--- a/notes/03-floats.pptx
+++ b/notes/03-floats.pptx
@@ -30,9 +30,9 @@
     <p:sldId id="1070" r:id="rId21"/>
     <p:sldId id="929" r:id="rId22"/>
     <p:sldId id="1065" r:id="rId23"/>
-    <p:sldId id="1071" r:id="rId24"/>
-    <p:sldId id="1066" r:id="rId25"/>
-    <p:sldId id="1074" r:id="rId26"/>
+    <p:sldId id="1074" r:id="rId24"/>
+    <p:sldId id="1071" r:id="rId25"/>
+    <p:sldId id="1066" r:id="rId26"/>
     <p:sldId id="1067" r:id="rId27"/>
     <p:sldId id="942" r:id="rId28"/>
     <p:sldId id="943" r:id="rId29"/>
@@ -181,7 +181,7 @@
 <file path=ppt/revisionInfo.xml><?xml version="1.0" encoding="utf-8"?>
 <p1510:revInfo xmlns:a="http://schemas.openxmlformats.org/drawingml/2006/main" xmlns:r="http://schemas.openxmlformats.org/officeDocument/2006/relationships" xmlns:p1510="http://schemas.microsoft.com/office/powerpoint/2015/10/main">
   <p1510:revLst>
-    <p1510:client id="{160326B9-4355-2B47-972D-18CCD1585E72}" v="45" dt="2026-01-28T18:27:40.998"/>
+    <p1510:client id="{58730CF9-8A96-6C4B-B49D-CC509B832BB1}" v="2" dt="2026-09-14T19:23:50.420"/>
   </p1510:revLst>
 </p1510:revInfo>
 </file>
@@ -11790,6 +11790,103 @@
   <p:cSld>
     <p:spTree>
       <p:nvGrpSpPr>
+        <p:cNvPr id="1" name=""/>
+        <p:cNvGrpSpPr/>
+        <p:nvPr/>
+      </p:nvGrpSpPr>
+      <p:grpSpPr>
+        <a:xfrm>
+          <a:off x="0" y="0"/>
+          <a:ext cx="0" cy="0"/>
+          <a:chOff x="0" y="0"/>
+          <a:chExt cx="0" cy="0"/>
+        </a:xfrm>
+      </p:grpSpPr>
+      <mc:AlternateContent xmlns:mc="http://schemas.openxmlformats.org/markup-compatibility/2006" xmlns:we="http://schemas.microsoft.com/office/webextensions/webextension/2010/11" xmlns:pca="http://schemas.microsoft.com/office/powerpoint/2013/contentapp">
+        <mc:Choice Requires="we pca">
+          <p:graphicFrame>
+            <p:nvGraphicFramePr>
+              <p:cNvPr id="4" name="Content Placeholder 3">
+                <a:extLst>
+                  <a:ext uri="{FF2B5EF4-FFF2-40B4-BE49-F238E27FC236}">
+                    <a16:creationId xmlns:a16="http://schemas.microsoft.com/office/drawing/2014/main" id="{026B48E2-674A-0F91-9DD5-EAB7D350DC61}"/>
+                  </a:ext>
+                </a:extLst>
+              </p:cNvPr>
+              <p:cNvGraphicFramePr>
+                <a:graphicFrameLocks noGrp="1"/>
+              </p:cNvGraphicFramePr>
+              <p:nvPr>
+                <p:ph idx="1"/>
+                <p:extLst>
+                  <p:ext uri="{D42A27DB-BD31-4B8C-83A1-F6EECF244321}">
+                    <p14:modId xmlns:p14="http://schemas.microsoft.com/office/powerpoint/2010/main" val="846193320"/>
+                  </p:ext>
+                </p:extLst>
+              </p:nvPr>
+            </p:nvGraphicFramePr>
+            <p:xfrm>
+              <a:off x="263236" y="180110"/>
+              <a:ext cx="8700654" cy="6567054"/>
+            </p:xfrm>
+            <a:graphic>
+              <a:graphicData uri="http://schemas.microsoft.com/office/webextensions/webextension/2010/11">
+                <we:webextensionref xmlns:we="http://schemas.microsoft.com/office/webextensions/webextension/2010/11" xmlns:r="http://schemas.openxmlformats.org/officeDocument/2006/relationships" r:id="rId2"/>
+              </a:graphicData>
+            </a:graphic>
+          </p:graphicFrame>
+        </mc:Choice>
+        <mc:Fallback xmlns="">
+          <p:pic>
+            <p:nvPicPr>
+              <p:cNvPr id="4" name="Content Placeholder 3">
+                <a:extLst>
+                  <a:ext uri="{FF2B5EF4-FFF2-40B4-BE49-F238E27FC236}">
+                    <a16:creationId xmlns:a16="http://schemas.microsoft.com/office/drawing/2014/main" id="{026B48E2-674A-0F91-9DD5-EAB7D350DC61}"/>
+                  </a:ext>
+                </a:extLst>
+              </p:cNvPr>
+              <p:cNvPicPr>
+                <a:picLocks noGrp="1" noRot="1" noChangeAspect="1" noMove="1" noResize="1" noEditPoints="1" noAdjustHandles="1" noChangeArrowheads="1" noChangeShapeType="1"/>
+              </p:cNvPicPr>
+              <p:nvPr/>
+            </p:nvPicPr>
+            <p:blipFill>
+              <a:blip r:embed="rId3"/>
+              <a:stretch>
+                <a:fillRect/>
+              </a:stretch>
+            </p:blipFill>
+            <p:spPr>
+              <a:xfrm>
+                <a:off x="263236" y="180110"/>
+                <a:ext cx="8700654" cy="6567054"/>
+              </a:xfrm>
+              <a:prstGeom prst="rect">
+                <a:avLst/>
+              </a:prstGeom>
+            </p:spPr>
+          </p:pic>
+        </mc:Fallback>
+      </mc:AlternateContent>
+    </p:spTree>
+    <p:extLst>
+      <p:ext uri="{BB962C8B-B14F-4D97-AF65-F5344CB8AC3E}">
+        <p14:creationId xmlns:p14="http://schemas.microsoft.com/office/powerpoint/2010/main" val="3646335127"/>
+      </p:ext>
+    </p:extLst>
+  </p:cSld>
+  <p:clrMapOvr>
+    <a:masterClrMapping/>
+  </p:clrMapOvr>
+</p:sld>
+</file>
+
+<file path=ppt/slides/slide21.xml><?xml version="1.0" encoding="utf-8"?>
+<p:sld xmlns:a="http://schemas.openxmlformats.org/drawingml/2006/main" xmlns:r="http://schemas.openxmlformats.org/officeDocument/2006/relationships" xmlns:p="http://schemas.openxmlformats.org/presentationml/2006/main">
+  <p:cSld>
+    <p:spTree>
+      <p:nvGrpSpPr>
         <p:cNvPr id="1" name="">
           <a:extLst>
             <a:ext uri="{FF2B5EF4-FFF2-40B4-BE49-F238E27FC236}">
@@ -12417,7 +12514,7 @@
 </p:sld>
 </file>
 
-<file path=ppt/slides/slide21.xml><?xml version="1.0" encoding="utf-8"?>
+<file path=ppt/slides/slide22.xml><?xml version="1.0" encoding="utf-8"?>
 <p:sld xmlns:a="http://schemas.openxmlformats.org/drawingml/2006/main" xmlns:r="http://schemas.openxmlformats.org/officeDocument/2006/relationships" xmlns:p="http://schemas.openxmlformats.org/presentationml/2006/main">
   <p:cSld>
     <p:spTree>
@@ -14275,103 +14372,6 @@
       <p:bldP spid="53" grpId="0"/>
     </p:bldLst>
   </p:timing>
-</p:sld>
-</file>
-
-<file path=ppt/slides/slide22.xml><?xml version="1.0" encoding="utf-8"?>
-<p:sld xmlns:a="http://schemas.openxmlformats.org/drawingml/2006/main" xmlns:r="http://schemas.openxmlformats.org/officeDocument/2006/relationships" xmlns:p="http://schemas.openxmlformats.org/presentationml/2006/main">
-  <p:cSld>
-    <p:spTree>
-      <p:nvGrpSpPr>
-        <p:cNvPr id="1" name=""/>
-        <p:cNvGrpSpPr/>
-        <p:nvPr/>
-      </p:nvGrpSpPr>
-      <p:grpSpPr>
-        <a:xfrm>
-          <a:off x="0" y="0"/>
-          <a:ext cx="0" cy="0"/>
-          <a:chOff x="0" y="0"/>
-          <a:chExt cx="0" cy="0"/>
-        </a:xfrm>
-      </p:grpSpPr>
-      <mc:AlternateContent xmlns:mc="http://schemas.openxmlformats.org/markup-compatibility/2006">
-        <mc:Choice xmlns:we="http://schemas.microsoft.com/office/webextensions/webextension/2010/11" xmlns:pca="http://schemas.microsoft.com/office/powerpoint/2013/contentapp" Requires="we pca">
-          <p:graphicFrame>
-            <p:nvGraphicFramePr>
-              <p:cNvPr id="4" name="Content Placeholder 3">
-                <a:extLst>
-                  <a:ext uri="{FF2B5EF4-FFF2-40B4-BE49-F238E27FC236}">
-                    <a16:creationId xmlns:a16="http://schemas.microsoft.com/office/drawing/2014/main" id="{026B48E2-674A-0F91-9DD5-EAB7D350DC61}"/>
-                  </a:ext>
-                </a:extLst>
-              </p:cNvPr>
-              <p:cNvGraphicFramePr>
-                <a:graphicFrameLocks noGrp="1"/>
-              </p:cNvGraphicFramePr>
-              <p:nvPr>
-                <p:ph idx="1"/>
-                <p:extLst>
-                  <p:ext uri="{D42A27DB-BD31-4B8C-83A1-F6EECF244321}">
-                    <p14:modId xmlns:p14="http://schemas.microsoft.com/office/powerpoint/2010/main" val="846193320"/>
-                  </p:ext>
-                </p:extLst>
-              </p:nvPr>
-            </p:nvGraphicFramePr>
-            <p:xfrm>
-              <a:off x="263236" y="180110"/>
-              <a:ext cx="8700654" cy="6567054"/>
-            </p:xfrm>
-            <a:graphic>
-              <a:graphicData uri="http://schemas.microsoft.com/office/webextensions/webextension/2010/11">
-                <we:webextensionref xmlns:we="http://schemas.microsoft.com/office/webextensions/webextension/2010/11" xmlns:r="http://schemas.openxmlformats.org/officeDocument/2006/relationships" r:id="rId2"/>
-              </a:graphicData>
-            </a:graphic>
-          </p:graphicFrame>
-        </mc:Choice>
-        <mc:Fallback>
-          <p:pic>
-            <p:nvPicPr>
-              <p:cNvPr id="4" name="Content Placeholder 3">
-                <a:extLst>
-                  <a:ext uri="{FF2B5EF4-FFF2-40B4-BE49-F238E27FC236}">
-                    <a16:creationId xmlns:a16="http://schemas.microsoft.com/office/drawing/2014/main" id="{026B48E2-674A-0F91-9DD5-EAB7D350DC61}"/>
-                  </a:ext>
-                </a:extLst>
-              </p:cNvPr>
-              <p:cNvPicPr>
-                <a:picLocks noGrp="1" noRot="1" noChangeAspect="1" noMove="1" noResize="1" noEditPoints="1" noAdjustHandles="1" noChangeArrowheads="1" noChangeShapeType="1"/>
-              </p:cNvPicPr>
-              <p:nvPr/>
-            </p:nvPicPr>
-            <p:blipFill>
-              <a:blip r:embed="rId3"/>
-              <a:stretch>
-                <a:fillRect/>
-              </a:stretch>
-            </p:blipFill>
-            <p:spPr>
-              <a:xfrm>
-                <a:off x="263236" y="180110"/>
-                <a:ext cx="8700654" cy="6567054"/>
-              </a:xfrm>
-              <a:prstGeom prst="rect">
-                <a:avLst/>
-              </a:prstGeom>
-            </p:spPr>
-          </p:pic>
-        </mc:Fallback>
-      </mc:AlternateContent>
-    </p:spTree>
-    <p:extLst>
-      <p:ext uri="{BB962C8B-B14F-4D97-AF65-F5344CB8AC3E}">
-        <p14:creationId xmlns:p14="http://schemas.microsoft.com/office/powerpoint/2010/main" val="3646335127"/>
-      </p:ext>
-    </p:extLst>
-  </p:cSld>
-  <p:clrMapOvr>
-    <a:masterClrMapping/>
-  </p:clrMapOvr>
 </p:sld>
 </file>
 
@@ -36810,8 +36810,8 @@
           <a:chExt cx="0" cy="0"/>
         </a:xfrm>
       </p:grpSpPr>
-      <mc:AlternateContent xmlns:mc="http://schemas.openxmlformats.org/markup-compatibility/2006">
-        <mc:Choice xmlns:we="http://schemas.microsoft.com/office/webextensions/webextension/2010/11" xmlns:pca="http://schemas.microsoft.com/office/powerpoint/2013/contentapp" Requires="we pca">
+      <mc:AlternateContent xmlns:mc="http://schemas.openxmlformats.org/markup-compatibility/2006" xmlns:we="http://schemas.microsoft.com/office/webextensions/webextension/2010/11" xmlns:pca="http://schemas.microsoft.com/office/powerpoint/2013/contentapp">
+        <mc:Choice Requires="we pca">
           <p:graphicFrame>
             <p:nvGraphicFramePr>
               <p:cNvPr id="4" name="Content Placeholder 3">
@@ -36844,7 +36844,7 @@
             </a:graphic>
           </p:graphicFrame>
         </mc:Choice>
-        <mc:Fallback>
+        <mc:Fallback xmlns="">
           <p:pic>
             <p:nvPicPr>
               <p:cNvPr id="4" name="Content Placeholder 3">
@@ -39528,15 +39528,15 @@
 <file path=customXml/itemProps1.xml><?xml version="1.0" encoding="utf-8"?>
 <ds:datastoreItem xmlns:ds="http://schemas.openxmlformats.org/officeDocument/2006/customXml" ds:itemID="{93E15339-EED0-434D-A40A-9991FB4373CD}">
   <ds:schemaRefs>
-    <ds:schemaRef ds:uri="http://purl.org/dc/elements/1.1/"/>
-    <ds:schemaRef ds:uri="http://schemas.openxmlformats.org/package/2006/metadata/core-properties"/>
-    <ds:schemaRef ds:uri="http://purl.org/dc/terms/"/>
-    <ds:schemaRef ds:uri="http://purl.org/dc/dcmitype/"/>
-    <ds:schemaRef ds:uri="http://schemas.microsoft.com/office/2006/documentManagement/types"/>
     <ds:schemaRef ds:uri="http://www.w3.org/XML/1998/namespace"/>
     <ds:schemaRef ds:uri="http://schemas.microsoft.com/office/infopath/2007/PartnerControls"/>
+    <ds:schemaRef ds:uri="http://schemas.openxmlformats.org/package/2006/metadata/core-properties"/>
     <ds:schemaRef ds:uri="74d6482f-e53c-4fa7-ac87-951f9f66bd4c"/>
+    <ds:schemaRef ds:uri="http://purl.org/dc/elements/1.1/"/>
+    <ds:schemaRef ds:uri="http://schemas.microsoft.com/office/2006/documentManagement/types"/>
+    <ds:schemaRef ds:uri="http://purl.org/dc/terms/"/>
     <ds:schemaRef ds:uri="http://schemas.microsoft.com/office/2006/metadata/properties"/>
+    <ds:schemaRef ds:uri="http://purl.org/dc/dcmitype/"/>
   </ds:schemaRefs>
 </ds:datastoreItem>
 </file>

--- a/notes/03-floats.pptx
+++ b/notes/03-floats.pptx
@@ -5,10 +5,10 @@
     <p:sldMasterId id="2147483684" r:id="rId4"/>
   </p:sldMasterIdLst>
   <p:notesMasterIdLst>
-    <p:notesMasterId r:id="rId55"/>
+    <p:notesMasterId r:id="rId56"/>
   </p:notesMasterIdLst>
   <p:handoutMasterIdLst>
-    <p:handoutMasterId r:id="rId56"/>
+    <p:handoutMasterId r:id="rId57"/>
   </p:handoutMasterIdLst>
   <p:sldIdLst>
     <p:sldId id="256" r:id="rId5"/>
@@ -57,10 +57,11 @@
     <p:sldId id="275" r:id="rId48"/>
     <p:sldId id="277" r:id="rId49"/>
     <p:sldId id="276" r:id="rId50"/>
-    <p:sldId id="1072" r:id="rId51"/>
-    <p:sldId id="283" r:id="rId52"/>
-    <p:sldId id="1062" r:id="rId53"/>
-    <p:sldId id="282" r:id="rId54"/>
+    <p:sldId id="1075" r:id="rId51"/>
+    <p:sldId id="1072" r:id="rId52"/>
+    <p:sldId id="283" r:id="rId53"/>
+    <p:sldId id="1062" r:id="rId54"/>
+    <p:sldId id="282" r:id="rId55"/>
   </p:sldIdLst>
   <p:sldSz cx="9144000" cy="6858000" type="screen4x3"/>
   <p:notesSz cx="6858000" cy="9144000"/>
@@ -181,7 +182,7 @@
 <file path=ppt/revisionInfo.xml><?xml version="1.0" encoding="utf-8"?>
 <p1510:revInfo xmlns:a="http://schemas.openxmlformats.org/drawingml/2006/main" xmlns:r="http://schemas.openxmlformats.org/officeDocument/2006/relationships" xmlns:p1510="http://schemas.microsoft.com/office/powerpoint/2015/10/main">
   <p1510:revLst>
-    <p1510:client id="{58730CF9-8A96-6C4B-B49D-CC509B832BB1}" v="2" dt="2026-09-14T19:23:50.420"/>
+    <p1510:client id="{58730CF9-8A96-6C4B-B49D-CC509B832BB1}" v="35" dt="2026-09-16T18:59:23.312"/>
   </p1510:revLst>
 </p1510:revInfo>
 </file>
@@ -268,7 +269,7 @@
           <a:p>
             <a:fld id="{C9615FF3-9FA2-1C4A-AAEA-4750F890D655}" type="datetimeFigureOut">
               <a:rPr lang="en-US" smtClean="0"/>
-              <a:t>9/14/26</a:t>
+              <a:t>9/16/26</a:t>
             </a:fld>
             <a:endParaRPr lang="en-US"/>
           </a:p>
@@ -434,7 +435,7 @@
           <a:p>
             <a:fld id="{52180D89-5C43-EF4A-AA48-38E879565468}" type="datetimeFigureOut">
               <a:rPr lang="en-US" smtClean="0"/>
-              <a:t>9/13/26</a:t>
+              <a:t>9/16/26</a:t>
             </a:fld>
             <a:endParaRPr lang="en-US"/>
           </a:p>
@@ -746,7 +747,7 @@
           <a:bodyPr/>
           <a:lstStyle/>
           <a:p>
-            <a:endParaRPr lang="zh-CN" altLang="en-US" dirty="0"/>
+            <a:endParaRPr lang="zh-CN" altLang="en-US"/>
           </a:p>
         </p:txBody>
       </p:sp>
@@ -849,14 +850,14 @@
           <a:lstStyle/>
           <a:p>
             <a:r>
-              <a:rPr lang="en-US" dirty="0"/>
+              <a:rPr lang="en-US"/>
               <a:t>You can not represent</a:t>
             </a:r>
             <a:r>
-              <a:rPr lang="en-US" baseline="0" dirty="0"/>
+              <a:rPr lang="en-US" baseline="0"/>
               <a:t> 0.1 exactly in floating point</a:t>
             </a:r>
-            <a:endParaRPr lang="en-US" dirty="0"/>
+            <a:endParaRPr lang="en-US"/>
           </a:p>
         </p:txBody>
       </p:sp>
@@ -883,7 +884,7 @@
           <a:p>
             <a:fld id="{AB68C08A-33DE-B14E-B2DE-046DC596C900}" type="slidenum">
               <a:rPr lang="en-US" smtClean="0"/>
-              <a:t>47</a:t>
+              <a:t>48</a:t>
             </a:fld>
             <a:endParaRPr lang="en-US"/>
           </a:p>
@@ -947,14 +948,14 @@
           <a:lstStyle/>
           <a:p>
             <a:r>
-              <a:rPr lang="en-US" dirty="0"/>
+              <a:rPr lang="en-US"/>
               <a:t>You can not represent</a:t>
             </a:r>
             <a:r>
-              <a:rPr lang="en-US" baseline="0" dirty="0"/>
+              <a:rPr lang="en-US" baseline="0"/>
               <a:t> 0.1 exactly in floating point</a:t>
             </a:r>
-            <a:endParaRPr lang="en-US" dirty="0"/>
+            <a:endParaRPr lang="en-US"/>
           </a:p>
         </p:txBody>
       </p:sp>
@@ -975,7 +976,7 @@
           <a:p>
             <a:fld id="{AB68C08A-33DE-B14E-B2DE-046DC596C900}" type="slidenum">
               <a:rPr lang="en-US" smtClean="0"/>
-              <a:t>48</a:t>
+              <a:t>49</a:t>
             </a:fld>
             <a:endParaRPr lang="en-US"/>
           </a:p>
@@ -1038,7 +1039,7 @@
           <a:bodyPr/>
           <a:lstStyle/>
           <a:p>
-            <a:endParaRPr lang="en-US" dirty="0"/>
+            <a:endParaRPr lang="en-US"/>
           </a:p>
         </p:txBody>
       </p:sp>
@@ -1059,7 +1060,7 @@
           <a:p>
             <a:fld id="{8556610F-FCBD-844B-B814-9F48A27EB77F}" type="slidenum">
               <a:rPr lang="en-US" smtClean="0"/>
-              <a:t>50</a:t>
+              <a:t>51</a:t>
             </a:fld>
             <a:endParaRPr lang="en-US"/>
           </a:p>
@@ -1122,7 +1123,7 @@
           <a:bodyPr/>
           <a:lstStyle/>
           <a:p>
-            <a:endParaRPr lang="en-US" dirty="0"/>
+            <a:endParaRPr lang="en-US"/>
           </a:p>
         </p:txBody>
       </p:sp>
@@ -1206,7 +1207,7 @@
           <a:bodyPr/>
           <a:lstStyle/>
           <a:p>
-            <a:endParaRPr lang="en-US" dirty="0"/>
+            <a:endParaRPr lang="en-US"/>
           </a:p>
         </p:txBody>
       </p:sp>
@@ -1290,7 +1291,7 @@
           <a:bodyPr/>
           <a:lstStyle/>
           <a:p>
-            <a:endParaRPr lang="en-US" dirty="0"/>
+            <a:endParaRPr lang="en-US"/>
           </a:p>
         </p:txBody>
       </p:sp>
@@ -1374,7 +1375,7 @@
           <a:bodyPr/>
           <a:lstStyle/>
           <a:p>
-            <a:endParaRPr lang="en-US" dirty="0"/>
+            <a:endParaRPr lang="en-US"/>
           </a:p>
         </p:txBody>
       </p:sp>
@@ -1458,7 +1459,7 @@
           <a:bodyPr/>
           <a:lstStyle/>
           <a:p>
-            <a:endParaRPr lang="en-US" dirty="0"/>
+            <a:endParaRPr lang="en-US"/>
           </a:p>
         </p:txBody>
       </p:sp>
@@ -1542,7 +1543,7 @@
           <a:bodyPr/>
           <a:lstStyle/>
           <a:p>
-            <a:endParaRPr lang="en-US" dirty="0"/>
+            <a:endParaRPr lang="en-US"/>
           </a:p>
         </p:txBody>
       </p:sp>
@@ -1626,7 +1627,7 @@
           <a:bodyPr/>
           <a:lstStyle/>
           <a:p>
-            <a:endParaRPr lang="en-US" dirty="0"/>
+            <a:endParaRPr lang="en-US"/>
           </a:p>
         </p:txBody>
       </p:sp>
@@ -1711,14 +1712,14 @@
           <a:lstStyle/>
           <a:p>
             <a:r>
-              <a:rPr lang="en-US" dirty="0"/>
+              <a:rPr lang="en-US"/>
               <a:t>You can not represent</a:t>
             </a:r>
             <a:r>
-              <a:rPr lang="en-US" baseline="0" dirty="0"/>
+              <a:rPr lang="en-US" baseline="0"/>
               <a:t> 0.1 exactly in floating point</a:t>
             </a:r>
-            <a:endParaRPr lang="en-US" dirty="0"/>
+            <a:endParaRPr lang="en-US"/>
           </a:p>
         </p:txBody>
       </p:sp>
@@ -1937,7 +1938,7 @@
           <a:p>
             <a:fld id="{212D147F-079F-4846-994D-0DB4A1A045D4}" type="datetime1">
               <a:rPr lang="zh-CN" altLang="en-US" smtClean="0"/>
-              <a:t>2026/9/13</a:t>
+              <a:t>2026/9/16</a:t>
             </a:fld>
             <a:endParaRPr lang="en-US"/>
           </a:p>
@@ -2101,7 +2102,7 @@
           <a:p>
             <a:fld id="{17491736-879B-FE48-95EC-EDE8A01D99DB}" type="datetime1">
               <a:rPr lang="zh-CN" altLang="en-US" smtClean="0"/>
-              <a:t>2026/9/13</a:t>
+              <a:t>2026/9/16</a:t>
             </a:fld>
             <a:endParaRPr lang="en-US"/>
           </a:p>
@@ -2275,7 +2276,7 @@
           <a:p>
             <a:fld id="{B977160F-44E5-DA43-A440-B77513F80BF6}" type="datetime1">
               <a:rPr lang="zh-CN" altLang="en-US" smtClean="0"/>
-              <a:t>2026/9/13</a:t>
+              <a:t>2026/9/16</a:t>
             </a:fld>
             <a:endParaRPr lang="en-US"/>
           </a:p>
@@ -2371,7 +2372,7 @@
           </a:lstStyle>
           <a:p>
             <a:r>
-              <a:rPr lang="en-US" dirty="0"/>
+              <a:rPr lang="en-US"/>
               <a:t>Click to edit Master title style</a:t>
             </a:r>
           </a:p>
@@ -2420,35 +2421,35 @@
           <a:p>
             <a:pPr lvl="0"/>
             <a:r>
-              <a:rPr lang="en-US" dirty="0"/>
+              <a:rPr lang="en-US"/>
               <a:t>Click to edit Master text styles</a:t>
             </a:r>
           </a:p>
           <a:p>
             <a:pPr lvl="1"/>
             <a:r>
-              <a:rPr lang="en-US" dirty="0"/>
+              <a:rPr lang="en-US"/>
               <a:t>Second level</a:t>
             </a:r>
           </a:p>
           <a:p>
             <a:pPr lvl="2"/>
             <a:r>
-              <a:rPr lang="en-US" dirty="0"/>
+              <a:rPr lang="en-US"/>
               <a:t>Third level</a:t>
             </a:r>
           </a:p>
           <a:p>
             <a:pPr lvl="3"/>
             <a:r>
-              <a:rPr lang="en-US" dirty="0"/>
+              <a:rPr lang="en-US"/>
               <a:t>Fourth level</a:t>
             </a:r>
           </a:p>
           <a:p>
             <a:pPr lvl="4"/>
             <a:r>
-              <a:rPr lang="en-US" dirty="0"/>
+              <a:rPr lang="en-US"/>
               <a:t>Fifth level</a:t>
             </a:r>
           </a:p>
@@ -2471,7 +2472,7 @@
           <a:p>
             <a:fld id="{AE880671-2720-6742-BF3B-130F38BFD6C2}" type="datetime1">
               <a:rPr lang="zh-CN" altLang="en-US" smtClean="0"/>
-              <a:t>2026/9/13</a:t>
+              <a:t>2026/9/16</a:t>
             </a:fld>
             <a:endParaRPr lang="en-US"/>
           </a:p>
@@ -2712,7 +2713,7 @@
           <a:p>
             <a:fld id="{0C2FF912-C460-F747-A5A7-E580342BDBD8}" type="datetime1">
               <a:rPr lang="zh-CN" altLang="en-US" smtClean="0"/>
-              <a:t>2026/9/13</a:t>
+              <a:t>2026/9/16</a:t>
             </a:fld>
             <a:endParaRPr lang="en-US"/>
           </a:p>
@@ -2993,7 +2994,7 @@
           <a:p>
             <a:fld id="{1EEB1225-B413-9941-B6FE-722B9F1A3838}" type="datetime1">
               <a:rPr lang="zh-CN" altLang="en-US" smtClean="0"/>
-              <a:t>2026/9/13</a:t>
+              <a:t>2026/9/16</a:t>
             </a:fld>
             <a:endParaRPr lang="en-US"/>
           </a:p>
@@ -3408,7 +3409,7 @@
           <a:p>
             <a:fld id="{3E24F182-DE75-D141-B72A-8599E29248A5}" type="datetime1">
               <a:rPr lang="zh-CN" altLang="en-US" smtClean="0"/>
-              <a:t>2026/9/13</a:t>
+              <a:t>2026/9/16</a:t>
             </a:fld>
             <a:endParaRPr lang="en-US"/>
           </a:p>
@@ -3521,7 +3522,7 @@
           <a:p>
             <a:fld id="{8E8C2D7A-8A1B-DA48-9B0B-0DEE102746F0}" type="datetime1">
               <a:rPr lang="zh-CN" altLang="en-US" smtClean="0"/>
-              <a:t>2026/9/13</a:t>
+              <a:t>2026/9/16</a:t>
             </a:fld>
             <a:endParaRPr lang="en-US"/>
           </a:p>
@@ -3612,7 +3613,7 @@
           <a:p>
             <a:fld id="{4153C787-59C9-0445-8F38-642A8469076F}" type="datetime1">
               <a:rPr lang="zh-CN" altLang="en-US" smtClean="0"/>
-              <a:t>2026/9/13</a:t>
+              <a:t>2026/9/16</a:t>
             </a:fld>
             <a:endParaRPr lang="en-US"/>
           </a:p>
@@ -3883,7 +3884,7 @@
           <a:p>
             <a:fld id="{44D50209-807A-E542-A52E-D898C2D2B27F}" type="datetime1">
               <a:rPr lang="zh-CN" altLang="en-US" smtClean="0"/>
-              <a:t>2026/9/13</a:t>
+              <a:t>2026/9/16</a:t>
             </a:fld>
             <a:endParaRPr lang="en-US"/>
           </a:p>
@@ -4134,7 +4135,7 @@
           <a:p>
             <a:fld id="{4EC27158-6770-8C48-8082-76913598A291}" type="datetime1">
               <a:rPr lang="zh-CN" altLang="en-US" smtClean="0"/>
-              <a:t>2026/9/13</a:t>
+              <a:t>2026/9/16</a:t>
             </a:fld>
             <a:endParaRPr lang="en-US"/>
           </a:p>
@@ -4242,7 +4243,6 @@
               <a:rPr lang="en-US"/>
               <a:t>Click to edit Master title style</a:t>
             </a:r>
-            <a:endParaRPr lang="en-US" dirty="0"/>
           </a:p>
         </p:txBody>
       </p:sp>
@@ -4304,7 +4304,6 @@
               <a:rPr lang="en-US"/>
               <a:t>Fifth level</a:t>
             </a:r>
-            <a:endParaRPr lang="en-US" dirty="0"/>
           </a:p>
         </p:txBody>
       </p:sp>
@@ -4343,7 +4342,7 @@
           <a:p>
             <a:fld id="{6619FEBD-E571-1443-AA22-BB9E67C15179}" type="datetime1">
               <a:rPr lang="zh-CN" altLang="en-US" smtClean="0"/>
-              <a:t>2026/9/13</a:t>
+              <a:t>2026/9/16</a:t>
             </a:fld>
             <a:endParaRPr lang="en-US"/>
           </a:p>
@@ -4738,7 +4737,7 @@
           <a:lstStyle/>
           <a:p>
             <a:r>
-              <a:rPr lang="en-US" sz="4800" b="0" dirty="0">
+              <a:rPr lang="en-US" sz="4800" b="0">
                 <a:solidFill>
                   <a:schemeClr val="tx1"/>
                 </a:solidFill>
@@ -4774,15 +4773,15 @@
           <a:lstStyle/>
           <a:p>
             <a:r>
-              <a:rPr lang="en-US" dirty="0"/>
+              <a:rPr lang="en-US"/>
               <a:t>Jinyang Li</a:t>
             </a:r>
           </a:p>
           <a:p>
-            <a:endParaRPr lang="en-US" dirty="0"/>
-          </a:p>
-          <a:p>
-            <a:endParaRPr lang="en-US" dirty="0"/>
+            <a:endParaRPr lang="en-US"/>
+          </a:p>
+          <a:p>
+            <a:endParaRPr lang="en-US"/>
           </a:p>
         </p:txBody>
       </p:sp>
@@ -4801,7 +4800,7 @@
       <p:transition spd="slow" p14:dur="2000" advTm="3831"/>
     </mc:Choice>
     <mc:Fallback xmlns="">
-      <p:transition xmlns:p14="http://schemas.microsoft.com/office/powerpoint/2010/main" spd="slow" advTm="3831"/>
+      <p:transition spd="slow" advTm="3831"/>
     </mc:Fallback>
   </mc:AlternateContent>
 </p:sld>
@@ -4847,17 +4846,17 @@
           <a:lstStyle/>
           <a:p>
             <a:r>
-              <a:rPr kumimoji="1" lang="en-US" altLang="zh-CN" dirty="0"/>
+              <a:rPr kumimoji="1" lang="en-US" altLang="zh-CN"/>
               <a:t>How to make the representation fixed width?</a:t>
             </a:r>
             <a:br>
-              <a:rPr kumimoji="1" lang="en-US" altLang="zh-CN" dirty="0"/>
+              <a:rPr kumimoji="1" lang="en-US" altLang="zh-CN"/>
             </a:br>
             <a:r>
-              <a:rPr kumimoji="1" lang="en-US" altLang="zh-CN" dirty="0"/>
+              <a:rPr kumimoji="1" lang="en-US" altLang="zh-CN"/>
               <a:t>Strawman: fixed point</a:t>
             </a:r>
-            <a:endParaRPr kumimoji="1" lang="zh-CN" altLang="en-US" dirty="0"/>
+            <a:endParaRPr kumimoji="1" lang="zh-CN" altLang="en-US"/>
           </a:p>
         </p:txBody>
       </p:sp>
@@ -4957,13 +4956,13 @@
                     <a:lstStyle/>
                     <a:p>
                       <a:r>
-                        <a:rPr lang="en-US" altLang="zh-CN" sz="1400" dirty="0">
+                        <a:rPr lang="en-US" altLang="zh-CN" sz="1400">
                           <a:latin typeface="Verdana"/>
                           <a:cs typeface="Verdana"/>
                         </a:rPr>
                         <a:t> s</a:t>
                       </a:r>
-                      <a:endParaRPr lang="zh-CN" altLang="en-US" sz="1400" dirty="0">
+                      <a:endParaRPr lang="zh-CN" altLang="en-US" sz="1400">
                         <a:latin typeface="Verdana"/>
                         <a:cs typeface="Verdana"/>
                       </a:endParaRPr>
@@ -4997,7 +4996,7 @@
                         <a:tabLst/>
                         <a:defRPr/>
                       </a:pPr>
-                      <a:endParaRPr lang="zh-CN" altLang="en-US" sz="1400" dirty="0">
+                      <a:endParaRPr lang="zh-CN" altLang="en-US" sz="1400">
                         <a:latin typeface="Verdana"/>
                         <a:cs typeface="Verdana"/>
                       </a:endParaRPr>
@@ -5034,7 +5033,7 @@
                         <a:tabLst/>
                         <a:defRPr/>
                       </a:pPr>
-                      <a:endParaRPr lang="zh-CN" altLang="en-US" sz="1400" dirty="0">
+                      <a:endParaRPr lang="zh-CN" altLang="en-US" sz="1400">
                         <a:latin typeface="Verdana"/>
                         <a:cs typeface="Verdana"/>
                       </a:endParaRPr>
@@ -5071,7 +5070,7 @@
                         <a:tabLst/>
                         <a:defRPr/>
                       </a:pPr>
-                      <a:endParaRPr lang="zh-CN" altLang="en-US" sz="1400" dirty="0">
+                      <a:endParaRPr lang="zh-CN" altLang="en-US" sz="1400">
                         <a:latin typeface="Verdana"/>
                         <a:cs typeface="Verdana"/>
                       </a:endParaRPr>
@@ -5091,7 +5090,7 @@
                     <a:bodyPr/>
                     <a:lstStyle/>
                     <a:p>
-                      <a:endParaRPr lang="zh-CN" altLang="en-US" sz="1400" dirty="0">
+                      <a:endParaRPr lang="zh-CN" altLang="en-US" sz="1400">
                         <a:latin typeface="Verdana"/>
                         <a:cs typeface="Verdana"/>
                       </a:endParaRPr>
@@ -5128,7 +5127,7 @@
                         <a:tabLst/>
                         <a:defRPr/>
                       </a:pPr>
-                      <a:endParaRPr lang="zh-CN" altLang="en-US" sz="1400" dirty="0">
+                      <a:endParaRPr lang="zh-CN" altLang="en-US" sz="1400">
                         <a:latin typeface="Verdana"/>
                         <a:cs typeface="Verdana"/>
                       </a:endParaRPr>
@@ -5165,7 +5164,7 @@
                         <a:tabLst/>
                         <a:defRPr/>
                       </a:pPr>
-                      <a:endParaRPr lang="zh-CN" altLang="en-US" sz="1400" dirty="0">
+                      <a:endParaRPr lang="zh-CN" altLang="en-US" sz="1400">
                         <a:latin typeface="Verdana"/>
                         <a:cs typeface="Verdana"/>
                       </a:endParaRPr>
@@ -5202,7 +5201,7 @@
                         <a:tabLst/>
                         <a:defRPr/>
                       </a:pPr>
-                      <a:endParaRPr lang="zh-CN" altLang="en-US" sz="1400" dirty="0">
+                      <a:endParaRPr lang="zh-CN" altLang="en-US" sz="1400">
                         <a:latin typeface="Verdana"/>
                         <a:cs typeface="Verdana"/>
                       </a:endParaRPr>
@@ -5249,13 +5248,13 @@
           <a:lstStyle/>
           <a:p>
             <a:r>
-              <a:rPr lang="en-US" altLang="zh-CN" sz="2000" dirty="0">
+              <a:rPr lang="en-US" altLang="zh-CN" sz="2000">
                 <a:latin typeface="Verdana"/>
                 <a:cs typeface="Verdana"/>
               </a:rPr>
               <a:t>sign</a:t>
             </a:r>
-            <a:endParaRPr lang="zh-CN" altLang="en-US" sz="2000" dirty="0">
+            <a:endParaRPr lang="zh-CN" altLang="en-US" sz="2000">
               <a:latin typeface="Verdana"/>
               <a:cs typeface="Verdana"/>
             </a:endParaRPr>
@@ -5330,13 +5329,13 @@
           <a:lstStyle/>
           <a:p>
             <a:r>
-              <a:rPr lang="en-US" altLang="zh-CN" sz="1350" b="1" dirty="0">
+              <a:rPr lang="en-US" altLang="zh-CN" sz="1350" b="1">
                 <a:latin typeface="Verdana"/>
                 <a:cs typeface="Verdana"/>
               </a:rPr>
               <a:t>3 bits</a:t>
             </a:r>
-            <a:endParaRPr lang="zh-CN" altLang="en-US" sz="1350" b="1" dirty="0">
+            <a:endParaRPr lang="zh-CN" altLang="en-US" sz="1350" b="1">
               <a:latin typeface="Verdana"/>
               <a:cs typeface="Verdana"/>
             </a:endParaRPr>
@@ -5475,20 +5474,20 @@
             <a:lstStyle/>
             <a:p>
               <a:r>
-                <a:rPr lang="en-US" altLang="zh-CN" dirty="0">
+                <a:rPr lang="en-US" altLang="zh-CN">
                   <a:latin typeface="Verdana"/>
                   <a:cs typeface="Verdana"/>
                 </a:rPr>
                 <a:t>Fixed position </a:t>
               </a:r>
               <a:r>
-                <a:rPr lang="en-US" altLang="zh-CN" i="1" dirty="0">
+                <a:rPr lang="en-US" altLang="zh-CN" i="1">
                   <a:latin typeface="Verdana"/>
                   <a:cs typeface="Verdana"/>
                 </a:rPr>
                 <a:t>e.g. middle</a:t>
               </a:r>
-              <a:endParaRPr lang="zh-CN" altLang="en-US" i="1" dirty="0">
+              <a:endParaRPr lang="zh-CN" altLang="en-US" i="1">
                 <a:latin typeface="Verdana"/>
                 <a:cs typeface="Verdana"/>
               </a:endParaRPr>
@@ -5564,13 +5563,13 @@
           <a:lstStyle/>
           <a:p>
             <a:r>
-              <a:rPr lang="en-US" altLang="zh-CN" sz="1350" b="1" dirty="0">
+              <a:rPr lang="en-US" altLang="zh-CN" sz="1350" b="1">
                 <a:latin typeface="Verdana"/>
                 <a:cs typeface="Verdana"/>
               </a:rPr>
               <a:t>4 bits</a:t>
             </a:r>
-            <a:endParaRPr lang="zh-CN" altLang="en-US" sz="1350" b="1" dirty="0">
+            <a:endParaRPr lang="zh-CN" altLang="en-US" sz="1350" b="1">
               <a:latin typeface="Verdana"/>
               <a:cs typeface="Verdana"/>
             </a:endParaRPr>
@@ -5646,18 +5645,18 @@
           <a:lstStyle/>
           <a:p>
             <a:r>
-              <a:rPr lang="en-US" altLang="zh-CN" sz="2800" dirty="0">
+              <a:rPr lang="en-US" altLang="zh-CN" sz="2800">
                 <a:cs typeface="Verdana"/>
               </a:rPr>
               <a:t>Example: ( 10.011 )</a:t>
             </a:r>
             <a:r>
-              <a:rPr lang="en-US" altLang="zh-CN" sz="2800" baseline="-25000" dirty="0">
+              <a:rPr lang="en-US" altLang="zh-CN" sz="2800" baseline="-25000">
                 <a:cs typeface="Verdana"/>
               </a:rPr>
               <a:t>2</a:t>
             </a:r>
-            <a:endParaRPr lang="zh-CN" altLang="en-US" sz="2800" baseline="-25000" dirty="0"/>
+            <a:endParaRPr lang="zh-CN" altLang="en-US" sz="2800" baseline="-25000"/>
           </a:p>
         </p:txBody>
       </p:sp>
@@ -5763,13 +5762,13 @@
                     <a:lstStyle/>
                     <a:p>
                       <a:r>
-                        <a:rPr lang="en-US" altLang="zh-CN" sz="1400" dirty="0">
+                        <a:rPr lang="en-US" altLang="zh-CN" sz="1400">
                           <a:latin typeface="Verdana"/>
                           <a:cs typeface="Verdana"/>
                         </a:rPr>
                         <a:t> 0</a:t>
                       </a:r>
-                      <a:endParaRPr lang="zh-CN" altLang="en-US" sz="1400" dirty="0">
+                      <a:endParaRPr lang="zh-CN" altLang="en-US" sz="1400">
                         <a:latin typeface="Verdana"/>
                         <a:cs typeface="Verdana"/>
                       </a:endParaRPr>
@@ -5804,13 +5803,13 @@
                         <a:defRPr/>
                       </a:pPr>
                       <a:r>
-                        <a:rPr lang="en-US" altLang="zh-CN" sz="1400" dirty="0">
+                        <a:rPr lang="en-US" altLang="zh-CN" sz="1400">
                           <a:latin typeface="Verdana"/>
                           <a:cs typeface="Verdana"/>
                         </a:rPr>
                         <a:t>0</a:t>
                       </a:r>
-                      <a:endParaRPr lang="zh-CN" altLang="en-US" sz="1400" dirty="0">
+                      <a:endParaRPr lang="zh-CN" altLang="en-US" sz="1400">
                         <a:latin typeface="Verdana"/>
                         <a:cs typeface="Verdana"/>
                       </a:endParaRPr>
@@ -5848,13 +5847,13 @@
                         <a:defRPr/>
                       </a:pPr>
                       <a:r>
-                        <a:rPr lang="en-US" altLang="zh-CN" sz="1400" dirty="0">
+                        <a:rPr lang="en-US" altLang="zh-CN" sz="1400">
                           <a:latin typeface="Verdana"/>
                           <a:cs typeface="Verdana"/>
                         </a:rPr>
                         <a:t>1</a:t>
                       </a:r>
-                      <a:endParaRPr lang="zh-CN" altLang="en-US" sz="1400" dirty="0">
+                      <a:endParaRPr lang="zh-CN" altLang="en-US" sz="1400">
                         <a:latin typeface="Verdana"/>
                         <a:cs typeface="Verdana"/>
                       </a:endParaRPr>
@@ -5892,13 +5891,13 @@
                         <a:defRPr/>
                       </a:pPr>
                       <a:r>
-                        <a:rPr lang="en-US" altLang="zh-CN" sz="1400" dirty="0">
+                        <a:rPr lang="en-US" altLang="zh-CN" sz="1400">
                           <a:latin typeface="Verdana"/>
                           <a:cs typeface="Verdana"/>
                         </a:rPr>
                         <a:t>0</a:t>
                       </a:r>
-                      <a:endParaRPr lang="zh-CN" altLang="en-US" sz="1400" dirty="0">
+                      <a:endParaRPr lang="zh-CN" altLang="en-US" sz="1400">
                         <a:latin typeface="Verdana"/>
                         <a:cs typeface="Verdana"/>
                       </a:endParaRPr>
@@ -5919,13 +5918,13 @@
                     <a:lstStyle/>
                     <a:p>
                       <a:r>
-                        <a:rPr lang="en-US" altLang="zh-CN" sz="1400" dirty="0">
+                        <a:rPr lang="en-US" altLang="zh-CN" sz="1400">
                           <a:latin typeface="Verdana"/>
                           <a:cs typeface="Verdana"/>
                         </a:rPr>
                         <a:t>0</a:t>
                       </a:r>
-                      <a:endParaRPr lang="zh-CN" altLang="en-US" sz="1400" dirty="0">
+                      <a:endParaRPr lang="zh-CN" altLang="en-US" sz="1400">
                         <a:latin typeface="Verdana"/>
                         <a:cs typeface="Verdana"/>
                       </a:endParaRPr>
@@ -5963,13 +5962,13 @@
                         <a:defRPr/>
                       </a:pPr>
                       <a:r>
-                        <a:rPr lang="en-US" altLang="zh-CN" sz="1400" dirty="0">
+                        <a:rPr lang="en-US" altLang="zh-CN" sz="1400">
                           <a:latin typeface="Verdana"/>
                           <a:cs typeface="Verdana"/>
                         </a:rPr>
                         <a:t>1</a:t>
                       </a:r>
-                      <a:endParaRPr lang="zh-CN" altLang="en-US" sz="1400" dirty="0">
+                      <a:endParaRPr lang="zh-CN" altLang="en-US" sz="1400">
                         <a:latin typeface="Verdana"/>
                         <a:cs typeface="Verdana"/>
                       </a:endParaRPr>
@@ -6007,13 +6006,13 @@
                         <a:defRPr/>
                       </a:pPr>
                       <a:r>
-                        <a:rPr lang="en-US" altLang="zh-CN" sz="1400" dirty="0">
+                        <a:rPr lang="en-US" altLang="zh-CN" sz="1400">
                           <a:latin typeface="Verdana"/>
                           <a:cs typeface="Verdana"/>
                         </a:rPr>
                         <a:t>1</a:t>
                       </a:r>
-                      <a:endParaRPr lang="zh-CN" altLang="en-US" sz="1400" dirty="0">
+                      <a:endParaRPr lang="zh-CN" altLang="en-US" sz="1400">
                         <a:latin typeface="Verdana"/>
                         <a:cs typeface="Verdana"/>
                       </a:endParaRPr>
@@ -6051,13 +6050,13 @@
                         <a:defRPr/>
                       </a:pPr>
                       <a:r>
-                        <a:rPr lang="en-US" altLang="zh-CN" sz="1400" dirty="0">
+                        <a:rPr lang="en-US" altLang="zh-CN" sz="1400">
                           <a:latin typeface="Verdana"/>
                           <a:cs typeface="Verdana"/>
                         </a:rPr>
                         <a:t>0</a:t>
                       </a:r>
-                      <a:endParaRPr lang="zh-CN" altLang="en-US" sz="1400" dirty="0">
+                      <a:endParaRPr lang="zh-CN" altLang="en-US" sz="1400">
                         <a:latin typeface="Verdana"/>
                         <a:cs typeface="Verdana"/>
                       </a:endParaRPr>
@@ -6233,10 +6232,10 @@
           <a:lstStyle/>
           <a:p>
             <a:r>
-              <a:rPr kumimoji="1" lang="en-US" altLang="zh-CN" dirty="0"/>
+              <a:rPr kumimoji="1" lang="en-US" altLang="zh-CN"/>
               <a:t>Problems of Fixed Point</a:t>
             </a:r>
-            <a:endParaRPr kumimoji="1" lang="zh-CN" altLang="en-US" dirty="0"/>
+            <a:endParaRPr kumimoji="1" lang="zh-CN" altLang="en-US"/>
           </a:p>
         </p:txBody>
       </p:sp>
@@ -6269,13 +6268,13 @@
           <a:lstStyle/>
           <a:p>
             <a:r>
-              <a:rPr lang="en-US" sz="2400" dirty="0"/>
+              <a:rPr lang="en-US" sz="2400"/>
               <a:t>Range?</a:t>
             </a:r>
           </a:p>
           <a:p>
             <a:r>
-              <a:rPr lang="en-US" sz="2400" dirty="0"/>
+              <a:rPr lang="en-US" sz="2400"/>
               <a:t>Precision?</a:t>
             </a:r>
           </a:p>
@@ -6455,10 +6454,10 @@
               <a:lstStyle/>
               <a:p>
                 <a:r>
-                  <a:rPr kumimoji="1" lang="en-US" altLang="zh-CN" dirty="0"/>
+                  <a:rPr kumimoji="1" lang="en-US" altLang="zh-CN"/>
                   <a:t>-</a:t>
                 </a:r>
-                <a:endParaRPr lang="zh-CN" altLang="en-US" dirty="0"/>
+                <a:endParaRPr lang="zh-CN" altLang="en-US"/>
               </a:p>
             </p:txBody>
           </p:sp>
@@ -6574,10 +6573,10 @@
               <a:lstStyle/>
               <a:p>
                 <a:r>
-                  <a:rPr kumimoji="1" lang="en-US" altLang="zh-CN" dirty="0"/>
+                  <a:rPr kumimoji="1" lang="en-US" altLang="zh-CN"/>
                   <a:t>+</a:t>
                 </a:r>
-                <a:endParaRPr lang="zh-CN" altLang="en-US" dirty="0"/>
+                <a:endParaRPr lang="zh-CN" altLang="en-US"/>
               </a:p>
             </p:txBody>
           </p:sp>
@@ -6611,7 +6610,7 @@
             <a:lstStyle/>
             <a:p>
               <a:r>
-                <a:rPr lang="en-US" sz="1350" dirty="0"/>
+                <a:rPr lang="en-US" sz="1350"/>
                 <a:t>0</a:t>
               </a:r>
             </a:p>
@@ -6761,13 +6760,13 @@
                     <a:lstStyle/>
                     <a:p>
                       <a:r>
-                        <a:rPr lang="en-US" altLang="zh-CN" sz="1400" dirty="0">
+                        <a:rPr lang="en-US" altLang="zh-CN" sz="1400">
                           <a:latin typeface="Verdana"/>
                           <a:cs typeface="Verdana"/>
                         </a:rPr>
                         <a:t> s</a:t>
                       </a:r>
-                      <a:endParaRPr lang="zh-CN" altLang="en-US" sz="1400" dirty="0">
+                      <a:endParaRPr lang="zh-CN" altLang="en-US" sz="1400">
                         <a:latin typeface="Verdana"/>
                         <a:cs typeface="Verdana"/>
                       </a:endParaRPr>
@@ -6801,7 +6800,7 @@
                         <a:tabLst/>
                         <a:defRPr/>
                       </a:pPr>
-                      <a:endParaRPr lang="zh-CN" altLang="en-US" sz="1400" dirty="0">
+                      <a:endParaRPr lang="zh-CN" altLang="en-US" sz="1400">
                         <a:latin typeface="Verdana"/>
                         <a:cs typeface="Verdana"/>
                       </a:endParaRPr>
@@ -6838,7 +6837,7 @@
                         <a:tabLst/>
                         <a:defRPr/>
                       </a:pPr>
-                      <a:endParaRPr lang="zh-CN" altLang="en-US" sz="1400" dirty="0">
+                      <a:endParaRPr lang="zh-CN" altLang="en-US" sz="1400">
                         <a:latin typeface="Verdana"/>
                         <a:cs typeface="Verdana"/>
                       </a:endParaRPr>
@@ -6875,7 +6874,7 @@
                         <a:tabLst/>
                         <a:defRPr/>
                       </a:pPr>
-                      <a:endParaRPr lang="zh-CN" altLang="en-US" sz="1400" dirty="0">
+                      <a:endParaRPr lang="zh-CN" altLang="en-US" sz="1400">
                         <a:latin typeface="Verdana"/>
                         <a:cs typeface="Verdana"/>
                       </a:endParaRPr>
@@ -6895,7 +6894,7 @@
                     <a:bodyPr/>
                     <a:lstStyle/>
                     <a:p>
-                      <a:endParaRPr lang="zh-CN" altLang="en-US" sz="1400" dirty="0">
+                      <a:endParaRPr lang="zh-CN" altLang="en-US" sz="1400">
                         <a:latin typeface="Verdana"/>
                         <a:cs typeface="Verdana"/>
                       </a:endParaRPr>
@@ -6932,7 +6931,7 @@
                         <a:tabLst/>
                         <a:defRPr/>
                       </a:pPr>
-                      <a:endParaRPr lang="zh-CN" altLang="en-US" sz="1400" dirty="0">
+                      <a:endParaRPr lang="zh-CN" altLang="en-US" sz="1400">
                         <a:latin typeface="Verdana"/>
                         <a:cs typeface="Verdana"/>
                       </a:endParaRPr>
@@ -6969,7 +6968,7 @@
                         <a:tabLst/>
                         <a:defRPr/>
                       </a:pPr>
-                      <a:endParaRPr lang="zh-CN" altLang="en-US" sz="1400" dirty="0">
+                      <a:endParaRPr lang="zh-CN" altLang="en-US" sz="1400">
                         <a:latin typeface="Verdana"/>
                         <a:cs typeface="Verdana"/>
                       </a:endParaRPr>
@@ -7006,7 +7005,7 @@
                         <a:tabLst/>
                         <a:defRPr/>
                       </a:pPr>
-                      <a:endParaRPr lang="zh-CN" altLang="en-US" sz="1400" dirty="0">
+                      <a:endParaRPr lang="zh-CN" altLang="en-US" sz="1400">
                         <a:latin typeface="Verdana"/>
                         <a:cs typeface="Verdana"/>
                       </a:endParaRPr>
@@ -7111,13 +7110,13 @@
           <a:lstStyle/>
           <a:p>
             <a:r>
-              <a:rPr lang="en-US" altLang="zh-CN" sz="1350" b="1" dirty="0">
+              <a:rPr lang="en-US" altLang="zh-CN" sz="1350" b="1">
                 <a:latin typeface="Verdana"/>
                 <a:cs typeface="Verdana"/>
               </a:rPr>
               <a:t>3 bits</a:t>
             </a:r>
-            <a:endParaRPr lang="zh-CN" altLang="en-US" sz="1350" b="1" dirty="0">
+            <a:endParaRPr lang="zh-CN" altLang="en-US" sz="1350" b="1">
               <a:latin typeface="Verdana"/>
               <a:cs typeface="Verdana"/>
             </a:endParaRPr>
@@ -7264,13 +7263,13 @@
           <a:lstStyle/>
           <a:p>
             <a:r>
-              <a:rPr lang="en-US" altLang="zh-CN" sz="1350" b="1" dirty="0">
+              <a:rPr lang="en-US" altLang="zh-CN" sz="1350" b="1">
                 <a:latin typeface="Verdana"/>
                 <a:cs typeface="Verdana"/>
               </a:rPr>
               <a:t>4 bits</a:t>
             </a:r>
-            <a:endParaRPr lang="zh-CN" altLang="en-US" sz="1350" b="1" dirty="0">
+            <a:endParaRPr lang="zh-CN" altLang="en-US" sz="1350" b="1">
               <a:latin typeface="Verdana"/>
               <a:cs typeface="Verdana"/>
             </a:endParaRPr>
@@ -7446,10 +7445,10 @@
           <a:lstStyle/>
           <a:p>
             <a:r>
-              <a:rPr kumimoji="1" lang="en-US" altLang="zh-CN" dirty="0"/>
+              <a:rPr kumimoji="1" lang="en-US" altLang="zh-CN"/>
               <a:t>Problems of Fixed Point</a:t>
             </a:r>
-            <a:endParaRPr kumimoji="1" lang="zh-CN" altLang="en-US" dirty="0"/>
+            <a:endParaRPr kumimoji="1" lang="zh-CN" altLang="en-US"/>
           </a:p>
         </p:txBody>
       </p:sp>
@@ -7477,87 +7476,87 @@
           <a:p>
             <a:pPr marL="342900" lvl="1" indent="-342900"/>
             <a:r>
-              <a:rPr kumimoji="1" lang="en-US" altLang="zh-CN" sz="2800" dirty="0">
+              <a:rPr kumimoji="1" lang="en-US" altLang="zh-CN" sz="2800">
                 <a:cs typeface="Verdana"/>
               </a:rPr>
               <a:t>Limited range </a:t>
             </a:r>
             <a:r>
-              <a:rPr lang="en-US" altLang="zh-CN" sz="2800" dirty="0"/>
+              <a:rPr lang="en-US" altLang="zh-CN" sz="2800"/>
               <a:t>[-2</a:t>
             </a:r>
             <a:r>
-              <a:rPr lang="en-US" altLang="zh-CN" sz="2800" baseline="30000" dirty="0"/>
+              <a:rPr lang="en-US" altLang="zh-CN" sz="2800" baseline="30000"/>
               <a:t>3</a:t>
             </a:r>
             <a:r>
-              <a:rPr lang="en-US" altLang="zh-CN" sz="2800" dirty="0"/>
+              <a:rPr lang="en-US" altLang="zh-CN" sz="2800"/>
               <a:t>+2</a:t>
             </a:r>
             <a:r>
-              <a:rPr lang="en-US" altLang="zh-CN" sz="2800" baseline="30000" dirty="0"/>
+              <a:rPr lang="en-US" altLang="zh-CN" sz="2800" baseline="30000"/>
               <a:t>-4</a:t>
             </a:r>
             <a:r>
-              <a:rPr lang="en-US" altLang="zh-CN" sz="2800" dirty="0"/>
+              <a:rPr lang="en-US" altLang="zh-CN" sz="2800"/>
               <a:t>,2</a:t>
             </a:r>
             <a:r>
-              <a:rPr lang="en-US" altLang="zh-CN" sz="2800" baseline="30000" dirty="0"/>
+              <a:rPr lang="en-US" altLang="zh-CN" sz="2800" baseline="30000"/>
               <a:t>3</a:t>
             </a:r>
             <a:r>
-              <a:rPr lang="en-US" altLang="zh-CN" sz="2800" dirty="0"/>
+              <a:rPr lang="en-US" altLang="zh-CN" sz="2800"/>
               <a:t>-2</a:t>
             </a:r>
             <a:r>
-              <a:rPr lang="en-US" altLang="zh-CN" sz="2800" baseline="30000" dirty="0"/>
+              <a:rPr lang="en-US" altLang="zh-CN" sz="2800" baseline="30000"/>
               <a:t>-4</a:t>
             </a:r>
             <a:r>
-              <a:rPr lang="en-US" altLang="zh-CN" sz="2800" dirty="0"/>
+              <a:rPr lang="en-US" altLang="zh-CN" sz="2800"/>
               <a:t> ]</a:t>
             </a:r>
-            <a:endParaRPr kumimoji="1" lang="en-US" altLang="zh-CN" sz="2800" dirty="0">
+            <a:endParaRPr kumimoji="1" lang="en-US" altLang="zh-CN" sz="2800">
               <a:cs typeface="Verdana"/>
             </a:endParaRPr>
           </a:p>
           <a:p>
             <a:pPr marL="342900" lvl="1" indent="-342900"/>
             <a:r>
-              <a:rPr kumimoji="1" lang="en-US" altLang="zh-CN" sz="2800" dirty="0">
+              <a:rPr kumimoji="1" lang="en-US" altLang="zh-CN" sz="2800">
                 <a:cs typeface="Verdana"/>
               </a:rPr>
               <a:t>Limited precision </a:t>
             </a:r>
             <a:r>
-              <a:rPr kumimoji="1" lang="en-US" altLang="zh-CN" sz="2800" dirty="0"/>
+              <a:rPr kumimoji="1" lang="en-US" altLang="zh-CN" sz="2800"/>
               <a:t>2</a:t>
             </a:r>
             <a:r>
-              <a:rPr lang="en-US" altLang="zh-CN" sz="2800" baseline="30000" dirty="0"/>
+              <a:rPr lang="en-US" altLang="zh-CN" sz="2800" baseline="30000"/>
               <a:t>-4</a:t>
             </a:r>
-            <a:endParaRPr kumimoji="1" lang="en-US" altLang="zh-CN" sz="2800" dirty="0">
+            <a:endParaRPr kumimoji="1" lang="en-US" altLang="zh-CN" sz="2800">
               <a:cs typeface="Verdana"/>
             </a:endParaRPr>
           </a:p>
           <a:p>
             <a:pPr marL="342900" lvl="1" indent="-342900"/>
             <a:r>
-              <a:rPr kumimoji="1" lang="en-US" altLang="zh-CN" sz="2800" dirty="0">
+              <a:rPr kumimoji="1" lang="en-US" altLang="zh-CN" sz="2800">
                 <a:cs typeface="Verdana"/>
               </a:rPr>
               <a:t>Equivalent to integer with a scaling factor</a:t>
             </a:r>
-            <a:endParaRPr lang="en-US" altLang="zh-CN" dirty="0"/>
+            <a:endParaRPr lang="en-US" altLang="zh-CN"/>
           </a:p>
           <a:p>
             <a:pPr>
               <a:buFont typeface="Wingdings" charset="0"/>
               <a:buChar char="à"/>
             </a:pPr>
-            <a:endParaRPr kumimoji="1" lang="en-US" altLang="zh-CN" dirty="0">
+            <a:endParaRPr kumimoji="1" lang="en-US" altLang="zh-CN">
               <a:sym typeface="Wingdings"/>
             </a:endParaRPr>
           </a:p>
@@ -7565,7 +7564,7 @@
             <a:pPr marL="0" indent="0">
               <a:buNone/>
             </a:pPr>
-            <a:endParaRPr lang="en-US" altLang="zh-CN" dirty="0"/>
+            <a:endParaRPr lang="en-US" altLang="zh-CN"/>
           </a:p>
         </p:txBody>
       </p:sp>
@@ -7671,13 +7670,13 @@
                     <a:lstStyle/>
                     <a:p>
                       <a:r>
-                        <a:rPr lang="en-US" altLang="zh-CN" sz="1400" dirty="0">
+                        <a:rPr lang="en-US" altLang="zh-CN" sz="1400">
                           <a:latin typeface="Verdana"/>
                           <a:cs typeface="Verdana"/>
                         </a:rPr>
                         <a:t> s</a:t>
                       </a:r>
-                      <a:endParaRPr lang="zh-CN" altLang="en-US" sz="1400" dirty="0">
+                      <a:endParaRPr lang="zh-CN" altLang="en-US" sz="1400">
                         <a:latin typeface="Verdana"/>
                         <a:cs typeface="Verdana"/>
                       </a:endParaRPr>
@@ -7711,7 +7710,7 @@
                         <a:tabLst/>
                         <a:defRPr/>
                       </a:pPr>
-                      <a:endParaRPr lang="zh-CN" altLang="en-US" sz="1400" dirty="0">
+                      <a:endParaRPr lang="zh-CN" altLang="en-US" sz="1400">
                         <a:latin typeface="Verdana"/>
                         <a:cs typeface="Verdana"/>
                       </a:endParaRPr>
@@ -7748,7 +7747,7 @@
                         <a:tabLst/>
                         <a:defRPr/>
                       </a:pPr>
-                      <a:endParaRPr lang="zh-CN" altLang="en-US" sz="1400" dirty="0">
+                      <a:endParaRPr lang="zh-CN" altLang="en-US" sz="1400">
                         <a:latin typeface="Verdana"/>
                         <a:cs typeface="Verdana"/>
                       </a:endParaRPr>
@@ -7785,7 +7784,7 @@
                         <a:tabLst/>
                         <a:defRPr/>
                       </a:pPr>
-                      <a:endParaRPr lang="zh-CN" altLang="en-US" sz="1400" dirty="0">
+                      <a:endParaRPr lang="zh-CN" altLang="en-US" sz="1400">
                         <a:latin typeface="Verdana"/>
                         <a:cs typeface="Verdana"/>
                       </a:endParaRPr>
@@ -7805,7 +7804,7 @@
                     <a:bodyPr/>
                     <a:lstStyle/>
                     <a:p>
-                      <a:endParaRPr lang="zh-CN" altLang="en-US" sz="1400" dirty="0">
+                      <a:endParaRPr lang="zh-CN" altLang="en-US" sz="1400">
                         <a:latin typeface="Verdana"/>
                         <a:cs typeface="Verdana"/>
                       </a:endParaRPr>
@@ -7842,7 +7841,7 @@
                         <a:tabLst/>
                         <a:defRPr/>
                       </a:pPr>
-                      <a:endParaRPr lang="zh-CN" altLang="en-US" sz="1400" dirty="0">
+                      <a:endParaRPr lang="zh-CN" altLang="en-US" sz="1400">
                         <a:latin typeface="Verdana"/>
                         <a:cs typeface="Verdana"/>
                       </a:endParaRPr>
@@ -7879,7 +7878,7 @@
                         <a:tabLst/>
                         <a:defRPr/>
                       </a:pPr>
-                      <a:endParaRPr lang="zh-CN" altLang="en-US" sz="1400" dirty="0">
+                      <a:endParaRPr lang="zh-CN" altLang="en-US" sz="1400">
                         <a:latin typeface="Verdana"/>
                         <a:cs typeface="Verdana"/>
                       </a:endParaRPr>
@@ -7916,7 +7915,7 @@
                         <a:tabLst/>
                         <a:defRPr/>
                       </a:pPr>
-                      <a:endParaRPr lang="zh-CN" altLang="en-US" sz="1400" dirty="0">
+                      <a:endParaRPr lang="zh-CN" altLang="en-US" sz="1400">
                         <a:latin typeface="Verdana"/>
                         <a:cs typeface="Verdana"/>
                       </a:endParaRPr>
@@ -8021,13 +8020,13 @@
           <a:lstStyle/>
           <a:p>
             <a:r>
-              <a:rPr lang="en-US" altLang="zh-CN" sz="1350" b="1" dirty="0">
+              <a:rPr lang="en-US" altLang="zh-CN" sz="1350" b="1">
                 <a:latin typeface="Verdana"/>
                 <a:cs typeface="Verdana"/>
               </a:rPr>
               <a:t>3 bits</a:t>
             </a:r>
-            <a:endParaRPr lang="zh-CN" altLang="en-US" sz="1350" b="1" dirty="0">
+            <a:endParaRPr lang="zh-CN" altLang="en-US" sz="1350" b="1">
               <a:latin typeface="Verdana"/>
               <a:cs typeface="Verdana"/>
             </a:endParaRPr>
@@ -8174,13 +8173,13 @@
           <a:lstStyle/>
           <a:p>
             <a:r>
-              <a:rPr lang="en-US" altLang="zh-CN" sz="1350" b="1" dirty="0">
+              <a:rPr lang="en-US" altLang="zh-CN" sz="1350" b="1">
                 <a:latin typeface="Verdana"/>
                 <a:cs typeface="Verdana"/>
               </a:rPr>
               <a:t>4 bits</a:t>
             </a:r>
-            <a:endParaRPr lang="zh-CN" altLang="en-US" sz="1350" b="1" dirty="0">
+            <a:endParaRPr lang="zh-CN" altLang="en-US" sz="1350" b="1">
               <a:latin typeface="Verdana"/>
               <a:cs typeface="Verdana"/>
             </a:endParaRPr>
@@ -8240,10 +8239,10 @@
           <a:lstStyle/>
           <a:p>
             <a:r>
-              <a:rPr kumimoji="1" lang="en-US" altLang="zh-CN" dirty="0"/>
+              <a:rPr kumimoji="1" lang="en-US" altLang="zh-CN"/>
               <a:t>Floating Point is based on scientific notation</a:t>
             </a:r>
-            <a:endParaRPr kumimoji="1" lang="zh-CN" altLang="en-US" dirty="0"/>
+            <a:endParaRPr kumimoji="1" lang="zh-CN" altLang="en-US"/>
           </a:p>
         </p:txBody>
       </p:sp>
@@ -8271,10 +8270,10 @@
               <a:buNone/>
             </a:pPr>
             <a:r>
-              <a:rPr kumimoji="1" lang="en-US" altLang="zh-CN" dirty="0"/>
+              <a:rPr kumimoji="1" lang="en-US" altLang="zh-CN"/>
               <a:t>Scientific notation in decimal:</a:t>
             </a:r>
-            <a:endParaRPr kumimoji="1" lang="zh-CN" altLang="en-US" dirty="0"/>
+            <a:endParaRPr kumimoji="1" lang="zh-CN" altLang="en-US"/>
           </a:p>
         </p:txBody>
       </p:sp>
@@ -8300,28 +8299,28 @@
           <a:lstStyle/>
           <a:p>
             <a:r>
-              <a:rPr lang="en-US" altLang="zh-CN" sz="2100" u="sng" dirty="0">
+              <a:rPr lang="en-US" altLang="zh-CN" sz="2100" u="sng">
                 <a:latin typeface="Consolas"/>
                 <a:cs typeface="Consolas"/>
               </a:rPr>
               <a:t>+</a:t>
             </a:r>
             <a:r>
-              <a:rPr lang="en-US" altLang="zh-CN" sz="2100" dirty="0">
+              <a:rPr lang="en-US" altLang="zh-CN" sz="2100">
                 <a:latin typeface="Consolas"/>
                 <a:cs typeface="Consolas"/>
               </a:rPr>
               <a:t>M * 10</a:t>
             </a:r>
             <a:r>
-              <a:rPr lang="en-US" altLang="zh-CN" sz="2100" baseline="30000" dirty="0">
+              <a:rPr lang="en-US" altLang="zh-CN" sz="2100" baseline="30000">
                 <a:latin typeface="Consolas"/>
                 <a:cs typeface="Consolas"/>
               </a:rPr>
               <a:t>E</a:t>
             </a:r>
             <a:r>
-              <a:rPr lang="en-US" altLang="zh-CN" sz="2100" dirty="0">
+              <a:rPr lang="en-US" altLang="zh-CN" sz="2100">
                 <a:latin typeface="Consolas"/>
                 <a:cs typeface="Consolas"/>
               </a:rPr>
@@ -8358,14 +8357,14 @@
           <a:lstStyle/>
           <a:p>
             <a:r>
-              <a:rPr lang="en-US" altLang="zh-CN" dirty="0">
+              <a:rPr lang="en-US" altLang="zh-CN">
                 <a:latin typeface="Consolas"/>
                 <a:cs typeface="Consolas"/>
               </a:rPr>
               <a:t>365.25 = 3.6525 * 10</a:t>
             </a:r>
             <a:r>
-              <a:rPr lang="en-US" altLang="zh-CN" baseline="30000" dirty="0">
+              <a:rPr lang="en-US" altLang="zh-CN" baseline="30000">
                 <a:latin typeface="Consolas"/>
                 <a:cs typeface="Consolas"/>
               </a:rPr>
@@ -8373,27 +8372,27 @@
             </a:r>
           </a:p>
           <a:p>
-            <a:endParaRPr lang="en-US" altLang="zh-CN" sz="825" baseline="-25000" dirty="0">
+            <a:endParaRPr lang="en-US" altLang="zh-CN" sz="825" baseline="-25000">
               <a:latin typeface="Consolas"/>
               <a:cs typeface="Consolas"/>
             </a:endParaRPr>
           </a:p>
           <a:p>
             <a:r>
-              <a:rPr lang="en-US" altLang="zh-CN" dirty="0">
+              <a:rPr lang="en-US" altLang="zh-CN">
                 <a:latin typeface="Consolas"/>
                 <a:cs typeface="Consolas"/>
               </a:rPr>
               <a:t>0.0123 = 1.23 * 10</a:t>
             </a:r>
             <a:r>
-              <a:rPr lang="en-US" altLang="zh-CN" baseline="30000" dirty="0">
+              <a:rPr lang="en-US" altLang="zh-CN" baseline="30000">
                 <a:latin typeface="Consolas"/>
                 <a:cs typeface="Consolas"/>
               </a:rPr>
               <a:t>-2</a:t>
             </a:r>
-            <a:endParaRPr lang="zh-CN" altLang="en-US" baseline="30000" dirty="0">
+            <a:endParaRPr lang="zh-CN" altLang="en-US" baseline="30000">
               <a:latin typeface="Consolas"/>
               <a:cs typeface="Consolas"/>
             </a:endParaRPr>
@@ -8429,7 +8428,7 @@
           <a:lstStyle/>
           <a:p>
             <a:r>
-              <a:rPr lang="en-US" dirty="0"/>
+              <a:rPr lang="en-US"/>
               <a:t>M: mantissa</a:t>
             </a:r>
           </a:p>
@@ -8464,7 +8463,7 @@
           <a:lstStyle/>
           <a:p>
             <a:r>
-              <a:rPr lang="en-US" dirty="0"/>
+              <a:rPr lang="en-US"/>
               <a:t>E: exponent</a:t>
             </a:r>
           </a:p>
@@ -8781,7 +8780,7 @@
           <a:lstStyle/>
           <a:p>
             <a:r>
-              <a:rPr lang="en-US" dirty="0"/>
+              <a:rPr lang="en-US"/>
               <a:t>Normalize mantissa</a:t>
             </a:r>
           </a:p>
@@ -8835,10 +8834,10 @@
           <a:lstStyle/>
           <a:p>
             <a:r>
-              <a:rPr kumimoji="1" lang="en-US" altLang="zh-CN" dirty="0"/>
+              <a:rPr kumimoji="1" lang="en-US" altLang="zh-CN"/>
               <a:t>Floating Point: binary scientific notation</a:t>
             </a:r>
-            <a:endParaRPr kumimoji="1" lang="zh-CN" altLang="en-US" dirty="0"/>
+            <a:endParaRPr kumimoji="1" lang="zh-CN" altLang="en-US"/>
           </a:p>
         </p:txBody>
       </p:sp>
@@ -8861,10 +8860,10 @@
               <a:buNone/>
             </a:pPr>
             <a:r>
-              <a:rPr kumimoji="1" lang="en-US" altLang="zh-CN" dirty="0"/>
+              <a:rPr kumimoji="1" lang="en-US" altLang="zh-CN"/>
               <a:t>Binary scientific notation</a:t>
             </a:r>
-            <a:endParaRPr kumimoji="1" lang="zh-CN" altLang="en-US" dirty="0"/>
+            <a:endParaRPr kumimoji="1" lang="zh-CN" altLang="en-US"/>
           </a:p>
         </p:txBody>
       </p:sp>
@@ -8890,75 +8889,75 @@
           <a:lstStyle/>
           <a:p>
             <a:r>
-              <a:rPr lang="en-US" altLang="zh-CN" sz="2000" dirty="0">
+              <a:rPr lang="en-US" altLang="zh-CN" sz="2000">
                 <a:latin typeface="Consolas"/>
                 <a:cs typeface="Consolas"/>
               </a:rPr>
               <a:t>(5.5)</a:t>
             </a:r>
             <a:r>
-              <a:rPr lang="en-US" altLang="zh-CN" sz="2000" baseline="-25000" dirty="0">
+              <a:rPr lang="en-US" altLang="zh-CN" sz="2000" baseline="-25000">
                 <a:latin typeface="Consolas"/>
                 <a:cs typeface="Consolas"/>
               </a:rPr>
               <a:t>10</a:t>
             </a:r>
             <a:r>
-              <a:rPr lang="en-US" altLang="zh-CN" sz="2000" dirty="0">
+              <a:rPr lang="en-US" altLang="zh-CN" sz="2000">
                 <a:latin typeface="Consolas"/>
                 <a:cs typeface="Consolas"/>
               </a:rPr>
               <a:t> = </a:t>
             </a:r>
             <a:r>
-              <a:rPr lang="en-US" altLang="zh-CN" sz="2000" dirty="0">
+              <a:rPr lang="en-US" altLang="zh-CN" sz="2000">
                 <a:latin typeface="Arial"/>
                 <a:cs typeface="Arial"/>
               </a:rPr>
               <a:t>(101.1)</a:t>
             </a:r>
             <a:r>
-              <a:rPr lang="en-US" altLang="zh-CN" sz="2000" baseline="-25000" dirty="0">
+              <a:rPr lang="en-US" altLang="zh-CN" sz="2000" baseline="-25000">
                 <a:latin typeface="Arial"/>
                 <a:cs typeface="Arial"/>
               </a:rPr>
               <a:t>2 </a:t>
             </a:r>
             <a:r>
-              <a:rPr lang="en-US" altLang="zh-CN" sz="2000" dirty="0">
+              <a:rPr lang="en-US" altLang="zh-CN" sz="2000">
                 <a:latin typeface="Arial"/>
                 <a:cs typeface="Arial"/>
               </a:rPr>
               <a:t> = (1.011)</a:t>
             </a:r>
             <a:r>
-              <a:rPr lang="en-US" altLang="zh-CN" sz="2000" baseline="-25000" dirty="0">
+              <a:rPr lang="en-US" altLang="zh-CN" sz="2000" baseline="-25000">
                 <a:latin typeface="Arial"/>
                 <a:cs typeface="Arial"/>
               </a:rPr>
               <a:t>2 </a:t>
             </a:r>
             <a:r>
-              <a:rPr lang="en-US" altLang="zh-CN" sz="2000" dirty="0">
+              <a:rPr lang="en-US" altLang="zh-CN" sz="2000">
                 <a:latin typeface="Arial"/>
                 <a:cs typeface="Arial"/>
               </a:rPr>
               <a:t>* 2</a:t>
             </a:r>
             <a:r>
-              <a:rPr lang="en-US" altLang="zh-CN" sz="2000" baseline="30000" dirty="0">
+              <a:rPr lang="en-US" altLang="zh-CN" sz="2000" baseline="30000">
                 <a:latin typeface="Arial"/>
                 <a:cs typeface="Arial"/>
               </a:rPr>
               <a:t>2</a:t>
             </a:r>
-            <a:endParaRPr lang="en-US" altLang="zh-CN" sz="2000" baseline="30000" dirty="0">
+            <a:endParaRPr lang="en-US" altLang="zh-CN" sz="2000" baseline="30000">
               <a:latin typeface="Consolas"/>
               <a:cs typeface="Consolas"/>
             </a:endParaRPr>
           </a:p>
           <a:p>
-            <a:endParaRPr lang="en-US" altLang="zh-CN" sz="825" baseline="-25000" dirty="0">
+            <a:endParaRPr lang="en-US" altLang="zh-CN" sz="825" baseline="-25000">
               <a:latin typeface="Consolas"/>
               <a:cs typeface="Consolas"/>
             </a:endParaRPr>
@@ -8987,27 +8986,27 @@
           <a:lstStyle/>
           <a:p>
             <a:r>
-              <a:rPr lang="en-US" altLang="zh-CN" sz="2100" u="sng" dirty="0">
+              <a:rPr lang="en-US" altLang="zh-CN" sz="2100" u="sng">
                 <a:latin typeface="Consolas"/>
                 <a:cs typeface="Consolas"/>
               </a:rPr>
               <a:t>+</a:t>
             </a:r>
             <a:r>
-              <a:rPr lang="en-US" altLang="zh-CN" sz="2100" dirty="0">
+              <a:rPr lang="en-US" altLang="zh-CN" sz="2100">
                 <a:latin typeface="Consolas"/>
                 <a:cs typeface="Consolas"/>
               </a:rPr>
               <a:t>M * 2</a:t>
             </a:r>
             <a:r>
-              <a:rPr lang="en-US" altLang="zh-CN" sz="2100" baseline="30000" dirty="0">
+              <a:rPr lang="en-US" altLang="zh-CN" sz="2100" baseline="30000">
                 <a:latin typeface="Consolas"/>
                 <a:cs typeface="Consolas"/>
               </a:rPr>
               <a:t>E</a:t>
             </a:r>
-            <a:endParaRPr lang="en-US" altLang="zh-CN" sz="2100" baseline="-25000" dirty="0">
+            <a:endParaRPr lang="en-US" altLang="zh-CN" sz="2100" baseline="-25000">
               <a:latin typeface="Consolas"/>
               <a:cs typeface="Consolas"/>
             </a:endParaRPr>
@@ -9042,7 +9041,7 @@
           <a:lstStyle/>
           <a:p>
             <a:r>
-              <a:rPr lang="en-US" altLang="zh-CN" sz="2100" dirty="0">
+              <a:rPr lang="en-US" altLang="zh-CN" sz="2100">
                 <a:solidFill>
                   <a:schemeClr val="tx2"/>
                 </a:solidFill>
@@ -9052,7 +9051,7 @@
               <a:t>where 1 &lt;= M &lt; 2, aka </a:t>
             </a:r>
             <a:r>
-              <a:rPr lang="en-US" altLang="zh-CN" dirty="0">
+              <a:rPr lang="en-US" altLang="zh-CN">
                 <a:solidFill>
                   <a:schemeClr val="tx2"/>
                 </a:solidFill>
@@ -9062,7 +9061,7 @@
               <a:t>M</a:t>
             </a:r>
             <a:r>
-              <a:rPr lang="en-US" altLang="zh-CN" sz="2100" dirty="0">
+              <a:rPr lang="en-US" altLang="zh-CN" sz="2100">
                 <a:solidFill>
                   <a:schemeClr val="tx2"/>
                 </a:solidFill>
@@ -9072,7 +9071,7 @@
               <a:t> = (1.b</a:t>
             </a:r>
             <a:r>
-              <a:rPr lang="en-US" altLang="zh-CN" sz="2100" baseline="-25000" dirty="0">
+              <a:rPr lang="en-US" altLang="zh-CN" sz="2100" baseline="-25000">
                 <a:solidFill>
                   <a:schemeClr val="tx2"/>
                 </a:solidFill>
@@ -9082,7 +9081,7 @@
               <a:t>1</a:t>
             </a:r>
             <a:r>
-              <a:rPr lang="en-US" altLang="zh-CN" sz="2100" dirty="0">
+              <a:rPr lang="en-US" altLang="zh-CN" sz="2100">
                 <a:solidFill>
                   <a:schemeClr val="tx2"/>
                 </a:solidFill>
@@ -9092,7 +9091,7 @@
               <a:t>b</a:t>
             </a:r>
             <a:r>
-              <a:rPr lang="en-US" altLang="zh-CN" sz="2100" baseline="-25000" dirty="0">
+              <a:rPr lang="en-US" altLang="zh-CN" sz="2100" baseline="-25000">
                 <a:solidFill>
                   <a:schemeClr val="tx2"/>
                 </a:solidFill>
@@ -9102,7 +9101,7 @@
               <a:t>2</a:t>
             </a:r>
             <a:r>
-              <a:rPr lang="en-US" altLang="zh-CN" sz="2100" dirty="0">
+              <a:rPr lang="en-US" altLang="zh-CN" sz="2100">
                 <a:solidFill>
                   <a:schemeClr val="tx2"/>
                 </a:solidFill>
@@ -9112,7 +9111,7 @@
               <a:t>b</a:t>
             </a:r>
             <a:r>
-              <a:rPr lang="en-US" altLang="zh-CN" sz="2100" baseline="-25000" dirty="0">
+              <a:rPr lang="en-US" altLang="zh-CN" sz="2100" baseline="-25000">
                 <a:solidFill>
                   <a:schemeClr val="tx2"/>
                 </a:solidFill>
@@ -9122,7 +9121,7 @@
               <a:t>3</a:t>
             </a:r>
             <a:r>
-              <a:rPr lang="mr-IN" altLang="zh-CN" sz="2100" dirty="0">
+              <a:rPr lang="mr-IN" altLang="zh-CN" sz="2100">
                 <a:solidFill>
                   <a:schemeClr val="tx2"/>
                 </a:solidFill>
@@ -9132,7 +9131,7 @@
               <a:t>…</a:t>
             </a:r>
             <a:r>
-              <a:rPr lang="en-US" altLang="zh-CN" sz="2100" dirty="0">
+              <a:rPr lang="en-US" altLang="zh-CN" sz="2100">
                 <a:solidFill>
                   <a:schemeClr val="tx2"/>
                 </a:solidFill>
@@ -9142,7 +9141,7 @@
               <a:t>b</a:t>
             </a:r>
             <a:r>
-              <a:rPr lang="en-US" altLang="zh-CN" sz="2100" baseline="-25000" dirty="0">
+              <a:rPr lang="en-US" altLang="zh-CN" sz="2100" baseline="-25000">
                 <a:solidFill>
                   <a:schemeClr val="tx2"/>
                 </a:solidFill>
@@ -9152,7 +9151,7 @@
               <a:t>n </a:t>
             </a:r>
             <a:r>
-              <a:rPr lang="en-US" altLang="zh-CN" sz="2100" dirty="0">
+              <a:rPr lang="en-US" altLang="zh-CN" sz="2100">
                 <a:solidFill>
                   <a:schemeClr val="tx2"/>
                 </a:solidFill>
@@ -9162,7 +9161,7 @@
               <a:t>)</a:t>
             </a:r>
             <a:r>
-              <a:rPr lang="en-US" altLang="zh-CN" sz="2100" baseline="-25000" dirty="0">
+              <a:rPr lang="en-US" altLang="zh-CN" sz="2100" baseline="-25000">
                 <a:solidFill>
                   <a:schemeClr val="tx2"/>
                 </a:solidFill>
@@ -9350,27 +9349,27 @@
           <a:lstStyle/>
           <a:p>
             <a:r>
-              <a:rPr kumimoji="1" lang="en-US" altLang="zh-CN" dirty="0">
+              <a:rPr kumimoji="1" lang="en-US" altLang="zh-CN">
                 <a:latin typeface="Arial"/>
                 <a:cs typeface="Arial"/>
               </a:rPr>
               <a:t>(Binary) normalized representation of  (10.25)</a:t>
             </a:r>
             <a:r>
-              <a:rPr kumimoji="1" lang="en-US" altLang="zh-CN" sz="2100" baseline="-25000" dirty="0">
+              <a:rPr kumimoji="1" lang="en-US" altLang="zh-CN" sz="2100" baseline="-25000">
                 <a:latin typeface="Arial"/>
                 <a:cs typeface="Arial"/>
               </a:rPr>
               <a:t>10</a:t>
             </a:r>
             <a:r>
-              <a:rPr kumimoji="1" lang="en-US" altLang="zh-CN" dirty="0">
+              <a:rPr kumimoji="1" lang="en-US" altLang="zh-CN">
                 <a:latin typeface="Arial"/>
                 <a:cs typeface="Arial"/>
               </a:rPr>
               <a:t>?    </a:t>
             </a:r>
-            <a:endParaRPr kumimoji="1" lang="zh-CN" altLang="en-US" dirty="0">
+            <a:endParaRPr kumimoji="1" lang="zh-CN" altLang="en-US">
               <a:latin typeface="Arial"/>
               <a:cs typeface="Arial"/>
             </a:endParaRPr>
@@ -9501,27 +9500,27 @@
           <a:lstStyle/>
           <a:p>
             <a:r>
-              <a:rPr kumimoji="1" lang="en-US" altLang="zh-CN" dirty="0">
+              <a:rPr kumimoji="1" lang="en-US" altLang="zh-CN">
                 <a:latin typeface="Arial"/>
                 <a:cs typeface="Arial"/>
               </a:rPr>
               <a:t>(Binary) normalized representation of  (10.25)</a:t>
             </a:r>
             <a:r>
-              <a:rPr kumimoji="1" lang="en-US" altLang="zh-CN" sz="2100" baseline="-25000" dirty="0">
+              <a:rPr kumimoji="1" lang="en-US" altLang="zh-CN" sz="2100" baseline="-25000">
                 <a:latin typeface="Arial"/>
                 <a:cs typeface="Arial"/>
               </a:rPr>
               <a:t>10</a:t>
             </a:r>
             <a:r>
-              <a:rPr kumimoji="1" lang="en-US" altLang="zh-CN" dirty="0">
+              <a:rPr kumimoji="1" lang="en-US" altLang="zh-CN">
                 <a:latin typeface="Arial"/>
                 <a:cs typeface="Arial"/>
               </a:rPr>
               <a:t> ?    </a:t>
             </a:r>
-            <a:endParaRPr kumimoji="1" lang="zh-CN" altLang="en-US" dirty="0">
+            <a:endParaRPr kumimoji="1" lang="zh-CN" altLang="en-US">
               <a:latin typeface="Arial"/>
               <a:cs typeface="Arial"/>
             </a:endParaRPr>
@@ -9550,60 +9549,60 @@
           <a:lstStyle/>
           <a:p>
             <a:r>
-              <a:rPr lang="en-US" altLang="zh-CN" sz="2100" dirty="0">
+              <a:rPr lang="en-US" altLang="zh-CN" sz="2100">
                 <a:cs typeface="Consolas"/>
               </a:rPr>
               <a:t>Answer: (10.25)</a:t>
             </a:r>
             <a:r>
-              <a:rPr lang="en-US" altLang="zh-CN" sz="2100" baseline="-25000" dirty="0">
+              <a:rPr lang="en-US" altLang="zh-CN" sz="2100" baseline="-25000">
                 <a:cs typeface="Consolas"/>
               </a:rPr>
               <a:t>10</a:t>
             </a:r>
             <a:r>
-              <a:rPr lang="en-US" altLang="zh-CN" sz="2100" dirty="0">
+              <a:rPr lang="en-US" altLang="zh-CN" sz="2100">
                 <a:cs typeface="Consolas"/>
               </a:rPr>
               <a:t> = </a:t>
             </a:r>
             <a:r>
-              <a:rPr lang="en-US" altLang="zh-CN" sz="2100" dirty="0">
+              <a:rPr lang="en-US" altLang="zh-CN" sz="2100">
                 <a:cs typeface="Arial"/>
               </a:rPr>
               <a:t>(1010.01)</a:t>
             </a:r>
             <a:r>
-              <a:rPr lang="en-US" altLang="zh-CN" sz="2100" baseline="-25000" dirty="0">
+              <a:rPr lang="en-US" altLang="zh-CN" sz="2100" baseline="-25000">
                 <a:cs typeface="Arial"/>
               </a:rPr>
               <a:t>2 </a:t>
             </a:r>
             <a:r>
-              <a:rPr lang="en-US" altLang="zh-CN" sz="2100" dirty="0">
+              <a:rPr lang="en-US" altLang="zh-CN" sz="2100">
                 <a:cs typeface="Arial"/>
               </a:rPr>
               <a:t> = (1.01001)</a:t>
             </a:r>
             <a:r>
-              <a:rPr lang="en-US" altLang="zh-CN" sz="2100" baseline="-25000" dirty="0">
+              <a:rPr lang="en-US" altLang="zh-CN" sz="2100" baseline="-25000">
                 <a:cs typeface="Arial"/>
               </a:rPr>
               <a:t>2 </a:t>
             </a:r>
             <a:r>
-              <a:rPr lang="en-US" altLang="zh-CN" sz="2100" dirty="0">
+              <a:rPr lang="en-US" altLang="zh-CN" sz="2100">
                 <a:cs typeface="Arial"/>
               </a:rPr>
               <a:t>* 2</a:t>
             </a:r>
             <a:r>
-              <a:rPr lang="en-US" altLang="zh-CN" sz="2100" baseline="30000" dirty="0">
+              <a:rPr lang="en-US" altLang="zh-CN" sz="2100" baseline="30000">
                 <a:cs typeface="Arial"/>
               </a:rPr>
               <a:t>3</a:t>
             </a:r>
-            <a:endParaRPr lang="en-US" altLang="zh-CN" sz="2100" baseline="30000" dirty="0">
+            <a:endParaRPr lang="en-US" altLang="zh-CN" sz="2100" baseline="30000">
               <a:cs typeface="Consolas"/>
             </a:endParaRPr>
           </a:p>
@@ -9714,7 +9713,7 @@
           <a:lstStyle/>
           <a:p>
             <a:r>
-              <a:rPr lang="en-US" dirty="0"/>
+              <a:rPr lang="en-US"/>
               <a:t>Floating Point lesson plan</a:t>
             </a:r>
           </a:p>
@@ -9742,7 +9741,7 @@
           <a:lstStyle/>
           <a:p>
             <a:r>
-              <a:rPr lang="en-US" dirty="0">
+              <a:rPr lang="en-US">
                 <a:solidFill>
                   <a:schemeClr val="tx1">
                     <a:lumMod val="50000"/>
@@ -9755,25 +9754,25 @@
           </a:p>
           <a:p>
             <a:r>
-              <a:rPr lang="en-US" dirty="0"/>
+              <a:rPr lang="en-US"/>
               <a:t>FP8 example </a:t>
             </a:r>
           </a:p>
           <a:p>
             <a:r>
-              <a:rPr lang="en-US" dirty="0"/>
+              <a:rPr lang="en-US"/>
               <a:t>IEEE FP standard</a:t>
             </a:r>
           </a:p>
           <a:p>
             <a:r>
-              <a:rPr lang="en-US" dirty="0"/>
+              <a:rPr lang="en-US"/>
               <a:t>Rounding</a:t>
             </a:r>
           </a:p>
           <a:p>
             <a:r>
-              <a:rPr lang="en-US" dirty="0"/>
+              <a:rPr lang="en-US"/>
               <a:t>FP operations caveats</a:t>
             </a:r>
           </a:p>
@@ -9832,10 +9831,10 @@
           <a:lstStyle/>
           <a:p>
             <a:r>
-              <a:rPr kumimoji="1" lang="en-US" altLang="zh-CN" dirty="0"/>
+              <a:rPr kumimoji="1" lang="en-US" altLang="zh-CN"/>
               <a:t>An example FP8 representation: E4M3</a:t>
             </a:r>
-            <a:endParaRPr kumimoji="1" lang="zh-CN" altLang="en-US" dirty="0"/>
+            <a:endParaRPr kumimoji="1" lang="zh-CN" altLang="en-US"/>
           </a:p>
         </p:txBody>
       </p:sp>
@@ -9861,91 +9860,91 @@
           <a:lstStyle/>
           <a:p>
             <a:r>
-              <a:rPr lang="en-US" altLang="zh-CN" sz="2100" u="sng" dirty="0">
+              <a:rPr lang="en-US" altLang="zh-CN" sz="2100" u="sng">
                 <a:latin typeface="Consolas"/>
                 <a:cs typeface="Consolas"/>
               </a:rPr>
               <a:t>+</a:t>
             </a:r>
             <a:r>
-              <a:rPr lang="en-US" altLang="zh-CN" sz="2100" dirty="0">
+              <a:rPr lang="en-US" altLang="zh-CN" sz="2100">
                 <a:latin typeface="Consolas"/>
                 <a:cs typeface="Consolas"/>
               </a:rPr>
               <a:t>M * 2</a:t>
             </a:r>
             <a:r>
-              <a:rPr lang="en-US" altLang="zh-CN" sz="2100" baseline="30000" dirty="0">
+              <a:rPr lang="en-US" altLang="zh-CN" sz="2100" baseline="30000">
                 <a:latin typeface="Consolas"/>
                 <a:cs typeface="Consolas"/>
               </a:rPr>
               <a:t>E</a:t>
             </a:r>
             <a:r>
-              <a:rPr lang="en-US" altLang="zh-CN" sz="2100" dirty="0">
+              <a:rPr lang="en-US" altLang="zh-CN" sz="2100">
                 <a:latin typeface="Consolas"/>
                 <a:cs typeface="Consolas"/>
               </a:rPr>
               <a:t>, where 1 &lt;= M &lt; 2, aka </a:t>
             </a:r>
             <a:r>
-              <a:rPr lang="en-US" altLang="zh-CN" dirty="0">
+              <a:rPr lang="en-US" altLang="zh-CN">
                 <a:latin typeface="Arial"/>
                 <a:cs typeface="Arial"/>
               </a:rPr>
               <a:t>M</a:t>
             </a:r>
             <a:r>
-              <a:rPr lang="en-US" altLang="zh-CN" sz="2100" dirty="0">
+              <a:rPr lang="en-US" altLang="zh-CN" sz="2100">
                 <a:latin typeface="Consolas"/>
                 <a:cs typeface="Consolas"/>
               </a:rPr>
               <a:t> = (1.b</a:t>
             </a:r>
             <a:r>
-              <a:rPr lang="en-US" altLang="zh-CN" sz="2100" baseline="-25000" dirty="0">
+              <a:rPr lang="en-US" altLang="zh-CN" sz="2100" baseline="-25000">
                 <a:latin typeface="Consolas"/>
                 <a:cs typeface="Consolas"/>
               </a:rPr>
               <a:t>1</a:t>
             </a:r>
             <a:r>
-              <a:rPr lang="en-US" altLang="zh-CN" sz="2100" dirty="0">
+              <a:rPr lang="en-US" altLang="zh-CN" sz="2100">
                 <a:latin typeface="Consolas"/>
                 <a:cs typeface="Consolas"/>
               </a:rPr>
               <a:t>b</a:t>
             </a:r>
             <a:r>
-              <a:rPr lang="en-US" altLang="zh-CN" sz="2100" baseline="-25000" dirty="0">
+              <a:rPr lang="en-US" altLang="zh-CN" sz="2100" baseline="-25000">
                 <a:latin typeface="Consolas"/>
                 <a:cs typeface="Consolas"/>
               </a:rPr>
               <a:t>2</a:t>
             </a:r>
             <a:r>
-              <a:rPr lang="en-US" altLang="zh-CN" sz="2100" dirty="0">
+              <a:rPr lang="en-US" altLang="zh-CN" sz="2100">
                 <a:latin typeface="Consolas"/>
                 <a:cs typeface="Consolas"/>
               </a:rPr>
               <a:t>b</a:t>
             </a:r>
             <a:r>
-              <a:rPr lang="en-US" altLang="zh-CN" sz="2100" baseline="-25000" dirty="0">
+              <a:rPr lang="en-US" altLang="zh-CN" sz="2100" baseline="-25000">
                 <a:latin typeface="Consolas"/>
                 <a:cs typeface="Consolas"/>
               </a:rPr>
               <a:t>3</a:t>
             </a:r>
             <a:r>
-              <a:rPr lang="en-US" altLang="zh-CN" sz="2100" dirty="0">
+              <a:rPr lang="en-US" altLang="zh-CN" sz="2100">
                 <a:latin typeface="Consolas"/>
                 <a:cs typeface="Consolas"/>
               </a:rPr>
               <a:t>)</a:t>
             </a:r>
             <a:r>
-              <a:rPr lang="en-US" altLang="zh-CN" sz="2100" baseline="-25000" dirty="0">
+              <a:rPr lang="en-US" altLang="zh-CN" sz="2100" baseline="-25000">
                 <a:latin typeface="Consolas"/>
                 <a:cs typeface="Consolas"/>
               </a:rPr>
@@ -9953,7 +9952,7 @@
             </a:r>
           </a:p>
           <a:p>
-            <a:endParaRPr lang="en-US" altLang="zh-CN" sz="1200" baseline="-25000" dirty="0">
+            <a:endParaRPr lang="en-US" altLang="zh-CN" sz="1200" baseline="-25000">
               <a:latin typeface="Consolas"/>
               <a:cs typeface="Consolas"/>
             </a:endParaRPr>
@@ -10117,13 +10116,13 @@
                     <a:lstStyle/>
                     <a:p>
                       <a:r>
-                        <a:rPr lang="en-US" altLang="zh-CN" sz="1400" dirty="0">
+                        <a:rPr lang="en-US" altLang="zh-CN" sz="1400">
                           <a:latin typeface="Verdana"/>
                           <a:cs typeface="Verdana"/>
                         </a:rPr>
                         <a:t> s</a:t>
                       </a:r>
-                      <a:endParaRPr lang="zh-CN" altLang="en-US" sz="1400" dirty="0">
+                      <a:endParaRPr lang="zh-CN" altLang="en-US" sz="1400">
                         <a:latin typeface="Verdana"/>
                         <a:cs typeface="Verdana"/>
                       </a:endParaRPr>
@@ -10157,7 +10156,7 @@
                         <a:tabLst/>
                         <a:defRPr/>
                       </a:pPr>
-                      <a:endParaRPr lang="zh-CN" altLang="en-US" sz="1400" dirty="0">
+                      <a:endParaRPr lang="zh-CN" altLang="en-US" sz="1400">
                         <a:latin typeface="Verdana"/>
                         <a:cs typeface="Verdana"/>
                       </a:endParaRPr>
@@ -10194,7 +10193,7 @@
                         <a:tabLst/>
                         <a:defRPr/>
                       </a:pPr>
-                      <a:endParaRPr lang="zh-CN" altLang="en-US" sz="1400" dirty="0">
+                      <a:endParaRPr lang="zh-CN" altLang="en-US" sz="1400">
                         <a:latin typeface="Verdana"/>
                         <a:cs typeface="Verdana"/>
                       </a:endParaRPr>
@@ -10231,7 +10230,7 @@
                         <a:tabLst/>
                         <a:defRPr/>
                       </a:pPr>
-                      <a:endParaRPr lang="zh-CN" altLang="en-US" sz="1400" dirty="0">
+                      <a:endParaRPr lang="zh-CN" altLang="en-US" sz="1400">
                         <a:latin typeface="Verdana"/>
                         <a:cs typeface="Verdana"/>
                       </a:endParaRPr>
@@ -10251,7 +10250,7 @@
                     <a:bodyPr/>
                     <a:lstStyle/>
                     <a:p>
-                      <a:endParaRPr lang="zh-CN" altLang="en-US" sz="1400" dirty="0">
+                      <a:endParaRPr lang="zh-CN" altLang="en-US" sz="1400">
                         <a:latin typeface="Verdana"/>
                         <a:cs typeface="Verdana"/>
                       </a:endParaRPr>
@@ -10288,7 +10287,7 @@
                         <a:tabLst/>
                         <a:defRPr/>
                       </a:pPr>
-                      <a:endParaRPr lang="zh-CN" altLang="en-US" sz="1400" dirty="0">
+                      <a:endParaRPr lang="zh-CN" altLang="en-US" sz="1400">
                         <a:latin typeface="Verdana"/>
                         <a:cs typeface="Verdana"/>
                       </a:endParaRPr>
@@ -10325,7 +10324,7 @@
                         <a:tabLst/>
                         <a:defRPr/>
                       </a:pPr>
-                      <a:endParaRPr lang="zh-CN" altLang="en-US" sz="1400" dirty="0">
+                      <a:endParaRPr lang="zh-CN" altLang="en-US" sz="1400">
                         <a:latin typeface="Verdana"/>
                         <a:cs typeface="Verdana"/>
                       </a:endParaRPr>
@@ -10362,7 +10361,7 @@
                         <a:tabLst/>
                         <a:defRPr/>
                       </a:pPr>
-                      <a:endParaRPr lang="zh-CN" altLang="en-US" sz="1400" dirty="0">
+                      <a:endParaRPr lang="zh-CN" altLang="en-US" sz="1400">
                         <a:latin typeface="Verdana"/>
                         <a:cs typeface="Verdana"/>
                       </a:endParaRPr>
@@ -10416,7 +10415,7 @@
           <a:lstStyle/>
           <a:p>
             <a:r>
-              <a:rPr lang="en-US" dirty="0"/>
+              <a:rPr lang="en-US"/>
               <a:t>exponent </a:t>
             </a:r>
           </a:p>
@@ -10451,7 +10450,7 @@
           <a:lstStyle/>
           <a:p>
             <a:r>
-              <a:rPr lang="en-US" dirty="0"/>
+              <a:rPr lang="en-US"/>
               <a:t>fraction(M)</a:t>
             </a:r>
           </a:p>
@@ -10580,65 +10579,65 @@
           <a:lstStyle/>
           <a:p>
             <a:r>
-              <a:rPr lang="en-US" altLang="zh-CN" sz="2100" dirty="0">
+              <a:rPr lang="en-US" altLang="zh-CN" sz="2100">
                 <a:cs typeface="Consolas"/>
               </a:rPr>
               <a:t>Example: (0.1875)</a:t>
             </a:r>
             <a:r>
-              <a:rPr lang="en-US" altLang="zh-CN" sz="2100" baseline="-25000" dirty="0">
+              <a:rPr lang="en-US" altLang="zh-CN" sz="2100" baseline="-25000">
                 <a:cs typeface="Consolas"/>
               </a:rPr>
               <a:t>10</a:t>
             </a:r>
             <a:r>
-              <a:rPr lang="en-US" altLang="zh-CN" sz="2100" dirty="0">
+              <a:rPr lang="en-US" altLang="zh-CN" sz="2100">
                 <a:cs typeface="Consolas"/>
               </a:rPr>
               <a:t> = </a:t>
             </a:r>
             <a:r>
-              <a:rPr lang="en-US" altLang="zh-CN" sz="2100" dirty="0">
+              <a:rPr lang="en-US" altLang="zh-CN" sz="2100">
                 <a:cs typeface="Arial"/>
               </a:rPr>
               <a:t>(0.0011)</a:t>
             </a:r>
             <a:r>
-              <a:rPr lang="en-US" altLang="zh-CN" sz="2100" baseline="-25000" dirty="0">
+              <a:rPr lang="en-US" altLang="zh-CN" sz="2100" baseline="-25000">
                 <a:cs typeface="Arial"/>
               </a:rPr>
               <a:t>2 </a:t>
             </a:r>
             <a:r>
-              <a:rPr lang="en-US" altLang="zh-CN" sz="2100" dirty="0">
+              <a:rPr lang="en-US" altLang="zh-CN" sz="2100">
                 <a:cs typeface="Arial"/>
               </a:rPr>
               <a:t> = (1.1)</a:t>
             </a:r>
             <a:r>
-              <a:rPr lang="en-US" altLang="zh-CN" sz="2100" baseline="-25000" dirty="0">
+              <a:rPr lang="en-US" altLang="zh-CN" sz="2100" baseline="-25000">
                 <a:cs typeface="Arial"/>
               </a:rPr>
               <a:t>2 </a:t>
             </a:r>
             <a:r>
-              <a:rPr lang="en-US" altLang="zh-CN" sz="2100" dirty="0">
+              <a:rPr lang="en-US" altLang="zh-CN" sz="2100">
                 <a:cs typeface="Arial"/>
               </a:rPr>
               <a:t>* 2</a:t>
             </a:r>
             <a:r>
-              <a:rPr lang="en-US" altLang="zh-CN" sz="2100" baseline="30000" dirty="0">
+              <a:rPr lang="en-US" altLang="zh-CN" sz="2100" baseline="30000">
                 <a:cs typeface="Arial"/>
               </a:rPr>
               <a:t>-3</a:t>
             </a:r>
-            <a:endParaRPr lang="en-US" altLang="zh-CN" sz="2100" baseline="30000" dirty="0">
+            <a:endParaRPr lang="en-US" altLang="zh-CN" sz="2100" baseline="30000">
               <a:cs typeface="Consolas"/>
             </a:endParaRPr>
           </a:p>
           <a:p>
-            <a:endParaRPr lang="en-US" altLang="zh-CN" sz="825" baseline="-25000" dirty="0">
+            <a:endParaRPr lang="en-US" altLang="zh-CN" sz="825" baseline="-25000">
               <a:latin typeface="Consolas"/>
               <a:cs typeface="Consolas"/>
             </a:endParaRPr>
@@ -10710,10 +10709,10 @@
           <a:lstStyle/>
           <a:p>
             <a:r>
-              <a:rPr kumimoji="1" lang="en-US" altLang="zh-CN" dirty="0"/>
+              <a:rPr kumimoji="1" lang="en-US" altLang="zh-CN"/>
               <a:t>An example FP8 representation: E4M3</a:t>
             </a:r>
-            <a:endParaRPr kumimoji="1" lang="zh-CN" altLang="en-US" dirty="0"/>
+            <a:endParaRPr kumimoji="1" lang="zh-CN" altLang="en-US"/>
           </a:p>
         </p:txBody>
       </p:sp>
@@ -10745,91 +10744,91 @@
           <a:lstStyle/>
           <a:p>
             <a:r>
-              <a:rPr lang="en-US" altLang="zh-CN" sz="2100" u="sng" dirty="0">
+              <a:rPr lang="en-US" altLang="zh-CN" sz="2100" u="sng">
                 <a:latin typeface="Consolas"/>
                 <a:cs typeface="Consolas"/>
               </a:rPr>
               <a:t>+</a:t>
             </a:r>
             <a:r>
-              <a:rPr lang="en-US" altLang="zh-CN" sz="2100" dirty="0">
+              <a:rPr lang="en-US" altLang="zh-CN" sz="2100">
                 <a:latin typeface="Consolas"/>
                 <a:cs typeface="Consolas"/>
               </a:rPr>
               <a:t>M * 2</a:t>
             </a:r>
             <a:r>
-              <a:rPr lang="en-US" altLang="zh-CN" sz="2100" baseline="30000" dirty="0">
+              <a:rPr lang="en-US" altLang="zh-CN" sz="2100" baseline="30000">
                 <a:latin typeface="Consolas"/>
                 <a:cs typeface="Consolas"/>
               </a:rPr>
               <a:t>E</a:t>
             </a:r>
             <a:r>
-              <a:rPr lang="en-US" altLang="zh-CN" sz="2100" dirty="0">
+              <a:rPr lang="en-US" altLang="zh-CN" sz="2100">
                 <a:latin typeface="Consolas"/>
                 <a:cs typeface="Consolas"/>
               </a:rPr>
               <a:t>, where 1 &lt;= M &lt; 2, aka </a:t>
             </a:r>
             <a:r>
-              <a:rPr lang="en-US" altLang="zh-CN" dirty="0">
+              <a:rPr lang="en-US" altLang="zh-CN">
                 <a:latin typeface="Arial"/>
                 <a:cs typeface="Arial"/>
               </a:rPr>
               <a:t>M</a:t>
             </a:r>
             <a:r>
-              <a:rPr lang="en-US" altLang="zh-CN" sz="2100" dirty="0">
+              <a:rPr lang="en-US" altLang="zh-CN" sz="2100">
                 <a:latin typeface="Consolas"/>
                 <a:cs typeface="Consolas"/>
               </a:rPr>
               <a:t> = (1.b</a:t>
             </a:r>
             <a:r>
-              <a:rPr lang="en-US" altLang="zh-CN" sz="2100" baseline="-25000" dirty="0">
+              <a:rPr lang="en-US" altLang="zh-CN" sz="2100" baseline="-25000">
                 <a:latin typeface="Consolas"/>
                 <a:cs typeface="Consolas"/>
               </a:rPr>
               <a:t>1</a:t>
             </a:r>
             <a:r>
-              <a:rPr lang="en-US" altLang="zh-CN" sz="2100" dirty="0">
+              <a:rPr lang="en-US" altLang="zh-CN" sz="2100">
                 <a:latin typeface="Consolas"/>
                 <a:cs typeface="Consolas"/>
               </a:rPr>
               <a:t>b</a:t>
             </a:r>
             <a:r>
-              <a:rPr lang="en-US" altLang="zh-CN" sz="2100" baseline="-25000" dirty="0">
+              <a:rPr lang="en-US" altLang="zh-CN" sz="2100" baseline="-25000">
                 <a:latin typeface="Consolas"/>
                 <a:cs typeface="Consolas"/>
               </a:rPr>
               <a:t>2</a:t>
             </a:r>
             <a:r>
-              <a:rPr lang="en-US" altLang="zh-CN" sz="2100" dirty="0">
+              <a:rPr lang="en-US" altLang="zh-CN" sz="2100">
                 <a:latin typeface="Consolas"/>
                 <a:cs typeface="Consolas"/>
               </a:rPr>
               <a:t>b</a:t>
             </a:r>
             <a:r>
-              <a:rPr lang="en-US" altLang="zh-CN" sz="2100" baseline="-25000" dirty="0">
+              <a:rPr lang="en-US" altLang="zh-CN" sz="2100" baseline="-25000">
                 <a:latin typeface="Consolas"/>
                 <a:cs typeface="Consolas"/>
               </a:rPr>
               <a:t>3</a:t>
             </a:r>
             <a:r>
-              <a:rPr lang="en-US" altLang="zh-CN" sz="2100" dirty="0">
+              <a:rPr lang="en-US" altLang="zh-CN" sz="2100">
                 <a:latin typeface="Consolas"/>
                 <a:cs typeface="Consolas"/>
               </a:rPr>
               <a:t>)</a:t>
             </a:r>
             <a:r>
-              <a:rPr lang="en-US" altLang="zh-CN" sz="2100" baseline="-25000" dirty="0">
+              <a:rPr lang="en-US" altLang="zh-CN" sz="2100" baseline="-25000">
                 <a:latin typeface="Consolas"/>
                 <a:cs typeface="Consolas"/>
               </a:rPr>
@@ -10837,7 +10836,7 @@
             </a:r>
           </a:p>
           <a:p>
-            <a:endParaRPr lang="en-US" altLang="zh-CN" sz="1200" baseline="-25000" dirty="0">
+            <a:endParaRPr lang="en-US" altLang="zh-CN" sz="1200" baseline="-25000">
               <a:latin typeface="Consolas"/>
               <a:cs typeface="Consolas"/>
             </a:endParaRPr>
@@ -10940,13 +10939,13 @@
                     <a:lstStyle/>
                     <a:p>
                       <a:r>
-                        <a:rPr lang="en-US" altLang="zh-CN" sz="1400" dirty="0">
+                        <a:rPr lang="en-US" altLang="zh-CN" sz="1400">
                           <a:latin typeface="Verdana"/>
                           <a:cs typeface="Verdana"/>
                         </a:rPr>
                         <a:t> s</a:t>
                       </a:r>
-                      <a:endParaRPr lang="zh-CN" altLang="en-US" sz="1400" dirty="0">
+                      <a:endParaRPr lang="zh-CN" altLang="en-US" sz="1400">
                         <a:latin typeface="Verdana"/>
                         <a:cs typeface="Verdana"/>
                       </a:endParaRPr>
@@ -10980,7 +10979,7 @@
                         <a:tabLst/>
                         <a:defRPr/>
                       </a:pPr>
-                      <a:endParaRPr lang="zh-CN" altLang="en-US" sz="1400" dirty="0">
+                      <a:endParaRPr lang="zh-CN" altLang="en-US" sz="1400">
                         <a:latin typeface="Verdana"/>
                         <a:cs typeface="Verdana"/>
                       </a:endParaRPr>
@@ -11017,7 +11016,7 @@
                         <a:tabLst/>
                         <a:defRPr/>
                       </a:pPr>
-                      <a:endParaRPr lang="zh-CN" altLang="en-US" sz="1400" dirty="0">
+                      <a:endParaRPr lang="zh-CN" altLang="en-US" sz="1400">
                         <a:latin typeface="Verdana"/>
                         <a:cs typeface="Verdana"/>
                       </a:endParaRPr>
@@ -11054,7 +11053,7 @@
                         <a:tabLst/>
                         <a:defRPr/>
                       </a:pPr>
-                      <a:endParaRPr lang="zh-CN" altLang="en-US" sz="1400" dirty="0">
+                      <a:endParaRPr lang="zh-CN" altLang="en-US" sz="1400">
                         <a:latin typeface="Verdana"/>
                         <a:cs typeface="Verdana"/>
                       </a:endParaRPr>
@@ -11074,7 +11073,7 @@
                     <a:bodyPr/>
                     <a:lstStyle/>
                     <a:p>
-                      <a:endParaRPr lang="zh-CN" altLang="en-US" sz="1400" dirty="0">
+                      <a:endParaRPr lang="zh-CN" altLang="en-US" sz="1400">
                         <a:latin typeface="Verdana"/>
                         <a:cs typeface="Verdana"/>
                       </a:endParaRPr>
@@ -11111,7 +11110,7 @@
                         <a:tabLst/>
                         <a:defRPr/>
                       </a:pPr>
-                      <a:endParaRPr lang="zh-CN" altLang="en-US" sz="1400" dirty="0">
+                      <a:endParaRPr lang="zh-CN" altLang="en-US" sz="1400">
                         <a:latin typeface="Verdana"/>
                         <a:cs typeface="Verdana"/>
                       </a:endParaRPr>
@@ -11148,7 +11147,7 @@
                         <a:tabLst/>
                         <a:defRPr/>
                       </a:pPr>
-                      <a:endParaRPr lang="zh-CN" altLang="en-US" sz="1400" dirty="0">
+                      <a:endParaRPr lang="zh-CN" altLang="en-US" sz="1400">
                         <a:latin typeface="Verdana"/>
                         <a:cs typeface="Verdana"/>
                       </a:endParaRPr>
@@ -11185,7 +11184,7 @@
                         <a:tabLst/>
                         <a:defRPr/>
                       </a:pPr>
-                      <a:endParaRPr lang="zh-CN" altLang="en-US" sz="1400" dirty="0">
+                      <a:endParaRPr lang="zh-CN" altLang="en-US" sz="1400">
                         <a:latin typeface="Verdana"/>
                         <a:cs typeface="Verdana"/>
                       </a:endParaRPr>
@@ -11239,7 +11238,7 @@
           <a:lstStyle/>
           <a:p>
             <a:r>
-              <a:rPr lang="en-US" dirty="0"/>
+              <a:rPr lang="en-US"/>
               <a:t>exponent</a:t>
             </a:r>
           </a:p>
@@ -11274,7 +11273,7 @@
           <a:lstStyle/>
           <a:p>
             <a:r>
-              <a:rPr lang="en-US" dirty="0"/>
+              <a:rPr lang="en-US"/>
               <a:t>fraction (M)</a:t>
             </a:r>
           </a:p>
@@ -11308,65 +11307,65 @@
           <a:lstStyle/>
           <a:p>
             <a:r>
-              <a:rPr lang="en-US" altLang="zh-CN" sz="2100" dirty="0">
+              <a:rPr lang="en-US" altLang="zh-CN" sz="2100">
                 <a:cs typeface="Consolas"/>
               </a:rPr>
               <a:t>Example: (0.1875)</a:t>
             </a:r>
             <a:r>
-              <a:rPr lang="en-US" altLang="zh-CN" sz="2100" baseline="-25000" dirty="0">
+              <a:rPr lang="en-US" altLang="zh-CN" sz="2100" baseline="-25000">
                 <a:cs typeface="Consolas"/>
               </a:rPr>
               <a:t>10</a:t>
             </a:r>
             <a:r>
-              <a:rPr lang="en-US" altLang="zh-CN" sz="2100" dirty="0">
+              <a:rPr lang="en-US" altLang="zh-CN" sz="2100">
                 <a:cs typeface="Consolas"/>
               </a:rPr>
               <a:t> = </a:t>
             </a:r>
             <a:r>
-              <a:rPr lang="en-US" altLang="zh-CN" sz="2100" dirty="0">
+              <a:rPr lang="en-US" altLang="zh-CN" sz="2100">
                 <a:cs typeface="Arial"/>
               </a:rPr>
               <a:t>(0.0011)</a:t>
             </a:r>
             <a:r>
-              <a:rPr lang="en-US" altLang="zh-CN" sz="2100" baseline="-25000" dirty="0">
+              <a:rPr lang="en-US" altLang="zh-CN" sz="2100" baseline="-25000">
                 <a:cs typeface="Arial"/>
               </a:rPr>
               <a:t>2 </a:t>
             </a:r>
             <a:r>
-              <a:rPr lang="en-US" altLang="zh-CN" sz="2100" dirty="0">
+              <a:rPr lang="en-US" altLang="zh-CN" sz="2100">
                 <a:cs typeface="Arial"/>
               </a:rPr>
               <a:t> = (1.1)</a:t>
             </a:r>
             <a:r>
-              <a:rPr lang="en-US" altLang="zh-CN" sz="2100" baseline="-25000" dirty="0">
+              <a:rPr lang="en-US" altLang="zh-CN" sz="2100" baseline="-25000">
                 <a:cs typeface="Arial"/>
               </a:rPr>
               <a:t>2 </a:t>
             </a:r>
             <a:r>
-              <a:rPr lang="en-US" altLang="zh-CN" sz="2100" dirty="0">
+              <a:rPr lang="en-US" altLang="zh-CN" sz="2100">
                 <a:cs typeface="Arial"/>
               </a:rPr>
               <a:t>* 2</a:t>
             </a:r>
             <a:r>
-              <a:rPr lang="en-US" altLang="zh-CN" sz="2100" baseline="30000" dirty="0">
+              <a:rPr lang="en-US" altLang="zh-CN" sz="2100" baseline="30000">
                 <a:cs typeface="Arial"/>
               </a:rPr>
               <a:t>-3</a:t>
             </a:r>
-            <a:endParaRPr lang="en-US" altLang="zh-CN" sz="2100" baseline="30000" dirty="0">
+            <a:endParaRPr lang="en-US" altLang="zh-CN" sz="2100" baseline="30000">
               <a:cs typeface="Consolas"/>
             </a:endParaRPr>
           </a:p>
           <a:p>
-            <a:endParaRPr lang="en-US" altLang="zh-CN" sz="825" baseline="-25000" dirty="0">
+            <a:endParaRPr lang="en-US" altLang="zh-CN" sz="825" baseline="-25000">
               <a:latin typeface="Consolas"/>
               <a:cs typeface="Consolas"/>
             </a:endParaRPr>
@@ -11522,8 +11521,8 @@
           </a:p>
         </p:txBody>
       </p:sp>
-      <mc:AlternateContent xmlns:mc="http://schemas.openxmlformats.org/markup-compatibility/2006">
-        <mc:Choice xmlns:a14="http://schemas.microsoft.com/office/drawing/2010/main" Requires="a14">
+      <mc:AlternateContent xmlns:mc="http://schemas.openxmlformats.org/markup-compatibility/2006" xmlns:a14="http://schemas.microsoft.com/office/drawing/2010/main">
+        <mc:Choice Requires="a14">
           <p:sp>
             <p:nvSpPr>
               <p:cNvPr id="10" name="TextBox 9">
@@ -11553,7 +11552,7 @@
               <a:lstStyle/>
               <a:p>
                 <a:r>
-                  <a:rPr lang="en-US" dirty="0"/>
+                  <a:rPr lang="en-US"/>
                   <a:t>E = exponent - bias, bias=</a:t>
                 </a:r>
                 <a14:m>
@@ -11604,14 +11603,14 @@
                   </m:oMath>
                 </a14:m>
                 <a:r>
-                  <a:rPr lang="en-US" dirty="0"/>
+                  <a:rPr lang="en-US"/>
                   <a:t>= 7</a:t>
                 </a:r>
               </a:p>
             </p:txBody>
           </p:sp>
         </mc:Choice>
-        <mc:Fallback>
+        <mc:Fallback xmlns="">
           <p:sp>
             <p:nvSpPr>
               <p:cNvPr id="10" name="TextBox 9">
@@ -11637,7 +11636,7 @@
               <a:blipFill>
                 <a:blip r:embed="rId2"/>
                 <a:stretch>
-                  <a:fillRect l="-1303" t="-6452" b="-22581"/>
+                  <a:fillRect l="-1254" t="-6452" b="-25806"/>
                 </a:stretch>
               </a:blipFill>
             </p:spPr>
@@ -11714,7 +11713,7 @@
           <a:lstStyle/>
           <a:p>
             <a:r>
-              <a:rPr lang="en-US" dirty="0"/>
+              <a:rPr lang="en-US"/>
               <a:t>Floating Point lesson plan</a:t>
             </a:r>
           </a:p>
@@ -11742,31 +11741,31 @@
           <a:lstStyle/>
           <a:p>
             <a:r>
-              <a:rPr lang="en-US" dirty="0"/>
+              <a:rPr lang="en-US"/>
               <a:t>Binary Scientific notation</a:t>
             </a:r>
           </a:p>
           <a:p>
             <a:r>
-              <a:rPr lang="en-US" dirty="0"/>
+              <a:rPr lang="en-US"/>
               <a:t>FP8 example </a:t>
             </a:r>
           </a:p>
           <a:p>
             <a:r>
-              <a:rPr lang="en-US" dirty="0"/>
+              <a:rPr lang="en-US"/>
               <a:t>IEEE FP standard</a:t>
             </a:r>
           </a:p>
           <a:p>
             <a:r>
-              <a:rPr lang="en-US" dirty="0"/>
+              <a:rPr lang="en-US"/>
               <a:t>Rounding</a:t>
             </a:r>
           </a:p>
           <a:p>
             <a:r>
-              <a:rPr lang="en-US" dirty="0"/>
+              <a:rPr lang="en-US"/>
               <a:t>FP operations caveats</a:t>
             </a:r>
           </a:p>
@@ -11927,7 +11926,7 @@
           <a:lstStyle/>
           <a:p>
             <a:r>
-              <a:rPr lang="en-US" dirty="0"/>
+              <a:rPr lang="en-US"/>
               <a:t>FP8 (E4M3) on the number line</a:t>
             </a:r>
           </a:p>
@@ -12074,13 +12073,13 @@
                     <a:lstStyle/>
                     <a:p>
                       <a:r>
-                        <a:rPr lang="en-US" altLang="zh-CN" sz="1400" dirty="0">
+                        <a:rPr lang="en-US" altLang="zh-CN" sz="1400">
                           <a:latin typeface="Verdana"/>
                           <a:cs typeface="Verdana"/>
                         </a:rPr>
                         <a:t> s</a:t>
                       </a:r>
-                      <a:endParaRPr lang="zh-CN" altLang="en-US" sz="1400" dirty="0">
+                      <a:endParaRPr lang="zh-CN" altLang="en-US" sz="1400">
                         <a:latin typeface="Verdana"/>
                         <a:cs typeface="Verdana"/>
                       </a:endParaRPr>
@@ -12114,7 +12113,7 @@
                         <a:tabLst/>
                         <a:defRPr/>
                       </a:pPr>
-                      <a:endParaRPr lang="zh-CN" altLang="en-US" sz="1400" dirty="0">
+                      <a:endParaRPr lang="zh-CN" altLang="en-US" sz="1400">
                         <a:latin typeface="Verdana"/>
                         <a:cs typeface="Verdana"/>
                       </a:endParaRPr>
@@ -12151,7 +12150,7 @@
                         <a:tabLst/>
                         <a:defRPr/>
                       </a:pPr>
-                      <a:endParaRPr lang="zh-CN" altLang="en-US" sz="1400" dirty="0">
+                      <a:endParaRPr lang="zh-CN" altLang="en-US" sz="1400">
                         <a:latin typeface="Verdana"/>
                         <a:cs typeface="Verdana"/>
                       </a:endParaRPr>
@@ -12188,7 +12187,7 @@
                         <a:tabLst/>
                         <a:defRPr/>
                       </a:pPr>
-                      <a:endParaRPr lang="zh-CN" altLang="en-US" sz="1400" dirty="0">
+                      <a:endParaRPr lang="zh-CN" altLang="en-US" sz="1400">
                         <a:latin typeface="Verdana"/>
                         <a:cs typeface="Verdana"/>
                       </a:endParaRPr>
@@ -12208,7 +12207,7 @@
                     <a:bodyPr/>
                     <a:lstStyle/>
                     <a:p>
-                      <a:endParaRPr lang="zh-CN" altLang="en-US" sz="1400" dirty="0">
+                      <a:endParaRPr lang="zh-CN" altLang="en-US" sz="1400">
                         <a:latin typeface="Verdana"/>
                         <a:cs typeface="Verdana"/>
                       </a:endParaRPr>
@@ -12245,7 +12244,7 @@
                         <a:tabLst/>
                         <a:defRPr/>
                       </a:pPr>
-                      <a:endParaRPr lang="zh-CN" altLang="en-US" sz="1400" dirty="0">
+                      <a:endParaRPr lang="zh-CN" altLang="en-US" sz="1400">
                         <a:latin typeface="Verdana"/>
                         <a:cs typeface="Verdana"/>
                       </a:endParaRPr>
@@ -12282,7 +12281,7 @@
                         <a:tabLst/>
                         <a:defRPr/>
                       </a:pPr>
-                      <a:endParaRPr lang="zh-CN" altLang="en-US" sz="1400" dirty="0">
+                      <a:endParaRPr lang="zh-CN" altLang="en-US" sz="1400">
                         <a:latin typeface="Verdana"/>
                         <a:cs typeface="Verdana"/>
                       </a:endParaRPr>
@@ -12319,7 +12318,7 @@
                         <a:tabLst/>
                         <a:defRPr/>
                       </a:pPr>
-                      <a:endParaRPr lang="zh-CN" altLang="en-US" sz="1400" dirty="0">
+                      <a:endParaRPr lang="zh-CN" altLang="en-US" sz="1400">
                         <a:latin typeface="Verdana"/>
                         <a:cs typeface="Verdana"/>
                       </a:endParaRPr>
@@ -12373,7 +12372,7 @@
           <a:lstStyle/>
           <a:p>
             <a:r>
-              <a:rPr lang="en-US" dirty="0"/>
+              <a:rPr lang="en-US"/>
               <a:t>exponent </a:t>
             </a:r>
           </a:p>
@@ -12408,7 +12407,7 @@
           <a:lstStyle/>
           <a:p>
             <a:r>
-              <a:rPr lang="en-US" dirty="0"/>
+              <a:rPr lang="en-US"/>
               <a:t>fraction (M)</a:t>
             </a:r>
           </a:p>
@@ -12495,7 +12494,7 @@
           <a:lstStyle/>
           <a:p>
             <a:r>
-              <a:rPr lang="en-US" dirty="0"/>
+              <a:rPr lang="en-US"/>
               <a:t>Larger the bit pattern, larger FP magnitude</a:t>
             </a:r>
           </a:p>
@@ -12553,7 +12552,7 @@
           <a:lstStyle/>
           <a:p>
             <a:r>
-              <a:rPr lang="en-US" dirty="0"/>
+              <a:rPr lang="en-US"/>
               <a:t>FP8 (E4M3) on the number line</a:t>
             </a:r>
           </a:p>
@@ -12653,7 +12652,7 @@
             <a:lstStyle/>
             <a:p>
               <a:r>
-                <a:rPr lang="en-US" sz="1350" dirty="0"/>
+                <a:rPr lang="en-US" sz="1350"/>
                 <a:t>0</a:t>
               </a:r>
             </a:p>
@@ -12762,13 +12761,13 @@
                     <a:lstStyle/>
                     <a:p>
                       <a:r>
-                        <a:rPr lang="en-US" altLang="zh-CN" sz="1400" dirty="0">
+                        <a:rPr lang="en-US" altLang="zh-CN" sz="1400">
                           <a:latin typeface="Verdana"/>
                           <a:cs typeface="Verdana"/>
                         </a:rPr>
                         <a:t> s</a:t>
                       </a:r>
-                      <a:endParaRPr lang="zh-CN" altLang="en-US" sz="1400" dirty="0">
+                      <a:endParaRPr lang="zh-CN" altLang="en-US" sz="1400">
                         <a:latin typeface="Verdana"/>
                         <a:cs typeface="Verdana"/>
                       </a:endParaRPr>
@@ -12802,7 +12801,7 @@
                         <a:tabLst/>
                         <a:defRPr/>
                       </a:pPr>
-                      <a:endParaRPr lang="zh-CN" altLang="en-US" sz="1400" dirty="0">
+                      <a:endParaRPr lang="zh-CN" altLang="en-US" sz="1400">
                         <a:latin typeface="Verdana"/>
                         <a:cs typeface="Verdana"/>
                       </a:endParaRPr>
@@ -12839,7 +12838,7 @@
                         <a:tabLst/>
                         <a:defRPr/>
                       </a:pPr>
-                      <a:endParaRPr lang="zh-CN" altLang="en-US" sz="1400" dirty="0">
+                      <a:endParaRPr lang="zh-CN" altLang="en-US" sz="1400">
                         <a:latin typeface="Verdana"/>
                         <a:cs typeface="Verdana"/>
                       </a:endParaRPr>
@@ -12876,7 +12875,7 @@
                         <a:tabLst/>
                         <a:defRPr/>
                       </a:pPr>
-                      <a:endParaRPr lang="zh-CN" altLang="en-US" sz="1400" dirty="0">
+                      <a:endParaRPr lang="zh-CN" altLang="en-US" sz="1400">
                         <a:latin typeface="Verdana"/>
                         <a:cs typeface="Verdana"/>
                       </a:endParaRPr>
@@ -12896,7 +12895,7 @@
                     <a:bodyPr/>
                     <a:lstStyle/>
                     <a:p>
-                      <a:endParaRPr lang="zh-CN" altLang="en-US" sz="1400" dirty="0">
+                      <a:endParaRPr lang="zh-CN" altLang="en-US" sz="1400">
                         <a:latin typeface="Verdana"/>
                         <a:cs typeface="Verdana"/>
                       </a:endParaRPr>
@@ -12933,7 +12932,7 @@
                         <a:tabLst/>
                         <a:defRPr/>
                       </a:pPr>
-                      <a:endParaRPr lang="zh-CN" altLang="en-US" sz="1400" dirty="0">
+                      <a:endParaRPr lang="zh-CN" altLang="en-US" sz="1400">
                         <a:latin typeface="Verdana"/>
                         <a:cs typeface="Verdana"/>
                       </a:endParaRPr>
@@ -12970,7 +12969,7 @@
                         <a:tabLst/>
                         <a:defRPr/>
                       </a:pPr>
-                      <a:endParaRPr lang="zh-CN" altLang="en-US" sz="1400" dirty="0">
+                      <a:endParaRPr lang="zh-CN" altLang="en-US" sz="1400">
                         <a:latin typeface="Verdana"/>
                         <a:cs typeface="Verdana"/>
                       </a:endParaRPr>
@@ -13007,7 +13006,7 @@
                         <a:tabLst/>
                         <a:defRPr/>
                       </a:pPr>
-                      <a:endParaRPr lang="zh-CN" altLang="en-US" sz="1400" dirty="0">
+                      <a:endParaRPr lang="zh-CN" altLang="en-US" sz="1400">
                         <a:latin typeface="Verdana"/>
                         <a:cs typeface="Verdana"/>
                       </a:endParaRPr>
@@ -13061,7 +13060,7 @@
           <a:lstStyle/>
           <a:p>
             <a:r>
-              <a:rPr lang="en-US" dirty="0"/>
+              <a:rPr lang="en-US"/>
               <a:t>exponent (E)</a:t>
             </a:r>
           </a:p>
@@ -13096,7 +13095,7 @@
           <a:lstStyle/>
           <a:p>
             <a:r>
-              <a:rPr lang="en-US" dirty="0"/>
+              <a:rPr lang="en-US"/>
               <a:t>fraction (M)</a:t>
             </a:r>
           </a:p>
@@ -13183,7 +13182,7 @@
           <a:lstStyle/>
           <a:p>
             <a:r>
-              <a:rPr lang="en-US" dirty="0"/>
+              <a:rPr lang="en-US"/>
               <a:t>Larger the bit pattern, larger FP magnitude</a:t>
             </a:r>
           </a:p>
@@ -13218,7 +13217,7 @@
           <a:lstStyle/>
           <a:p>
             <a:r>
-              <a:rPr lang="en-US" dirty="0"/>
+              <a:rPr lang="en-US"/>
               <a:t>0x7f</a:t>
             </a:r>
           </a:p>
@@ -13253,14 +13252,14 @@
           <a:lstStyle/>
           <a:p>
             <a:r>
-              <a:rPr lang="en-US" sz="1600" dirty="0"/>
+              <a:rPr lang="en-US" sz="1600"/>
               <a:t>2</a:t>
             </a:r>
             <a:r>
-              <a:rPr lang="en-US" sz="1600" baseline="30000" dirty="0"/>
+              <a:rPr lang="en-US" sz="1600" baseline="30000"/>
               <a:t>8</a:t>
             </a:r>
-            <a:endParaRPr lang="en-US" dirty="0"/>
+            <a:endParaRPr lang="en-US"/>
           </a:p>
         </p:txBody>
       </p:sp>
@@ -13293,14 +13292,14 @@
           <a:lstStyle/>
           <a:p>
             <a:r>
-              <a:rPr lang="en-US" sz="1600" dirty="0"/>
+              <a:rPr lang="en-US" sz="1600"/>
               <a:t>2</a:t>
             </a:r>
             <a:r>
-              <a:rPr lang="en-US" sz="1600" baseline="30000" dirty="0"/>
+              <a:rPr lang="en-US" sz="1600" baseline="30000"/>
               <a:t>7</a:t>
             </a:r>
-            <a:endParaRPr lang="en-US" sz="1600" dirty="0"/>
+            <a:endParaRPr lang="en-US" sz="1600"/>
           </a:p>
         </p:txBody>
       </p:sp>
@@ -13333,14 +13332,14 @@
           <a:lstStyle/>
           <a:p>
             <a:r>
-              <a:rPr lang="en-US" sz="1600" dirty="0"/>
+              <a:rPr lang="en-US" sz="1600"/>
               <a:t>2</a:t>
             </a:r>
             <a:r>
-              <a:rPr lang="en-US" sz="1600" baseline="30000" dirty="0"/>
+              <a:rPr lang="en-US" sz="1600" baseline="30000"/>
               <a:t>6</a:t>
             </a:r>
-            <a:endParaRPr lang="en-US" sz="1600" dirty="0"/>
+            <a:endParaRPr lang="en-US" sz="1600"/>
           </a:p>
         </p:txBody>
       </p:sp>
@@ -13373,14 +13372,14 @@
           <a:lstStyle/>
           <a:p>
             <a:r>
-              <a:rPr lang="en-US" sz="1600" dirty="0"/>
+              <a:rPr lang="en-US" sz="1600"/>
               <a:t>2</a:t>
             </a:r>
             <a:r>
-              <a:rPr lang="en-US" sz="1600" baseline="30000" dirty="0"/>
+              <a:rPr lang="en-US" sz="1600" baseline="30000"/>
               <a:t>5</a:t>
             </a:r>
-            <a:endParaRPr lang="en-US" dirty="0"/>
+            <a:endParaRPr lang="en-US"/>
           </a:p>
         </p:txBody>
       </p:sp>
@@ -13816,7 +13815,7 @@
               <a:lstStyle/>
               <a:p>
                 <a:r>
-                  <a:rPr lang="en-US" sz="1350" dirty="0"/>
+                  <a:rPr lang="en-US" sz="1350"/>
                   <a:t>0</a:t>
                 </a:r>
               </a:p>
@@ -14072,14 +14071,14 @@
             <a:lstStyle/>
             <a:p>
               <a:r>
-                <a:rPr lang="en-US" sz="1600" dirty="0"/>
+                <a:rPr lang="en-US" sz="1600"/>
                 <a:t>2</a:t>
               </a:r>
               <a:r>
-                <a:rPr lang="en-US" sz="1600" baseline="30000" dirty="0"/>
+                <a:rPr lang="en-US" sz="1600" baseline="30000"/>
                 <a:t>-4</a:t>
               </a:r>
-              <a:endParaRPr lang="en-US" dirty="0"/>
+              <a:endParaRPr lang="en-US"/>
             </a:p>
           </p:txBody>
         </p:sp>
@@ -14112,14 +14111,14 @@
             <a:lstStyle/>
             <a:p>
               <a:r>
-                <a:rPr lang="en-US" sz="1600" dirty="0"/>
+                <a:rPr lang="en-US" sz="1600"/>
                 <a:t>2</a:t>
               </a:r>
               <a:r>
-                <a:rPr lang="en-US" sz="1600" baseline="30000" dirty="0"/>
+                <a:rPr lang="en-US" sz="1600" baseline="30000"/>
                 <a:t>-5</a:t>
               </a:r>
-              <a:endParaRPr lang="en-US" sz="1600" dirty="0"/>
+              <a:endParaRPr lang="en-US" sz="1600"/>
             </a:p>
           </p:txBody>
         </p:sp>
@@ -14152,14 +14151,14 @@
             <a:lstStyle/>
             <a:p>
               <a:r>
-                <a:rPr lang="en-US" sz="1600" dirty="0"/>
+                <a:rPr lang="en-US" sz="1600"/>
                 <a:t>2</a:t>
               </a:r>
               <a:r>
-                <a:rPr lang="en-US" sz="1600" baseline="30000" dirty="0"/>
+                <a:rPr lang="en-US" sz="1600" baseline="30000"/>
                 <a:t>-6</a:t>
               </a:r>
-              <a:endParaRPr lang="en-US" sz="1600" dirty="0"/>
+              <a:endParaRPr lang="en-US" sz="1600"/>
             </a:p>
           </p:txBody>
         </p:sp>
@@ -14192,14 +14191,14 @@
             <a:lstStyle/>
             <a:p>
               <a:r>
-                <a:rPr lang="en-US" sz="1600" dirty="0"/>
+                <a:rPr lang="en-US" sz="1600"/>
                 <a:t>2</a:t>
               </a:r>
               <a:r>
-                <a:rPr lang="en-US" sz="1600" baseline="30000" dirty="0"/>
+                <a:rPr lang="en-US" sz="1600" baseline="30000"/>
                 <a:t>-7</a:t>
               </a:r>
-              <a:endParaRPr lang="en-US" dirty="0"/>
+              <a:endParaRPr lang="en-US"/>
             </a:p>
           </p:txBody>
         </p:sp>
@@ -14233,7 +14232,7 @@
           <a:lstStyle/>
           <a:p>
             <a:r>
-              <a:rPr lang="en-US" dirty="0"/>
+              <a:rPr lang="en-US"/>
               <a:t>Having normalized representation only leaves a disproportionally large gap around zero.</a:t>
             </a:r>
           </a:p>
@@ -14484,7 +14483,7 @@
           <a:lstStyle/>
           <a:p>
             <a:r>
-              <a:rPr lang="en-US" dirty="0"/>
+              <a:rPr lang="en-US"/>
               <a:t>FP8 (E4M3): denormalized (subnormal) number</a:t>
             </a:r>
           </a:p>
@@ -14584,7 +14583,7 @@
             <a:lstStyle/>
             <a:p>
               <a:r>
-                <a:rPr lang="en-US" sz="1350" dirty="0"/>
+                <a:rPr lang="en-US" sz="1350"/>
                 <a:t>0</a:t>
               </a:r>
             </a:p>
@@ -14734,13 +14733,13 @@
                     <a:lstStyle/>
                     <a:p>
                       <a:r>
-                        <a:rPr lang="en-US" altLang="zh-CN" sz="1400" dirty="0">
+                        <a:rPr lang="en-US" altLang="zh-CN" sz="1400">
                           <a:latin typeface="Verdana"/>
                           <a:cs typeface="Verdana"/>
                         </a:rPr>
                         <a:t> s</a:t>
                       </a:r>
-                      <a:endParaRPr lang="zh-CN" altLang="en-US" sz="1400" dirty="0">
+                      <a:endParaRPr lang="zh-CN" altLang="en-US" sz="1400">
                         <a:latin typeface="Verdana"/>
                         <a:cs typeface="Verdana"/>
                       </a:endParaRPr>
@@ -14775,13 +14774,13 @@
                         <a:defRPr/>
                       </a:pPr>
                       <a:r>
-                        <a:rPr lang="en-US" altLang="zh-CN" sz="1400" dirty="0">
+                        <a:rPr lang="en-US" altLang="zh-CN" sz="1400">
                           <a:latin typeface="Verdana"/>
                           <a:cs typeface="Verdana"/>
                         </a:rPr>
                         <a:t>0</a:t>
                       </a:r>
-                      <a:endParaRPr lang="zh-CN" altLang="en-US" sz="1400" dirty="0">
+                      <a:endParaRPr lang="zh-CN" altLang="en-US" sz="1400">
                         <a:latin typeface="Verdana"/>
                         <a:cs typeface="Verdana"/>
                       </a:endParaRPr>
@@ -14819,13 +14818,13 @@
                         <a:defRPr/>
                       </a:pPr>
                       <a:r>
-                        <a:rPr lang="en-US" altLang="zh-CN" sz="1400" dirty="0">
+                        <a:rPr lang="en-US" altLang="zh-CN" sz="1400">
                           <a:latin typeface="Verdana"/>
                           <a:cs typeface="Verdana"/>
                         </a:rPr>
                         <a:t>0</a:t>
                       </a:r>
-                      <a:endParaRPr lang="zh-CN" altLang="en-US" sz="1400" dirty="0">
+                      <a:endParaRPr lang="zh-CN" altLang="en-US" sz="1400">
                         <a:latin typeface="Verdana"/>
                         <a:cs typeface="Verdana"/>
                       </a:endParaRPr>
@@ -14863,13 +14862,13 @@
                         <a:defRPr/>
                       </a:pPr>
                       <a:r>
-                        <a:rPr lang="en-US" altLang="zh-CN" sz="1400" dirty="0">
+                        <a:rPr lang="en-US" altLang="zh-CN" sz="1400">
                           <a:latin typeface="Verdana"/>
                           <a:cs typeface="Verdana"/>
                         </a:rPr>
                         <a:t>0</a:t>
                       </a:r>
-                      <a:endParaRPr lang="zh-CN" altLang="en-US" sz="1400" dirty="0">
+                      <a:endParaRPr lang="zh-CN" altLang="en-US" sz="1400">
                         <a:latin typeface="Verdana"/>
                         <a:cs typeface="Verdana"/>
                       </a:endParaRPr>
@@ -14890,13 +14889,13 @@
                     <a:lstStyle/>
                     <a:p>
                       <a:r>
-                        <a:rPr lang="en-US" altLang="zh-CN" sz="1400" dirty="0">
+                        <a:rPr lang="en-US" altLang="zh-CN" sz="1400">
                           <a:latin typeface="Verdana"/>
                           <a:cs typeface="Verdana"/>
                         </a:rPr>
                         <a:t>0</a:t>
                       </a:r>
-                      <a:endParaRPr lang="zh-CN" altLang="en-US" sz="1400" dirty="0">
+                      <a:endParaRPr lang="zh-CN" altLang="en-US" sz="1400">
                         <a:latin typeface="Verdana"/>
                         <a:cs typeface="Verdana"/>
                       </a:endParaRPr>
@@ -14934,20 +14933,20 @@
                         <a:defRPr/>
                       </a:pPr>
                       <a:r>
-                        <a:rPr lang="en-US" altLang="zh-CN" sz="1400" dirty="0">
+                        <a:rPr lang="en-US" altLang="zh-CN" sz="1400">
                           <a:latin typeface="Verdana"/>
                           <a:cs typeface="Verdana"/>
                         </a:rPr>
                         <a:t>b</a:t>
                       </a:r>
                       <a:r>
-                        <a:rPr lang="en-US" altLang="zh-CN" sz="1400" baseline="-25000" dirty="0">
+                        <a:rPr lang="en-US" altLang="zh-CN" sz="1400" baseline="-25000">
                           <a:latin typeface="Verdana"/>
                           <a:cs typeface="Verdana"/>
                         </a:rPr>
                         <a:t>1</a:t>
                       </a:r>
-                      <a:endParaRPr lang="zh-CN" altLang="en-US" sz="1400" baseline="-25000" dirty="0">
+                      <a:endParaRPr lang="zh-CN" altLang="en-US" sz="1400" baseline="-25000">
                         <a:latin typeface="Verdana"/>
                         <a:cs typeface="Verdana"/>
                       </a:endParaRPr>
@@ -14985,20 +14984,20 @@
                         <a:defRPr/>
                       </a:pPr>
                       <a:r>
-                        <a:rPr lang="en-US" altLang="zh-CN" sz="1400" dirty="0">
+                        <a:rPr lang="en-US" altLang="zh-CN" sz="1400">
                           <a:latin typeface="Verdana"/>
                           <a:cs typeface="Verdana"/>
                         </a:rPr>
                         <a:t>b</a:t>
                       </a:r>
                       <a:r>
-                        <a:rPr lang="en-US" altLang="zh-CN" sz="1400" baseline="-25000" dirty="0">
+                        <a:rPr lang="en-US" altLang="zh-CN" sz="1400" baseline="-25000">
                           <a:latin typeface="Verdana"/>
                           <a:cs typeface="Verdana"/>
                         </a:rPr>
                         <a:t>2</a:t>
                       </a:r>
-                      <a:endParaRPr lang="zh-CN" altLang="en-US" sz="1400" baseline="-25000" dirty="0">
+                      <a:endParaRPr lang="zh-CN" altLang="en-US" sz="1400" baseline="-25000">
                         <a:latin typeface="Verdana"/>
                         <a:cs typeface="Verdana"/>
                       </a:endParaRPr>
@@ -15036,20 +15035,20 @@
                         <a:defRPr/>
                       </a:pPr>
                       <a:r>
-                        <a:rPr lang="en-US" altLang="zh-CN" sz="1400" dirty="0">
+                        <a:rPr lang="en-US" altLang="zh-CN" sz="1400">
                           <a:latin typeface="Verdana"/>
                           <a:cs typeface="Verdana"/>
                         </a:rPr>
                         <a:t>b</a:t>
                       </a:r>
                       <a:r>
-                        <a:rPr lang="en-US" altLang="zh-CN" sz="1400" baseline="-25000" dirty="0">
+                        <a:rPr lang="en-US" altLang="zh-CN" sz="1400" baseline="-25000">
                           <a:latin typeface="Verdana"/>
                           <a:cs typeface="Verdana"/>
                         </a:rPr>
                         <a:t>3</a:t>
                       </a:r>
-                      <a:endParaRPr lang="zh-CN" altLang="en-US" sz="1400" baseline="-25000" dirty="0">
+                      <a:endParaRPr lang="zh-CN" altLang="en-US" sz="1400" baseline="-25000">
                         <a:latin typeface="Verdana"/>
                         <a:cs typeface="Verdana"/>
                       </a:endParaRPr>
@@ -15103,7 +15102,7 @@
           <a:lstStyle/>
           <a:p>
             <a:r>
-              <a:rPr lang="en-US" dirty="0"/>
+              <a:rPr lang="en-US"/>
               <a:t>exponent (E)</a:t>
             </a:r>
           </a:p>
@@ -15138,7 +15137,7 @@
           <a:lstStyle/>
           <a:p>
             <a:r>
-              <a:rPr lang="en-US" dirty="0"/>
+              <a:rPr lang="en-US"/>
               <a:t>fraction (M)</a:t>
             </a:r>
           </a:p>
@@ -15173,7 +15172,7 @@
           <a:lstStyle/>
           <a:p>
             <a:r>
-              <a:rPr lang="en-US" dirty="0"/>
+              <a:rPr lang="en-US"/>
               <a:t>0x7f</a:t>
             </a:r>
           </a:p>
@@ -15372,14 +15371,14 @@
           <a:lstStyle/>
           <a:p>
             <a:r>
-              <a:rPr lang="en-US" sz="1600" dirty="0"/>
+              <a:rPr lang="en-US" sz="1600"/>
               <a:t>2</a:t>
             </a:r>
             <a:r>
-              <a:rPr lang="en-US" sz="1600" baseline="30000" dirty="0"/>
+              <a:rPr lang="en-US" sz="1600" baseline="30000"/>
               <a:t>8</a:t>
             </a:r>
-            <a:endParaRPr lang="en-US" dirty="0"/>
+            <a:endParaRPr lang="en-US"/>
           </a:p>
         </p:txBody>
       </p:sp>
@@ -15412,14 +15411,14 @@
           <a:lstStyle/>
           <a:p>
             <a:r>
-              <a:rPr lang="en-US" sz="1600" dirty="0"/>
+              <a:rPr lang="en-US" sz="1600"/>
               <a:t>2</a:t>
             </a:r>
             <a:r>
-              <a:rPr lang="en-US" sz="1600" baseline="30000" dirty="0"/>
+              <a:rPr lang="en-US" sz="1600" baseline="30000"/>
               <a:t>7</a:t>
             </a:r>
-            <a:endParaRPr lang="en-US" sz="1600" dirty="0"/>
+            <a:endParaRPr lang="en-US" sz="1600"/>
           </a:p>
         </p:txBody>
       </p:sp>
@@ -15452,14 +15451,14 @@
           <a:lstStyle/>
           <a:p>
             <a:r>
-              <a:rPr lang="en-US" sz="1600" dirty="0"/>
+              <a:rPr lang="en-US" sz="1600"/>
               <a:t>2</a:t>
             </a:r>
             <a:r>
-              <a:rPr lang="en-US" sz="1600" baseline="30000" dirty="0"/>
+              <a:rPr lang="en-US" sz="1600" baseline="30000"/>
               <a:t>6</a:t>
             </a:r>
-            <a:endParaRPr lang="en-US" sz="1600" dirty="0"/>
+            <a:endParaRPr lang="en-US" sz="1600"/>
           </a:p>
         </p:txBody>
       </p:sp>
@@ -15492,14 +15491,14 @@
           <a:lstStyle/>
           <a:p>
             <a:r>
-              <a:rPr lang="en-US" sz="1600" dirty="0"/>
+              <a:rPr lang="en-US" sz="1600"/>
               <a:t>2</a:t>
             </a:r>
             <a:r>
-              <a:rPr lang="en-US" sz="1600" baseline="30000" dirty="0"/>
+              <a:rPr lang="en-US" sz="1600" baseline="30000"/>
               <a:t>5</a:t>
             </a:r>
-            <a:endParaRPr lang="en-US" dirty="0"/>
+            <a:endParaRPr lang="en-US"/>
           </a:p>
         </p:txBody>
       </p:sp>
@@ -15653,7 +15652,7 @@
             <a:lstStyle/>
             <a:p>
               <a:r>
-                <a:rPr lang="en-US" sz="1350" dirty="0"/>
+                <a:rPr lang="en-US" sz="1350"/>
                 <a:t>0</a:t>
               </a:r>
             </a:p>
@@ -15868,14 +15867,14 @@
           <a:lstStyle/>
           <a:p>
             <a:r>
-              <a:rPr lang="en-US" sz="1600" dirty="0"/>
+              <a:rPr lang="en-US" sz="1600"/>
               <a:t>2</a:t>
             </a:r>
             <a:r>
-              <a:rPr lang="en-US" sz="1600" baseline="30000" dirty="0"/>
+              <a:rPr lang="en-US" sz="1600" baseline="30000"/>
               <a:t>-4</a:t>
             </a:r>
-            <a:endParaRPr lang="en-US" dirty="0"/>
+            <a:endParaRPr lang="en-US"/>
           </a:p>
         </p:txBody>
       </p:sp>
@@ -15908,14 +15907,14 @@
           <a:lstStyle/>
           <a:p>
             <a:r>
-              <a:rPr lang="en-US" sz="1600" dirty="0"/>
+              <a:rPr lang="en-US" sz="1600"/>
               <a:t>2</a:t>
             </a:r>
             <a:r>
-              <a:rPr lang="en-US" sz="1600" baseline="30000" dirty="0"/>
+              <a:rPr lang="en-US" sz="1600" baseline="30000"/>
               <a:t>-5</a:t>
             </a:r>
-            <a:endParaRPr lang="en-US" sz="1600" dirty="0"/>
+            <a:endParaRPr lang="en-US" sz="1600"/>
           </a:p>
         </p:txBody>
       </p:sp>
@@ -15948,14 +15947,14 @@
           <a:lstStyle/>
           <a:p>
             <a:r>
-              <a:rPr lang="en-US" sz="1600" dirty="0"/>
+              <a:rPr lang="en-US" sz="1600"/>
               <a:t>2</a:t>
             </a:r>
             <a:r>
-              <a:rPr lang="en-US" sz="1600" baseline="30000" dirty="0"/>
+              <a:rPr lang="en-US" sz="1600" baseline="30000"/>
               <a:t>-6</a:t>
             </a:r>
-            <a:endParaRPr lang="en-US" sz="1600" dirty="0"/>
+            <a:endParaRPr lang="en-US" sz="1600"/>
           </a:p>
         </p:txBody>
       </p:sp>
@@ -15988,91 +15987,91 @@
           <a:lstStyle/>
           <a:p>
             <a:r>
-              <a:rPr lang="en-US" altLang="zh-CN" sz="1800" u="sng" dirty="0">
+              <a:rPr lang="en-US" altLang="zh-CN" sz="1800" u="sng">
                 <a:latin typeface="Consolas"/>
                 <a:cs typeface="Consolas"/>
               </a:rPr>
               <a:t>+</a:t>
             </a:r>
             <a:r>
-              <a:rPr lang="en-US" altLang="zh-CN" sz="1800" dirty="0">
+              <a:rPr lang="en-US" altLang="zh-CN" sz="1800">
                 <a:latin typeface="Consolas"/>
                 <a:cs typeface="Consolas"/>
               </a:rPr>
               <a:t>M * 2</a:t>
             </a:r>
             <a:r>
-              <a:rPr lang="en-US" altLang="zh-CN" baseline="30000" dirty="0">
+              <a:rPr lang="en-US" altLang="zh-CN" baseline="30000">
                 <a:latin typeface="Consolas"/>
                 <a:cs typeface="Consolas"/>
               </a:rPr>
               <a:t>1-bias</a:t>
             </a:r>
             <a:r>
-              <a:rPr lang="en-US" altLang="zh-CN" sz="1800" dirty="0">
+              <a:rPr lang="en-US" altLang="zh-CN" sz="1800">
                 <a:latin typeface="Consolas"/>
                 <a:cs typeface="Consolas"/>
               </a:rPr>
               <a:t>, where </a:t>
             </a:r>
             <a:r>
-              <a:rPr lang="en-US" altLang="zh-CN" dirty="0">
+              <a:rPr lang="en-US" altLang="zh-CN">
                 <a:latin typeface="Arial"/>
                 <a:cs typeface="Arial"/>
               </a:rPr>
               <a:t>M</a:t>
             </a:r>
             <a:r>
-              <a:rPr lang="en-US" altLang="zh-CN" sz="1800" dirty="0">
+              <a:rPr lang="en-US" altLang="zh-CN" sz="1800">
                 <a:latin typeface="Consolas"/>
                 <a:cs typeface="Consolas"/>
               </a:rPr>
               <a:t> = (0.b</a:t>
             </a:r>
             <a:r>
-              <a:rPr lang="en-US" altLang="zh-CN" sz="1800" baseline="-25000" dirty="0">
+              <a:rPr lang="en-US" altLang="zh-CN" sz="1800" baseline="-25000">
                 <a:latin typeface="Consolas"/>
                 <a:cs typeface="Consolas"/>
               </a:rPr>
               <a:t>1</a:t>
             </a:r>
             <a:r>
-              <a:rPr lang="en-US" altLang="zh-CN" sz="1800" dirty="0">
+              <a:rPr lang="en-US" altLang="zh-CN" sz="1800">
                 <a:latin typeface="Consolas"/>
                 <a:cs typeface="Consolas"/>
               </a:rPr>
               <a:t>b</a:t>
             </a:r>
             <a:r>
-              <a:rPr lang="en-US" altLang="zh-CN" sz="1800" baseline="-25000" dirty="0">
+              <a:rPr lang="en-US" altLang="zh-CN" sz="1800" baseline="-25000">
                 <a:latin typeface="Consolas"/>
                 <a:cs typeface="Consolas"/>
               </a:rPr>
               <a:t>2</a:t>
             </a:r>
             <a:r>
-              <a:rPr lang="en-US" altLang="zh-CN" sz="1800" dirty="0">
+              <a:rPr lang="en-US" altLang="zh-CN" sz="1800">
                 <a:latin typeface="Consolas"/>
                 <a:cs typeface="Consolas"/>
               </a:rPr>
               <a:t>b</a:t>
             </a:r>
             <a:r>
-              <a:rPr lang="en-US" altLang="zh-CN" sz="1800" baseline="-25000" dirty="0">
+              <a:rPr lang="en-US" altLang="zh-CN" sz="1800" baseline="-25000">
                 <a:latin typeface="Consolas"/>
                 <a:cs typeface="Consolas"/>
               </a:rPr>
               <a:t>3</a:t>
             </a:r>
             <a:r>
-              <a:rPr lang="en-US" altLang="zh-CN" sz="1800" dirty="0">
+              <a:rPr lang="en-US" altLang="zh-CN" sz="1800">
                 <a:latin typeface="Consolas"/>
                 <a:cs typeface="Consolas"/>
               </a:rPr>
               <a:t>)</a:t>
             </a:r>
             <a:r>
-              <a:rPr lang="en-US" altLang="zh-CN" sz="1800" baseline="-25000" dirty="0">
+              <a:rPr lang="en-US" altLang="zh-CN" sz="1800" baseline="-25000">
                 <a:latin typeface="Consolas"/>
                 <a:cs typeface="Consolas"/>
               </a:rPr>
@@ -16133,7 +16132,7 @@
             </a:bodyPr>
             <a:lstStyle/>
             <a:p>
-              <a:endParaRPr lang="en-US" dirty="0"/>
+              <a:endParaRPr lang="en-US"/>
             </a:p>
           </p:txBody>
         </p:sp>
@@ -16166,11 +16165,11 @@
             <a:lstStyle/>
             <a:p>
               <a:r>
-                <a:rPr lang="en-US" dirty="0"/>
+                <a:rPr lang="en-US"/>
                 <a:t>What’s the value of (00000101)</a:t>
               </a:r>
               <a:r>
-                <a:rPr lang="en-US" baseline="-25000" dirty="0"/>
+                <a:rPr lang="en-US" baseline="-25000"/>
                 <a:t>2</a:t>
               </a:r>
             </a:p>
@@ -16206,27 +16205,27 @@
           <a:lstStyle/>
           <a:p>
             <a:r>
-              <a:rPr lang="en-US" dirty="0"/>
+              <a:rPr lang="en-US"/>
               <a:t>=  (0.101)</a:t>
             </a:r>
             <a:r>
-              <a:rPr lang="en-US" baseline="-25000" dirty="0"/>
+              <a:rPr lang="en-US" baseline="-25000"/>
               <a:t>2 </a:t>
             </a:r>
             <a:r>
-              <a:rPr lang="en-US" dirty="0"/>
+              <a:rPr lang="en-US"/>
               <a:t>x 2</a:t>
             </a:r>
             <a:r>
-              <a:rPr lang="en-US" baseline="30000" dirty="0"/>
+              <a:rPr lang="en-US" baseline="30000"/>
               <a:t>-6 </a:t>
             </a:r>
             <a:r>
-              <a:rPr lang="en-US" dirty="0"/>
+              <a:rPr lang="en-US"/>
               <a:t>?</a:t>
             </a:r>
             <a:r>
-              <a:rPr lang="en-US" baseline="30000" dirty="0"/>
+              <a:rPr lang="en-US" baseline="30000"/>
               <a:t> </a:t>
             </a:r>
           </a:p>
@@ -16401,10 +16400,10 @@
           <a:lstStyle/>
           <a:p>
             <a:r>
-              <a:rPr kumimoji="1" lang="en-US" altLang="zh-CN" dirty="0"/>
+              <a:rPr kumimoji="1" lang="en-US" altLang="zh-CN"/>
               <a:t>IEEE Floating Point Standard</a:t>
             </a:r>
-            <a:endParaRPr kumimoji="1" lang="zh-CN" altLang="en-US" dirty="0"/>
+            <a:endParaRPr kumimoji="1" lang="zh-CN" altLang="en-US"/>
           </a:p>
         </p:txBody>
       </p:sp>
@@ -16430,34 +16429,34 @@
           <a:lstStyle/>
           <a:p>
             <a:r>
-              <a:rPr lang="en-US" dirty="0"/>
+              <a:rPr lang="en-US"/>
               <a:t>Lots of FP implementations in 60s/70s</a:t>
             </a:r>
           </a:p>
           <a:p>
             <a:pPr lvl="1"/>
             <a:r>
-              <a:rPr lang="en-US" dirty="0"/>
+              <a:rPr lang="en-US"/>
               <a:t>Code was not portable across processors</a:t>
             </a:r>
           </a:p>
           <a:p>
             <a:r>
-              <a:rPr lang="en-US" dirty="0"/>
+              <a:rPr lang="en-US"/>
               <a:t>IEEE formed a committee (IEEE.754) to standardize FP format and specification.</a:t>
             </a:r>
           </a:p>
           <a:p>
             <a:pPr lvl="1"/>
             <a:r>
-              <a:rPr lang="en-US" dirty="0"/>
+              <a:rPr lang="en-US"/>
               <a:t>IEEE FP standard published in 1985</a:t>
             </a:r>
           </a:p>
           <a:p>
             <a:pPr lvl="1"/>
             <a:r>
-              <a:rPr lang="en-US" dirty="0"/>
+              <a:rPr lang="en-US"/>
               <a:t>Led by William Kahan </a:t>
             </a:r>
           </a:p>
@@ -16509,111 +16508,111 @@
           <a:lstStyle/>
           <a:p>
             <a:r>
-              <a:rPr lang="fr-FR" altLang="zh-CN" dirty="0">
+              <a:rPr lang="fr-FR" altLang="zh-CN">
                 <a:latin typeface="Arial"/>
                 <a:cs typeface="Arial"/>
               </a:rPr>
               <a:t>Prof</a:t>
             </a:r>
             <a:r>
-              <a:rPr lang="en-US" altLang="zh-CN" dirty="0">
+              <a:rPr lang="en-US" altLang="zh-CN">
                 <a:latin typeface="Arial"/>
                 <a:cs typeface="Arial"/>
               </a:rPr>
               <a:t>.</a:t>
             </a:r>
             <a:r>
-              <a:rPr lang="zh-CN" altLang="en-US" dirty="0">
+              <a:rPr lang="zh-CN" altLang="en-US">
                 <a:latin typeface="Arial"/>
                 <a:cs typeface="Arial"/>
               </a:rPr>
               <a:t> </a:t>
             </a:r>
             <a:r>
-              <a:rPr lang="fr-FR" altLang="zh-CN" dirty="0">
+              <a:rPr lang="fr-FR" altLang="zh-CN">
                 <a:latin typeface="Arial"/>
                 <a:cs typeface="Arial"/>
               </a:rPr>
               <a:t>William </a:t>
             </a:r>
             <a:r>
-              <a:rPr lang="fr-FR" altLang="zh-CN" dirty="0" err="1">
+              <a:rPr lang="fr-FR" altLang="zh-CN" err="1">
                 <a:latin typeface="Arial"/>
                 <a:cs typeface="Arial"/>
               </a:rPr>
               <a:t>Kahan</a:t>
             </a:r>
             <a:r>
-              <a:rPr lang="zh-CN" altLang="en-US" dirty="0">
+              <a:rPr lang="zh-CN" altLang="en-US">
                 <a:latin typeface="Arial"/>
                 <a:cs typeface="Arial"/>
               </a:rPr>
               <a:t> </a:t>
             </a:r>
-            <a:endParaRPr lang="en-US" altLang="zh-CN" dirty="0">
+            <a:endParaRPr lang="en-US" altLang="zh-CN">
               <a:latin typeface="Arial"/>
               <a:cs typeface="Arial"/>
             </a:endParaRPr>
           </a:p>
           <a:p>
             <a:r>
-              <a:rPr lang="en-US" altLang="zh-CN" dirty="0">
+              <a:rPr lang="en-US" altLang="zh-CN">
                 <a:latin typeface="Arial"/>
                 <a:cs typeface="Arial"/>
               </a:rPr>
               <a:t>University</a:t>
             </a:r>
             <a:r>
-              <a:rPr lang="zh-CN" altLang="en-US" dirty="0">
+              <a:rPr lang="zh-CN" altLang="en-US">
                 <a:latin typeface="Arial"/>
                 <a:cs typeface="Arial"/>
               </a:rPr>
               <a:t> </a:t>
             </a:r>
             <a:r>
-              <a:rPr lang="en-US" altLang="zh-CN" dirty="0">
+              <a:rPr lang="en-US" altLang="zh-CN">
                 <a:latin typeface="Arial"/>
                 <a:cs typeface="Arial"/>
               </a:rPr>
               <a:t>of</a:t>
             </a:r>
             <a:r>
-              <a:rPr lang="zh-CN" altLang="en-US" dirty="0">
+              <a:rPr lang="zh-CN" altLang="en-US">
                 <a:latin typeface="Arial"/>
                 <a:cs typeface="Arial"/>
               </a:rPr>
               <a:t> </a:t>
             </a:r>
             <a:r>
-              <a:rPr lang="en-US" altLang="zh-CN" dirty="0">
+              <a:rPr lang="en-US" altLang="zh-CN">
                 <a:latin typeface="Arial"/>
                 <a:cs typeface="Arial"/>
               </a:rPr>
               <a:t>California</a:t>
             </a:r>
             <a:r>
-              <a:rPr lang="zh-CN" altLang="en-US" dirty="0">
+              <a:rPr lang="zh-CN" altLang="en-US">
                 <a:latin typeface="Arial"/>
                 <a:cs typeface="Arial"/>
               </a:rPr>
               <a:t> </a:t>
             </a:r>
             <a:r>
-              <a:rPr lang="en-US" altLang="zh-CN" dirty="0">
+              <a:rPr lang="en-US" altLang="zh-CN">
                 <a:latin typeface="Arial"/>
                 <a:cs typeface="Arial"/>
               </a:rPr>
               <a:t>at</a:t>
             </a:r>
             <a:r>
-              <a:rPr lang="zh-CN" altLang="en-US" dirty="0">
+              <a:rPr lang="zh-CN" altLang="en-US">
                 <a:latin typeface="Arial"/>
                 <a:cs typeface="Arial"/>
               </a:rPr>
               <a:t> </a:t>
             </a:r>
             <a:r>
-              <a:rPr lang="en-US" altLang="zh-CN" dirty="0">
+              <a:rPr lang="en-US" altLang="zh-CN">
                 <a:latin typeface="Arial"/>
                 <a:cs typeface="Arial"/>
               </a:rPr>
@@ -16622,13 +16621,13 @@
           </a:p>
           <a:p>
             <a:r>
-              <a:rPr lang="en-US" altLang="zh-CN" dirty="0">
+              <a:rPr lang="en-US" altLang="zh-CN">
                 <a:latin typeface="Arial"/>
                 <a:cs typeface="Arial"/>
               </a:rPr>
               <a:t>Turing Award (1989)</a:t>
             </a:r>
-            <a:endParaRPr lang="zh-CN" altLang="en-US" dirty="0">
+            <a:endParaRPr lang="zh-CN" altLang="en-US">
               <a:latin typeface="Arial"/>
               <a:cs typeface="Arial"/>
             </a:endParaRPr>
@@ -16683,10 +16682,10 @@
           <a:lstStyle/>
           <a:p>
             <a:r>
-              <a:rPr kumimoji="1" lang="en-US" altLang="zh-CN" dirty="0"/>
+              <a:rPr kumimoji="1" lang="en-US" altLang="zh-CN"/>
               <a:t>IEEE Floating Point Standard</a:t>
             </a:r>
-            <a:endParaRPr kumimoji="1" lang="zh-CN" altLang="en-US" dirty="0"/>
+            <a:endParaRPr kumimoji="1" lang="zh-CN" altLang="en-US"/>
           </a:p>
         </p:txBody>
       </p:sp>
@@ -16719,20 +16718,20 @@
           <a:lstStyle/>
           <a:p>
             <a:r>
-              <a:rPr lang="en-US" dirty="0"/>
+              <a:rPr lang="en-US"/>
               <a:t>This class only covers basic FP materials</a:t>
             </a:r>
           </a:p>
           <a:p>
             <a:r>
-              <a:rPr lang="en-US" dirty="0"/>
+              <a:rPr lang="en-US"/>
               <a:t>A deep understanding of FP is crucial for numerical/scientific computing </a:t>
             </a:r>
           </a:p>
           <a:p>
             <a:pPr lvl="1"/>
             <a:r>
-              <a:rPr lang="en-US" dirty="0"/>
+              <a:rPr lang="en-US"/>
               <a:t>More FP is covered in undergrad/grad classes on numerical methods</a:t>
             </a:r>
           </a:p>
@@ -16832,10 +16831,10 @@
           <a:lstStyle/>
           <a:p>
             <a:r>
-              <a:rPr kumimoji="1" lang="en-US" altLang="zh-CN" dirty="0"/>
+              <a:rPr kumimoji="1" lang="en-US" altLang="zh-CN"/>
               <a:t>Goals of IEEE Standard</a:t>
             </a:r>
-            <a:endParaRPr kumimoji="1" lang="zh-CN" altLang="en-US" dirty="0"/>
+            <a:endParaRPr kumimoji="1" lang="zh-CN" altLang="en-US"/>
           </a:p>
         </p:txBody>
       </p:sp>
@@ -16857,16 +16856,16 @@
           <a:lstStyle/>
           <a:p>
             <a:r>
-              <a:rPr kumimoji="1" lang="en-US" altLang="zh-CN" dirty="0"/>
+              <a:rPr kumimoji="1" lang="en-US" altLang="zh-CN"/>
               <a:t>Consistent representation of floating point numbers at various widths</a:t>
             </a:r>
           </a:p>
           <a:p>
-            <a:endParaRPr kumimoji="1" lang="en-US" altLang="zh-CN" dirty="0"/>
-          </a:p>
-          <a:p>
-            <a:r>
-              <a:rPr kumimoji="1" lang="en-US" altLang="zh-CN" dirty="0"/>
+            <a:endParaRPr kumimoji="1" lang="en-US" altLang="zh-CN"/>
+          </a:p>
+          <a:p>
+            <a:r>
+              <a:rPr kumimoji="1" lang="en-US" altLang="zh-CN"/>
               <a:t>Correctly rounded floating point operations, using several rounding modes.</a:t>
             </a:r>
           </a:p>
@@ -16874,14 +16873,14 @@
             <a:pPr marL="0" indent="0">
               <a:buNone/>
             </a:pPr>
-            <a:endParaRPr kumimoji="1" lang="en-US" altLang="zh-CN" dirty="0"/>
-          </a:p>
-          <a:p>
-            <a:r>
-              <a:rPr kumimoji="1" lang="en-US" altLang="zh-CN" dirty="0"/>
+            <a:endParaRPr kumimoji="1" lang="en-US" altLang="zh-CN"/>
+          </a:p>
+          <a:p>
+            <a:r>
+              <a:rPr kumimoji="1" lang="en-US" altLang="zh-CN"/>
               <a:t>Consistent treatment of exceptional situations such as division by zero</a:t>
             </a:r>
-            <a:endParaRPr kumimoji="1" lang="zh-CN" altLang="en-US" dirty="0"/>
+            <a:endParaRPr kumimoji="1" lang="zh-CN" altLang="en-US"/>
           </a:p>
         </p:txBody>
       </p:sp>
@@ -16938,10 +16937,10 @@
           <a:lstStyle/>
           <a:p>
             <a:r>
-              <a:rPr kumimoji="1" lang="en-US" altLang="zh-CN" dirty="0"/>
+              <a:rPr kumimoji="1" lang="en-US" altLang="zh-CN"/>
               <a:t>IEEE FP32 normalized + denormalized</a:t>
             </a:r>
-            <a:endParaRPr kumimoji="1" lang="zh-CN" altLang="en-US" dirty="0"/>
+            <a:endParaRPr kumimoji="1" lang="zh-CN" altLang="en-US"/>
           </a:p>
         </p:txBody>
       </p:sp>
@@ -17012,13 +17011,13 @@
                     <a:lstStyle/>
                     <a:p>
                       <a:r>
-                        <a:rPr lang="en-US" altLang="zh-CN" dirty="0">
+                        <a:rPr lang="en-US" altLang="zh-CN">
                           <a:latin typeface="Verdana"/>
                           <a:cs typeface="Verdana"/>
                         </a:rPr>
                         <a:t>s</a:t>
                       </a:r>
-                      <a:endParaRPr lang="zh-CN" altLang="en-US" dirty="0">
+                      <a:endParaRPr lang="zh-CN" altLang="en-US">
                         <a:latin typeface="Verdana"/>
                         <a:cs typeface="Verdana"/>
                       </a:endParaRPr>
@@ -17053,20 +17052,20 @@
                         <a:defRPr/>
                       </a:pPr>
                       <a:r>
-                        <a:rPr lang="en-US" altLang="zh-CN" dirty="0">
+                        <a:rPr lang="en-US" altLang="zh-CN">
                           <a:latin typeface="Verdana"/>
                           <a:cs typeface="Verdana"/>
                         </a:rPr>
                         <a:t>E = exp -</a:t>
                       </a:r>
                       <a:r>
-                        <a:rPr lang="en-US" altLang="zh-CN" baseline="0" dirty="0">
+                        <a:rPr lang="en-US" altLang="zh-CN" baseline="0">
                           <a:latin typeface="Verdana"/>
                           <a:cs typeface="Verdana"/>
                         </a:rPr>
                         <a:t> 127</a:t>
                       </a:r>
-                      <a:endParaRPr lang="zh-CN" altLang="en-US" dirty="0">
+                      <a:endParaRPr lang="zh-CN" altLang="en-US">
                         <a:latin typeface="Verdana"/>
                         <a:cs typeface="Verdana"/>
                       </a:endParaRPr>
@@ -17101,13 +17100,13 @@
                         <a:defRPr/>
                       </a:pPr>
                       <a:r>
-                        <a:rPr lang="en-US" altLang="zh-CN" baseline="0" dirty="0">
+                        <a:rPr lang="en-US" altLang="zh-CN" baseline="0">
                           <a:latin typeface="Verdana"/>
                           <a:cs typeface="Verdana"/>
                         </a:rPr>
                         <a:t>fraction (F)</a:t>
                       </a:r>
-                      <a:endParaRPr lang="zh-CN" altLang="en-US" dirty="0">
+                      <a:endParaRPr lang="zh-CN" altLang="en-US">
                         <a:latin typeface="Verdana"/>
                         <a:cs typeface="Verdana"/>
                       </a:endParaRPr>
@@ -17160,41 +17159,41 @@
           <a:lstStyle/>
           <a:p>
             <a:r>
-              <a:rPr lang="en-US" altLang="zh-CN" dirty="0">
+              <a:rPr lang="en-US" altLang="zh-CN">
                 <a:latin typeface="Arial"/>
                 <a:cs typeface="Arial"/>
               </a:rPr>
               <a:t>If (exp!=0 &amp;&amp; exp!=255) n = (1.F)</a:t>
             </a:r>
             <a:r>
-              <a:rPr lang="en-US" altLang="zh-CN" baseline="-25000" dirty="0">
+              <a:rPr lang="en-US" altLang="zh-CN" baseline="-25000">
                 <a:latin typeface="Arial"/>
                 <a:cs typeface="Arial"/>
               </a:rPr>
               <a:t>2 </a:t>
             </a:r>
             <a:r>
-              <a:rPr lang="en-US" altLang="zh-CN" dirty="0">
+              <a:rPr lang="en-US" altLang="zh-CN">
                 <a:latin typeface="Arial"/>
                 <a:cs typeface="Arial"/>
               </a:rPr>
               <a:t>* 2</a:t>
             </a:r>
             <a:r>
-              <a:rPr lang="en-US" altLang="zh-CN" baseline="30000" dirty="0">
+              <a:rPr lang="en-US" altLang="zh-CN" baseline="30000">
                 <a:latin typeface="Arial"/>
                 <a:cs typeface="Arial"/>
               </a:rPr>
               <a:t>exp-127</a:t>
             </a:r>
             <a:r>
-              <a:rPr lang="en-US" altLang="zh-CN" dirty="0">
+              <a:rPr lang="en-US" altLang="zh-CN">
                 <a:latin typeface="Arial"/>
                 <a:cs typeface="Arial"/>
               </a:rPr>
               <a:t> (normalized)</a:t>
             </a:r>
-            <a:endParaRPr lang="en-US" altLang="zh-CN" baseline="-25000" dirty="0">
+            <a:endParaRPr lang="en-US" altLang="zh-CN" baseline="-25000">
               <a:latin typeface="Arial"/>
               <a:cs typeface="Arial"/>
             </a:endParaRPr>
@@ -17268,13 +17267,13 @@
                     <a:lstStyle/>
                     <a:p>
                       <a:r>
-                        <a:rPr lang="en-US" altLang="zh-CN" dirty="0">
+                        <a:rPr lang="en-US" altLang="zh-CN">
                           <a:latin typeface="Verdana"/>
                           <a:cs typeface="Verdana"/>
                         </a:rPr>
                         <a:t>s</a:t>
                       </a:r>
-                      <a:endParaRPr lang="zh-CN" altLang="en-US" dirty="0">
+                      <a:endParaRPr lang="zh-CN" altLang="en-US">
                         <a:latin typeface="Verdana"/>
                         <a:cs typeface="Verdana"/>
                       </a:endParaRPr>
@@ -17309,20 +17308,20 @@
                         <a:defRPr/>
                       </a:pPr>
                       <a:r>
-                        <a:rPr lang="en-US" altLang="zh-CN" dirty="0">
+                        <a:rPr lang="en-US" altLang="zh-CN">
                           <a:latin typeface="Verdana"/>
                           <a:cs typeface="Verdana"/>
                         </a:rPr>
                         <a:t>0</a:t>
                       </a:r>
                       <a:r>
-                        <a:rPr lang="en-US" altLang="zh-CN" baseline="0" dirty="0">
+                        <a:rPr lang="en-US" altLang="zh-CN" baseline="0">
                           <a:latin typeface="Verdana"/>
                           <a:cs typeface="Verdana"/>
                         </a:rPr>
                         <a:t>000 0000</a:t>
                       </a:r>
-                      <a:endParaRPr lang="zh-CN" altLang="en-US" dirty="0">
+                      <a:endParaRPr lang="zh-CN" altLang="en-US">
                         <a:latin typeface="Verdana"/>
                         <a:cs typeface="Verdana"/>
                       </a:endParaRPr>
@@ -17357,13 +17356,13 @@
                         <a:defRPr/>
                       </a:pPr>
                       <a:r>
-                        <a:rPr lang="en-US" altLang="zh-CN" baseline="0" dirty="0">
+                        <a:rPr lang="en-US" altLang="zh-CN" baseline="0">
                           <a:latin typeface="Verdana"/>
                           <a:cs typeface="Verdana"/>
                         </a:rPr>
                         <a:t>fraction (F)</a:t>
                       </a:r>
-                      <a:endParaRPr lang="zh-CN" altLang="en-US" dirty="0">
+                      <a:endParaRPr lang="zh-CN" altLang="en-US">
                         <a:latin typeface="Verdana"/>
                         <a:cs typeface="Verdana"/>
                       </a:endParaRPr>
@@ -17416,41 +17415,41 @@
           <a:lstStyle/>
           <a:p>
             <a:r>
-              <a:rPr lang="en-US" altLang="zh-CN" sz="1600" dirty="0">
+              <a:rPr lang="en-US" altLang="zh-CN" sz="1600">
                 <a:latin typeface="Arial"/>
                 <a:cs typeface="Arial"/>
               </a:rPr>
               <a:t>If (exp == 0) n = (0.F)</a:t>
             </a:r>
             <a:r>
-              <a:rPr lang="en-US" altLang="zh-CN" sz="1600" baseline="-25000" dirty="0">
+              <a:rPr lang="en-US" altLang="zh-CN" sz="1600" baseline="-25000">
                 <a:latin typeface="Arial"/>
                 <a:cs typeface="Arial"/>
               </a:rPr>
               <a:t>2 </a:t>
             </a:r>
             <a:r>
-              <a:rPr lang="en-US" altLang="zh-CN" sz="1600" dirty="0">
+              <a:rPr lang="en-US" altLang="zh-CN" sz="1600">
                 <a:latin typeface="Arial"/>
                 <a:cs typeface="Arial"/>
               </a:rPr>
               <a:t>* 2</a:t>
             </a:r>
             <a:r>
-              <a:rPr lang="en-US" altLang="zh-CN" sz="1600" baseline="30000" dirty="0">
+              <a:rPr lang="en-US" altLang="zh-CN" sz="1600" baseline="30000">
                 <a:latin typeface="Arial"/>
                 <a:cs typeface="Arial"/>
               </a:rPr>
               <a:t>-126</a:t>
             </a:r>
             <a:r>
-              <a:rPr lang="en-US" altLang="zh-CN" sz="1600" dirty="0">
+              <a:rPr lang="en-US" altLang="zh-CN" sz="1600">
                 <a:latin typeface="Arial"/>
                 <a:cs typeface="Arial"/>
               </a:rPr>
               <a:t> (denormalized)</a:t>
             </a:r>
-            <a:endParaRPr lang="en-US" altLang="zh-CN" sz="1600" baseline="-25000" dirty="0">
+            <a:endParaRPr lang="en-US" altLang="zh-CN" sz="1600" baseline="-25000">
               <a:latin typeface="Arial"/>
               <a:cs typeface="Arial"/>
             </a:endParaRPr>
@@ -17524,13 +17523,13 @@
                     <a:lstStyle/>
                     <a:p>
                       <a:r>
-                        <a:rPr lang="en-US" altLang="zh-CN" dirty="0">
+                        <a:rPr lang="en-US" altLang="zh-CN">
                           <a:latin typeface="Verdana"/>
                           <a:cs typeface="Verdana"/>
                         </a:rPr>
                         <a:t>0</a:t>
                       </a:r>
-                      <a:endParaRPr lang="zh-CN" altLang="en-US" dirty="0">
+                      <a:endParaRPr lang="zh-CN" altLang="en-US">
                         <a:latin typeface="Verdana"/>
                         <a:cs typeface="Verdana"/>
                       </a:endParaRPr>
@@ -17565,13 +17564,13 @@
                         <a:defRPr/>
                       </a:pPr>
                       <a:r>
-                        <a:rPr lang="en-US" altLang="zh-CN" dirty="0">
+                        <a:rPr lang="en-US" altLang="zh-CN">
                           <a:latin typeface="Verdana"/>
                           <a:cs typeface="Verdana"/>
                         </a:rPr>
                         <a:t>1000 0010</a:t>
                       </a:r>
-                      <a:endParaRPr lang="zh-CN" altLang="en-US" dirty="0">
+                      <a:endParaRPr lang="zh-CN" altLang="en-US">
                         <a:latin typeface="Verdana"/>
                         <a:cs typeface="Verdana"/>
                       </a:endParaRPr>
@@ -17606,13 +17605,13 @@
                         <a:defRPr/>
                       </a:pPr>
                       <a:r>
-                        <a:rPr lang="en-US" altLang="zh-CN" baseline="0" dirty="0">
+                        <a:rPr lang="en-US" altLang="zh-CN" baseline="0">
                           <a:latin typeface="Verdana"/>
                           <a:cs typeface="Verdana"/>
                         </a:rPr>
                         <a:t>0100 1000 0000 0000 0000 000</a:t>
                       </a:r>
-                      <a:endParaRPr lang="zh-CN" altLang="en-US" dirty="0">
+                      <a:endParaRPr lang="zh-CN" altLang="en-US">
                         <a:latin typeface="Verdana"/>
                         <a:cs typeface="Verdana"/>
                       </a:endParaRPr>
@@ -17666,7 +17665,7 @@
           <a:lstStyle/>
           <a:p>
             <a:r>
-              <a:rPr lang="en-US" sz="1400" dirty="0">
+              <a:rPr lang="en-US" sz="1400">
                 <a:latin typeface="Verdana"/>
                 <a:cs typeface="Verdana"/>
               </a:rPr>
@@ -17704,7 +17703,7 @@
           <a:lstStyle/>
           <a:p>
             <a:r>
-              <a:rPr lang="en-US" sz="1400" dirty="0">
+              <a:rPr lang="en-US" sz="1400">
                 <a:latin typeface="Verdana"/>
                 <a:cs typeface="Verdana"/>
               </a:rPr>
@@ -17742,7 +17741,7 @@
           <a:lstStyle/>
           <a:p>
             <a:r>
-              <a:rPr lang="en-US" sz="1400" dirty="0">
+              <a:rPr lang="en-US" sz="1400">
                 <a:latin typeface="Verdana"/>
                 <a:cs typeface="Verdana"/>
               </a:rPr>
@@ -17780,7 +17779,7 @@
           <a:lstStyle/>
           <a:p>
             <a:r>
-              <a:rPr lang="en-US" sz="1400" dirty="0">
+              <a:rPr lang="en-US" sz="1400">
                 <a:latin typeface="Verdana"/>
                 <a:cs typeface="Verdana"/>
               </a:rPr>
@@ -17818,7 +17817,7 @@
           <a:lstStyle/>
           <a:p>
             <a:r>
-              <a:rPr lang="en-US" sz="1400" dirty="0">
+              <a:rPr lang="en-US" sz="1400">
                 <a:latin typeface="Verdana"/>
                 <a:cs typeface="Verdana"/>
               </a:rPr>
@@ -17895,22 +17894,22 @@
           <a:lstStyle/>
           <a:p>
             <a:r>
-              <a:rPr lang="en-US" dirty="0"/>
+              <a:rPr lang="en-US"/>
               <a:t>n = (1.01001)</a:t>
             </a:r>
             <a:r>
-              <a:rPr lang="en-US" baseline="-25000" dirty="0"/>
+              <a:rPr lang="en-US" baseline="-25000"/>
               <a:t>2</a:t>
             </a:r>
             <a:r>
-              <a:rPr lang="en-US" dirty="0"/>
+              <a:rPr lang="en-US"/>
               <a:t> * 2</a:t>
             </a:r>
             <a:r>
-              <a:rPr lang="en-US" baseline="30000" dirty="0"/>
+              <a:rPr lang="en-US" baseline="30000"/>
               <a:t>130-127</a:t>
             </a:r>
-            <a:endParaRPr lang="en-US" dirty="0"/>
+            <a:endParaRPr lang="en-US"/>
           </a:p>
         </p:txBody>
       </p:sp>
@@ -17981,13 +17980,13 @@
                     <a:lstStyle/>
                     <a:p>
                       <a:r>
-                        <a:rPr lang="en-US" altLang="zh-CN" dirty="0">
+                        <a:rPr lang="en-US" altLang="zh-CN">
                           <a:latin typeface="Verdana"/>
                           <a:cs typeface="Verdana"/>
                         </a:rPr>
                         <a:t>0</a:t>
                       </a:r>
-                      <a:endParaRPr lang="zh-CN" altLang="en-US" dirty="0">
+                      <a:endParaRPr lang="zh-CN" altLang="en-US">
                         <a:latin typeface="Verdana"/>
                         <a:cs typeface="Verdana"/>
                       </a:endParaRPr>
@@ -18022,13 +18021,13 @@
                         <a:defRPr/>
                       </a:pPr>
                       <a:r>
-                        <a:rPr lang="en-US" altLang="zh-CN" dirty="0">
+                        <a:rPr lang="en-US" altLang="zh-CN">
                           <a:latin typeface="Verdana"/>
                           <a:cs typeface="Verdana"/>
                         </a:rPr>
                         <a:t>0000 0000</a:t>
                       </a:r>
-                      <a:endParaRPr lang="zh-CN" altLang="en-US" dirty="0">
+                      <a:endParaRPr lang="zh-CN" altLang="en-US">
                         <a:latin typeface="Verdana"/>
                         <a:cs typeface="Verdana"/>
                       </a:endParaRPr>
@@ -18063,13 +18062,13 @@
                         <a:defRPr/>
                       </a:pPr>
                       <a:r>
-                        <a:rPr lang="en-US" altLang="zh-CN" baseline="0" dirty="0">
+                        <a:rPr lang="en-US" altLang="zh-CN" baseline="0">
                           <a:latin typeface="Verdana"/>
                           <a:cs typeface="Verdana"/>
                         </a:rPr>
                         <a:t>0100 1000 0000 0000 0000 000</a:t>
                       </a:r>
-                      <a:endParaRPr lang="zh-CN" altLang="en-US" dirty="0">
+                      <a:endParaRPr lang="zh-CN" altLang="en-US">
                         <a:latin typeface="Verdana"/>
                         <a:cs typeface="Verdana"/>
                       </a:endParaRPr>
@@ -18123,22 +18122,22 @@
           <a:lstStyle/>
           <a:p>
             <a:r>
-              <a:rPr lang="en-US" dirty="0"/>
+              <a:rPr lang="en-US"/>
               <a:t>n = (0.01001)</a:t>
             </a:r>
             <a:r>
-              <a:rPr lang="en-US" baseline="-25000" dirty="0"/>
+              <a:rPr lang="en-US" baseline="-25000"/>
               <a:t>2</a:t>
             </a:r>
             <a:r>
-              <a:rPr lang="en-US" dirty="0"/>
+              <a:rPr lang="en-US"/>
               <a:t> * 2</a:t>
             </a:r>
             <a:r>
-              <a:rPr lang="en-US" baseline="30000" dirty="0"/>
+              <a:rPr lang="en-US" baseline="30000"/>
               <a:t>-126</a:t>
             </a:r>
-            <a:endParaRPr lang="en-US" dirty="0"/>
+            <a:endParaRPr lang="en-US"/>
           </a:p>
         </p:txBody>
       </p:sp>
@@ -18402,10 +18401,10 @@
           <a:lstStyle/>
           <a:p>
             <a:r>
-              <a:rPr kumimoji="1" lang="en-US" altLang="zh-CN" dirty="0"/>
+              <a:rPr kumimoji="1" lang="en-US" altLang="zh-CN"/>
               <a:t>IEEE FP32: special values</a:t>
             </a:r>
-            <a:endParaRPr kumimoji="1" lang="zh-CN" altLang="en-US" dirty="0"/>
+            <a:endParaRPr kumimoji="1" lang="zh-CN" altLang="en-US"/>
           </a:p>
         </p:txBody>
       </p:sp>
@@ -18470,13 +18469,13 @@
                     <a:lstStyle/>
                     <a:p>
                       <a:r>
-                        <a:rPr lang="en-US" altLang="zh-CN" dirty="0">
+                        <a:rPr lang="en-US" altLang="zh-CN">
                           <a:latin typeface="Verdana"/>
                           <a:cs typeface="Verdana"/>
                         </a:rPr>
                         <a:t>s</a:t>
                       </a:r>
-                      <a:endParaRPr lang="zh-CN" altLang="en-US" dirty="0">
+                      <a:endParaRPr lang="zh-CN" altLang="en-US">
                         <a:latin typeface="Verdana"/>
                         <a:cs typeface="Verdana"/>
                       </a:endParaRPr>
@@ -18511,20 +18510,20 @@
                         <a:defRPr/>
                       </a:pPr>
                       <a:r>
-                        <a:rPr lang="en-US" altLang="zh-CN" dirty="0">
+                        <a:rPr lang="en-US" altLang="zh-CN">
                           <a:latin typeface="Verdana"/>
                           <a:cs typeface="Verdana"/>
                         </a:rPr>
                         <a:t>1111 </a:t>
                       </a:r>
                       <a:r>
-                        <a:rPr lang="en-US" altLang="zh-CN" baseline="0" dirty="0">
+                        <a:rPr lang="en-US" altLang="zh-CN" baseline="0">
                           <a:latin typeface="Verdana"/>
                           <a:cs typeface="Verdana"/>
                         </a:rPr>
                         <a:t>1111</a:t>
                       </a:r>
-                      <a:endParaRPr lang="zh-CN" altLang="en-US" dirty="0">
+                      <a:endParaRPr lang="zh-CN" altLang="en-US">
                         <a:latin typeface="Verdana"/>
                         <a:cs typeface="Verdana"/>
                       </a:endParaRPr>
@@ -18559,13 +18558,13 @@
                         <a:defRPr/>
                       </a:pPr>
                       <a:r>
-                        <a:rPr lang="en-US" altLang="zh-CN" baseline="0" dirty="0">
+                        <a:rPr lang="en-US" altLang="zh-CN" baseline="0">
                           <a:latin typeface="Verdana"/>
                           <a:cs typeface="Verdana"/>
                         </a:rPr>
                         <a:t>fraction (F)</a:t>
                       </a:r>
-                      <a:endParaRPr lang="zh-CN" altLang="en-US" dirty="0">
+                      <a:endParaRPr lang="zh-CN" altLang="en-US">
                         <a:latin typeface="Verdana"/>
                         <a:cs typeface="Verdana"/>
                       </a:endParaRPr>
@@ -18613,7 +18612,7 @@
           <a:lstStyle/>
           <a:p>
             <a:r>
-              <a:rPr lang="en-US" sz="1400" dirty="0">
+              <a:rPr lang="en-US" sz="1400">
                 <a:latin typeface="Verdana"/>
                 <a:cs typeface="Verdana"/>
               </a:rPr>
@@ -18645,7 +18644,7 @@
           <a:lstStyle/>
           <a:p>
             <a:r>
-              <a:rPr lang="en-US" sz="1400" dirty="0">
+              <a:rPr lang="en-US" sz="1400">
                 <a:latin typeface="Verdana"/>
                 <a:cs typeface="Verdana"/>
               </a:rPr>
@@ -18677,7 +18676,7 @@
           <a:lstStyle/>
           <a:p>
             <a:r>
-              <a:rPr lang="en-US" sz="1400" dirty="0">
+              <a:rPr lang="en-US" sz="1400">
                 <a:latin typeface="Verdana"/>
                 <a:cs typeface="Verdana"/>
               </a:rPr>
@@ -18709,7 +18708,7 @@
           <a:lstStyle/>
           <a:p>
             <a:r>
-              <a:rPr lang="en-US" sz="1400" dirty="0">
+              <a:rPr lang="en-US" sz="1400">
                 <a:latin typeface="Verdana"/>
                 <a:cs typeface="Verdana"/>
               </a:rPr>
@@ -18741,7 +18740,7 @@
           <a:lstStyle/>
           <a:p>
             <a:r>
-              <a:rPr lang="en-US" sz="1400" dirty="0">
+              <a:rPr lang="en-US" sz="1400">
                 <a:latin typeface="Verdana"/>
                 <a:cs typeface="Verdana"/>
               </a:rPr>
@@ -18772,7 +18771,7 @@
           <a:lstStyle/>
           <a:p>
             <a:r>
-              <a:rPr lang="en-US" altLang="zh-CN" sz="2000" b="1" dirty="0">
+              <a:rPr lang="en-US" altLang="zh-CN" sz="2000" b="1">
                 <a:latin typeface="Arial"/>
                 <a:cs typeface="Arial"/>
               </a:rPr>
@@ -18780,13 +18779,13 @@
             </a:r>
           </a:p>
           <a:p>
-            <a:endParaRPr lang="en-US" altLang="zh-CN" sz="2000" b="1" baseline="-25000" dirty="0">
+            <a:endParaRPr lang="en-US" altLang="zh-CN" sz="2000" b="1" baseline="-25000">
               <a:latin typeface="Arial"/>
               <a:cs typeface="Arial"/>
             </a:endParaRPr>
           </a:p>
           <a:p>
-            <a:endParaRPr lang="en-US" altLang="zh-CN" sz="2000" b="1" u="sng" baseline="-25000" dirty="0">
+            <a:endParaRPr lang="en-US" altLang="zh-CN" sz="2000" b="1" u="sng" baseline="-25000">
               <a:latin typeface="Arial"/>
               <a:cs typeface="Arial"/>
             </a:endParaRPr>
@@ -18847,13 +18846,13 @@
                     <a:lstStyle/>
                     <a:p>
                       <a:r>
-                        <a:rPr lang="en-US" altLang="zh-CN" sz="2200" b="1" i="0" dirty="0">
+                        <a:rPr lang="en-US" altLang="zh-CN" sz="2200" b="1" i="0">
                           <a:latin typeface="Verdana"/>
                           <a:cs typeface="Verdana"/>
                         </a:rPr>
                         <a:t>values</a:t>
                       </a:r>
-                      <a:endParaRPr lang="zh-CN" altLang="en-US" sz="2200" b="1" i="0" dirty="0">
+                      <a:endParaRPr lang="zh-CN" altLang="en-US" sz="2200" b="1" i="0">
                         <a:latin typeface="Verdana"/>
                         <a:cs typeface="Verdana"/>
                       </a:endParaRPr>
@@ -18867,13 +18866,13 @@
                     <a:lstStyle/>
                     <a:p>
                       <a:r>
-                        <a:rPr lang="en-US" altLang="zh-CN" sz="2200" b="1" i="0" dirty="0">
+                        <a:rPr lang="en-US" altLang="zh-CN" sz="2200" b="1" i="0">
                           <a:latin typeface="Verdana"/>
                           <a:cs typeface="Verdana"/>
                         </a:rPr>
                         <a:t>sign</a:t>
                       </a:r>
-                      <a:endParaRPr lang="zh-CN" altLang="en-US" sz="2200" b="1" i="0" dirty="0">
+                      <a:endParaRPr lang="zh-CN" altLang="en-US" sz="2200" b="1" i="0">
                         <a:latin typeface="Verdana"/>
                         <a:cs typeface="Verdana"/>
                       </a:endParaRPr>
@@ -18887,13 +18886,13 @@
                     <a:lstStyle/>
                     <a:p>
                       <a:r>
-                        <a:rPr lang="en-US" altLang="zh-CN" sz="2200" b="1" i="0" dirty="0">
+                        <a:rPr lang="en-US" altLang="zh-CN" sz="2200" b="1" i="0">
                           <a:latin typeface="Verdana"/>
                           <a:cs typeface="Verdana"/>
                         </a:rPr>
                         <a:t>frac</a:t>
                       </a:r>
-                      <a:endParaRPr lang="zh-CN" altLang="en-US" sz="2200" b="1" i="0" dirty="0">
+                      <a:endParaRPr lang="zh-CN" altLang="en-US" sz="2200" b="1" i="0">
                         <a:latin typeface="Verdana"/>
                         <a:cs typeface="Verdana"/>
                       </a:endParaRPr>
@@ -18914,13 +18913,13 @@
                     <a:lstStyle/>
                     <a:p>
                       <a:r>
-                        <a:rPr lang="en-US" altLang="zh-CN" sz="2200" dirty="0">
+                        <a:rPr lang="en-US" altLang="zh-CN" sz="2200">
                           <a:latin typeface="Verdana"/>
                           <a:cs typeface="Verdana"/>
                         </a:rPr>
                         <a:t>+</a:t>
                       </a:r>
-                      <a:endParaRPr lang="zh-CN" altLang="en-US" sz="2200" dirty="0">
+                      <a:endParaRPr lang="zh-CN" altLang="en-US" sz="2200">
                         <a:latin typeface="Verdana"/>
                         <a:cs typeface="Verdana"/>
                       </a:endParaRPr>
@@ -18934,13 +18933,13 @@
                     <a:lstStyle/>
                     <a:p>
                       <a:r>
-                        <a:rPr lang="en-US" altLang="zh-CN" sz="2200" dirty="0">
+                        <a:rPr lang="en-US" altLang="zh-CN" sz="2200">
                           <a:latin typeface="Verdana"/>
                           <a:cs typeface="Verdana"/>
                         </a:rPr>
                         <a:t>0</a:t>
                       </a:r>
-                      <a:endParaRPr lang="zh-CN" altLang="en-US" sz="2200" dirty="0">
+                      <a:endParaRPr lang="zh-CN" altLang="en-US" sz="2200">
                         <a:latin typeface="Verdana"/>
                         <a:cs typeface="Verdana"/>
                       </a:endParaRPr>
@@ -18954,13 +18953,13 @@
                     <a:lstStyle/>
                     <a:p>
                       <a:r>
-                        <a:rPr lang="en-US" altLang="zh-CN" sz="2200" dirty="0">
+                        <a:rPr lang="en-US" altLang="zh-CN" sz="2200">
                           <a:latin typeface="Verdana"/>
                           <a:cs typeface="Verdana"/>
                         </a:rPr>
                         <a:t>all zeros</a:t>
                       </a:r>
-                      <a:endParaRPr lang="zh-CN" altLang="en-US" sz="2200" dirty="0">
+                      <a:endParaRPr lang="zh-CN" altLang="en-US" sz="2200">
                         <a:latin typeface="Verdana"/>
                         <a:cs typeface="Verdana"/>
                       </a:endParaRPr>
@@ -18981,13 +18980,13 @@
                     <a:lstStyle/>
                     <a:p>
                       <a:r>
-                        <a:rPr lang="en-US" altLang="zh-CN" sz="2200" dirty="0">
+                        <a:rPr lang="en-US" altLang="zh-CN" sz="2200">
                           <a:latin typeface="Verdana"/>
                           <a:cs typeface="Verdana"/>
                         </a:rPr>
                         <a:t>- </a:t>
                       </a:r>
-                      <a:endParaRPr lang="zh-CN" altLang="en-US" sz="2200" dirty="0">
+                      <a:endParaRPr lang="zh-CN" altLang="en-US" sz="2200">
                         <a:latin typeface="Verdana"/>
                         <a:cs typeface="Verdana"/>
                       </a:endParaRPr>
@@ -19001,13 +19000,13 @@
                     <a:lstStyle/>
                     <a:p>
                       <a:r>
-                        <a:rPr lang="en-US" altLang="zh-CN" sz="2200" dirty="0">
+                        <a:rPr lang="en-US" altLang="zh-CN" sz="2200">
                           <a:latin typeface="Verdana"/>
                           <a:cs typeface="Verdana"/>
                         </a:rPr>
                         <a:t>1</a:t>
                       </a:r>
-                      <a:endParaRPr lang="zh-CN" altLang="en-US" sz="2200" dirty="0">
+                      <a:endParaRPr lang="zh-CN" altLang="en-US" sz="2200">
                         <a:latin typeface="Verdana"/>
                         <a:cs typeface="Verdana"/>
                       </a:endParaRPr>
@@ -19021,13 +19020,13 @@
                     <a:lstStyle/>
                     <a:p>
                       <a:r>
-                        <a:rPr lang="en-US" altLang="zh-CN" sz="2200" dirty="0">
+                        <a:rPr lang="en-US" altLang="zh-CN" sz="2200">
                           <a:latin typeface="Verdana"/>
                           <a:cs typeface="Verdana"/>
                         </a:rPr>
                         <a:t>all zeros</a:t>
                       </a:r>
-                      <a:endParaRPr lang="zh-CN" altLang="en-US" sz="2200" dirty="0">
+                      <a:endParaRPr lang="zh-CN" altLang="en-US" sz="2200">
                         <a:latin typeface="Verdana"/>
                         <a:cs typeface="Verdana"/>
                       </a:endParaRPr>
@@ -19048,13 +19047,13 @@
                     <a:lstStyle/>
                     <a:p>
                       <a:r>
-                        <a:rPr lang="en-US" altLang="zh-CN" sz="2200" dirty="0" err="1">
+                        <a:rPr lang="en-US" altLang="zh-CN" sz="2200" err="1">
                           <a:latin typeface="Verdana"/>
                           <a:cs typeface="Verdana"/>
                         </a:rPr>
                         <a:t>NaN</a:t>
                       </a:r>
-                      <a:endParaRPr lang="zh-CN" altLang="en-US" sz="2200" dirty="0">
+                      <a:endParaRPr lang="zh-CN" altLang="en-US" sz="2200">
                         <a:latin typeface="Verdana"/>
                         <a:cs typeface="Verdana"/>
                       </a:endParaRPr>
@@ -19068,13 +19067,13 @@
                     <a:lstStyle/>
                     <a:p>
                       <a:r>
-                        <a:rPr lang="en-US" altLang="zh-CN" sz="2200" dirty="0">
+                        <a:rPr lang="en-US" altLang="zh-CN" sz="2200">
                           <a:latin typeface="Verdana"/>
                           <a:cs typeface="Verdana"/>
                         </a:rPr>
                         <a:t>any</a:t>
                       </a:r>
-                      <a:endParaRPr lang="zh-CN" altLang="en-US" sz="2200" dirty="0">
+                      <a:endParaRPr lang="zh-CN" altLang="en-US" sz="2200">
                         <a:latin typeface="Verdana"/>
                         <a:cs typeface="Verdana"/>
                       </a:endParaRPr>
@@ -19088,13 +19087,13 @@
                     <a:lstStyle/>
                     <a:p>
                       <a:r>
-                        <a:rPr lang="en-US" altLang="zh-CN" sz="2200" dirty="0">
+                        <a:rPr lang="en-US" altLang="zh-CN" sz="2200">
                           <a:latin typeface="Verdana"/>
                           <a:cs typeface="Verdana"/>
                         </a:rPr>
                         <a:t>non-zero</a:t>
                       </a:r>
-                      <a:endParaRPr lang="zh-CN" altLang="en-US" sz="2200" dirty="0">
+                      <a:endParaRPr lang="zh-CN" altLang="en-US" sz="2200">
                         <a:latin typeface="Verdana"/>
                         <a:cs typeface="Verdana"/>
                       </a:endParaRPr>
@@ -19272,10 +19271,10 @@
           <a:lstStyle/>
           <a:p>
             <a:r>
-              <a:rPr kumimoji="1" lang="en-US" altLang="zh-CN" dirty="0"/>
+              <a:rPr kumimoji="1" lang="en-US" altLang="zh-CN"/>
               <a:t>IEEE FP32: single vs. double precision</a:t>
             </a:r>
-            <a:endParaRPr kumimoji="1" lang="zh-CN" altLang="en-US" dirty="0"/>
+            <a:endParaRPr kumimoji="1" lang="zh-CN" altLang="en-US"/>
           </a:p>
         </p:txBody>
       </p:sp>
@@ -19340,13 +19339,13 @@
                     <a:lstStyle/>
                     <a:p>
                       <a:r>
-                        <a:rPr lang="en-US" altLang="zh-CN" dirty="0">
+                        <a:rPr lang="en-US" altLang="zh-CN">
                           <a:latin typeface="Verdana"/>
                           <a:cs typeface="Verdana"/>
                         </a:rPr>
                         <a:t>s</a:t>
                       </a:r>
-                      <a:endParaRPr lang="zh-CN" altLang="en-US" dirty="0">
+                      <a:endParaRPr lang="zh-CN" altLang="en-US">
                         <a:latin typeface="Verdana"/>
                         <a:cs typeface="Verdana"/>
                       </a:endParaRPr>
@@ -19381,13 +19380,13 @@
                         <a:defRPr/>
                       </a:pPr>
                       <a:r>
-                        <a:rPr lang="en-US" altLang="zh-CN" dirty="0">
+                        <a:rPr lang="en-US" altLang="zh-CN">
                           <a:latin typeface="Verdana"/>
                           <a:cs typeface="Verdana"/>
                         </a:rPr>
                         <a:t>E + 127</a:t>
                       </a:r>
-                      <a:endParaRPr lang="zh-CN" altLang="en-US" dirty="0">
+                      <a:endParaRPr lang="zh-CN" altLang="en-US">
                         <a:latin typeface="Verdana"/>
                         <a:cs typeface="Verdana"/>
                       </a:endParaRPr>
@@ -19425,13 +19424,13 @@
                         <a:defRPr/>
                       </a:pPr>
                       <a:r>
-                        <a:rPr lang="en-US" altLang="zh-CN" baseline="0" dirty="0">
+                        <a:rPr lang="en-US" altLang="zh-CN" baseline="0">
                           <a:latin typeface="Verdana"/>
                           <a:cs typeface="Verdana"/>
                         </a:rPr>
                         <a:t>frac</a:t>
                       </a:r>
-                      <a:endParaRPr lang="zh-CN" altLang="en-US" dirty="0">
+                      <a:endParaRPr lang="zh-CN" altLang="en-US">
                         <a:latin typeface="Verdana"/>
                         <a:cs typeface="Verdana"/>
                       </a:endParaRPr>
@@ -19479,7 +19478,7 @@
           <a:lstStyle/>
           <a:p>
             <a:r>
-              <a:rPr lang="en-US" sz="1400" dirty="0">
+              <a:rPr lang="en-US" sz="1400">
                 <a:latin typeface="Verdana"/>
                 <a:cs typeface="Verdana"/>
               </a:rPr>
@@ -19511,7 +19510,7 @@
           <a:lstStyle/>
           <a:p>
             <a:r>
-              <a:rPr lang="en-US" sz="1400" dirty="0">
+              <a:rPr lang="en-US" sz="1400">
                 <a:latin typeface="Verdana"/>
                 <a:cs typeface="Verdana"/>
               </a:rPr>
@@ -19543,7 +19542,7 @@
           <a:lstStyle/>
           <a:p>
             <a:r>
-              <a:rPr lang="en-US" sz="1400" dirty="0">
+              <a:rPr lang="en-US" sz="1400">
                 <a:latin typeface="Verdana"/>
                 <a:cs typeface="Verdana"/>
               </a:rPr>
@@ -19575,7 +19574,7 @@
           <a:lstStyle/>
           <a:p>
             <a:r>
-              <a:rPr lang="en-US" sz="1400" dirty="0">
+              <a:rPr lang="en-US" sz="1400">
                 <a:latin typeface="Verdana"/>
                 <a:cs typeface="Verdana"/>
               </a:rPr>
@@ -19607,7 +19606,7 @@
           <a:lstStyle/>
           <a:p>
             <a:r>
-              <a:rPr lang="en-US" sz="1400" dirty="0">
+              <a:rPr lang="en-US" sz="1400">
                 <a:latin typeface="Verdana"/>
                 <a:cs typeface="Verdana"/>
               </a:rPr>
@@ -19684,20 +19683,20 @@
           <a:lstStyle/>
           <a:p>
             <a:r>
-              <a:rPr lang="en-US" altLang="zh-CN" sz="1600" b="1" dirty="0">
+              <a:rPr lang="en-US" altLang="zh-CN" sz="1600" b="1">
                 <a:latin typeface="Verdana"/>
                 <a:cs typeface="Verdana"/>
               </a:rPr>
               <a:t>single precision </a:t>
             </a:r>
             <a:r>
-              <a:rPr lang="en-US" altLang="zh-CN" sz="1600" dirty="0">
+              <a:rPr lang="en-US" altLang="zh-CN" sz="1600">
                 <a:latin typeface="Verdana"/>
                 <a:cs typeface="Verdana"/>
               </a:rPr>
               <a:t>(32 bits)</a:t>
             </a:r>
-            <a:endParaRPr lang="zh-CN" altLang="en-US" sz="1600" dirty="0">
+            <a:endParaRPr lang="zh-CN" altLang="en-US" sz="1600">
               <a:latin typeface="Verdana"/>
               <a:cs typeface="Verdana"/>
             </a:endParaRPr>
@@ -19765,13 +19764,13 @@
                     <a:lstStyle/>
                     <a:p>
                       <a:r>
-                        <a:rPr lang="en-US" altLang="zh-CN" dirty="0">
+                        <a:rPr lang="en-US" altLang="zh-CN">
                           <a:latin typeface="Verdana"/>
                           <a:cs typeface="Verdana"/>
                         </a:rPr>
                         <a:t>s</a:t>
                       </a:r>
-                      <a:endParaRPr lang="zh-CN" altLang="en-US" dirty="0">
+                      <a:endParaRPr lang="zh-CN" altLang="en-US">
                         <a:latin typeface="Verdana"/>
                         <a:cs typeface="Verdana"/>
                       </a:endParaRPr>
@@ -19806,13 +19805,13 @@
                         <a:defRPr/>
                       </a:pPr>
                       <a:r>
-                        <a:rPr lang="en-US" altLang="zh-CN" dirty="0">
+                        <a:rPr lang="en-US" altLang="zh-CN">
                           <a:latin typeface="Verdana"/>
                           <a:cs typeface="Verdana"/>
                         </a:rPr>
                         <a:t>E + 1023 </a:t>
                       </a:r>
-                      <a:endParaRPr lang="zh-CN" altLang="en-US" dirty="0">
+                      <a:endParaRPr lang="zh-CN" altLang="en-US">
                         <a:latin typeface="Verdana"/>
                         <a:cs typeface="Verdana"/>
                       </a:endParaRPr>
@@ -19850,13 +19849,13 @@
                         <a:defRPr/>
                       </a:pPr>
                       <a:r>
-                        <a:rPr lang="en-US" altLang="zh-CN" baseline="0" dirty="0">
+                        <a:rPr lang="en-US" altLang="zh-CN" baseline="0">
                           <a:latin typeface="Verdana"/>
                           <a:cs typeface="Verdana"/>
                         </a:rPr>
                         <a:t>frac</a:t>
                       </a:r>
-                      <a:endParaRPr lang="zh-CN" altLang="en-US" dirty="0">
+                      <a:endParaRPr lang="zh-CN" altLang="en-US">
                         <a:latin typeface="Verdana"/>
                         <a:cs typeface="Verdana"/>
                       </a:endParaRPr>
@@ -19904,7 +19903,7 @@
           <a:lstStyle/>
           <a:p>
             <a:r>
-              <a:rPr lang="en-US" sz="1400" dirty="0">
+              <a:rPr lang="en-US" sz="1400">
                 <a:latin typeface="Verdana"/>
                 <a:cs typeface="Verdana"/>
               </a:rPr>
@@ -19936,7 +19935,7 @@
           <a:lstStyle/>
           <a:p>
             <a:r>
-              <a:rPr lang="en-US" sz="1400" dirty="0">
+              <a:rPr lang="en-US" sz="1400">
                 <a:latin typeface="Verdana"/>
                 <a:cs typeface="Verdana"/>
               </a:rPr>
@@ -19968,7 +19967,7 @@
           <a:lstStyle/>
           <a:p>
             <a:r>
-              <a:rPr lang="en-US" sz="1400" dirty="0">
+              <a:rPr lang="en-US" sz="1400">
                 <a:latin typeface="Verdana"/>
                 <a:cs typeface="Verdana"/>
               </a:rPr>
@@ -20000,7 +19999,7 @@
           <a:lstStyle/>
           <a:p>
             <a:r>
-              <a:rPr lang="en-US" sz="1400" dirty="0">
+              <a:rPr lang="en-US" sz="1400">
                 <a:latin typeface="Verdana"/>
                 <a:cs typeface="Verdana"/>
               </a:rPr>
@@ -20032,7 +20031,7 @@
           <a:lstStyle/>
           <a:p>
             <a:r>
-              <a:rPr lang="en-US" sz="1400" dirty="0">
+              <a:rPr lang="en-US" sz="1400">
                 <a:latin typeface="Verdana"/>
                 <a:cs typeface="Verdana"/>
               </a:rPr>
@@ -20109,20 +20108,20 @@
           <a:lstStyle/>
           <a:p>
             <a:r>
-              <a:rPr lang="en-US" altLang="zh-CN" b="1" dirty="0">
+              <a:rPr lang="en-US" altLang="zh-CN" b="1">
                 <a:latin typeface="Verdana"/>
                 <a:cs typeface="Verdana"/>
               </a:rPr>
               <a:t>double precision </a:t>
             </a:r>
             <a:r>
-              <a:rPr lang="en-US" altLang="zh-CN" dirty="0">
+              <a:rPr lang="en-US" altLang="zh-CN">
                 <a:latin typeface="Verdana"/>
                 <a:cs typeface="Verdana"/>
               </a:rPr>
               <a:t>(64 bits)</a:t>
             </a:r>
-            <a:endParaRPr lang="zh-CN" altLang="en-US" dirty="0">
+            <a:endParaRPr lang="zh-CN" altLang="en-US">
               <a:latin typeface="Verdana"/>
               <a:cs typeface="Verdana"/>
             </a:endParaRPr>
@@ -20151,7 +20150,7 @@
           <a:lstStyle/>
           <a:p>
             <a:r>
-              <a:rPr lang="en-US" altLang="zh-CN" sz="2400" dirty="0">
+              <a:rPr lang="en-US" altLang="zh-CN" sz="2400">
                 <a:latin typeface="Arial"/>
                 <a:cs typeface="Arial"/>
               </a:rPr>
@@ -20160,13 +20159,13 @@
           </a:p>
           <a:p>
             <a:r>
-              <a:rPr lang="en-US" altLang="zh-CN" sz="2400" dirty="0">
+              <a:rPr lang="en-US" altLang="zh-CN" sz="2400">
                 <a:latin typeface="Arial"/>
                 <a:cs typeface="Arial"/>
               </a:rPr>
               <a:t>double d = 0.1;</a:t>
             </a:r>
-            <a:endParaRPr lang="zh-CN" altLang="en-US" sz="2400" dirty="0">
+            <a:endParaRPr lang="zh-CN" altLang="en-US" sz="2400">
               <a:latin typeface="Arial"/>
               <a:cs typeface="Arial"/>
             </a:endParaRPr>
@@ -20263,10 +20262,10 @@
           <a:lstStyle/>
           <a:p>
             <a:r>
-              <a:rPr kumimoji="1" lang="en-US" altLang="zh-CN" dirty="0"/>
+              <a:rPr kumimoji="1" lang="en-US" altLang="zh-CN"/>
               <a:t>Previously…</a:t>
             </a:r>
-            <a:endParaRPr kumimoji="1" lang="zh-CN" altLang="en-US" dirty="0"/>
+            <a:endParaRPr kumimoji="1" lang="zh-CN" altLang="en-US"/>
           </a:p>
         </p:txBody>
       </p:sp>
@@ -20537,7 +20536,7 @@
           </a:bodyPr>
           <a:lstStyle/>
           <a:p>
-            <a:endParaRPr kumimoji="1" lang="zh-CN" altLang="en-US" sz="1350" dirty="0"/>
+            <a:endParaRPr kumimoji="1" lang="zh-CN" altLang="en-US" sz="1350"/>
           </a:p>
         </p:txBody>
       </p:sp>
@@ -20628,10 +20627,10 @@
             <a:lstStyle/>
             <a:p>
               <a:r>
-                <a:rPr kumimoji="1" lang="en-US" altLang="zh-CN" dirty="0"/>
+                <a:rPr kumimoji="1" lang="en-US" altLang="zh-CN"/>
                 <a:t>-</a:t>
               </a:r>
-              <a:endParaRPr lang="zh-CN" altLang="en-US" dirty="0"/>
+              <a:endParaRPr lang="zh-CN" altLang="en-US"/>
             </a:p>
           </p:txBody>
         </p:sp>
@@ -20723,10 +20722,10 @@
             <a:lstStyle/>
             <a:p>
               <a:r>
-                <a:rPr kumimoji="1" lang="en-US" altLang="zh-CN" dirty="0"/>
+                <a:rPr kumimoji="1" lang="en-US" altLang="zh-CN"/>
                 <a:t>+</a:t>
               </a:r>
-              <a:endParaRPr lang="zh-CN" altLang="en-US" dirty="0"/>
+              <a:endParaRPr lang="zh-CN" altLang="en-US"/>
             </a:p>
           </p:txBody>
         </p:sp>
@@ -20753,13 +20752,13 @@
           <a:lstStyle/>
           <a:p>
             <a:r>
-              <a:rPr kumimoji="1" lang="en-US" altLang="zh-CN" sz="1500" dirty="0">
+              <a:rPr kumimoji="1" lang="en-US" altLang="zh-CN" sz="1500">
                 <a:latin typeface="Arial"/>
                 <a:cs typeface="Arial"/>
               </a:rPr>
               <a:t>1</a:t>
             </a:r>
-            <a:endParaRPr lang="zh-CN" altLang="en-US" sz="1500" dirty="0">
+            <a:endParaRPr lang="zh-CN" altLang="en-US" sz="1500">
               <a:latin typeface="Arial"/>
               <a:cs typeface="Arial"/>
             </a:endParaRPr>
@@ -20788,13 +20787,13 @@
           <a:lstStyle/>
           <a:p>
             <a:r>
-              <a:rPr kumimoji="1" lang="en-US" altLang="zh-CN" sz="1500" dirty="0">
+              <a:rPr kumimoji="1" lang="en-US" altLang="zh-CN" sz="1500">
                 <a:latin typeface="Arial"/>
                 <a:cs typeface="Arial"/>
               </a:rPr>
               <a:t>2</a:t>
             </a:r>
-            <a:endParaRPr lang="zh-CN" altLang="en-US" sz="1500" dirty="0">
+            <a:endParaRPr lang="zh-CN" altLang="en-US" sz="1500">
               <a:latin typeface="Arial"/>
               <a:cs typeface="Arial"/>
             </a:endParaRPr>
@@ -20823,13 +20822,13 @@
           <a:lstStyle/>
           <a:p>
             <a:r>
-              <a:rPr kumimoji="1" lang="en-US" altLang="zh-CN" sz="1500" dirty="0">
+              <a:rPr kumimoji="1" lang="en-US" altLang="zh-CN" sz="1500">
                 <a:latin typeface="Arial"/>
                 <a:cs typeface="Arial"/>
               </a:rPr>
               <a:t>-3</a:t>
             </a:r>
-            <a:endParaRPr lang="zh-CN" altLang="en-US" sz="1500" dirty="0">
+            <a:endParaRPr lang="zh-CN" altLang="en-US" sz="1500">
               <a:latin typeface="Arial"/>
               <a:cs typeface="Arial"/>
             </a:endParaRPr>
@@ -20858,13 +20857,13 @@
           <a:lstStyle/>
           <a:p>
             <a:r>
-              <a:rPr kumimoji="1" lang="en-US" altLang="zh-CN" sz="1500" dirty="0">
+              <a:rPr kumimoji="1" lang="en-US" altLang="zh-CN" sz="1500">
                 <a:latin typeface="Arial"/>
                 <a:cs typeface="Arial"/>
               </a:rPr>
               <a:t>-2</a:t>
             </a:r>
-            <a:endParaRPr lang="zh-CN" altLang="en-US" sz="1500" dirty="0">
+            <a:endParaRPr lang="zh-CN" altLang="en-US" sz="1500">
               <a:latin typeface="Arial"/>
               <a:cs typeface="Arial"/>
             </a:endParaRPr>
@@ -20893,13 +20892,13 @@
           <a:lstStyle/>
           <a:p>
             <a:r>
-              <a:rPr kumimoji="1" lang="en-US" altLang="zh-CN" sz="1500" dirty="0">
+              <a:rPr kumimoji="1" lang="en-US" altLang="zh-CN" sz="1500">
                 <a:latin typeface="Arial"/>
                 <a:cs typeface="Arial"/>
               </a:rPr>
               <a:t>-1</a:t>
             </a:r>
-            <a:endParaRPr lang="zh-CN" altLang="en-US" sz="1500" dirty="0">
+            <a:endParaRPr lang="zh-CN" altLang="en-US" sz="1500">
               <a:latin typeface="Arial"/>
               <a:cs typeface="Arial"/>
             </a:endParaRPr>
@@ -20928,13 +20927,13 @@
           <a:lstStyle/>
           <a:p>
             <a:r>
-              <a:rPr kumimoji="1" lang="en-US" altLang="zh-CN" sz="1500" dirty="0">
+              <a:rPr kumimoji="1" lang="en-US" altLang="zh-CN" sz="1500">
                 <a:latin typeface="Arial"/>
                 <a:cs typeface="Arial"/>
               </a:rPr>
               <a:t>3</a:t>
             </a:r>
-            <a:endParaRPr lang="zh-CN" altLang="en-US" sz="1500" dirty="0">
+            <a:endParaRPr lang="zh-CN" altLang="en-US" sz="1500">
               <a:latin typeface="Arial"/>
               <a:cs typeface="Arial"/>
             </a:endParaRPr>
@@ -20977,27 +20976,27 @@
             <a:lstStyle/>
             <a:p>
               <a:r>
-                <a:rPr kumimoji="1" lang="en-US" altLang="zh-CN" sz="1500" dirty="0">
+                <a:rPr kumimoji="1" lang="en-US" altLang="zh-CN" sz="1500">
                   <a:latin typeface="Arial"/>
                   <a:cs typeface="Arial"/>
                 </a:rPr>
                 <a:t>2</a:t>
               </a:r>
               <a:r>
-                <a:rPr kumimoji="1" lang="en-US" altLang="zh-CN" sz="1500" baseline="30000" dirty="0">
+                <a:rPr kumimoji="1" lang="en-US" altLang="zh-CN" sz="1500" baseline="30000">
                   <a:latin typeface="Arial"/>
                   <a:cs typeface="Arial"/>
                 </a:rPr>
                 <a:t>n-1</a:t>
               </a:r>
               <a:r>
-                <a:rPr kumimoji="1" lang="en-US" altLang="zh-CN" sz="1500" dirty="0">
+                <a:rPr kumimoji="1" lang="en-US" altLang="zh-CN" sz="1500">
                   <a:latin typeface="Arial"/>
                   <a:cs typeface="Arial"/>
                 </a:rPr>
                 <a:t>-1</a:t>
               </a:r>
-              <a:endParaRPr lang="zh-CN" altLang="en-US" sz="1500" dirty="0">
+              <a:endParaRPr lang="zh-CN" altLang="en-US" sz="1500">
                 <a:latin typeface="Arial"/>
                 <a:cs typeface="Arial"/>
               </a:endParaRPr>
@@ -21038,7 +21037,7 @@
             <a:lstStyle/>
             <a:p>
               <a:pPr algn="ctr"/>
-              <a:endParaRPr lang="en-US" sz="1350" dirty="0"/>
+              <a:endParaRPr lang="en-US" sz="1350"/>
             </a:p>
           </p:txBody>
         </p:sp>
@@ -21064,20 +21063,20 @@
             <a:lstStyle/>
             <a:p>
               <a:r>
-                <a:rPr kumimoji="1" lang="en-US" altLang="zh-CN" sz="1500" dirty="0">
+                <a:rPr kumimoji="1" lang="en-US" altLang="zh-CN" sz="1500">
                   <a:latin typeface="Arial"/>
                   <a:cs typeface="Arial"/>
                 </a:rPr>
                 <a:t>-2</a:t>
               </a:r>
               <a:r>
-                <a:rPr kumimoji="1" lang="en-US" altLang="zh-CN" sz="1500" baseline="30000" dirty="0">
+                <a:rPr kumimoji="1" lang="en-US" altLang="zh-CN" sz="1500" baseline="30000">
                   <a:latin typeface="Arial"/>
                   <a:cs typeface="Arial"/>
                 </a:rPr>
                 <a:t>n-1</a:t>
               </a:r>
-              <a:endParaRPr lang="zh-CN" altLang="en-US" sz="1500" dirty="0">
+              <a:endParaRPr lang="zh-CN" altLang="en-US" sz="1500">
                 <a:latin typeface="Arial"/>
                 <a:cs typeface="Arial"/>
               </a:endParaRPr>
@@ -21121,13 +21120,13 @@
             <a:lstStyle/>
             <a:p>
               <a:r>
-                <a:rPr kumimoji="1" lang="en-US" altLang="zh-CN" sz="1500" dirty="0">
+                <a:rPr kumimoji="1" lang="en-US" altLang="zh-CN" sz="1500">
                   <a:latin typeface="Arial"/>
                   <a:cs typeface="Arial"/>
                 </a:rPr>
                 <a:t>0</a:t>
               </a:r>
-              <a:endParaRPr lang="zh-CN" altLang="en-US" sz="1500" dirty="0">
+              <a:endParaRPr lang="zh-CN" altLang="en-US" sz="1500">
                 <a:latin typeface="Arial"/>
                 <a:cs typeface="Arial"/>
               </a:endParaRPr>
@@ -21168,7 +21167,7 @@
             <a:lstStyle/>
             <a:p>
               <a:pPr algn="ctr"/>
-              <a:endParaRPr lang="en-US" sz="1350" dirty="0"/>
+              <a:endParaRPr lang="en-US" sz="1350"/>
             </a:p>
           </p:txBody>
         </p:sp>
@@ -21194,27 +21193,27 @@
             <a:lstStyle/>
             <a:p>
               <a:r>
-                <a:rPr kumimoji="1" lang="en-US" altLang="zh-CN" sz="1500" dirty="0">
+                <a:rPr kumimoji="1" lang="en-US" altLang="zh-CN" sz="1500">
                   <a:latin typeface="Arial"/>
                   <a:cs typeface="Arial"/>
                 </a:rPr>
                 <a:t>2</a:t>
               </a:r>
               <a:r>
-                <a:rPr kumimoji="1" lang="en-US" altLang="zh-CN" sz="1500" baseline="30000" dirty="0">
+                <a:rPr kumimoji="1" lang="en-US" altLang="zh-CN" sz="1500" baseline="30000">
                   <a:latin typeface="Arial"/>
                   <a:cs typeface="Arial"/>
                 </a:rPr>
                 <a:t>n</a:t>
               </a:r>
               <a:r>
-                <a:rPr kumimoji="1" lang="en-US" altLang="zh-CN" sz="1500" dirty="0">
+                <a:rPr kumimoji="1" lang="en-US" altLang="zh-CN" sz="1500">
                   <a:latin typeface="Arial"/>
                   <a:cs typeface="Arial"/>
                 </a:rPr>
                 <a:t>-1</a:t>
               </a:r>
-              <a:endParaRPr lang="zh-CN" altLang="en-US" sz="1500" dirty="0">
+              <a:endParaRPr lang="zh-CN" altLang="en-US" sz="1500">
                 <a:latin typeface="Arial"/>
                 <a:cs typeface="Arial"/>
               </a:endParaRPr>
@@ -21251,7 +21250,7 @@
           <a:lstStyle/>
           <a:p>
             <a:r>
-              <a:rPr lang="en-US" sz="1350" dirty="0"/>
+              <a:rPr lang="en-US" sz="1350"/>
               <a:t>Unsigned n-bit integers</a:t>
             </a:r>
           </a:p>
@@ -21286,7 +21285,7 @@
           <a:lstStyle/>
           <a:p>
             <a:r>
-              <a:rPr lang="en-US" sz="1350" dirty="0"/>
+              <a:rPr lang="en-US" sz="1350"/>
               <a:t>Signed n-bit integers</a:t>
             </a:r>
           </a:p>
@@ -21326,7 +21325,7 @@
           <a:lstStyle/>
           <a:p>
             <a:r>
-              <a:rPr lang="en-US" sz="2400" dirty="0"/>
+              <a:rPr lang="en-US" sz="2400"/>
               <a:t>What about real numbers?</a:t>
             </a:r>
           </a:p>
@@ -21579,10 +21578,10 @@
           <a:lstStyle/>
           <a:p>
             <a:r>
-              <a:rPr kumimoji="1" lang="en-US" altLang="zh-CN" dirty="0"/>
+              <a:rPr kumimoji="1" lang="en-US" altLang="zh-CN"/>
               <a:t>single/ double precision</a:t>
             </a:r>
-            <a:endParaRPr kumimoji="1" lang="zh-CN" altLang="en-US" dirty="0"/>
+            <a:endParaRPr kumimoji="1" lang="zh-CN" altLang="en-US"/>
           </a:p>
         </p:txBody>
       </p:sp>
@@ -21658,7 +21657,7 @@
                           <a:spcPct val="110000"/>
                         </a:lnSpc>
                       </a:pPr>
-                      <a:endParaRPr lang="zh-CN" altLang="en-US" sz="2400" dirty="0">
+                      <a:endParaRPr lang="zh-CN" altLang="en-US" sz="2400">
                         <a:latin typeface="Verdana"/>
                         <a:cs typeface="Verdana"/>
                       </a:endParaRPr>
@@ -21677,20 +21676,20 @@
                         </a:lnSpc>
                       </a:pPr>
                       <a:r>
-                        <a:rPr lang="en-US" altLang="zh-CN" sz="2400" dirty="0" err="1">
+                        <a:rPr lang="en-US" altLang="zh-CN" sz="2400" err="1">
                           <a:latin typeface="Verdana"/>
                           <a:cs typeface="Verdana"/>
                         </a:rPr>
                         <a:t>E</a:t>
                       </a:r>
                       <a:r>
-                        <a:rPr lang="en-US" altLang="zh-CN" sz="2400" baseline="-25000" dirty="0" err="1">
+                        <a:rPr lang="en-US" altLang="zh-CN" sz="2400" baseline="-25000" err="1">
                           <a:latin typeface="Verdana"/>
                           <a:cs typeface="Verdana"/>
                         </a:rPr>
                         <a:t>min</a:t>
                       </a:r>
-                      <a:endParaRPr lang="zh-CN" altLang="en-US" sz="2400" baseline="-25000" dirty="0">
+                      <a:endParaRPr lang="zh-CN" altLang="en-US" sz="2400" baseline="-25000">
                         <a:latin typeface="Verdana"/>
                         <a:cs typeface="Verdana"/>
                       </a:endParaRPr>
@@ -21709,20 +21708,20 @@
                         </a:lnSpc>
                       </a:pPr>
                       <a:r>
-                        <a:rPr lang="en-US" altLang="zh-CN" sz="2400" dirty="0" err="1">
+                        <a:rPr lang="en-US" altLang="zh-CN" sz="2400" err="1">
                           <a:latin typeface="Verdana"/>
                           <a:cs typeface="Verdana"/>
                         </a:rPr>
                         <a:t>E</a:t>
                       </a:r>
                       <a:r>
-                        <a:rPr lang="en-US" altLang="zh-CN" sz="2400" baseline="-25000" dirty="0" err="1">
+                        <a:rPr lang="en-US" altLang="zh-CN" sz="2400" baseline="-25000" err="1">
                           <a:latin typeface="Verdana"/>
                           <a:cs typeface="Verdana"/>
                         </a:rPr>
                         <a:t>max</a:t>
                       </a:r>
-                      <a:endParaRPr lang="zh-CN" altLang="en-US" sz="2400" baseline="-25000" dirty="0">
+                      <a:endParaRPr lang="zh-CN" altLang="en-US" sz="2400" baseline="-25000">
                         <a:latin typeface="Verdana"/>
                         <a:cs typeface="Verdana"/>
                       </a:endParaRPr>
@@ -21741,20 +21740,20 @@
                         </a:lnSpc>
                       </a:pPr>
                       <a:r>
-                        <a:rPr lang="en-US" altLang="zh-CN" sz="2400" baseline="0" dirty="0" err="1">
+                        <a:rPr lang="en-US" altLang="zh-CN" sz="2400" baseline="0" err="1">
                           <a:latin typeface="Verdana"/>
                           <a:cs typeface="Verdana"/>
                         </a:rPr>
                         <a:t>N</a:t>
                       </a:r>
                       <a:r>
-                        <a:rPr lang="en-US" altLang="zh-CN" sz="2400" baseline="-25000" dirty="0" err="1">
+                        <a:rPr lang="en-US" altLang="zh-CN" sz="2400" baseline="-25000" err="1">
                           <a:latin typeface="Verdana"/>
                           <a:cs typeface="Verdana"/>
                         </a:rPr>
                         <a:t>min</a:t>
                       </a:r>
-                      <a:endParaRPr lang="zh-CN" altLang="en-US" sz="2400" baseline="-25000" dirty="0">
+                      <a:endParaRPr lang="zh-CN" altLang="en-US" sz="2400" baseline="-25000">
                         <a:latin typeface="Verdana"/>
                         <a:cs typeface="Verdana"/>
                       </a:endParaRPr>
@@ -21773,20 +21772,20 @@
                         </a:lnSpc>
                       </a:pPr>
                       <a:r>
-                        <a:rPr lang="en-US" altLang="zh-CN" sz="2400" baseline="0" dirty="0" err="1">
+                        <a:rPr lang="en-US" altLang="zh-CN" sz="2400" baseline="0" err="1">
                           <a:latin typeface="Verdana"/>
                           <a:cs typeface="Verdana"/>
                         </a:rPr>
                         <a:t>N</a:t>
                       </a:r>
                       <a:r>
-                        <a:rPr lang="en-US" altLang="zh-CN" sz="2400" baseline="-25000" dirty="0" err="1">
+                        <a:rPr lang="en-US" altLang="zh-CN" sz="2400" baseline="-25000" err="1">
                           <a:latin typeface="Verdana"/>
                           <a:cs typeface="Verdana"/>
                         </a:rPr>
                         <a:t>max</a:t>
                       </a:r>
-                      <a:endParaRPr lang="zh-CN" altLang="en-US" sz="2400" baseline="-25000" dirty="0">
+                      <a:endParaRPr lang="zh-CN" altLang="en-US" sz="2400" baseline="-25000">
                         <a:latin typeface="Verdana"/>
                         <a:cs typeface="Verdana"/>
                       </a:endParaRPr>
@@ -21812,13 +21811,13 @@
                         </a:lnSpc>
                       </a:pPr>
                       <a:r>
-                        <a:rPr lang="en-US" altLang="zh-CN" sz="2400" dirty="0">
+                        <a:rPr lang="en-US" altLang="zh-CN" sz="2400">
                           <a:latin typeface="Verdana"/>
                           <a:cs typeface="Verdana"/>
                         </a:rPr>
                         <a:t>Float</a:t>
                       </a:r>
-                      <a:endParaRPr lang="zh-CN" altLang="en-US" sz="2400" dirty="0">
+                      <a:endParaRPr lang="zh-CN" altLang="en-US" sz="2400">
                         <a:latin typeface="Verdana"/>
                         <a:cs typeface="Verdana"/>
                       </a:endParaRPr>
@@ -21837,13 +21836,13 @@
                         </a:lnSpc>
                       </a:pPr>
                       <a:r>
-                        <a:rPr lang="en-US" altLang="zh-CN" sz="2400" dirty="0">
+                        <a:rPr lang="en-US" altLang="zh-CN" sz="2400">
                           <a:latin typeface="Verdana"/>
                           <a:cs typeface="Verdana"/>
                         </a:rPr>
                         <a:t>-126</a:t>
                       </a:r>
-                      <a:endParaRPr lang="zh-CN" altLang="en-US" sz="2400" dirty="0">
+                      <a:endParaRPr lang="zh-CN" altLang="en-US" sz="2400">
                         <a:latin typeface="Verdana"/>
                         <a:cs typeface="Verdana"/>
                       </a:endParaRPr>
@@ -21862,13 +21861,13 @@
                         </a:lnSpc>
                       </a:pPr>
                       <a:r>
-                        <a:rPr lang="en-US" altLang="zh-CN" sz="2400" dirty="0">
+                        <a:rPr lang="en-US" altLang="zh-CN" sz="2400">
                           <a:latin typeface="Verdana"/>
                           <a:cs typeface="Verdana"/>
                         </a:rPr>
                         <a:t>127</a:t>
                       </a:r>
-                      <a:endParaRPr lang="zh-CN" altLang="en-US" sz="2400" dirty="0">
+                      <a:endParaRPr lang="zh-CN" altLang="en-US" sz="2400">
                         <a:latin typeface="Verdana"/>
                         <a:cs typeface="Verdana"/>
                       </a:endParaRPr>
@@ -21887,20 +21886,20 @@
                         </a:lnSpc>
                       </a:pPr>
                       <a:r>
-                        <a:rPr lang="en-US" altLang="zh-CN" sz="2400" dirty="0">
+                        <a:rPr lang="en-US" altLang="zh-CN" sz="2400">
                           <a:latin typeface="Verdana"/>
                           <a:cs typeface="Verdana"/>
                         </a:rPr>
                         <a:t> 2</a:t>
                       </a:r>
                       <a:r>
-                        <a:rPr lang="en-US" altLang="zh-CN" sz="2400" baseline="30000" dirty="0">
+                        <a:rPr lang="en-US" altLang="zh-CN" sz="2400" baseline="30000">
                           <a:latin typeface="Verdana"/>
                           <a:cs typeface="Verdana"/>
                         </a:rPr>
                         <a:t>-149</a:t>
                       </a:r>
-                      <a:endParaRPr lang="zh-CN" altLang="en-US" sz="2400" baseline="30000" dirty="0">
+                      <a:endParaRPr lang="zh-CN" altLang="en-US" sz="2400" baseline="30000">
                         <a:latin typeface="Verdana"/>
                         <a:cs typeface="Verdana"/>
                       </a:endParaRPr>
@@ -21931,27 +21930,27 @@
                         <a:defRPr/>
                       </a:pPr>
                       <a:r>
-                        <a:rPr lang="zh-CN" altLang="en-US" sz="2400" dirty="0">
+                        <a:rPr lang="zh-CN" altLang="en-US" sz="2400">
                           <a:latin typeface="Verdana"/>
                           <a:cs typeface="Verdana"/>
                         </a:rPr>
                         <a:t>≈</a:t>
                       </a:r>
                       <a:r>
-                        <a:rPr lang="en-US" altLang="zh-CN" sz="2400" dirty="0">
+                        <a:rPr lang="en-US" altLang="zh-CN" sz="2400">
                           <a:latin typeface="Verdana"/>
                           <a:cs typeface="Verdana"/>
                         </a:rPr>
                         <a:t> 2</a:t>
                       </a:r>
                       <a:r>
-                        <a:rPr lang="en-US" altLang="zh-CN" sz="2400" baseline="30000" dirty="0">
+                        <a:rPr lang="en-US" altLang="zh-CN" sz="2400" baseline="30000">
                           <a:latin typeface="Verdana"/>
                           <a:cs typeface="Verdana"/>
                         </a:rPr>
                         <a:t>128</a:t>
                       </a:r>
-                      <a:endParaRPr lang="zh-CN" altLang="en-US" sz="2400" baseline="30000" dirty="0">
+                      <a:endParaRPr lang="zh-CN" altLang="en-US" sz="2400" baseline="30000">
                         <a:latin typeface="Verdana"/>
                         <a:cs typeface="Verdana"/>
                       </a:endParaRPr>
@@ -21977,13 +21976,13 @@
                         </a:lnSpc>
                       </a:pPr>
                       <a:r>
-                        <a:rPr lang="en-US" altLang="zh-CN" sz="2400" dirty="0">
+                        <a:rPr lang="en-US" altLang="zh-CN" sz="2400">
                           <a:latin typeface="Verdana"/>
                           <a:cs typeface="Verdana"/>
                         </a:rPr>
                         <a:t>Double</a:t>
                       </a:r>
-                      <a:endParaRPr lang="zh-CN" altLang="en-US" sz="2400" dirty="0">
+                      <a:endParaRPr lang="zh-CN" altLang="en-US" sz="2400">
                         <a:latin typeface="Verdana"/>
                         <a:cs typeface="Verdana"/>
                       </a:endParaRPr>
@@ -22002,13 +22001,13 @@
                         </a:lnSpc>
                       </a:pPr>
                       <a:r>
-                        <a:rPr lang="en-US" altLang="zh-CN" sz="2400" dirty="0">
+                        <a:rPr lang="en-US" altLang="zh-CN" sz="2400">
                           <a:latin typeface="Verdana"/>
                           <a:cs typeface="Verdana"/>
                         </a:rPr>
                         <a:t>-1022</a:t>
                       </a:r>
-                      <a:endParaRPr lang="zh-CN" altLang="en-US" sz="2400" dirty="0">
+                      <a:endParaRPr lang="zh-CN" altLang="en-US" sz="2400">
                         <a:latin typeface="Verdana"/>
                         <a:cs typeface="Verdana"/>
                       </a:endParaRPr>
@@ -22039,13 +22038,13 @@
                         <a:defRPr/>
                       </a:pPr>
                       <a:r>
-                        <a:rPr lang="en-US" altLang="zh-CN" sz="2400" dirty="0">
+                        <a:rPr lang="en-US" altLang="zh-CN" sz="2400">
                           <a:latin typeface="Verdana"/>
                           <a:cs typeface="Verdana"/>
                         </a:rPr>
                         <a:t>1023</a:t>
                       </a:r>
-                      <a:endParaRPr lang="zh-CN" altLang="en-US" sz="2400" dirty="0">
+                      <a:endParaRPr lang="zh-CN" altLang="en-US" sz="2400">
                         <a:latin typeface="Verdana"/>
                         <a:cs typeface="Verdana"/>
                       </a:endParaRPr>
@@ -22089,7 +22088,7 @@
                         </a:rPr>
                         <a:t>-1074</a:t>
                       </a:r>
-                      <a:endParaRPr lang="zh-CN" altLang="en-US" sz="2400" baseline="30000" dirty="0">
+                      <a:endParaRPr lang="zh-CN" altLang="en-US" sz="2400" baseline="30000">
                         <a:latin typeface="Verdana"/>
                         <a:cs typeface="Verdana"/>
                       </a:endParaRPr>
@@ -22120,27 +22119,27 @@
                         <a:defRPr/>
                       </a:pPr>
                       <a:r>
-                        <a:rPr lang="zh-CN" altLang="en-US" sz="2400" dirty="0">
+                        <a:rPr lang="zh-CN" altLang="en-US" sz="2400">
                           <a:latin typeface="Verdana"/>
                           <a:cs typeface="Verdana"/>
                         </a:rPr>
                         <a:t>≈</a:t>
                       </a:r>
                       <a:r>
-                        <a:rPr lang="en-US" altLang="zh-CN" sz="2400" dirty="0">
+                        <a:rPr lang="en-US" altLang="zh-CN" sz="2400">
                           <a:latin typeface="Verdana"/>
                           <a:cs typeface="Verdana"/>
                         </a:rPr>
                         <a:t> 2</a:t>
                       </a:r>
                       <a:r>
-                        <a:rPr lang="en-US" altLang="zh-CN" sz="2400" baseline="30000" dirty="0">
+                        <a:rPr lang="en-US" altLang="zh-CN" sz="2400" baseline="30000">
                           <a:latin typeface="Verdana"/>
                           <a:cs typeface="Verdana"/>
                         </a:rPr>
                         <a:t>1024</a:t>
                       </a:r>
-                      <a:endParaRPr lang="zh-CN" altLang="en-US" sz="2400" baseline="30000" dirty="0">
+                      <a:endParaRPr lang="zh-CN" altLang="en-US" sz="2400" baseline="30000">
                         <a:latin typeface="Verdana"/>
                         <a:cs typeface="Verdana"/>
                       </a:endParaRPr>
@@ -22210,7 +22209,7 @@
           <a:lstStyle/>
           <a:p>
             <a:r>
-              <a:rPr lang="en-US" dirty="0"/>
+              <a:rPr lang="en-US"/>
               <a:t>FP summary</a:t>
             </a:r>
           </a:p>
@@ -22243,19 +22242,19 @@
           <a:lstStyle/>
           <a:p>
             <a:r>
-              <a:rPr lang="en-US" dirty="0"/>
+              <a:rPr lang="en-US"/>
               <a:t>Normalized binary representation of real numbers</a:t>
             </a:r>
           </a:p>
           <a:p>
             <a:r>
-              <a:rPr lang="en-US" dirty="0"/>
+              <a:rPr lang="en-US"/>
               <a:t>IEEE FP</a:t>
             </a:r>
           </a:p>
           <a:p>
             <a:pPr lvl="1"/>
-            <a:endParaRPr lang="en-US" dirty="0"/>
+            <a:endParaRPr lang="en-US"/>
           </a:p>
         </p:txBody>
       </p:sp>
@@ -22453,20 +22452,20 @@
           <a:lstStyle/>
           <a:p>
             <a:r>
-              <a:rPr kumimoji="1" lang="en-US" altLang="zh-CN" sz="1600" dirty="0">
+              <a:rPr kumimoji="1" lang="en-US" altLang="zh-CN" sz="1600">
                 <a:latin typeface="Arial"/>
                 <a:cs typeface="Arial"/>
               </a:rPr>
               <a:t>2</a:t>
             </a:r>
             <a:r>
-              <a:rPr kumimoji="1" lang="en-US" altLang="zh-CN" sz="1600" baseline="30000" dirty="0">
+              <a:rPr kumimoji="1" lang="en-US" altLang="zh-CN" sz="1600" baseline="30000">
                 <a:latin typeface="Arial"/>
                 <a:cs typeface="Arial"/>
               </a:rPr>
               <a:t>-126</a:t>
             </a:r>
-            <a:endParaRPr lang="en-US" sz="1600" dirty="0"/>
+            <a:endParaRPr lang="en-US" sz="1600"/>
           </a:p>
         </p:txBody>
       </p:sp>
@@ -22499,20 +22498,20 @@
           <a:lstStyle/>
           <a:p>
             <a:r>
-              <a:rPr kumimoji="1" lang="en-US" altLang="zh-CN" sz="1600" dirty="0">
+              <a:rPr kumimoji="1" lang="en-US" altLang="zh-CN" sz="1600">
                 <a:latin typeface="Arial"/>
                 <a:cs typeface="Arial"/>
               </a:rPr>
               <a:t>2</a:t>
             </a:r>
             <a:r>
-              <a:rPr kumimoji="1" lang="en-US" altLang="zh-CN" sz="1600" baseline="30000" dirty="0">
+              <a:rPr kumimoji="1" lang="en-US" altLang="zh-CN" sz="1600" baseline="30000">
                 <a:latin typeface="Arial"/>
                 <a:cs typeface="Arial"/>
               </a:rPr>
               <a:t>-125</a:t>
             </a:r>
-            <a:endParaRPr lang="en-US" dirty="0"/>
+            <a:endParaRPr lang="en-US"/>
           </a:p>
         </p:txBody>
       </p:sp>
@@ -22545,20 +22544,20 @@
           <a:lstStyle/>
           <a:p>
             <a:r>
-              <a:rPr kumimoji="1" lang="en-US" altLang="zh-CN" sz="1600" dirty="0">
+              <a:rPr kumimoji="1" lang="en-US" altLang="zh-CN" sz="1600">
                 <a:latin typeface="Arial"/>
                 <a:cs typeface="Arial"/>
               </a:rPr>
               <a:t>2</a:t>
             </a:r>
             <a:r>
-              <a:rPr kumimoji="1" lang="en-US" altLang="zh-CN" sz="1600" baseline="30000" dirty="0">
+              <a:rPr kumimoji="1" lang="en-US" altLang="zh-CN" sz="1600" baseline="30000">
                 <a:latin typeface="Arial"/>
                 <a:cs typeface="Arial"/>
               </a:rPr>
               <a:t>-124</a:t>
             </a:r>
-            <a:endParaRPr lang="en-US" sz="1600" dirty="0"/>
+            <a:endParaRPr lang="en-US" sz="1600"/>
           </a:p>
         </p:txBody>
       </p:sp>
@@ -22591,11 +22590,11 @@
           <a:lstStyle/>
           <a:p>
             <a:r>
-              <a:rPr lang="en-US" dirty="0"/>
+              <a:rPr lang="en-US"/>
               <a:t>1 </a:t>
             </a:r>
             <a:r>
-              <a:rPr lang="en-US" dirty="0">
+              <a:rPr lang="en-US">
                 <a:solidFill>
                   <a:schemeClr val="accent2">
                     <a:lumMod val="75000"/>
@@ -22605,7 +22604,7 @@
               <a:t>0….01 </a:t>
             </a:r>
             <a:r>
-              <a:rPr lang="en-US" dirty="0">
+              <a:rPr lang="en-US">
                 <a:solidFill>
                   <a:schemeClr val="accent1"/>
                 </a:solidFill>
@@ -22687,11 +22686,11 @@
           <a:lstStyle/>
           <a:p>
             <a:r>
-              <a:rPr lang="en-US" dirty="0"/>
+              <a:rPr lang="en-US"/>
               <a:t>0 </a:t>
             </a:r>
             <a:r>
-              <a:rPr lang="en-US" dirty="0">
+              <a:rPr lang="en-US">
                 <a:solidFill>
                   <a:schemeClr val="accent2">
                     <a:lumMod val="75000"/>
@@ -22701,7 +22700,7 @@
               <a:t>0….10 </a:t>
             </a:r>
             <a:r>
-              <a:rPr lang="en-US" dirty="0">
+              <a:rPr lang="en-US">
                 <a:solidFill>
                   <a:schemeClr val="accent1"/>
                 </a:solidFill>
@@ -22782,11 +22781,11 @@
           <a:lstStyle/>
           <a:p>
             <a:r>
-              <a:rPr lang="en-US" dirty="0"/>
+              <a:rPr lang="en-US"/>
               <a:t>0 </a:t>
             </a:r>
             <a:r>
-              <a:rPr lang="en-US" dirty="0">
+              <a:rPr lang="en-US">
                 <a:solidFill>
                   <a:schemeClr val="accent2">
                     <a:lumMod val="75000"/>
@@ -22796,7 +22795,7 @@
               <a:t>0…11 </a:t>
             </a:r>
             <a:r>
-              <a:rPr lang="en-US" dirty="0">
+              <a:rPr lang="en-US">
                 <a:solidFill>
                   <a:schemeClr val="accent1"/>
                 </a:solidFill>
@@ -23088,7 +23087,7 @@
           <a:lstStyle/>
           <a:p>
             <a:r>
-              <a:rPr lang="en-US" dirty="0">
+              <a:rPr lang="en-US">
                 <a:ln w="0"/>
                 <a:solidFill>
                   <a:schemeClr val="tx1"/>
@@ -23104,7 +23103,7 @@
               <a:t>2</a:t>
             </a:r>
             <a:r>
-              <a:rPr lang="en-US" baseline="30000" dirty="0">
+              <a:rPr lang="en-US" baseline="30000">
                 <a:ln w="0"/>
                 <a:solidFill>
                   <a:schemeClr val="tx1"/>
@@ -23120,7 +23119,7 @@
               <a:t>23</a:t>
             </a:r>
             <a:r>
-              <a:rPr lang="en-US" dirty="0">
+              <a:rPr lang="en-US">
                 <a:ln w="0"/>
                 <a:solidFill>
                   <a:schemeClr val="tx1"/>
@@ -23288,27 +23287,27 @@
           <a:lstStyle/>
           <a:p>
             <a:r>
-              <a:rPr lang="en-US" dirty="0"/>
+              <a:rPr lang="en-US"/>
               <a:t>-</a:t>
             </a:r>
             <a:r>
-              <a:rPr kumimoji="1" lang="en-US" altLang="zh-CN" sz="1600" dirty="0">
+              <a:rPr kumimoji="1" lang="en-US" altLang="zh-CN" sz="1600">
                 <a:latin typeface="Arial"/>
                 <a:cs typeface="Arial"/>
               </a:rPr>
               <a:t>2</a:t>
             </a:r>
             <a:r>
-              <a:rPr kumimoji="1" lang="en-US" altLang="zh-CN" sz="1600" baseline="30000" dirty="0">
+              <a:rPr kumimoji="1" lang="en-US" altLang="zh-CN" sz="1600" baseline="30000">
                 <a:latin typeface="Arial"/>
                 <a:cs typeface="Arial"/>
               </a:rPr>
               <a:t>-126</a:t>
             </a:r>
-            <a:endParaRPr lang="en-US" sz="1800" dirty="0"/>
-          </a:p>
-          <a:p>
-            <a:endParaRPr lang="en-US" dirty="0"/>
+            <a:endParaRPr lang="en-US" sz="1800"/>
+          </a:p>
+          <a:p>
+            <a:endParaRPr lang="en-US"/>
           </a:p>
         </p:txBody>
       </p:sp>
@@ -23423,27 +23422,27 @@
           <a:lstStyle/>
           <a:p>
             <a:r>
-              <a:rPr lang="en-US" dirty="0"/>
+              <a:rPr lang="en-US"/>
               <a:t>-</a:t>
             </a:r>
             <a:r>
-              <a:rPr kumimoji="1" lang="en-US" altLang="zh-CN" sz="1600" dirty="0">
+              <a:rPr kumimoji="1" lang="en-US" altLang="zh-CN" sz="1600">
                 <a:latin typeface="Arial"/>
                 <a:cs typeface="Arial"/>
               </a:rPr>
               <a:t>2</a:t>
             </a:r>
             <a:r>
-              <a:rPr kumimoji="1" lang="en-US" altLang="zh-CN" sz="1600" baseline="30000" dirty="0">
+              <a:rPr kumimoji="1" lang="en-US" altLang="zh-CN" sz="1600" baseline="30000">
                 <a:latin typeface="Arial"/>
                 <a:cs typeface="Arial"/>
               </a:rPr>
               <a:t>-125</a:t>
             </a:r>
-            <a:endParaRPr lang="en-US" dirty="0"/>
-          </a:p>
-          <a:p>
-            <a:endParaRPr lang="en-US" dirty="0"/>
+            <a:endParaRPr lang="en-US"/>
+          </a:p>
+          <a:p>
+            <a:endParaRPr lang="en-US"/>
           </a:p>
         </p:txBody>
       </p:sp>
@@ -23476,11 +23475,11 @@
           <a:lstStyle/>
           <a:p>
             <a:r>
-              <a:rPr lang="en-US" dirty="0"/>
+              <a:rPr lang="en-US"/>
               <a:t>0 </a:t>
             </a:r>
             <a:r>
-              <a:rPr lang="en-US" dirty="0">
+              <a:rPr lang="en-US">
                 <a:solidFill>
                   <a:schemeClr val="accent2">
                     <a:lumMod val="75000"/>
@@ -23490,7 +23489,7 @@
               <a:t>0….01 </a:t>
             </a:r>
             <a:r>
-              <a:rPr lang="en-US" dirty="0">
+              <a:rPr lang="en-US">
                 <a:solidFill>
                   <a:schemeClr val="accent1"/>
                 </a:solidFill>
@@ -23570,11 +23569,11 @@
           <a:lstStyle/>
           <a:p>
             <a:r>
-              <a:rPr lang="en-US" dirty="0"/>
+              <a:rPr lang="en-US"/>
               <a:t>1 </a:t>
             </a:r>
             <a:r>
-              <a:rPr lang="en-US" dirty="0">
+              <a:rPr lang="en-US">
                 <a:solidFill>
                   <a:schemeClr val="accent2">
                     <a:lumMod val="75000"/>
@@ -23584,7 +23583,7 @@
               <a:t>0….00 </a:t>
             </a:r>
             <a:r>
-              <a:rPr lang="en-US" dirty="0">
+              <a:rPr lang="en-US">
                 <a:solidFill>
                   <a:schemeClr val="accent1"/>
                 </a:solidFill>
@@ -23758,11 +23757,11 @@
           <a:lstStyle/>
           <a:p>
             <a:r>
-              <a:rPr lang="en-US" dirty="0"/>
+              <a:rPr lang="en-US"/>
               <a:t>Max: 0 </a:t>
             </a:r>
             <a:r>
-              <a:rPr lang="en-US" dirty="0">
+              <a:rPr lang="en-US">
                 <a:solidFill>
                   <a:schemeClr val="accent2">
                     <a:lumMod val="75000"/>
@@ -23772,7 +23771,7 @@
               <a:t>1…10 </a:t>
             </a:r>
             <a:r>
-              <a:rPr lang="en-US" dirty="0">
+              <a:rPr lang="en-US">
                 <a:solidFill>
                   <a:schemeClr val="accent1"/>
                 </a:solidFill>
@@ -23811,27 +23810,27 @@
           <a:lstStyle/>
           <a:p>
             <a:r>
-              <a:rPr lang="en-US" dirty="0"/>
+              <a:rPr lang="en-US"/>
               <a:t>2</a:t>
             </a:r>
             <a:r>
-              <a:rPr lang="en-US" baseline="30000" dirty="0"/>
+              <a:rPr lang="en-US" baseline="30000"/>
               <a:t>127</a:t>
             </a:r>
             <a:r>
-              <a:rPr lang="en-US" dirty="0"/>
+              <a:rPr lang="en-US"/>
               <a:t>+(2</a:t>
             </a:r>
             <a:r>
-              <a:rPr lang="en-US" baseline="30000" dirty="0"/>
+              <a:rPr lang="en-US" baseline="30000"/>
               <a:t>23</a:t>
             </a:r>
             <a:r>
-              <a:rPr lang="en-US" dirty="0"/>
+              <a:rPr lang="en-US"/>
               <a:t>-1)*2</a:t>
             </a:r>
             <a:r>
-              <a:rPr lang="en-US" baseline="30000" dirty="0"/>
+              <a:rPr lang="en-US" baseline="30000"/>
               <a:t>127-23</a:t>
             </a:r>
           </a:p>
@@ -23904,13 +23903,13 @@
                     <a:lstStyle/>
                     <a:p>
                       <a:r>
-                        <a:rPr lang="en-US" altLang="zh-CN" dirty="0">
+                        <a:rPr lang="en-US" altLang="zh-CN">
                           <a:latin typeface="Verdana"/>
                           <a:cs typeface="Verdana"/>
                         </a:rPr>
                         <a:t>s</a:t>
                       </a:r>
-                      <a:endParaRPr lang="zh-CN" altLang="en-US" dirty="0">
+                      <a:endParaRPr lang="zh-CN" altLang="en-US">
                         <a:latin typeface="Verdana"/>
                         <a:cs typeface="Verdana"/>
                       </a:endParaRPr>
@@ -23945,13 +23944,13 @@
                         <a:defRPr/>
                       </a:pPr>
                       <a:r>
-                        <a:rPr lang="en-US" altLang="zh-CN" dirty="0">
+                        <a:rPr lang="en-US" altLang="zh-CN">
                           <a:latin typeface="Verdana"/>
                           <a:cs typeface="Verdana"/>
                         </a:rPr>
                         <a:t>exp</a:t>
                       </a:r>
-                      <a:endParaRPr lang="zh-CN" altLang="en-US" dirty="0">
+                      <a:endParaRPr lang="zh-CN" altLang="en-US">
                         <a:latin typeface="Verdana"/>
                         <a:cs typeface="Verdana"/>
                       </a:endParaRPr>
@@ -23986,13 +23985,13 @@
                         <a:defRPr/>
                       </a:pPr>
                       <a:r>
-                        <a:rPr lang="en-US" altLang="zh-CN" baseline="0" dirty="0">
+                        <a:rPr lang="en-US" altLang="zh-CN" baseline="0">
                           <a:latin typeface="Verdana"/>
                           <a:cs typeface="Verdana"/>
                         </a:rPr>
                         <a:t>fraction (F)</a:t>
                       </a:r>
-                      <a:endParaRPr lang="zh-CN" altLang="en-US" dirty="0">
+                      <a:endParaRPr lang="zh-CN" altLang="en-US">
                         <a:latin typeface="Verdana"/>
                         <a:cs typeface="Verdana"/>
                       </a:endParaRPr>
@@ -24045,28 +24044,28 @@
           <a:lstStyle/>
           <a:p>
             <a:r>
-              <a:rPr lang="en-US" altLang="zh-CN" sz="1600" dirty="0">
+              <a:rPr lang="en-US" altLang="zh-CN" sz="1600">
                 <a:latin typeface="Arial"/>
                 <a:cs typeface="Arial"/>
               </a:rPr>
               <a:t>If exp!=0 &amp;&amp; exp!=255, (1.F</a:t>
             </a:r>
             <a:r>
-              <a:rPr lang="en-US" altLang="zh-CN" sz="1600" baseline="-25000" dirty="0">
+              <a:rPr lang="en-US" altLang="zh-CN" sz="1600" baseline="-25000">
                 <a:latin typeface="Arial"/>
                 <a:cs typeface="Arial"/>
               </a:rPr>
               <a:t> </a:t>
             </a:r>
             <a:r>
-              <a:rPr lang="en-US" altLang="zh-CN" sz="1600" dirty="0">
+              <a:rPr lang="en-US" altLang="zh-CN" sz="1600">
                 <a:latin typeface="Arial"/>
                 <a:cs typeface="Arial"/>
               </a:rPr>
               <a:t>)*2</a:t>
             </a:r>
             <a:r>
-              <a:rPr lang="en-US" altLang="zh-CN" sz="1600" baseline="30000" dirty="0">
+              <a:rPr lang="en-US" altLang="zh-CN" sz="1600" baseline="30000">
                 <a:latin typeface="Arial"/>
                 <a:cs typeface="Arial"/>
               </a:rPr>
@@ -24103,28 +24102,28 @@
           <a:lstStyle/>
           <a:p>
             <a:r>
-              <a:rPr lang="en-US" altLang="zh-CN" sz="1600" dirty="0">
+              <a:rPr lang="en-US" altLang="zh-CN" sz="1600">
                 <a:latin typeface="Arial"/>
                 <a:cs typeface="Arial"/>
               </a:rPr>
               <a:t>0 &lt;= M &lt; 1, M = ( 0.F</a:t>
             </a:r>
             <a:r>
-              <a:rPr lang="en-US" altLang="zh-CN" sz="1600" baseline="-25000" dirty="0">
+              <a:rPr lang="en-US" altLang="zh-CN" sz="1600" baseline="-25000">
                 <a:latin typeface="Arial"/>
                 <a:cs typeface="Arial"/>
               </a:rPr>
               <a:t> </a:t>
             </a:r>
             <a:r>
-              <a:rPr lang="en-US" altLang="zh-CN" sz="1600" dirty="0">
+              <a:rPr lang="en-US" altLang="zh-CN" sz="1600">
                 <a:latin typeface="Arial"/>
                 <a:cs typeface="Arial"/>
               </a:rPr>
               <a:t>)</a:t>
             </a:r>
             <a:r>
-              <a:rPr lang="en-US" altLang="zh-CN" sz="1600" baseline="-25000" dirty="0">
+              <a:rPr lang="en-US" altLang="zh-CN" sz="1600" baseline="-25000">
                 <a:latin typeface="Arial"/>
                 <a:cs typeface="Arial"/>
               </a:rPr>
@@ -24223,10 +24222,10 @@
             <a:lstStyle/>
             <a:p>
               <a:r>
-                <a:rPr lang="en-US" sz="2400" dirty="0"/>
+                <a:rPr lang="en-US" sz="2400"/>
                 <a:t>±0</a:t>
               </a:r>
-              <a:endParaRPr lang="en-US" sz="1600" dirty="0"/>
+              <a:endParaRPr lang="en-US" sz="1600"/>
             </a:p>
           </p:txBody>
         </p:sp>
@@ -24305,11 +24304,11 @@
             <a:lstStyle/>
             <a:p>
               <a:r>
-                <a:rPr lang="en-US" dirty="0"/>
+                <a:rPr lang="en-US"/>
                 <a:t>0 </a:t>
               </a:r>
               <a:r>
-                <a:rPr lang="en-US" dirty="0">
+                <a:rPr lang="en-US">
                   <a:solidFill>
                     <a:schemeClr val="accent2">
                       <a:lumMod val="75000"/>
@@ -24319,7 +24318,7 @@
                 <a:t>0….00 </a:t>
               </a:r>
               <a:r>
-                <a:rPr lang="en-US" dirty="0">
+                <a:rPr lang="en-US">
                   <a:solidFill>
                     <a:schemeClr val="accent1"/>
                   </a:solidFill>
@@ -24358,11 +24357,11 @@
             <a:lstStyle/>
             <a:p>
               <a:r>
-                <a:rPr lang="en-US" dirty="0"/>
+                <a:rPr lang="en-US"/>
                 <a:t>1 </a:t>
               </a:r>
               <a:r>
-                <a:rPr lang="en-US" dirty="0">
+                <a:rPr lang="en-US">
                   <a:solidFill>
                     <a:schemeClr val="accent2">
                       <a:lumMod val="75000"/>
@@ -24372,7 +24371,7 @@
                 <a:t>0….00 </a:t>
               </a:r>
               <a:r>
-                <a:rPr lang="en-US" dirty="0">
+                <a:rPr lang="en-US">
                   <a:solidFill>
                     <a:schemeClr val="accent1"/>
                   </a:solidFill>
@@ -24622,7 +24621,7 @@
             <a:lstStyle/>
             <a:p>
               <a:r>
-                <a:rPr lang="en-US" dirty="0">
+                <a:rPr lang="en-US">
                   <a:ln w="0"/>
                   <a:solidFill>
                     <a:schemeClr val="tx1"/>
@@ -24638,7 +24637,7 @@
                 <a:t>2</a:t>
               </a:r>
               <a:r>
-                <a:rPr lang="en-US" baseline="30000" dirty="0">
+                <a:rPr lang="en-US" baseline="30000">
                   <a:ln w="0"/>
                   <a:solidFill>
                     <a:schemeClr val="tx1"/>
@@ -24654,7 +24653,7 @@
                 <a:t>23</a:t>
               </a:r>
               <a:r>
-                <a:rPr lang="en-US" dirty="0">
+                <a:rPr lang="en-US">
                   <a:ln w="0"/>
                   <a:solidFill>
                     <a:schemeClr val="tx1"/>
@@ -24701,28 +24700,28 @@
           <a:lstStyle/>
           <a:p>
             <a:r>
-              <a:rPr lang="en-US" altLang="zh-CN" sz="1600" dirty="0">
+              <a:rPr lang="en-US" altLang="zh-CN" sz="1600">
                 <a:latin typeface="Arial"/>
                 <a:cs typeface="Arial"/>
               </a:rPr>
               <a:t>If exp==0, (0.F</a:t>
             </a:r>
             <a:r>
-              <a:rPr lang="en-US" altLang="zh-CN" sz="1600" baseline="-25000" dirty="0">
+              <a:rPr lang="en-US" altLang="zh-CN" sz="1600" baseline="-25000">
                 <a:latin typeface="Arial"/>
                 <a:cs typeface="Arial"/>
               </a:rPr>
               <a:t> </a:t>
             </a:r>
             <a:r>
-              <a:rPr lang="en-US" altLang="zh-CN" sz="1600" dirty="0">
+              <a:rPr lang="en-US" altLang="zh-CN" sz="1600">
                 <a:latin typeface="Arial"/>
                 <a:cs typeface="Arial"/>
               </a:rPr>
               <a:t>)*2</a:t>
             </a:r>
             <a:r>
-              <a:rPr lang="en-US" altLang="zh-CN" sz="1600" baseline="30000" dirty="0">
+              <a:rPr lang="en-US" altLang="zh-CN" sz="1600" baseline="30000">
                 <a:latin typeface="Arial"/>
                 <a:cs typeface="Arial"/>
               </a:rPr>
@@ -24954,7 +24953,7 @@
           <a:lstStyle/>
           <a:p>
             <a:r>
-              <a:rPr lang="en-US" dirty="0"/>
+              <a:rPr lang="en-US"/>
               <a:t>Floating Point lesson plan</a:t>
             </a:r>
           </a:p>
@@ -24982,7 +24981,7 @@
           <a:lstStyle/>
           <a:p>
             <a:r>
-              <a:rPr lang="en-US" dirty="0">
+              <a:rPr lang="en-US">
                 <a:solidFill>
                   <a:schemeClr val="tx1">
                     <a:lumMod val="50000"/>
@@ -24995,7 +24994,7 @@
           </a:p>
           <a:p>
             <a:r>
-              <a:rPr lang="en-US" dirty="0">
+              <a:rPr lang="en-US">
                 <a:solidFill>
                   <a:schemeClr val="tx1">
                     <a:lumMod val="50000"/>
@@ -25008,7 +25007,7 @@
           </a:p>
           <a:p>
             <a:r>
-              <a:rPr lang="en-US" dirty="0">
+              <a:rPr lang="en-US">
                 <a:solidFill>
                   <a:schemeClr val="tx1">
                     <a:lumMod val="50000"/>
@@ -25021,13 +25020,13 @@
           </a:p>
           <a:p>
             <a:r>
-              <a:rPr lang="en-US" dirty="0"/>
+              <a:rPr lang="en-US"/>
               <a:t>Rounding</a:t>
             </a:r>
           </a:p>
           <a:p>
             <a:r>
-              <a:rPr lang="en-US" dirty="0"/>
+              <a:rPr lang="en-US"/>
               <a:t>FP operations caveats</a:t>
             </a:r>
           </a:p>
@@ -25086,10 +25085,10 @@
           <a:lstStyle/>
           <a:p>
             <a:r>
-              <a:rPr kumimoji="1" lang="en-US" altLang="zh-CN" dirty="0"/>
+              <a:rPr kumimoji="1" lang="en-US" altLang="zh-CN"/>
               <a:t>FP: Rounding</a:t>
             </a:r>
-            <a:endParaRPr kumimoji="1" lang="zh-CN" altLang="en-US" dirty="0"/>
+            <a:endParaRPr kumimoji="1" lang="zh-CN" altLang="en-US"/>
           </a:p>
         </p:txBody>
       </p:sp>
@@ -25220,12 +25219,12 @@
               <a:buNone/>
             </a:pPr>
             <a:r>
-              <a:rPr kumimoji="1" lang="en-US" altLang="zh-CN" dirty="0">
+              <a:rPr kumimoji="1" lang="en-US" altLang="zh-CN">
                 <a:cs typeface="Verdana"/>
               </a:rPr>
               <a:t>What if the result of computation is at    ? </a:t>
             </a:r>
-            <a:endParaRPr kumimoji="1" lang="zh-CN" altLang="en-US" dirty="0">
+            <a:endParaRPr kumimoji="1" lang="zh-CN" altLang="en-US">
               <a:cs typeface="Verdana"/>
             </a:endParaRPr>
           </a:p>
@@ -25275,7 +25274,7 @@
           <a:lstStyle/>
           <a:p>
             <a:pPr algn="ctr"/>
-            <a:endParaRPr kumimoji="1" lang="zh-CN" altLang="en-US" dirty="0">
+            <a:endParaRPr kumimoji="1" lang="zh-CN" altLang="en-US">
               <a:ln>
                 <a:solidFill>
                   <a:srgbClr val="000000"/>
@@ -25424,7 +25423,7 @@
           <a:lstStyle/>
           <a:p>
             <a:pPr algn="ctr"/>
-            <a:endParaRPr kumimoji="1" lang="zh-CN" altLang="en-US" dirty="0">
+            <a:endParaRPr kumimoji="1" lang="zh-CN" altLang="en-US">
               <a:ln>
                 <a:solidFill>
                   <a:srgbClr val="000000"/>
@@ -25505,7 +25504,7 @@
           <a:lstStyle/>
           <a:p>
             <a:r>
-              <a:rPr lang="en-US" dirty="0"/>
+              <a:rPr lang="en-US"/>
               <a:t>Values that are represented precisely</a:t>
             </a:r>
           </a:p>
@@ -25663,27 +25662,27 @@
           <a:lstStyle/>
           <a:p>
             <a:r>
-              <a:rPr lang="en-US" sz="2400" dirty="0">
+              <a:rPr lang="en-US" sz="2400">
                 <a:latin typeface="+mj-lt"/>
               </a:rPr>
               <a:t>Rounding: </a:t>
             </a:r>
             <a:r>
-              <a:rPr kumimoji="1" lang="en-US" altLang="zh-CN" sz="2400" dirty="0">
+              <a:rPr kumimoji="1" lang="en-US" altLang="zh-CN" sz="2400">
                 <a:latin typeface="+mj-lt"/>
                 <a:cs typeface="Verdana"/>
               </a:rPr>
               <a:t>Use the “closest” representable value </a:t>
             </a:r>
             <a:r>
-              <a:rPr kumimoji="1" lang="en-US" altLang="zh-CN" sz="2400" i="1" dirty="0">
+              <a:rPr kumimoji="1" lang="en-US" altLang="zh-CN" sz="2400" i="1">
                 <a:latin typeface="+mj-lt"/>
                 <a:cs typeface="Verdana"/>
               </a:rPr>
               <a:t>x’</a:t>
             </a:r>
             <a:r>
-              <a:rPr kumimoji="1" lang="en-US" altLang="zh-CN" sz="2400" dirty="0">
+              <a:rPr kumimoji="1" lang="en-US" altLang="zh-CN" sz="2400">
                 <a:latin typeface="+mj-lt"/>
                 <a:cs typeface="Verdana"/>
               </a:rPr>
@@ -25691,7 +25690,7 @@
             </a:r>
           </a:p>
           <a:p>
-            <a:endParaRPr lang="en-US" dirty="0"/>
+            <a:endParaRPr lang="en-US"/>
           </a:p>
         </p:txBody>
       </p:sp>
@@ -25725,7 +25724,7 @@
           <a:p>
             <a:pPr lvl="1"/>
             <a:r>
-              <a:rPr kumimoji="1" lang="en-US" altLang="zh-CN" sz="2400" dirty="0">
+              <a:rPr kumimoji="1" lang="en-US" altLang="zh-CN" sz="2400">
                 <a:latin typeface="+mj-lt"/>
                 <a:cs typeface="Verdana"/>
               </a:rPr>
@@ -25738,7 +25737,7 @@
               <a:buChar char="•"/>
             </a:pPr>
             <a:r>
-              <a:rPr kumimoji="1" lang="en-US" altLang="zh-CN" sz="2400" dirty="0">
+              <a:rPr kumimoji="1" lang="en-US" altLang="zh-CN" sz="2400">
                 <a:latin typeface="+mj-lt"/>
                 <a:cs typeface="Verdana"/>
               </a:rPr>
@@ -25751,7 +25750,7 @@
               <a:buChar char="•"/>
             </a:pPr>
             <a:r>
-              <a:rPr kumimoji="1" lang="en-US" altLang="zh-CN" sz="2400" dirty="0">
+              <a:rPr kumimoji="1" lang="en-US" altLang="zh-CN" sz="2400">
                 <a:latin typeface="+mj-lt"/>
                 <a:cs typeface="Verdana"/>
               </a:rPr>
@@ -25764,7 +25763,7 @@
               <a:buChar char="•"/>
             </a:pPr>
             <a:r>
-              <a:rPr kumimoji="1" lang="en-US" altLang="zh-CN" sz="2400" dirty="0">
+              <a:rPr kumimoji="1" lang="en-US" altLang="zh-CN" sz="2400">
                 <a:latin typeface="+mj-lt"/>
                 <a:cs typeface="Verdana"/>
               </a:rPr>
@@ -25777,19 +25776,19 @@
               <a:buChar char="•"/>
             </a:pPr>
             <a:r>
-              <a:rPr kumimoji="1" lang="en-US" altLang="zh-CN" sz="2400" dirty="0">
+              <a:rPr kumimoji="1" lang="en-US" altLang="zh-CN" sz="2400">
                 <a:latin typeface="+mj-lt"/>
                 <a:cs typeface="Verdana"/>
               </a:rPr>
               <a:t>Round-to-nearest (Round-to-even in text book)</a:t>
             </a:r>
-            <a:endParaRPr kumimoji="1" lang="zh-CN" altLang="en-US" sz="2400" dirty="0">
+            <a:endParaRPr kumimoji="1" lang="zh-CN" altLang="en-US" sz="2400">
               <a:latin typeface="+mj-lt"/>
               <a:cs typeface="Verdana"/>
             </a:endParaRPr>
           </a:p>
           <a:p>
-            <a:endParaRPr lang="en-US" dirty="0"/>
+            <a:endParaRPr lang="en-US"/>
           </a:p>
         </p:txBody>
       </p:sp>
@@ -26069,10 +26068,10 @@
           <a:lstStyle/>
           <a:p>
             <a:r>
-              <a:rPr kumimoji="1" lang="en-US" altLang="zh-CN" dirty="0"/>
+              <a:rPr kumimoji="1" lang="en-US" altLang="zh-CN"/>
               <a:t>Round up vs. round down</a:t>
             </a:r>
-            <a:endParaRPr kumimoji="1" lang="zh-CN" altLang="en-US" dirty="0"/>
+            <a:endParaRPr kumimoji="1" lang="zh-CN" altLang="en-US"/>
           </a:p>
         </p:txBody>
       </p:sp>
@@ -26217,13 +26216,13 @@
             <a:lstStyle/>
             <a:p>
               <a:r>
-                <a:rPr kumimoji="1" lang="en-US" altLang="zh-CN" sz="1400" dirty="0">
+                <a:rPr kumimoji="1" lang="en-US" altLang="zh-CN" sz="1400">
                   <a:latin typeface="Verdana"/>
                   <a:cs typeface="Verdana"/>
                 </a:rPr>
                 <a:t>-0.875</a:t>
               </a:r>
-              <a:endParaRPr lang="zh-CN" altLang="en-US" sz="1400" dirty="0"/>
+              <a:endParaRPr lang="zh-CN" altLang="en-US" sz="1400"/>
             </a:p>
           </p:txBody>
         </p:sp>
@@ -26250,13 +26249,13 @@
             <a:lstStyle/>
             <a:p>
               <a:r>
-                <a:rPr kumimoji="1" lang="en-US" altLang="zh-CN" sz="1400" dirty="0">
+                <a:rPr kumimoji="1" lang="en-US" altLang="zh-CN" sz="1400">
                   <a:latin typeface="Verdana"/>
                   <a:cs typeface="Verdana"/>
                 </a:rPr>
                 <a:t>-0.75</a:t>
               </a:r>
-              <a:endParaRPr lang="zh-CN" altLang="en-US" sz="1400" dirty="0"/>
+              <a:endParaRPr lang="zh-CN" altLang="en-US" sz="1400"/>
             </a:p>
           </p:txBody>
         </p:sp>
@@ -26353,13 +26352,13 @@
             <a:lstStyle/>
             <a:p>
               <a:r>
-                <a:rPr kumimoji="1" lang="en-US" altLang="zh-CN" sz="1400" dirty="0">
+                <a:rPr kumimoji="1" lang="en-US" altLang="zh-CN" sz="1400">
                   <a:latin typeface="Verdana"/>
                   <a:cs typeface="Verdana"/>
                 </a:rPr>
                 <a:t>0.5</a:t>
               </a:r>
-              <a:endParaRPr lang="zh-CN" altLang="en-US" sz="1400" dirty="0"/>
+              <a:endParaRPr lang="zh-CN" altLang="en-US" sz="1400"/>
             </a:p>
           </p:txBody>
         </p:sp>
@@ -26453,13 +26452,13 @@
             <a:lstStyle/>
             <a:p>
               <a:r>
-                <a:rPr kumimoji="1" lang="en-US" altLang="zh-CN" sz="1400" dirty="0">
+                <a:rPr kumimoji="1" lang="en-US" altLang="zh-CN" sz="1400">
                   <a:latin typeface="Verdana"/>
                   <a:cs typeface="Verdana"/>
                 </a:rPr>
                 <a:t>0.625</a:t>
               </a:r>
-              <a:endParaRPr lang="zh-CN" altLang="en-US" sz="1400" dirty="0"/>
+              <a:endParaRPr lang="zh-CN" altLang="en-US" sz="1400"/>
             </a:p>
           </p:txBody>
         </p:sp>
@@ -26564,7 +26563,7 @@
           <a:lstStyle/>
           <a:p>
             <a:pPr algn="ctr"/>
-            <a:endParaRPr lang="en-US" dirty="0"/>
+            <a:endParaRPr lang="en-US"/>
           </a:p>
         </p:txBody>
       </p:sp>
@@ -26618,7 +26617,7 @@
           <a:lstStyle/>
           <a:p>
             <a:pPr algn="ctr"/>
-            <a:endParaRPr kumimoji="1" lang="zh-CN" altLang="en-US" dirty="0">
+            <a:endParaRPr kumimoji="1" lang="zh-CN" altLang="en-US">
               <a:ln>
                 <a:solidFill>
                   <a:srgbClr val="000000"/>
@@ -26815,55 +26814,55 @@
                 <a:buNone/>
               </a:pPr>
               <a:r>
-                <a:rPr kumimoji="1" lang="en-US" altLang="zh-CN" sz="2400" dirty="0">
+                <a:rPr kumimoji="1" lang="en-US" altLang="zh-CN" sz="2400">
                   <a:latin typeface="+mj-lt"/>
                   <a:cs typeface="Verdana"/>
                 </a:rPr>
                 <a:t>Round(x) = x</a:t>
               </a:r>
               <a:r>
-                <a:rPr kumimoji="1" lang="en-US" altLang="zh-CN" sz="2400" baseline="-25000" dirty="0">
+                <a:rPr kumimoji="1" lang="en-US" altLang="zh-CN" sz="2400" baseline="-25000">
                   <a:latin typeface="+mj-lt"/>
                   <a:cs typeface="Verdana"/>
                 </a:rPr>
                 <a:t>-</a:t>
               </a:r>
               <a:r>
-                <a:rPr kumimoji="1" lang="en-US" altLang="zh-CN" sz="4400" baseline="-25000" dirty="0">
+                <a:rPr kumimoji="1" lang="en-US" altLang="zh-CN" sz="4400" baseline="-25000">
                   <a:latin typeface="+mj-lt"/>
                   <a:cs typeface="Verdana"/>
                 </a:rPr>
                 <a:t> </a:t>
               </a:r>
               <a:r>
-                <a:rPr kumimoji="1" lang="en-US" altLang="zh-CN" dirty="0">
+                <a:rPr kumimoji="1" lang="en-US" altLang="zh-CN">
                   <a:latin typeface="+mj-lt"/>
                   <a:cs typeface="Verdana"/>
                 </a:rPr>
                 <a:t>(</a:t>
               </a:r>
               <a:r>
-                <a:rPr kumimoji="1" lang="en-US" altLang="zh-CN" sz="2400" dirty="0">
+                <a:rPr kumimoji="1" lang="en-US" altLang="zh-CN" sz="2400">
                   <a:latin typeface="+mj-lt"/>
                   <a:cs typeface="Verdana"/>
                 </a:rPr>
                 <a:t>x</a:t>
               </a:r>
               <a:r>
-                <a:rPr kumimoji="1" lang="en-US" altLang="zh-CN" baseline="-25000" dirty="0">
+                <a:rPr kumimoji="1" lang="en-US" altLang="zh-CN" baseline="-25000">
                   <a:latin typeface="+mj-lt"/>
                   <a:cs typeface="Verdana"/>
                 </a:rPr>
                 <a:t>-</a:t>
               </a:r>
               <a:r>
-                <a:rPr kumimoji="1" lang="en-US" altLang="zh-CN" sz="2400" dirty="0">
+                <a:rPr kumimoji="1" lang="en-US" altLang="zh-CN" sz="2400">
                   <a:latin typeface="+mj-lt"/>
                   <a:cs typeface="Verdana"/>
                 </a:rPr>
                 <a:t>&lt;= x)</a:t>
               </a:r>
-              <a:endParaRPr kumimoji="1" lang="en-US" altLang="zh-CN" sz="2400" baseline="-25000" dirty="0">
+              <a:endParaRPr kumimoji="1" lang="en-US" altLang="zh-CN" sz="2400" baseline="-25000">
                 <a:latin typeface="+mj-lt"/>
                 <a:cs typeface="Verdana"/>
               </a:endParaRPr>
@@ -26940,7 +26939,7 @@
             <a:lstStyle/>
             <a:p>
               <a:r>
-                <a:rPr lang="en-US" sz="2400" dirty="0"/>
+                <a:rPr lang="en-US" sz="2400"/>
                 <a:t>Round down rounds to the left</a:t>
               </a:r>
             </a:p>
@@ -26976,7 +26975,7 @@
           <a:lstStyle/>
           <a:p>
             <a:r>
-              <a:rPr lang="en-US" dirty="0"/>
+              <a:rPr lang="en-US"/>
               <a:t>0</a:t>
             </a:r>
           </a:p>
@@ -27011,7 +27010,7 @@
           <a:lstStyle/>
           <a:p>
             <a:r>
-              <a:rPr lang="en-US" sz="2400" dirty="0"/>
+              <a:rPr lang="en-US" sz="2400"/>
               <a:t>Round up rounds to the right</a:t>
             </a:r>
           </a:p>
@@ -27088,36 +27087,36 @@
               <a:buNone/>
             </a:pPr>
             <a:r>
-              <a:rPr kumimoji="1" lang="en-US" altLang="zh-CN" sz="2400" dirty="0">
+              <a:rPr kumimoji="1" lang="en-US" altLang="zh-CN" sz="2400">
                 <a:cs typeface="Verdana"/>
               </a:rPr>
               <a:t>Round(x) = x</a:t>
             </a:r>
             <a:r>
-              <a:rPr kumimoji="1" lang="en-US" altLang="zh-CN" baseline="-25000" dirty="0">
+              <a:rPr kumimoji="1" lang="en-US" altLang="zh-CN" baseline="-25000">
                 <a:cs typeface="Verdana"/>
               </a:rPr>
               <a:t>+     </a:t>
             </a:r>
             <a:r>
-              <a:rPr kumimoji="1" lang="en-US" altLang="zh-CN" sz="2400" dirty="0">
+              <a:rPr kumimoji="1" lang="en-US" altLang="zh-CN" sz="2400">
                 <a:cs typeface="Verdana"/>
               </a:rPr>
               <a:t>(x</a:t>
             </a:r>
             <a:r>
-              <a:rPr kumimoji="1" lang="en-US" altLang="zh-CN" sz="2400" baseline="-25000" dirty="0">
+              <a:rPr kumimoji="1" lang="en-US" altLang="zh-CN" sz="2400" baseline="-25000">
                 <a:cs typeface="Verdana"/>
               </a:rPr>
               <a:t>+</a:t>
             </a:r>
             <a:r>
-              <a:rPr kumimoji="1" lang="en-US" altLang="zh-CN" sz="2400" dirty="0">
+              <a:rPr kumimoji="1" lang="en-US" altLang="zh-CN" sz="2400">
                 <a:cs typeface="Verdana"/>
               </a:rPr>
               <a:t>&gt;= x)</a:t>
             </a:r>
-            <a:endParaRPr kumimoji="1" lang="en-US" altLang="zh-CN" sz="2400" baseline="-25000" dirty="0">
+            <a:endParaRPr kumimoji="1" lang="en-US" altLang="zh-CN" sz="2400" baseline="-25000">
               <a:cs typeface="Verdana"/>
             </a:endParaRPr>
           </a:p>
@@ -27125,7 +27124,7 @@
             <a:pPr marL="0" indent="0">
               <a:buNone/>
             </a:pPr>
-            <a:endParaRPr kumimoji="1" lang="en-US" altLang="zh-CN" sz="4800" baseline="-25000" dirty="0">
+            <a:endParaRPr kumimoji="1" lang="en-US" altLang="zh-CN" sz="4800" baseline="-25000">
               <a:latin typeface="Verdana"/>
               <a:cs typeface="Verdana"/>
             </a:endParaRPr>
@@ -27134,7 +27133,7 @@
             <a:pPr marL="0" indent="0">
               <a:buNone/>
             </a:pPr>
-            <a:endParaRPr kumimoji="1" lang="en-US" altLang="zh-CN" baseline="-25000" dirty="0">
+            <a:endParaRPr kumimoji="1" lang="en-US" altLang="zh-CN" baseline="-25000">
               <a:latin typeface="Verdana"/>
               <a:cs typeface="Verdana"/>
             </a:endParaRPr>
@@ -27369,10 +27368,10 @@
           <a:lstStyle/>
           <a:p>
             <a:r>
-              <a:rPr kumimoji="1" lang="en-US" altLang="zh-CN" dirty="0"/>
+              <a:rPr kumimoji="1" lang="en-US" altLang="zh-CN"/>
               <a:t>Round towards zero</a:t>
             </a:r>
-            <a:endParaRPr kumimoji="1" lang="zh-CN" altLang="en-US" dirty="0"/>
+            <a:endParaRPr kumimoji="1" lang="zh-CN" altLang="en-US"/>
           </a:p>
         </p:txBody>
       </p:sp>
@@ -27511,13 +27510,13 @@
             <a:lstStyle/>
             <a:p>
               <a:r>
-                <a:rPr kumimoji="1" lang="en-US" altLang="zh-CN" sz="1400" dirty="0">
+                <a:rPr kumimoji="1" lang="en-US" altLang="zh-CN" sz="1400">
                   <a:latin typeface="Verdana"/>
                   <a:cs typeface="Verdana"/>
                 </a:rPr>
                 <a:t>-0.875</a:t>
               </a:r>
-              <a:endParaRPr lang="zh-CN" altLang="en-US" sz="1400" dirty="0"/>
+              <a:endParaRPr lang="zh-CN" altLang="en-US" sz="1400"/>
             </a:p>
           </p:txBody>
         </p:sp>
@@ -27544,13 +27543,13 @@
             <a:lstStyle/>
             <a:p>
               <a:r>
-                <a:rPr kumimoji="1" lang="en-US" altLang="zh-CN" sz="1400" dirty="0">
+                <a:rPr kumimoji="1" lang="en-US" altLang="zh-CN" sz="1400">
                   <a:latin typeface="Verdana"/>
                   <a:cs typeface="Verdana"/>
                 </a:rPr>
                 <a:t>-0.75</a:t>
               </a:r>
-              <a:endParaRPr lang="zh-CN" altLang="en-US" sz="1400" dirty="0"/>
+              <a:endParaRPr lang="zh-CN" altLang="en-US" sz="1400"/>
             </a:p>
           </p:txBody>
         </p:sp>
@@ -27647,13 +27646,13 @@
             <a:lstStyle/>
             <a:p>
               <a:r>
-                <a:rPr kumimoji="1" lang="en-US" altLang="zh-CN" sz="1400" dirty="0">
+                <a:rPr kumimoji="1" lang="en-US" altLang="zh-CN" sz="1400">
                   <a:latin typeface="Verdana"/>
                   <a:cs typeface="Verdana"/>
                 </a:rPr>
                 <a:t>0.5</a:t>
               </a:r>
-              <a:endParaRPr lang="zh-CN" altLang="en-US" sz="1400" dirty="0"/>
+              <a:endParaRPr lang="zh-CN" altLang="en-US" sz="1400"/>
             </a:p>
           </p:txBody>
         </p:sp>
@@ -27747,13 +27746,13 @@
             <a:lstStyle/>
             <a:p>
               <a:r>
-                <a:rPr kumimoji="1" lang="en-US" altLang="zh-CN" sz="1400" dirty="0">
+                <a:rPr kumimoji="1" lang="en-US" altLang="zh-CN" sz="1400">
                   <a:latin typeface="Verdana"/>
                   <a:cs typeface="Verdana"/>
                 </a:rPr>
                 <a:t>0.625</a:t>
               </a:r>
-              <a:endParaRPr lang="zh-CN" altLang="en-US" sz="1400" dirty="0"/>
+              <a:endParaRPr lang="zh-CN" altLang="en-US" sz="1400"/>
             </a:p>
           </p:txBody>
         </p:sp>
@@ -27858,7 +27857,7 @@
           <a:lstStyle/>
           <a:p>
             <a:pPr algn="ctr"/>
-            <a:endParaRPr lang="en-US" dirty="0"/>
+            <a:endParaRPr lang="en-US"/>
           </a:p>
         </p:txBody>
       </p:sp>
@@ -28026,27 +28025,27 @@
               <a:buNone/>
             </a:pPr>
             <a:r>
-              <a:rPr kumimoji="1" lang="en-US" altLang="zh-CN" sz="2400" dirty="0">
+              <a:rPr kumimoji="1" lang="en-US" altLang="zh-CN" sz="2400">
                 <a:latin typeface="+mj-lt"/>
                 <a:cs typeface="Verdana"/>
               </a:rPr>
               <a:t>Round(x) = x</a:t>
             </a:r>
             <a:r>
-              <a:rPr kumimoji="1" lang="en-US" altLang="zh-CN" sz="2400" baseline="-25000" dirty="0">
+              <a:rPr kumimoji="1" lang="en-US" altLang="zh-CN" sz="2400" baseline="-25000">
                 <a:latin typeface="+mj-lt"/>
                 <a:cs typeface="Verdana"/>
               </a:rPr>
               <a:t>- </a:t>
             </a:r>
             <a:r>
-              <a:rPr kumimoji="1" lang="en-US" altLang="zh-CN" sz="2400" dirty="0">
+              <a:rPr kumimoji="1" lang="en-US" altLang="zh-CN" sz="2400">
                 <a:latin typeface="+mj-lt"/>
                 <a:cs typeface="Verdana"/>
               </a:rPr>
               <a:t>if x &lt; 0</a:t>
             </a:r>
-            <a:endParaRPr kumimoji="1" lang="en-US" altLang="zh-CN" sz="2400" baseline="-25000" dirty="0">
+            <a:endParaRPr kumimoji="1" lang="en-US" altLang="zh-CN" sz="2400" baseline="-25000">
               <a:latin typeface="+mj-lt"/>
               <a:cs typeface="Verdana"/>
             </a:endParaRPr>
@@ -28103,7 +28102,7 @@
           <a:lstStyle/>
           <a:p>
             <a:pPr algn="ctr"/>
-            <a:endParaRPr kumimoji="1" lang="zh-CN" altLang="en-US" dirty="0">
+            <a:endParaRPr kumimoji="1" lang="zh-CN" altLang="en-US">
               <a:ln>
                 <a:solidFill>
                   <a:srgbClr val="000000"/>
@@ -28186,7 +28185,7 @@
           <a:lstStyle/>
           <a:p>
             <a:r>
-              <a:rPr lang="en-US" sz="2400" dirty="0"/>
+              <a:rPr lang="en-US" sz="2400"/>
               <a:t>Rounds to the left if x &gt;0</a:t>
             </a:r>
           </a:p>
@@ -28221,7 +28220,7 @@
           <a:lstStyle/>
           <a:p>
             <a:r>
-              <a:rPr lang="en-US" sz="2400" dirty="0"/>
+              <a:rPr lang="en-US" sz="2400"/>
               <a:t>Rounds to the right if x &lt; 0</a:t>
             </a:r>
           </a:p>
@@ -28298,24 +28297,24 @@
               <a:buNone/>
             </a:pPr>
             <a:r>
-              <a:rPr kumimoji="1" lang="en-US" altLang="zh-CN" sz="2400" dirty="0">
+              <a:rPr kumimoji="1" lang="en-US" altLang="zh-CN" sz="2400">
                 <a:cs typeface="Verdana"/>
               </a:rPr>
               <a:t>Round(x) = x</a:t>
             </a:r>
             <a:r>
-              <a:rPr kumimoji="1" lang="en-US" altLang="zh-CN" baseline="-25000" dirty="0">
+              <a:rPr kumimoji="1" lang="en-US" altLang="zh-CN" baseline="-25000">
                 <a:cs typeface="Verdana"/>
               </a:rPr>
               <a:t>+     </a:t>
             </a:r>
             <a:r>
-              <a:rPr kumimoji="1" lang="en-US" altLang="zh-CN" sz="2400" dirty="0">
+              <a:rPr kumimoji="1" lang="en-US" altLang="zh-CN" sz="2400">
                 <a:cs typeface="Verdana"/>
               </a:rPr>
               <a:t>if x &lt; 0</a:t>
             </a:r>
-            <a:endParaRPr kumimoji="1" lang="en-US" altLang="zh-CN" sz="4800" baseline="-25000" dirty="0">
+            <a:endParaRPr kumimoji="1" lang="en-US" altLang="zh-CN" sz="4800" baseline="-25000">
               <a:latin typeface="Verdana"/>
               <a:cs typeface="Verdana"/>
             </a:endParaRPr>
@@ -28324,7 +28323,7 @@
             <a:pPr marL="0" indent="0">
               <a:buNone/>
             </a:pPr>
-            <a:endParaRPr kumimoji="1" lang="en-US" altLang="zh-CN" baseline="-25000" dirty="0">
+            <a:endParaRPr kumimoji="1" lang="en-US" altLang="zh-CN" baseline="-25000">
               <a:latin typeface="Verdana"/>
               <a:cs typeface="Verdana"/>
             </a:endParaRPr>
@@ -28360,7 +28359,7 @@
           <a:lstStyle/>
           <a:p>
             <a:r>
-              <a:rPr lang="en-US" dirty="0"/>
+              <a:rPr lang="en-US"/>
               <a:t>0</a:t>
             </a:r>
           </a:p>
@@ -28416,7 +28415,7 @@
           <a:lstStyle/>
           <a:p>
             <a:pPr algn="ctr"/>
-            <a:endParaRPr kumimoji="1" lang="zh-CN" altLang="en-US" dirty="0">
+            <a:endParaRPr kumimoji="1" lang="zh-CN" altLang="en-US">
               <a:ln>
                 <a:solidFill>
                   <a:srgbClr val="000000"/>
@@ -28805,10 +28804,10 @@
           <a:lstStyle/>
           <a:p>
             <a:r>
-              <a:rPr kumimoji="1" lang="en-US" altLang="zh-CN" dirty="0"/>
+              <a:rPr kumimoji="1" lang="en-US" altLang="zh-CN"/>
               <a:t>Round to nearest; ties to even </a:t>
             </a:r>
-            <a:endParaRPr kumimoji="1" lang="zh-CN" altLang="en-US" dirty="0"/>
+            <a:endParaRPr kumimoji="1" lang="zh-CN" altLang="en-US"/>
           </a:p>
         </p:txBody>
       </p:sp>
@@ -28947,13 +28946,13 @@
             <a:lstStyle/>
             <a:p>
               <a:r>
-                <a:rPr kumimoji="1" lang="en-US" altLang="zh-CN" sz="1400" dirty="0">
+                <a:rPr kumimoji="1" lang="en-US" altLang="zh-CN" sz="1400">
                   <a:latin typeface="Verdana"/>
                   <a:cs typeface="Verdana"/>
                 </a:rPr>
                 <a:t>-0.875</a:t>
               </a:r>
-              <a:endParaRPr lang="zh-CN" altLang="en-US" sz="1400" dirty="0"/>
+              <a:endParaRPr lang="zh-CN" altLang="en-US" sz="1400"/>
             </a:p>
           </p:txBody>
         </p:sp>
@@ -28980,13 +28979,13 @@
             <a:lstStyle/>
             <a:p>
               <a:r>
-                <a:rPr kumimoji="1" lang="en-US" altLang="zh-CN" sz="1400" dirty="0">
+                <a:rPr kumimoji="1" lang="en-US" altLang="zh-CN" sz="1400">
                   <a:latin typeface="Verdana"/>
                   <a:cs typeface="Verdana"/>
                 </a:rPr>
                 <a:t>-0.75</a:t>
               </a:r>
-              <a:endParaRPr lang="zh-CN" altLang="en-US" sz="1400" dirty="0"/>
+              <a:endParaRPr lang="zh-CN" altLang="en-US" sz="1400"/>
             </a:p>
           </p:txBody>
         </p:sp>
@@ -29083,13 +29082,13 @@
             <a:lstStyle/>
             <a:p>
               <a:r>
-                <a:rPr kumimoji="1" lang="en-US" altLang="zh-CN" sz="1400" dirty="0">
+                <a:rPr kumimoji="1" lang="en-US" altLang="zh-CN" sz="1400">
                   <a:latin typeface="Verdana"/>
                   <a:cs typeface="Verdana"/>
                 </a:rPr>
                 <a:t>0.5</a:t>
               </a:r>
-              <a:endParaRPr lang="zh-CN" altLang="en-US" sz="1400" dirty="0"/>
+              <a:endParaRPr lang="zh-CN" altLang="en-US" sz="1400"/>
             </a:p>
           </p:txBody>
         </p:sp>
@@ -29183,13 +29182,13 @@
             <a:lstStyle/>
             <a:p>
               <a:r>
-                <a:rPr kumimoji="1" lang="en-US" altLang="zh-CN" sz="1400" dirty="0">
+                <a:rPr kumimoji="1" lang="en-US" altLang="zh-CN" sz="1400">
                   <a:latin typeface="Verdana"/>
                   <a:cs typeface="Verdana"/>
                 </a:rPr>
                 <a:t>0.625</a:t>
               </a:r>
-              <a:endParaRPr lang="zh-CN" altLang="en-US" sz="1400" dirty="0"/>
+              <a:endParaRPr lang="zh-CN" altLang="en-US" sz="1400"/>
             </a:p>
           </p:txBody>
         </p:sp>
@@ -29294,7 +29293,7 @@
           <a:lstStyle/>
           <a:p>
             <a:pPr algn="ctr"/>
-            <a:endParaRPr lang="en-US" dirty="0"/>
+            <a:endParaRPr lang="en-US"/>
           </a:p>
         </p:txBody>
       </p:sp>
@@ -29348,7 +29347,7 @@
           <a:lstStyle/>
           <a:p>
             <a:pPr algn="ctr"/>
-            <a:endParaRPr kumimoji="1" lang="zh-CN" altLang="en-US" dirty="0">
+            <a:endParaRPr kumimoji="1" lang="zh-CN" altLang="en-US">
               <a:ln>
                 <a:solidFill>
                   <a:srgbClr val="000000"/>
@@ -29431,19 +29430,19 @@
           <a:lstStyle/>
           <a:p>
             <a:r>
-              <a:rPr lang="en-US" sz="2400" dirty="0"/>
+              <a:rPr lang="en-US" sz="2400"/>
               <a:t>Round to the right if x</a:t>
             </a:r>
             <a:r>
-              <a:rPr lang="en-US" sz="2400" baseline="-25000" dirty="0"/>
+              <a:rPr lang="en-US" sz="2400" baseline="-25000"/>
               <a:t>+</a:t>
             </a:r>
             <a:r>
-              <a:rPr lang="en-US" sz="2400" dirty="0"/>
+              <a:rPr lang="en-US" sz="2400"/>
               <a:t> is nearer to x than x</a:t>
             </a:r>
             <a:r>
-              <a:rPr lang="en-US" sz="2400" baseline="-25000" dirty="0"/>
+              <a:rPr lang="en-US" sz="2400" baseline="-25000"/>
               <a:t>-</a:t>
             </a:r>
           </a:p>
@@ -29519,7 +29518,7 @@
           <a:lstStyle/>
           <a:p>
             <a:r>
-              <a:rPr lang="en-US" dirty="0"/>
+              <a:rPr lang="en-US"/>
               <a:t>0</a:t>
             </a:r>
           </a:p>
@@ -29575,7 +29574,7 @@
           <a:lstStyle/>
           <a:p>
             <a:pPr algn="ctr"/>
-            <a:endParaRPr kumimoji="1" lang="zh-CN" altLang="en-US" dirty="0">
+            <a:endParaRPr kumimoji="1" lang="zh-CN" altLang="en-US">
               <a:ln>
                 <a:solidFill>
                   <a:srgbClr val="000000"/>
@@ -29617,19 +29616,19 @@
           <a:lstStyle/>
           <a:p>
             <a:r>
-              <a:rPr lang="en-US" sz="2400" dirty="0"/>
+              <a:rPr lang="en-US" sz="2400"/>
               <a:t>Round to the left if x</a:t>
             </a:r>
             <a:r>
-              <a:rPr lang="en-US" sz="2400" baseline="-25000" dirty="0"/>
+              <a:rPr lang="en-US" sz="2400" baseline="-25000"/>
               <a:t>-</a:t>
             </a:r>
             <a:r>
-              <a:rPr lang="en-US" sz="2400" dirty="0"/>
+              <a:rPr lang="en-US" sz="2400"/>
               <a:t> is nearer to x than x</a:t>
             </a:r>
             <a:r>
-              <a:rPr lang="en-US" sz="2400" baseline="-25000" dirty="0"/>
+              <a:rPr lang="en-US" sz="2400" baseline="-25000"/>
               <a:t>+</a:t>
             </a:r>
           </a:p>
@@ -29663,7 +29662,7 @@
           <a:lstStyle/>
           <a:p>
             <a:r>
-              <a:rPr lang="en-US" altLang="zh-CN" sz="3600" baseline="30000" dirty="0">
+              <a:rPr lang="en-US" altLang="zh-CN" sz="3600" baseline="30000">
                 <a:solidFill>
                   <a:srgbClr val="FF0000"/>
                 </a:solidFill>
@@ -30044,14 +30043,14 @@
           <a:lstStyle/>
           <a:p>
             <a:r>
-              <a:rPr kumimoji="1" lang="en-US" altLang="zh-CN" dirty="0">
+              <a:rPr kumimoji="1" lang="en-US" altLang="zh-CN">
                 <a:solidFill>
                   <a:srgbClr val="0000FF"/>
                 </a:solidFill>
               </a:rPr>
               <a:t>How does CPU know if some 4-byte value should be interpreted as IEEE FP or integers?  </a:t>
             </a:r>
-            <a:endParaRPr kumimoji="1" lang="zh-CN" altLang="en-US" dirty="0">
+            <a:endParaRPr kumimoji="1" lang="zh-CN" altLang="en-US">
               <a:solidFill>
                 <a:srgbClr val="0000FF"/>
               </a:solidFill>
@@ -30083,15 +30082,15 @@
               <a:buNone/>
             </a:pPr>
             <a:r>
-              <a:rPr kumimoji="1" lang="en-US" altLang="zh-CN" dirty="0"/>
+              <a:rPr kumimoji="1" lang="en-US" altLang="zh-CN"/>
               <a:t>CPU uses separate registers for floating point and </a:t>
             </a:r>
             <a:r>
-              <a:rPr kumimoji="1" lang="en-US" altLang="zh-CN" dirty="0" err="1"/>
+              <a:rPr kumimoji="1" lang="en-US" altLang="zh-CN" err="1"/>
               <a:t>ints</a:t>
             </a:r>
             <a:r>
-              <a:rPr kumimoji="1" lang="en-US" altLang="zh-CN" dirty="0"/>
+              <a:rPr kumimoji="1" lang="en-US" altLang="zh-CN"/>
               <a:t>.</a:t>
             </a:r>
           </a:p>
@@ -30100,10 +30099,10 @@
               <a:buNone/>
             </a:pPr>
             <a:r>
-              <a:rPr kumimoji="1" lang="en-US" altLang="zh-CN" dirty="0"/>
+              <a:rPr kumimoji="1" lang="en-US" altLang="zh-CN"/>
               <a:t>CPU uses different instructions for floating points and int operations.</a:t>
             </a:r>
-            <a:endParaRPr kumimoji="1" lang="zh-CN" altLang="en-US" dirty="0"/>
+            <a:endParaRPr kumimoji="1" lang="zh-CN" altLang="en-US"/>
           </a:p>
         </p:txBody>
       </p:sp>
@@ -30296,7 +30295,7 @@
           <a:lstStyle/>
           <a:p>
             <a:r>
-              <a:rPr lang="en-US" dirty="0"/>
+              <a:rPr lang="en-US"/>
               <a:t>Floating Point lesson plan</a:t>
             </a:r>
           </a:p>
@@ -30324,7 +30323,7 @@
           <a:lstStyle/>
           <a:p>
             <a:r>
-              <a:rPr lang="en-US" dirty="0">
+              <a:rPr lang="en-US">
                 <a:solidFill>
                   <a:schemeClr val="tx1">
                     <a:lumMod val="50000"/>
@@ -30337,7 +30336,7 @@
           </a:p>
           <a:p>
             <a:r>
-              <a:rPr lang="en-US" dirty="0">
+              <a:rPr lang="en-US">
                 <a:solidFill>
                   <a:schemeClr val="tx1">
                     <a:lumMod val="50000"/>
@@ -30350,7 +30349,7 @@
           </a:p>
           <a:p>
             <a:r>
-              <a:rPr lang="en-US" dirty="0">
+              <a:rPr lang="en-US">
                 <a:solidFill>
                   <a:schemeClr val="tx1">
                     <a:lumMod val="50000"/>
@@ -30363,7 +30362,7 @@
           </a:p>
           <a:p>
             <a:r>
-              <a:rPr lang="en-US" dirty="0">
+              <a:rPr lang="en-US">
                 <a:solidFill>
                   <a:schemeClr val="bg1">
                     <a:lumMod val="50000"/>
@@ -30375,7 +30374,7 @@
           </a:p>
           <a:p>
             <a:r>
-              <a:rPr lang="en-US" dirty="0"/>
+              <a:rPr lang="en-US"/>
               <a:t>FP operations caveats</a:t>
             </a:r>
           </a:p>
@@ -30427,7 +30426,7 @@
           <a:lstStyle/>
           <a:p>
             <a:r>
-              <a:rPr lang="en-US" dirty="0"/>
+              <a:rPr lang="en-US"/>
               <a:t>Floating point operations</a:t>
             </a:r>
           </a:p>
@@ -30464,15 +30463,7 @@
             <a:pPr lvl="1"/>
             <a:r>
               <a:rPr lang="en-US" dirty="0"/>
-              <a:t>Invalid operation: 0/0, </a:t>
-            </a:r>
-            <a:r>
-              <a:rPr lang="en-US" dirty="0" err="1"/>
-              <a:t>sqrt</a:t>
-            </a:r>
-            <a:r>
-              <a:rPr lang="en-US" dirty="0"/>
-              <a:t>(-1), </a:t>
+              <a:t>Invalid operation: 0/0, sqrt(-1), </a:t>
             </a:r>
             <a:r>
               <a:rPr lang="en-US" dirty="0">
@@ -30513,22 +30504,14 @@
             <a:pPr lvl="1"/>
             <a:r>
               <a:rPr lang="en-US" dirty="0"/>
-              <a:t>Underflows: 0 &lt; result &lt; smallest </a:t>
-            </a:r>
-            <a:r>
-              <a:rPr lang="en-US" dirty="0" err="1"/>
-              <a:t>denormalized</a:t>
-            </a:r>
+              <a:t>Underflows: 0 &lt; result &lt; smallest denormalized value</a:t>
+            </a:r>
+          </a:p>
+          <a:p>
+            <a:pPr lvl="1"/>
             <a:r>
               <a:rPr lang="en-US" dirty="0"/>
-              <a:t> value</a:t>
-            </a:r>
-          </a:p>
-          <a:p>
-            <a:pPr lvl="1"/>
-            <a:r>
-              <a:rPr lang="en-US" dirty="0"/>
-              <a:t>Inexact: round it!</a:t>
+              <a:t>Inexact: rounded</a:t>
             </a:r>
           </a:p>
           <a:p>
@@ -30971,10 +30954,10 @@
           <a:lstStyle/>
           <a:p>
             <a:r>
-              <a:rPr kumimoji="1" lang="en-US" altLang="zh-CN" dirty="0"/>
+              <a:rPr kumimoji="1" lang="en-US" altLang="zh-CN"/>
               <a:t>Represent real numbers: the decimal way</a:t>
             </a:r>
-            <a:endParaRPr kumimoji="1" lang="zh-CN" altLang="en-US" dirty="0"/>
+            <a:endParaRPr kumimoji="1" lang="zh-CN" altLang="en-US"/>
           </a:p>
         </p:txBody>
       </p:sp>
@@ -31025,14 +31008,14 @@
                     <a:lstStyle/>
                     <a:p>
                       <a:r>
-                        <a:rPr lang="en-US" altLang="zh-CN" sz="2800" dirty="0">
+                        <a:rPr lang="en-US" altLang="zh-CN" sz="2800">
                           <a:solidFill>
                             <a:schemeClr val="bg1"/>
                           </a:solidFill>
                         </a:rPr>
                         <a:t>Real Number</a:t>
                       </a:r>
-                      <a:endParaRPr lang="zh-CN" altLang="en-US" sz="2800" dirty="0">
+                      <a:endParaRPr lang="zh-CN" altLang="en-US" sz="2800">
                         <a:solidFill>
                           <a:schemeClr val="bg1"/>
                         </a:solidFill>
@@ -31049,10 +31032,10 @@
                     <a:lstStyle/>
                     <a:p>
                       <a:r>
-                        <a:rPr lang="en-US" altLang="zh-CN" sz="2800" dirty="0"/>
+                        <a:rPr lang="en-US" altLang="zh-CN" sz="2800"/>
                         <a:t>Decimal Representation</a:t>
                       </a:r>
-                      <a:endParaRPr lang="zh-CN" altLang="en-US" sz="2800" dirty="0">
+                      <a:endParaRPr lang="zh-CN" altLang="en-US" sz="2800">
                         <a:latin typeface="Verdana"/>
                         <a:cs typeface="Verdana"/>
                       </a:endParaRPr>
@@ -31090,14 +31073,14 @@
                         <a:defRPr/>
                       </a:pPr>
                       <a:r>
-                        <a:rPr lang="en-US" altLang="zh-CN" sz="2400" b="0" dirty="0"/>
+                        <a:rPr lang="en-US" altLang="zh-CN" sz="2400" b="0"/>
                         <a:t>11</a:t>
                       </a:r>
                       <a:r>
-                        <a:rPr lang="en-US" altLang="zh-CN" sz="2400" b="0" baseline="0" dirty="0"/>
+                        <a:rPr lang="en-US" altLang="zh-CN" sz="2400" b="0" baseline="0"/>
                         <a:t> / 2</a:t>
                       </a:r>
-                      <a:endParaRPr lang="en-US" altLang="zh-CN" sz="2400" b="0" dirty="0">
+                      <a:endParaRPr lang="en-US" altLang="zh-CN" sz="2400" b="0">
                         <a:latin typeface="Verdana"/>
                         <a:cs typeface="Verdana"/>
                       </a:endParaRPr>
@@ -31111,14 +31094,14 @@
                     <a:lstStyle/>
                     <a:p>
                       <a:r>
-                        <a:rPr lang="en-US" altLang="zh-CN" sz="2400" dirty="0"/>
+                        <a:rPr lang="en-US" altLang="zh-CN" sz="2400"/>
                         <a:t>(5.5)</a:t>
                       </a:r>
                       <a:r>
-                        <a:rPr lang="en-US" altLang="zh-CN" sz="2400" baseline="-25000" dirty="0"/>
+                        <a:rPr lang="en-US" altLang="zh-CN" sz="2400" baseline="-25000"/>
                         <a:t>10</a:t>
                       </a:r>
-                      <a:endParaRPr lang="zh-CN" altLang="en-US" sz="2400" baseline="-25000" dirty="0">
+                      <a:endParaRPr lang="zh-CN" altLang="en-US" sz="2400" baseline="-25000">
                         <a:latin typeface="Verdana"/>
                         <a:cs typeface="Verdana"/>
                       </a:endParaRPr>
@@ -31156,10 +31139,10 @@
                         <a:defRPr/>
                       </a:pPr>
                       <a:r>
-                        <a:rPr lang="en-US" altLang="zh-CN" sz="2400" b="0" dirty="0"/>
+                        <a:rPr lang="en-US" altLang="zh-CN" sz="2400" b="0"/>
                         <a:t>1 / 3</a:t>
                       </a:r>
-                      <a:endParaRPr lang="en-US" altLang="zh-CN" sz="2400" b="0" dirty="0">
+                      <a:endParaRPr lang="en-US" altLang="zh-CN" sz="2400" b="0">
                         <a:latin typeface="Verdana"/>
                         <a:cs typeface="Verdana"/>
                       </a:endParaRPr>
@@ -31173,14 +31156,14 @@
                     <a:lstStyle/>
                     <a:p>
                       <a:r>
-                        <a:rPr lang="en-US" altLang="zh-CN" sz="2400" baseline="0" dirty="0"/>
+                        <a:rPr lang="en-US" altLang="zh-CN" sz="2400" baseline="0"/>
                         <a:t>(0.333...)</a:t>
                       </a:r>
                       <a:r>
-                        <a:rPr lang="en-US" altLang="zh-CN" sz="2400" baseline="-25000" dirty="0"/>
+                        <a:rPr lang="en-US" altLang="zh-CN" sz="2400" baseline="-25000"/>
                         <a:t>10</a:t>
                       </a:r>
-                      <a:endParaRPr lang="en-US" altLang="zh-CN" sz="2400" baseline="-25000" dirty="0">
+                      <a:endParaRPr lang="en-US" altLang="zh-CN" sz="2400" baseline="-25000">
                         <a:latin typeface="Verdana"/>
                         <a:cs typeface="Verdana"/>
                       </a:endParaRPr>
@@ -31218,10 +31201,10 @@
                         <a:defRPr/>
                       </a:pPr>
                       <a:r>
-                        <a:rPr lang="en-US" altLang="zh-CN" sz="2400" b="0" dirty="0"/>
+                        <a:rPr lang="en-US" altLang="zh-CN" sz="2400" b="0"/>
                         <a:t>√2</a:t>
                       </a:r>
-                      <a:endParaRPr lang="en-US" altLang="zh-CN" sz="2400" b="0" dirty="0">
+                      <a:endParaRPr lang="en-US" altLang="zh-CN" sz="2400" b="0">
                         <a:latin typeface="Verdana"/>
                         <a:cs typeface="Verdana"/>
                       </a:endParaRPr>
@@ -31235,26 +31218,26 @@
                     <a:lstStyle/>
                     <a:p>
                       <a:r>
-                        <a:rPr lang="zh-CN" altLang="en-US" sz="2400" baseline="0" dirty="0"/>
+                        <a:rPr lang="zh-CN" altLang="en-US" sz="2400" baseline="0"/>
                         <a:t> </a:t>
                       </a:r>
                       <a:r>
-                        <a:rPr lang="en-US" altLang="zh-CN" sz="2400" baseline="0" dirty="0"/>
+                        <a:rPr lang="en-US" altLang="zh-CN" sz="2400" baseline="0"/>
                         <a:t>(1.414</a:t>
                       </a:r>
                       <a:r>
-                        <a:rPr lang="mr-IN" altLang="zh-CN" sz="2400" baseline="0" dirty="0"/>
+                        <a:rPr lang="mr-IN" altLang="zh-CN" sz="2400" baseline="0"/>
                         <a:t>…</a:t>
                       </a:r>
                       <a:r>
-                        <a:rPr lang="en-US" altLang="zh-CN" sz="2400" baseline="0" dirty="0"/>
+                        <a:rPr lang="en-US" altLang="zh-CN" sz="2400" baseline="0"/>
                         <a:t>)</a:t>
                       </a:r>
                       <a:r>
-                        <a:rPr lang="en-US" altLang="zh-CN" sz="2400" baseline="-25000" dirty="0"/>
+                        <a:rPr lang="en-US" altLang="zh-CN" sz="2400" baseline="-25000"/>
                         <a:t>10</a:t>
                       </a:r>
-                      <a:endParaRPr lang="en-US" altLang="zh-CN" sz="2400" baseline="-25000" dirty="0">
+                      <a:endParaRPr lang="en-US" altLang="zh-CN" sz="2400" baseline="-25000">
                         <a:latin typeface="Verdana"/>
                         <a:cs typeface="Verdana"/>
                       </a:endParaRPr>
@@ -31320,83 +31303,83 @@
             <a:lstStyle/>
             <a:p>
               <a:r>
-                <a:rPr lang="en-US" altLang="zh-CN" dirty="0">
+                <a:rPr lang="en-US" altLang="zh-CN">
                   <a:latin typeface="Arial"/>
                   <a:cs typeface="Arial"/>
                 </a:rPr>
                 <a:t>(1.414...)</a:t>
               </a:r>
               <a:r>
-                <a:rPr lang="en-US" altLang="zh-CN" baseline="-25000" dirty="0">
+                <a:rPr lang="en-US" altLang="zh-CN" baseline="-25000">
                   <a:latin typeface="Arial"/>
                   <a:cs typeface="Arial"/>
                 </a:rPr>
                 <a:t>10</a:t>
               </a:r>
               <a:r>
-                <a:rPr lang="en-US" altLang="zh-CN" dirty="0">
+                <a:rPr lang="en-US" altLang="zh-CN">
                   <a:latin typeface="Arial"/>
                   <a:cs typeface="Arial"/>
                 </a:rPr>
                 <a:t> = 1 * 10</a:t>
               </a:r>
               <a:r>
-                <a:rPr lang="en-US" altLang="zh-CN" baseline="30000" dirty="0">
+                <a:rPr lang="en-US" altLang="zh-CN" baseline="30000">
                   <a:latin typeface="Arial"/>
                   <a:cs typeface="Arial"/>
                 </a:rPr>
                 <a:t>0</a:t>
               </a:r>
               <a:r>
-                <a:rPr lang="en-US" altLang="zh-CN" dirty="0">
+                <a:rPr lang="en-US" altLang="zh-CN">
                   <a:latin typeface="Arial"/>
                   <a:cs typeface="Arial"/>
                 </a:rPr>
                 <a:t> + 4 * 10</a:t>
               </a:r>
               <a:r>
-                <a:rPr lang="en-US" altLang="zh-CN" baseline="30000" dirty="0">
+                <a:rPr lang="en-US" altLang="zh-CN" baseline="30000">
                   <a:latin typeface="Arial"/>
                   <a:cs typeface="Arial"/>
                 </a:rPr>
                 <a:t>-1</a:t>
               </a:r>
               <a:r>
-                <a:rPr lang="en-US" altLang="zh-CN" dirty="0">
+                <a:rPr lang="en-US" altLang="zh-CN">
                   <a:latin typeface="Arial"/>
                   <a:cs typeface="Arial"/>
                 </a:rPr>
                 <a:t> + 1 * 10</a:t>
               </a:r>
               <a:r>
-                <a:rPr lang="en-US" altLang="zh-CN" baseline="30000" dirty="0">
+                <a:rPr lang="en-US" altLang="zh-CN" baseline="30000">
                   <a:latin typeface="Arial"/>
                   <a:cs typeface="Arial"/>
                 </a:rPr>
                 <a:t>-2</a:t>
               </a:r>
               <a:r>
-                <a:rPr lang="en-US" altLang="zh-CN" dirty="0">
+                <a:rPr lang="en-US" altLang="zh-CN">
                   <a:latin typeface="Arial"/>
                   <a:cs typeface="Arial"/>
                 </a:rPr>
                 <a:t> + 4 * 10</a:t>
               </a:r>
               <a:r>
-                <a:rPr lang="en-US" altLang="zh-CN" baseline="30000" dirty="0">
+                <a:rPr lang="en-US" altLang="zh-CN" baseline="30000">
                   <a:latin typeface="Arial"/>
                   <a:cs typeface="Arial"/>
                 </a:rPr>
                 <a:t>-3 </a:t>
               </a:r>
               <a:r>
-                <a:rPr lang="en-US" altLang="zh-CN" dirty="0">
+                <a:rPr lang="en-US" altLang="zh-CN">
                   <a:latin typeface="Arial"/>
                   <a:cs typeface="Arial"/>
                 </a:rPr>
                 <a:t>+ ...</a:t>
               </a:r>
-              <a:endParaRPr lang="zh-CN" altLang="en-US" baseline="30000" dirty="0">
+              <a:endParaRPr lang="zh-CN" altLang="en-US" baseline="30000">
                 <a:latin typeface="Arial"/>
                 <a:cs typeface="Arial"/>
               </a:endParaRPr>
@@ -31609,7 +31592,7 @@
           <a:lstStyle/>
           <a:p>
             <a:r>
-              <a:rPr lang="en-US" dirty="0"/>
+              <a:rPr lang="en-US"/>
               <a:t>Floating point operations</a:t>
             </a:r>
           </a:p>
@@ -31638,84 +31621,84 @@
           <a:lstStyle/>
           <a:p>
             <a:r>
-              <a:rPr lang="en-US" dirty="0"/>
+              <a:rPr lang="en-US"/>
               <a:t>Addition, subtraction, multiplication, division etc.</a:t>
             </a:r>
           </a:p>
           <a:p>
             <a:r>
-              <a:rPr lang="en-US" dirty="0"/>
+              <a:rPr lang="en-US"/>
               <a:t>FP Caveats:</a:t>
             </a:r>
           </a:p>
           <a:p>
             <a:pPr lvl="1"/>
             <a:r>
-              <a:rPr lang="en-US" dirty="0"/>
+              <a:rPr lang="en-US"/>
               <a:t>Invalid operation: 0/0, </a:t>
             </a:r>
             <a:r>
-              <a:rPr lang="en-US" dirty="0" err="1"/>
+              <a:rPr lang="en-US" err="1"/>
               <a:t>sqrt</a:t>
             </a:r>
             <a:r>
-              <a:rPr lang="en-US" dirty="0"/>
+              <a:rPr lang="en-US"/>
               <a:t>(-1), </a:t>
             </a:r>
             <a:r>
-              <a:rPr lang="en-US" dirty="0">
+              <a:rPr lang="en-US">
                 <a:sym typeface="Symbol"/>
               </a:rPr>
               <a:t>+</a:t>
             </a:r>
-            <a:endParaRPr lang="en-US" dirty="0"/>
+            <a:endParaRPr lang="en-US"/>
           </a:p>
           <a:p>
             <a:pPr lvl="1"/>
             <a:r>
-              <a:rPr lang="en-US" dirty="0"/>
+              <a:rPr lang="en-US"/>
               <a:t>Divide by zero: x/0</a:t>
             </a:r>
             <a:r>
-              <a:rPr lang="en-US" dirty="0">
+              <a:rPr lang="en-US">
                 <a:sym typeface="Wingdings"/>
               </a:rPr>
               <a:t></a:t>
             </a:r>
             <a:r>
-              <a:rPr lang="en-US" dirty="0">
+              <a:rPr lang="en-US">
                 <a:sym typeface="Symbol"/>
               </a:rPr>
               <a:t></a:t>
             </a:r>
-            <a:endParaRPr lang="en-US" dirty="0"/>
+            <a:endParaRPr lang="en-US"/>
           </a:p>
           <a:p>
             <a:pPr lvl="1"/>
             <a:r>
-              <a:rPr lang="en-US" dirty="0"/>
+              <a:rPr lang="en-US"/>
               <a:t>Overflows: result too big to fit</a:t>
             </a:r>
           </a:p>
           <a:p>
             <a:pPr lvl="1"/>
             <a:r>
-              <a:rPr lang="en-US" dirty="0"/>
+              <a:rPr lang="en-US"/>
               <a:t>Underflows: 0 &lt; result &lt; smallest </a:t>
             </a:r>
             <a:r>
-              <a:rPr lang="en-US" dirty="0" err="1"/>
+              <a:rPr lang="en-US" err="1"/>
               <a:t>denormalized</a:t>
             </a:r>
             <a:r>
-              <a:rPr lang="en-US" dirty="0"/>
+              <a:rPr lang="en-US"/>
               <a:t> value</a:t>
             </a:r>
           </a:p>
           <a:p>
             <a:pPr lvl="1"/>
             <a:r>
-              <a:rPr lang="en-US" dirty="0"/>
+              <a:rPr lang="en-US"/>
               <a:t>Inexact: round it!</a:t>
             </a:r>
           </a:p>
@@ -32042,17 +32025,17 @@
           <a:lstStyle/>
           <a:p>
             <a:r>
-              <a:rPr lang="en-US" dirty="0"/>
+              <a:rPr lang="en-US"/>
               <a:t>Why divide by zero = </a:t>
             </a:r>
             <a:r>
-              <a:rPr lang="en-US" dirty="0">
+              <a:rPr lang="en-US">
                 <a:sym typeface="Symbol"/>
               </a:rPr>
               <a:t>?</a:t>
             </a:r>
             <a:r>
-              <a:rPr lang="en-US" dirty="0"/>
+              <a:rPr lang="en-US"/>
               <a:t> </a:t>
             </a:r>
           </a:p>
@@ -32081,34 +32064,34 @@
           <a:lstStyle/>
           <a:p>
             <a:r>
-              <a:rPr lang="en-US" dirty="0"/>
+              <a:rPr lang="en-US"/>
               <a:t>Allow a calculation to continue and produce a valid result </a:t>
             </a:r>
           </a:p>
           <a:p>
             <a:r>
-              <a:rPr lang="en-US" dirty="0"/>
+              <a:rPr lang="en-US"/>
               <a:t>Example: </a:t>
             </a:r>
           </a:p>
           <a:p>
-            <a:endParaRPr lang="en-US" dirty="0"/>
-          </a:p>
-          <a:p>
-            <a:endParaRPr lang="en-US" dirty="0"/>
-          </a:p>
-          <a:p>
-            <a:endParaRPr lang="en-US" dirty="0"/>
-          </a:p>
-          <a:p>
-            <a:endParaRPr lang="en-US" dirty="0"/>
+            <a:endParaRPr lang="en-US"/>
+          </a:p>
+          <a:p>
+            <a:endParaRPr lang="en-US"/>
+          </a:p>
+          <a:p>
+            <a:endParaRPr lang="en-US"/>
+          </a:p>
+          <a:p>
+            <a:endParaRPr lang="en-US"/>
           </a:p>
           <a:p>
             <a:pPr marL="0" indent="0">
               <a:buNone/>
             </a:pPr>
             <a:r>
-              <a:rPr lang="en-US" dirty="0"/>
+              <a:rPr lang="en-US"/>
               <a:t>If R1 or R2 is 0,  overall resistance should be 0</a:t>
             </a:r>
           </a:p>
@@ -32220,7 +32203,7 @@
           <a:lstStyle/>
           <a:p>
             <a:r>
-              <a:rPr lang="en-US" dirty="0"/>
+              <a:rPr lang="en-US"/>
               <a:t>Floating point addition</a:t>
             </a:r>
           </a:p>
@@ -32249,52 +32232,52 @@
           <a:lstStyle/>
           <a:p>
             <a:r>
-              <a:rPr lang="en-US" dirty="0"/>
+              <a:rPr lang="en-US"/>
               <a:t>Commutative? </a:t>
             </a:r>
             <a:r>
-              <a:rPr lang="en-US" dirty="0" err="1"/>
+              <a:rPr lang="en-US" err="1"/>
               <a:t>x+y</a:t>
             </a:r>
             <a:r>
-              <a:rPr lang="en-US" dirty="0"/>
+              <a:rPr lang="en-US"/>
               <a:t> == </a:t>
             </a:r>
             <a:r>
-              <a:rPr lang="en-US" dirty="0" err="1"/>
+              <a:rPr lang="en-US" err="1"/>
               <a:t>y+x</a:t>
             </a:r>
             <a:r>
-              <a:rPr lang="en-US" dirty="0"/>
+              <a:rPr lang="en-US"/>
               <a:t>?</a:t>
             </a:r>
           </a:p>
           <a:p>
             <a:r>
-              <a:rPr lang="en-US" dirty="0"/>
+              <a:rPr lang="en-US"/>
               <a:t>Associative? (</a:t>
             </a:r>
             <a:r>
-              <a:rPr lang="en-US" dirty="0" err="1"/>
+              <a:rPr lang="en-US" err="1"/>
               <a:t>x+y</a:t>
             </a:r>
             <a:r>
-              <a:rPr lang="en-US" dirty="0"/>
+              <a:rPr lang="en-US"/>
               <a:t>)+z = x + (</a:t>
             </a:r>
             <a:r>
-              <a:rPr lang="en-US" dirty="0" err="1"/>
+              <a:rPr lang="en-US" err="1"/>
               <a:t>y+z</a:t>
             </a:r>
             <a:r>
-              <a:rPr lang="en-US" dirty="0"/>
+              <a:rPr lang="en-US"/>
               <a:t>)?</a:t>
             </a:r>
           </a:p>
           <a:p>
             <a:pPr lvl="1"/>
             <a:r>
-              <a:rPr lang="en-US" dirty="0"/>
+              <a:rPr lang="en-US"/>
               <a:t>Rounding: </a:t>
             </a:r>
           </a:p>
@@ -32303,7 +32286,7 @@
               <a:buNone/>
             </a:pPr>
             <a:r>
-              <a:rPr lang="en-US" dirty="0">
+              <a:rPr lang="en-US">
                 <a:latin typeface="Courier New"/>
                 <a:cs typeface="Courier New"/>
               </a:rPr>
@@ -32315,46 +32298,46 @@
               <a:buNone/>
             </a:pPr>
             <a:r>
-              <a:rPr lang="en-US" dirty="0">
+              <a:rPr lang="en-US">
                 <a:latin typeface="Courier New"/>
                 <a:cs typeface="Courier New"/>
               </a:rPr>
               <a:t> 3.14+(1e10-1e10) = 3.14</a:t>
             </a:r>
-            <a:endParaRPr lang="en-US" dirty="0"/>
+            <a:endParaRPr lang="en-US"/>
           </a:p>
           <a:p>
             <a:pPr lvl="1"/>
             <a:r>
-              <a:rPr lang="en-US" dirty="0"/>
+              <a:rPr lang="en-US"/>
               <a:t>Overflow</a:t>
             </a:r>
           </a:p>
           <a:p>
             <a:r>
-              <a:rPr lang="en-US" dirty="0"/>
+              <a:rPr lang="en-US"/>
               <a:t>Every number has an additive inverse? </a:t>
             </a:r>
           </a:p>
           <a:p>
             <a:pPr lvl="1"/>
             <a:r>
-              <a:rPr lang="en-US" dirty="0"/>
+              <a:rPr lang="en-US"/>
               <a:t>Yes except for </a:t>
             </a:r>
             <a:r>
-              <a:rPr lang="en-US" dirty="0">
+              <a:rPr lang="en-US">
                 <a:sym typeface="Symbol"/>
               </a:rPr>
               <a:t> and </a:t>
             </a:r>
             <a:r>
-              <a:rPr lang="en-US" dirty="0" err="1">
+              <a:rPr lang="en-US" err="1">
                 <a:sym typeface="Symbol"/>
               </a:rPr>
               <a:t>NaN</a:t>
             </a:r>
-            <a:endParaRPr lang="en-US" dirty="0">
+            <a:endParaRPr lang="en-US">
               <a:sym typeface="Symbol"/>
             </a:endParaRPr>
           </a:p>
@@ -32362,7 +32345,7 @@
             <a:pPr marL="914400" lvl="2" indent="0">
               <a:buNone/>
             </a:pPr>
-            <a:endParaRPr lang="en-US" dirty="0"/>
+            <a:endParaRPr lang="en-US"/>
           </a:p>
         </p:txBody>
       </p:sp>
@@ -32602,7 +32585,7 @@
           <a:lstStyle/>
           <a:p>
             <a:r>
-              <a:rPr lang="en-US" dirty="0"/>
+              <a:rPr lang="en-US"/>
               <a:t>Floating point multiplication</a:t>
             </a:r>
           </a:p>
@@ -32626,20 +32609,20 @@
           <a:lstStyle/>
           <a:p>
             <a:r>
-              <a:rPr lang="en-US" dirty="0"/>
+              <a:rPr lang="en-US"/>
               <a:t>Commutative? x* y == y*x?</a:t>
             </a:r>
           </a:p>
           <a:p>
             <a:r>
-              <a:rPr lang="en-US" dirty="0"/>
+              <a:rPr lang="en-US"/>
               <a:t>Associative? (x*y)*z = x * (y*z)?</a:t>
             </a:r>
           </a:p>
           <a:p>
             <a:pPr lvl="1"/>
             <a:r>
-              <a:rPr lang="en-US" dirty="0"/>
+              <a:rPr lang="en-US"/>
               <a:t>Overflow: </a:t>
             </a:r>
           </a:p>
@@ -32648,68 +32631,68 @@
               <a:buNone/>
             </a:pPr>
             <a:r>
-              <a:rPr lang="en-US" dirty="0">
+              <a:rPr lang="en-US">
                 <a:latin typeface="Courier New"/>
               </a:rPr>
               <a:t>(1e20*1e20)*1e-20</a:t>
             </a:r>
             <a:r>
-              <a:rPr lang="en-US" dirty="0"/>
+              <a:rPr lang="en-US"/>
               <a:t>= </a:t>
             </a:r>
             <a:r>
-              <a:rPr lang="en-US" dirty="0" err="1">
+              <a:rPr lang="en-US" err="1">
                 <a:latin typeface="Courier New"/>
                 <a:cs typeface="Courier New"/>
               </a:rPr>
               <a:t>inf</a:t>
             </a:r>
             <a:r>
-              <a:rPr lang="en-US" dirty="0"/>
+              <a:rPr lang="en-US"/>
               <a:t>, </a:t>
             </a:r>
             <a:r>
-              <a:rPr lang="en-US" dirty="0">
+              <a:rPr lang="en-US">
                 <a:latin typeface="Courier New"/>
                 <a:cs typeface="Courier New"/>
               </a:rPr>
               <a:t>1e20*(1e20*1e-20)</a:t>
             </a:r>
             <a:r>
-              <a:rPr lang="en-US" dirty="0"/>
+              <a:rPr lang="en-US"/>
               <a:t>= </a:t>
             </a:r>
             <a:r>
-              <a:rPr lang="en-US" dirty="0">
+              <a:rPr lang="en-US">
                 <a:latin typeface="Courier New"/>
                 <a:cs typeface="Courier New"/>
               </a:rPr>
               <a:t>1e20</a:t>
             </a:r>
-            <a:endParaRPr lang="en-US" dirty="0"/>
+            <a:endParaRPr lang="en-US"/>
           </a:p>
           <a:p>
             <a:pPr lvl="1"/>
             <a:r>
-              <a:rPr lang="en-US" dirty="0"/>
+              <a:rPr lang="en-US"/>
               <a:t>Rounding</a:t>
             </a:r>
           </a:p>
           <a:p>
             <a:r>
-              <a:rPr lang="en-US" dirty="0">
+              <a:rPr lang="en-US">
                 <a:sym typeface="Symbol"/>
               </a:rPr>
               <a:t>(</a:t>
             </a:r>
             <a:r>
-              <a:rPr lang="en-US" dirty="0" err="1">
+              <a:rPr lang="en-US" err="1">
                 <a:sym typeface="Symbol"/>
               </a:rPr>
               <a:t>x+y</a:t>
             </a:r>
             <a:r>
-              <a:rPr lang="en-US" dirty="0">
+              <a:rPr lang="en-US">
                 <a:sym typeface="Symbol"/>
               </a:rPr>
               <a:t>)*z = x*z + y*z?</a:t>
@@ -32718,51 +32701,51 @@
           <a:p>
             <a:pPr lvl="1"/>
             <a:r>
-              <a:rPr lang="en-US" dirty="0">
+              <a:rPr lang="en-US">
                 <a:latin typeface="Courier New"/>
                 <a:cs typeface="Courier New"/>
               </a:rPr>
               <a:t>1e20*(1e20-1e20)</a:t>
             </a:r>
             <a:r>
-              <a:rPr lang="en-US" dirty="0"/>
+              <a:rPr lang="en-US"/>
               <a:t>= </a:t>
             </a:r>
             <a:r>
-              <a:rPr lang="en-US" dirty="0">
+              <a:rPr lang="en-US">
                 <a:latin typeface="Courier New"/>
                 <a:cs typeface="Courier New"/>
               </a:rPr>
               <a:t>0.0</a:t>
             </a:r>
             <a:r>
-              <a:rPr lang="en-US" dirty="0"/>
+              <a:rPr lang="en-US"/>
               <a:t>,  </a:t>
             </a:r>
             <a:r>
-              <a:rPr lang="en-US" dirty="0">
+              <a:rPr lang="en-US">
                 <a:latin typeface="Courier New"/>
                 <a:cs typeface="Courier New"/>
               </a:rPr>
               <a:t>1e20*1e20 – 1e20*1e20 </a:t>
             </a:r>
             <a:r>
-              <a:rPr lang="en-US" dirty="0"/>
+              <a:rPr lang="en-US"/>
               <a:t>= </a:t>
             </a:r>
             <a:r>
-              <a:rPr lang="en-US" dirty="0" err="1">
+              <a:rPr lang="en-US" err="1">
                 <a:latin typeface="Courier New"/>
                 <a:cs typeface="Courier New"/>
               </a:rPr>
               <a:t>NaN</a:t>
             </a:r>
-            <a:endParaRPr lang="en-US" dirty="0">
+            <a:endParaRPr lang="en-US">
               <a:sym typeface="Symbol"/>
             </a:endParaRPr>
           </a:p>
           <a:p>
-            <a:endParaRPr lang="en-US" dirty="0"/>
+            <a:endParaRPr lang="en-US"/>
           </a:p>
         </p:txBody>
       </p:sp>
@@ -33020,7 +33003,7 @@
           <a:lstStyle/>
           <a:p>
             <a:r>
-              <a:rPr lang="en-US" dirty="0"/>
+              <a:rPr lang="en-US"/>
               <a:t>Floating point in real world</a:t>
             </a:r>
           </a:p>
@@ -33049,13 +33032,13 @@
           <a:lstStyle/>
           <a:p>
             <a:r>
-              <a:rPr lang="en-US" dirty="0"/>
+              <a:rPr lang="en-US"/>
               <a:t>Storing time in computer games as a FP?</a:t>
             </a:r>
           </a:p>
           <a:p>
             <a:r>
-              <a:rPr lang="en-US" dirty="0"/>
+              <a:rPr lang="en-US"/>
               <a:t>Precision diminishes as time gets bigger</a:t>
             </a:r>
           </a:p>
@@ -33122,14 +33105,14 @@
                     <a:lstStyle/>
                     <a:p>
                       <a:r>
-                        <a:rPr lang="en-US" dirty="0"/>
+                        <a:rPr lang="en-US"/>
                         <a:t>FP</a:t>
                       </a:r>
                       <a:r>
-                        <a:rPr lang="en-US" baseline="0" dirty="0"/>
+                        <a:rPr lang="en-US" baseline="0"/>
                         <a:t> value (decimal)</a:t>
                       </a:r>
-                      <a:endParaRPr lang="en-US" dirty="0"/>
+                      <a:endParaRPr lang="en-US"/>
                     </a:p>
                   </a:txBody>
                   <a:tcPr/>
@@ -33140,7 +33123,7 @@
                     <a:lstStyle/>
                     <a:p>
                       <a:r>
-                        <a:rPr lang="en-US" dirty="0"/>
+                        <a:rPr lang="en-US"/>
                         <a:t>Time value</a:t>
                       </a:r>
                     </a:p>
@@ -33153,7 +33136,7 @@
                     <a:lstStyle/>
                     <a:p>
                       <a:r>
-                        <a:rPr lang="en-US" dirty="0"/>
+                        <a:rPr lang="en-US"/>
                         <a:t>FP precision</a:t>
                       </a:r>
                     </a:p>
@@ -33166,7 +33149,7 @@
                     <a:lstStyle/>
                     <a:p>
                       <a:r>
-                        <a:rPr lang="en-US" dirty="0"/>
+                        <a:rPr lang="en-US"/>
                         <a:t>Time precision</a:t>
                       </a:r>
                     </a:p>
@@ -33186,7 +33169,7 @@
                     <a:lstStyle/>
                     <a:p>
                       <a:r>
-                        <a:rPr lang="en-US" dirty="0"/>
+                        <a:rPr lang="en-US"/>
                         <a:t>1</a:t>
                       </a:r>
                     </a:p>
@@ -33199,7 +33182,7 @@
                     <a:lstStyle/>
                     <a:p>
                       <a:r>
-                        <a:rPr lang="en-US" dirty="0"/>
+                        <a:rPr lang="en-US"/>
                         <a:t>1 sec</a:t>
                       </a:r>
                     </a:p>
@@ -33229,7 +33212,7 @@
                         <a:defRPr/>
                       </a:pPr>
                       <a:r>
-                        <a:rPr lang="en-US" dirty="0"/>
+                        <a:rPr lang="en-US"/>
                         <a:t>1.19E-07	</a:t>
                       </a:r>
                     </a:p>
@@ -33259,7 +33242,7 @@
                         <a:defRPr/>
                       </a:pPr>
                       <a:r>
-                        <a:rPr lang="en-US" dirty="0"/>
+                        <a:rPr lang="en-US"/>
                         <a:t>119 nanoseconds</a:t>
                       </a:r>
                     </a:p>
@@ -33279,7 +33262,7 @@
                     <a:lstStyle/>
                     <a:p>
                       <a:r>
-                        <a:rPr lang="en-US" dirty="0"/>
+                        <a:rPr lang="en-US"/>
                         <a:t>100</a:t>
                       </a:r>
                     </a:p>
@@ -33292,7 +33275,7 @@
                     <a:lstStyle/>
                     <a:p>
                       <a:r>
-                        <a:rPr lang="en-US" dirty="0"/>
+                        <a:rPr lang="en-US"/>
                         <a:t>~1.5 min</a:t>
                       </a:r>
                     </a:p>
@@ -33305,7 +33288,7 @@
                     <a:lstStyle/>
                     <a:p>
                       <a:r>
-                        <a:rPr lang="en-US" dirty="0"/>
+                        <a:rPr lang="en-US"/>
                         <a:t>7.63E-06	</a:t>
                       </a:r>
                     </a:p>
@@ -33335,7 +33318,7 @@
                         <a:defRPr/>
                       </a:pPr>
                       <a:r>
-                        <a:rPr lang="en-US" dirty="0"/>
+                        <a:rPr lang="en-US"/>
                         <a:t>7.63 microseconds</a:t>
                       </a:r>
                     </a:p>
@@ -33355,7 +33338,7 @@
                     <a:lstStyle/>
                     <a:p>
                       <a:r>
-                        <a:rPr lang="en-US" dirty="0"/>
+                        <a:rPr lang="en-US"/>
                         <a:t>10 000</a:t>
                       </a:r>
                     </a:p>
@@ -33368,7 +33351,7 @@
                     <a:lstStyle/>
                     <a:p>
                       <a:r>
-                        <a:rPr lang="en-US" dirty="0"/>
+                        <a:rPr lang="en-US"/>
                         <a:t>~3 hours</a:t>
                       </a:r>
                     </a:p>
@@ -33381,7 +33364,7 @@
                     <a:lstStyle/>
                     <a:p>
                       <a:r>
-                        <a:rPr lang="en-US" dirty="0"/>
+                        <a:rPr lang="en-US"/>
                         <a:t>0.000977</a:t>
                       </a:r>
                     </a:p>
@@ -33411,7 +33394,7 @@
                         <a:defRPr/>
                       </a:pPr>
                       <a:r>
-                        <a:rPr lang="en-US" dirty="0"/>
+                        <a:rPr lang="en-US"/>
                         <a:t>.976 milliseconds</a:t>
                       </a:r>
                     </a:p>
@@ -33431,7 +33414,7 @@
                     <a:lstStyle/>
                     <a:p>
                       <a:r>
-                        <a:rPr lang="en-US" dirty="0"/>
+                        <a:rPr lang="en-US"/>
                         <a:t>1000 000</a:t>
                       </a:r>
                     </a:p>
@@ -33444,7 +33427,7 @@
                     <a:lstStyle/>
                     <a:p>
                       <a:r>
-                        <a:rPr lang="en-US" dirty="0"/>
+                        <a:rPr lang="en-US"/>
                         <a:t>~11 days</a:t>
                       </a:r>
                     </a:p>
@@ -33474,7 +33457,7 @@
                         <a:defRPr/>
                       </a:pPr>
                       <a:r>
-                        <a:rPr lang="en-US" dirty="0"/>
+                        <a:rPr lang="en-US"/>
                         <a:t>0.0625</a:t>
                       </a:r>
                     </a:p>
@@ -33504,7 +33487,7 @@
                         <a:defRPr/>
                       </a:pPr>
                       <a:r>
-                        <a:rPr lang="en-US" dirty="0"/>
+                        <a:rPr lang="en-US"/>
                         <a:t>62.5 milliseconds</a:t>
                       </a:r>
                     </a:p>
@@ -33567,7 +33550,7 @@
           <a:lstStyle/>
           <a:p>
             <a:r>
-              <a:rPr lang="en-US" dirty="0"/>
+              <a:rPr lang="en-US"/>
               <a:t>Floating point in the real world</a:t>
             </a:r>
           </a:p>
@@ -33596,14 +33579,9 @@
           <a:lstStyle/>
           <a:p>
             <a:r>
-              <a:rPr lang="en-US" dirty="0"/>
-              <a:t>Use floating point for </a:t>
-            </a:r>
-            <a:r>
               <a:rPr lang="en-US"/>
-              <a:t>distance measures in computer games</a:t>
-            </a:r>
-            <a:endParaRPr lang="en-US" dirty="0"/>
+              <a:t>Use floating point for distance measures in computer games</a:t>
+            </a:r>
           </a:p>
         </p:txBody>
       </p:sp>
@@ -33662,14 +33640,14 @@
                     <a:lstStyle/>
                     <a:p>
                       <a:r>
-                        <a:rPr lang="en-US" dirty="0"/>
+                        <a:rPr lang="en-US"/>
                         <a:t>FP</a:t>
                       </a:r>
                       <a:r>
-                        <a:rPr lang="en-US" baseline="0" dirty="0"/>
+                        <a:rPr lang="en-US" baseline="0"/>
                         <a:t> value</a:t>
                       </a:r>
-                      <a:endParaRPr lang="en-US" dirty="0"/>
+                      <a:endParaRPr lang="en-US"/>
                     </a:p>
                   </a:txBody>
                   <a:tcPr/>
@@ -33680,7 +33658,7 @@
                     <a:lstStyle/>
                     <a:p>
                       <a:r>
-                        <a:rPr lang="en-US" dirty="0"/>
+                        <a:rPr lang="en-US"/>
                         <a:t>Length</a:t>
                       </a:r>
                     </a:p>
@@ -33693,7 +33671,7 @@
                     <a:lstStyle/>
                     <a:p>
                       <a:r>
-                        <a:rPr lang="en-US" dirty="0"/>
+                        <a:rPr lang="en-US"/>
                         <a:t>FP precision</a:t>
                       </a:r>
                     </a:p>
@@ -33706,14 +33684,14 @@
                     <a:lstStyle/>
                     <a:p>
                       <a:r>
-                        <a:rPr lang="en-US" dirty="0"/>
+                        <a:rPr lang="en-US"/>
                         <a:t>Precision</a:t>
                       </a:r>
                       <a:r>
-                        <a:rPr lang="en-US" baseline="0" dirty="0"/>
+                        <a:rPr lang="en-US" baseline="0"/>
                         <a:t> size</a:t>
                       </a:r>
-                      <a:endParaRPr lang="en-US" dirty="0"/>
+                      <a:endParaRPr lang="en-US"/>
                     </a:p>
                   </a:txBody>
                   <a:tcPr/>
@@ -33731,7 +33709,7 @@
                     <a:lstStyle/>
                     <a:p>
                       <a:r>
-                        <a:rPr lang="en-US" dirty="0"/>
+                        <a:rPr lang="en-US"/>
                         <a:t>1</a:t>
                       </a:r>
                     </a:p>
@@ -33744,7 +33722,7 @@
                     <a:lstStyle/>
                     <a:p>
                       <a:r>
-                        <a:rPr lang="en-US" dirty="0"/>
+                        <a:rPr lang="en-US"/>
                         <a:t>1 meter</a:t>
                       </a:r>
                     </a:p>
@@ -33774,7 +33752,7 @@
                         <a:defRPr/>
                       </a:pPr>
                       <a:r>
-                        <a:rPr lang="en-US" dirty="0"/>
+                        <a:rPr lang="en-US"/>
                         <a:t>1.19E-07	</a:t>
                       </a:r>
                     </a:p>
@@ -33804,7 +33782,7 @@
                         <a:defRPr/>
                       </a:pPr>
                       <a:r>
-                        <a:rPr lang="en-US" dirty="0"/>
+                        <a:rPr lang="en-US"/>
                         <a:t>Virus</a:t>
                       </a:r>
                     </a:p>
@@ -33824,7 +33802,7 @@
                     <a:lstStyle/>
                     <a:p>
                       <a:r>
-                        <a:rPr lang="en-US" dirty="0"/>
+                        <a:rPr lang="en-US"/>
                         <a:t>100</a:t>
                       </a:r>
                     </a:p>
@@ -33837,7 +33815,7 @@
                     <a:lstStyle/>
                     <a:p>
                       <a:r>
-                        <a:rPr lang="en-US" dirty="0"/>
+                        <a:rPr lang="en-US"/>
                         <a:t>100 meter</a:t>
                       </a:r>
                     </a:p>
@@ -33850,7 +33828,7 @@
                     <a:lstStyle/>
                     <a:p>
                       <a:r>
-                        <a:rPr lang="en-US" dirty="0"/>
+                        <a:rPr lang="en-US"/>
                         <a:t>7.63E-06	</a:t>
                       </a:r>
                     </a:p>
@@ -33880,7 +33858,7 @@
                         <a:defRPr/>
                       </a:pPr>
                       <a:r>
-                        <a:rPr lang="en-US" dirty="0"/>
+                        <a:rPr lang="en-US"/>
                         <a:t>red blood cell</a:t>
                       </a:r>
                     </a:p>
@@ -33900,7 +33878,7 @@
                     <a:lstStyle/>
                     <a:p>
                       <a:r>
-                        <a:rPr lang="en-US" dirty="0"/>
+                        <a:rPr lang="en-US"/>
                         <a:t>10 000</a:t>
                       </a:r>
                     </a:p>
@@ -33913,7 +33891,7 @@
                     <a:lstStyle/>
                     <a:p>
                       <a:r>
-                        <a:rPr lang="en-US" dirty="0"/>
+                        <a:rPr lang="en-US"/>
                         <a:t>10 km</a:t>
                       </a:r>
                     </a:p>
@@ -33926,7 +33904,7 @@
                     <a:lstStyle/>
                     <a:p>
                       <a:r>
-                        <a:rPr lang="en-US" dirty="0"/>
+                        <a:rPr lang="en-US"/>
                         <a:t>0.000977</a:t>
                       </a:r>
                     </a:p>
@@ -33956,7 +33934,7 @@
                         <a:defRPr/>
                       </a:pPr>
                       <a:r>
-                        <a:rPr lang="en-US" dirty="0"/>
+                        <a:rPr lang="en-US"/>
                         <a:t>toenail thickness</a:t>
                       </a:r>
                     </a:p>
@@ -33976,7 +33954,7 @@
                     <a:lstStyle/>
                     <a:p>
                       <a:r>
-                        <a:rPr lang="en-US" dirty="0"/>
+                        <a:rPr lang="en-US"/>
                         <a:t>1000 000</a:t>
                       </a:r>
                     </a:p>
@@ -34006,7 +33984,7 @@
                         <a:defRPr/>
                       </a:pPr>
                       <a:r>
-                        <a:rPr lang="en-US" dirty="0"/>
+                        <a:rPr lang="en-US"/>
                         <a:t>.16x earth radius</a:t>
                       </a:r>
                     </a:p>
@@ -34036,7 +34014,7 @@
                         <a:defRPr/>
                       </a:pPr>
                       <a:r>
-                        <a:rPr lang="en-US" dirty="0"/>
+                        <a:rPr lang="en-US"/>
                         <a:t>0.0625</a:t>
                       </a:r>
                     </a:p>
@@ -34066,7 +34044,7 @@
                         <a:defRPr/>
                       </a:pPr>
                       <a:r>
-                        <a:rPr lang="en-US" dirty="0"/>
+                        <a:rPr lang="en-US"/>
                         <a:t>credit card width</a:t>
                       </a:r>
                     </a:p>
@@ -34106,7 +34084,7 @@
           <a:lstStyle/>
           <a:p>
             <a:r>
-              <a:rPr lang="en-US" dirty="0"/>
+              <a:rPr lang="en-US"/>
               <a:t>Table source: Random ASCII </a:t>
             </a:r>
           </a:p>
@@ -34158,7 +34136,7 @@
           <a:lstStyle/>
           <a:p>
             <a:r>
-              <a:rPr lang="en-US" dirty="0"/>
+              <a:rPr lang="en-US"/>
               <a:t>Floating point trouble</a:t>
             </a:r>
           </a:p>
@@ -34185,7 +34163,7 @@
           <a:lstStyle/>
           <a:p>
             <a:r>
-              <a:rPr lang="en-US" dirty="0"/>
+              <a:rPr lang="en-US"/>
               <a:t>Comparing floats for equality is a bad idea!</a:t>
             </a:r>
           </a:p>
@@ -34219,34 +34197,34 @@
           <a:lstStyle/>
           <a:p>
             <a:r>
-              <a:rPr lang="ro-RO" sz="3200" dirty="0"/>
+              <a:rPr lang="ro-RO" sz="3200"/>
               <a:t>float f = 0.1;</a:t>
             </a:r>
           </a:p>
           <a:p>
             <a:r>
-              <a:rPr lang="en-US" sz="3200" dirty="0"/>
+              <a:rPr lang="en-US" sz="3200"/>
               <a:t>while (f != 1.0) {</a:t>
             </a:r>
           </a:p>
           <a:p>
             <a:r>
-              <a:rPr lang="en-US" sz="3200" dirty="0"/>
+              <a:rPr lang="en-US" sz="3200"/>
               <a:t>          f += 0.1;</a:t>
             </a:r>
           </a:p>
           <a:p>
             <a:r>
-              <a:rPr lang="en-US" sz="3200" dirty="0"/>
+              <a:rPr lang="en-US" sz="3200"/>
               <a:t>}</a:t>
             </a:r>
           </a:p>
           <a:p>
             <a:r>
-              <a:rPr lang="is-IS" dirty="0"/>
+              <a:rPr lang="is-IS"/>
               <a:t>       </a:t>
             </a:r>
-            <a:endParaRPr lang="en-US" dirty="0"/>
+            <a:endParaRPr lang="en-US"/>
           </a:p>
         </p:txBody>
       </p:sp>
@@ -34463,6 +34441,519 @@
   <p:cSld>
     <p:spTree>
       <p:nvGrpSpPr>
+        <p:cNvPr id="1" name=""/>
+        <p:cNvGrpSpPr/>
+        <p:nvPr/>
+      </p:nvGrpSpPr>
+      <p:grpSpPr>
+        <a:xfrm>
+          <a:off x="0" y="0"/>
+          <a:ext cx="0" cy="0"/>
+          <a:chOff x="0" y="0"/>
+          <a:chExt cx="0" cy="0"/>
+        </a:xfrm>
+      </p:grpSpPr>
+      <p:sp>
+        <p:nvSpPr>
+          <p:cNvPr id="2" name="Title 1">
+            <a:extLst>
+              <a:ext uri="{FF2B5EF4-FFF2-40B4-BE49-F238E27FC236}">
+                <a16:creationId xmlns:a16="http://schemas.microsoft.com/office/drawing/2014/main" id="{3CC9C716-3301-4D10-292D-3F42DDCFA9F4}"/>
+              </a:ext>
+            </a:extLst>
+          </p:cNvPr>
+          <p:cNvSpPr>
+            <a:spLocks noGrp="1"/>
+          </p:cNvSpPr>
+          <p:nvPr>
+            <p:ph type="title"/>
+          </p:nvPr>
+        </p:nvSpPr>
+        <p:spPr/>
+        <p:txBody>
+          <a:bodyPr/>
+          <a:lstStyle/>
+          <a:p>
+            <a:r>
+              <a:rPr lang="en-US" dirty="0"/>
+              <a:t>Floating point trouble</a:t>
+            </a:r>
+          </a:p>
+        </p:txBody>
+      </p:sp>
+      <mc:AlternateContent xmlns:mc="http://schemas.openxmlformats.org/markup-compatibility/2006">
+        <mc:Choice xmlns:a14="http://schemas.microsoft.com/office/drawing/2010/main" Requires="a14">
+          <p:sp>
+            <p:nvSpPr>
+              <p:cNvPr id="3" name="Content Placeholder 2">
+                <a:extLst>
+                  <a:ext uri="{FF2B5EF4-FFF2-40B4-BE49-F238E27FC236}">
+                    <a16:creationId xmlns:a16="http://schemas.microsoft.com/office/drawing/2014/main" id="{1E06BBCA-6247-2CE0-3FE6-EEC2EB84A581}"/>
+                  </a:ext>
+                </a:extLst>
+              </p:cNvPr>
+              <p:cNvSpPr>
+                <a:spLocks noGrp="1"/>
+              </p:cNvSpPr>
+              <p:nvPr>
+                <p:ph idx="1"/>
+              </p:nvPr>
+            </p:nvSpPr>
+            <p:spPr>
+              <a:xfrm>
+                <a:off x="258896" y="1567149"/>
+                <a:ext cx="8626207" cy="4525963"/>
+              </a:xfrm>
+            </p:spPr>
+            <p:txBody>
+              <a:bodyPr/>
+              <a:lstStyle/>
+              <a:p>
+                <a:r>
+                  <a:rPr lang="en-US" sz="2400" dirty="0"/>
+                  <a:t>FP is not associative: the order of operations affects results</a:t>
+                </a:r>
+              </a:p>
+              <a:p>
+                <a:pPr lvl="1"/>
+                <a14:m>
+                  <m:oMath xmlns:m="http://schemas.openxmlformats.org/officeDocument/2006/math">
+                    <m:d>
+                      <m:dPr>
+                        <m:ctrlPr>
+                          <a:rPr lang="en-US" i="1">
+                            <a:latin typeface="Cambria Math" panose="02040503050406030204" pitchFamily="18" charset="0"/>
+                          </a:rPr>
+                        </m:ctrlPr>
+                      </m:dPr>
+                      <m:e>
+                        <m:r>
+                          <a:rPr lang="en-US" i="1">
+                            <a:latin typeface="Cambria Math" panose="02040503050406030204" pitchFamily="18" charset="0"/>
+                          </a:rPr>
+                          <m:t>𝑎</m:t>
+                        </m:r>
+                        <m:r>
+                          <a:rPr lang="en-US" i="1">
+                            <a:latin typeface="Cambria Math" panose="02040503050406030204" pitchFamily="18" charset="0"/>
+                          </a:rPr>
+                          <m:t>+</m:t>
+                        </m:r>
+                        <m:r>
+                          <a:rPr lang="en-US" i="1">
+                            <a:latin typeface="Cambria Math" panose="02040503050406030204" pitchFamily="18" charset="0"/>
+                          </a:rPr>
+                          <m:t>𝑏</m:t>
+                        </m:r>
+                      </m:e>
+                    </m:d>
+                    <m:r>
+                      <a:rPr lang="en-US" i="1">
+                        <a:latin typeface="Cambria Math" panose="02040503050406030204" pitchFamily="18" charset="0"/>
+                      </a:rPr>
+                      <m:t>+</m:t>
+                    </m:r>
+                    <m:r>
+                      <a:rPr lang="en-US" i="1">
+                        <a:latin typeface="Cambria Math" panose="02040503050406030204" pitchFamily="18" charset="0"/>
+                      </a:rPr>
+                      <m:t>𝑐</m:t>
+                    </m:r>
+                    <m:r>
+                      <a:rPr lang="en-US" i="1">
+                        <a:latin typeface="Cambria Math" panose="02040503050406030204" pitchFamily="18" charset="0"/>
+                      </a:rPr>
+                      <m:t> ≠</m:t>
+                    </m:r>
+                    <m:r>
+                      <a:rPr lang="en-US" i="1">
+                        <a:latin typeface="Cambria Math" panose="02040503050406030204" pitchFamily="18" charset="0"/>
+                        <a:ea typeface="Cambria Math" panose="02040503050406030204" pitchFamily="18" charset="0"/>
+                      </a:rPr>
+                      <m:t>𝑎</m:t>
+                    </m:r>
+                    <m:r>
+                      <a:rPr lang="en-US" i="1">
+                        <a:latin typeface="Cambria Math" panose="02040503050406030204" pitchFamily="18" charset="0"/>
+                        <a:ea typeface="Cambria Math" panose="02040503050406030204" pitchFamily="18" charset="0"/>
+                      </a:rPr>
+                      <m:t>+(</m:t>
+                    </m:r>
+                    <m:r>
+                      <a:rPr lang="en-US" i="1">
+                        <a:latin typeface="Cambria Math" panose="02040503050406030204" pitchFamily="18" charset="0"/>
+                        <a:ea typeface="Cambria Math" panose="02040503050406030204" pitchFamily="18" charset="0"/>
+                      </a:rPr>
+                      <m:t>𝑏</m:t>
+                    </m:r>
+                    <m:r>
+                      <a:rPr lang="en-US" i="1">
+                        <a:latin typeface="Cambria Math" panose="02040503050406030204" pitchFamily="18" charset="0"/>
+                        <a:ea typeface="Cambria Math" panose="02040503050406030204" pitchFamily="18" charset="0"/>
+                      </a:rPr>
+                      <m:t>+</m:t>
+                    </m:r>
+                    <m:r>
+                      <a:rPr lang="en-US" i="1">
+                        <a:latin typeface="Cambria Math" panose="02040503050406030204" pitchFamily="18" charset="0"/>
+                        <a:ea typeface="Cambria Math" panose="02040503050406030204" pitchFamily="18" charset="0"/>
+                      </a:rPr>
+                      <m:t>𝑐</m:t>
+                    </m:r>
+                    <m:r>
+                      <a:rPr lang="en-US" i="1">
+                        <a:latin typeface="Cambria Math" panose="02040503050406030204" pitchFamily="18" charset="0"/>
+                        <a:ea typeface="Cambria Math" panose="02040503050406030204" pitchFamily="18" charset="0"/>
+                      </a:rPr>
+                      <m:t>)</m:t>
+                    </m:r>
+                  </m:oMath>
+                </a14:m>
+                <a:endParaRPr lang="en-US" dirty="0"/>
+              </a:p>
+              <a:p>
+                <a:endParaRPr lang="en-US" dirty="0"/>
+              </a:p>
+            </p:txBody>
+          </p:sp>
+        </mc:Choice>
+        <mc:Fallback>
+          <p:sp>
+            <p:nvSpPr>
+              <p:cNvPr id="3" name="Content Placeholder 2">
+                <a:extLst>
+                  <a:ext uri="{FF2B5EF4-FFF2-40B4-BE49-F238E27FC236}">
+                    <a16:creationId xmlns:a16="http://schemas.microsoft.com/office/drawing/2014/main" id="{1E06BBCA-6247-2CE0-3FE6-EEC2EB84A581}"/>
+                  </a:ext>
+                </a:extLst>
+              </p:cNvPr>
+              <p:cNvSpPr>
+                <a:spLocks noGrp="1" noRot="1" noChangeAspect="1" noMove="1" noResize="1" noEditPoints="1" noAdjustHandles="1" noChangeArrowheads="1" noChangeShapeType="1" noTextEdit="1"/>
+              </p:cNvSpPr>
+              <p:nvPr>
+                <p:ph idx="1"/>
+              </p:nvPr>
+            </p:nvSpPr>
+            <p:spPr>
+              <a:xfrm>
+                <a:off x="258896" y="1567149"/>
+                <a:ext cx="8626207" cy="4525963"/>
+              </a:xfrm>
+              <a:blipFill>
+                <a:blip r:embed="rId2"/>
+                <a:stretch>
+                  <a:fillRect l="-1029" t="-1117"/>
+                </a:stretch>
+              </a:blipFill>
+            </p:spPr>
+            <p:txBody>
+              <a:bodyPr/>
+              <a:lstStyle/>
+              <a:p>
+                <a:r>
+                  <a:rPr lang="en-US">
+                    <a:noFill/>
+                  </a:rPr>
+                  <a:t> </a:t>
+                </a:r>
+              </a:p>
+            </p:txBody>
+          </p:sp>
+        </mc:Fallback>
+      </mc:AlternateContent>
+      <p:grpSp>
+        <p:nvGrpSpPr>
+          <p:cNvPr id="7" name="Group 6">
+            <a:extLst>
+              <a:ext uri="{FF2B5EF4-FFF2-40B4-BE49-F238E27FC236}">
+                <a16:creationId xmlns:a16="http://schemas.microsoft.com/office/drawing/2014/main" id="{E952712B-9646-187C-DEB1-7FB0960DB1C1}"/>
+              </a:ext>
+            </a:extLst>
+          </p:cNvPr>
+          <p:cNvGrpSpPr/>
+          <p:nvPr/>
+        </p:nvGrpSpPr>
+        <p:grpSpPr>
+          <a:xfrm>
+            <a:off x="2302525" y="2963537"/>
+            <a:ext cx="2886418" cy="369332"/>
+            <a:chOff x="2302525" y="2963537"/>
+            <a:chExt cx="2886418" cy="369332"/>
+          </a:xfrm>
+        </p:grpSpPr>
+        <mc:AlternateContent xmlns:mc="http://schemas.openxmlformats.org/markup-compatibility/2006">
+          <mc:Choice xmlns:a14="http://schemas.microsoft.com/office/drawing/2010/main" Requires="a14">
+            <p:sp>
+              <p:nvSpPr>
+                <p:cNvPr id="4" name="TextBox 3">
+                  <a:extLst>
+                    <a:ext uri="{FF2B5EF4-FFF2-40B4-BE49-F238E27FC236}">
+                      <a16:creationId xmlns:a16="http://schemas.microsoft.com/office/drawing/2014/main" id="{A8DE14F3-6673-2CFF-4814-3D77F06E6F87}"/>
+                    </a:ext>
+                  </a:extLst>
+                </p:cNvPr>
+                <p:cNvSpPr txBox="1"/>
+                <p:nvPr/>
+              </p:nvSpPr>
+              <p:spPr>
+                <a:xfrm>
+                  <a:off x="3445004" y="2963537"/>
+                  <a:ext cx="1743939" cy="369332"/>
+                </a:xfrm>
+                <a:prstGeom prst="rect">
+                  <a:avLst/>
+                </a:prstGeom>
+                <a:solidFill>
+                  <a:schemeClr val="accent1">
+                    <a:lumMod val="40000"/>
+                    <a:lumOff val="60000"/>
+                  </a:schemeClr>
+                </a:solidFill>
+              </p:spPr>
+              <p:txBody>
+                <a:bodyPr wrap="none" rtlCol="0">
+                  <a:spAutoFit/>
+                </a:bodyPr>
+                <a:lstStyle/>
+                <a:p>
+                  <a14:m>
+                    <m:oMathPara xmlns:m="http://schemas.openxmlformats.org/officeDocument/2006/math">
+                      <m:oMath>
+                        <m:d>
+                          <m:dPr>
+                            <m:ctrlPr>
+                              <a:rPr lang="en-US" i="1">
+                                <a:latin typeface="Cambria Math" panose="02040503050406030204" pitchFamily="18" charset="0"/>
+                              </a:rPr>
+                            </m:ctrlPr>
+                          </m:dPr>
+                          <m:e>
+                            <m:r>
+                              <a:rPr lang="en-US" i="1">
+                                <a:latin typeface="Cambria Math" panose="02040503050406030204" pitchFamily="18" charset="0"/>
+                              </a:rPr>
+                              <m:t>𝑎</m:t>
+                            </m:r>
+                            <m:r>
+                              <a:rPr lang="en-US" i="1">
+                                <a:latin typeface="Cambria Math" panose="02040503050406030204" pitchFamily="18" charset="0"/>
+                              </a:rPr>
+                              <m:t>+</m:t>
+                            </m:r>
+                            <m:r>
+                              <a:rPr lang="en-US" i="1">
+                                <a:latin typeface="Cambria Math" panose="02040503050406030204" pitchFamily="18" charset="0"/>
+                              </a:rPr>
+                              <m:t>𝑏</m:t>
+                            </m:r>
+                          </m:e>
+                        </m:d>
+                        <m:r>
+                          <a:rPr lang="en-US" i="1">
+                            <a:latin typeface="Cambria Math" panose="02040503050406030204" pitchFamily="18" charset="0"/>
+                          </a:rPr>
+                          <m:t>+</m:t>
+                        </m:r>
+                        <m:r>
+                          <a:rPr lang="en-US" b="0" i="1" smtClean="0">
+                            <a:latin typeface="Cambria Math" panose="02040503050406030204" pitchFamily="18" charset="0"/>
+                          </a:rPr>
+                          <m:t>(−</m:t>
+                        </m:r>
+                        <m:r>
+                          <a:rPr lang="en-US" b="0" i="1" smtClean="0">
+                            <a:latin typeface="Cambria Math" panose="02040503050406030204" pitchFamily="18" charset="0"/>
+                          </a:rPr>
+                          <m:t>𝑎</m:t>
+                        </m:r>
+                        <m:r>
+                          <a:rPr lang="en-US" b="0" i="1" smtClean="0">
+                            <a:latin typeface="Cambria Math" panose="02040503050406030204" pitchFamily="18" charset="0"/>
+                          </a:rPr>
+                          <m:t>)</m:t>
+                        </m:r>
+                      </m:oMath>
+                    </m:oMathPara>
+                  </a14:m>
+                  <a:endParaRPr lang="en-US" dirty="0"/>
+                </a:p>
+              </p:txBody>
+            </p:sp>
+          </mc:Choice>
+          <mc:Fallback>
+            <p:sp>
+              <p:nvSpPr>
+                <p:cNvPr id="4" name="TextBox 3">
+                  <a:extLst>
+                    <a:ext uri="{FF2B5EF4-FFF2-40B4-BE49-F238E27FC236}">
+                      <a16:creationId xmlns:a16="http://schemas.microsoft.com/office/drawing/2014/main" id="{A8DE14F3-6673-2CFF-4814-3D77F06E6F87}"/>
+                    </a:ext>
+                  </a:extLst>
+                </p:cNvPr>
+                <p:cNvSpPr txBox="1">
+                  <a:spLocks noRot="1" noChangeAspect="1" noMove="1" noResize="1" noEditPoints="1" noAdjustHandles="1" noChangeArrowheads="1" noChangeShapeType="1" noTextEdit="1"/>
+                </p:cNvSpPr>
+                <p:nvPr/>
+              </p:nvSpPr>
+              <p:spPr>
+                <a:xfrm>
+                  <a:off x="3445004" y="2963537"/>
+                  <a:ext cx="1743939" cy="369332"/>
+                </a:xfrm>
+                <a:prstGeom prst="rect">
+                  <a:avLst/>
+                </a:prstGeom>
+                <a:blipFill>
+                  <a:blip r:embed="rId3"/>
+                  <a:stretch>
+                    <a:fillRect b="-13333"/>
+                  </a:stretch>
+                </a:blipFill>
+              </p:spPr>
+              <p:txBody>
+                <a:bodyPr/>
+                <a:lstStyle/>
+                <a:p>
+                  <a:r>
+                    <a:rPr lang="en-US">
+                      <a:noFill/>
+                    </a:rPr>
+                    <a:t> </a:t>
+                  </a:r>
+                </a:p>
+              </p:txBody>
+            </p:sp>
+          </mc:Fallback>
+        </mc:AlternateContent>
+        <p:sp>
+          <p:nvSpPr>
+            <p:cNvPr id="6" name="TextBox 5">
+              <a:extLst>
+                <a:ext uri="{FF2B5EF4-FFF2-40B4-BE49-F238E27FC236}">
+                  <a16:creationId xmlns:a16="http://schemas.microsoft.com/office/drawing/2014/main" id="{F824C8BF-1C5C-546E-3472-D307A1A6BA07}"/>
+                </a:ext>
+              </a:extLst>
+            </p:cNvPr>
+            <p:cNvSpPr txBox="1"/>
+            <p:nvPr/>
+          </p:nvSpPr>
+          <p:spPr>
+            <a:xfrm>
+              <a:off x="2302525" y="2963537"/>
+              <a:ext cx="1039708" cy="369332"/>
+            </a:xfrm>
+            <a:prstGeom prst="rect">
+              <a:avLst/>
+            </a:prstGeom>
+            <a:noFill/>
+          </p:spPr>
+          <p:txBody>
+            <a:bodyPr wrap="none" rtlCol="0">
+              <a:spAutoFit/>
+            </a:bodyPr>
+            <a:lstStyle/>
+            <a:p>
+              <a:r>
+                <a:rPr lang="en-US" dirty="0"/>
+                <a:t>Example:</a:t>
+              </a:r>
+            </a:p>
+          </p:txBody>
+        </p:sp>
+      </p:grpSp>
+    </p:spTree>
+    <p:extLst>
+      <p:ext uri="{BB962C8B-B14F-4D97-AF65-F5344CB8AC3E}">
+        <p14:creationId xmlns:p14="http://schemas.microsoft.com/office/powerpoint/2010/main" val="2879319667"/>
+      </p:ext>
+    </p:extLst>
+  </p:cSld>
+  <p:clrMapOvr>
+    <a:masterClrMapping/>
+  </p:clrMapOvr>
+  <p:timing>
+    <p:tnLst>
+      <p:par>
+        <p:cTn id="1" dur="indefinite" restart="never" nodeType="tmRoot">
+          <p:childTnLst>
+            <p:seq concurrent="1" nextAc="seek">
+              <p:cTn id="2" dur="indefinite" nodeType="mainSeq">
+                <p:childTnLst>
+                  <p:par>
+                    <p:cTn id="3" fill="hold">
+                      <p:stCondLst>
+                        <p:cond delay="indefinite"/>
+                      </p:stCondLst>
+                      <p:childTnLst>
+                        <p:par>
+                          <p:cTn id="4" fill="hold">
+                            <p:stCondLst>
+                              <p:cond delay="0"/>
+                            </p:stCondLst>
+                            <p:childTnLst>
+                              <p:par>
+                                <p:cTn id="5" presetID="1" presetClass="entr" presetSubtype="0" fill="hold" nodeType="clickEffect">
+                                  <p:stCondLst>
+                                    <p:cond delay="0"/>
+                                  </p:stCondLst>
+                                  <p:childTnLst>
+                                    <p:set>
+                                      <p:cBhvr>
+                                        <p:cTn id="6" dur="1" fill="hold">
+                                          <p:stCondLst>
+                                            <p:cond delay="0"/>
+                                          </p:stCondLst>
+                                        </p:cTn>
+                                        <p:tgtEl>
+                                          <p:spTgt spid="7"/>
+                                        </p:tgtEl>
+                                        <p:attrNameLst>
+                                          <p:attrName>style.visibility</p:attrName>
+                                        </p:attrNameLst>
+                                      </p:cBhvr>
+                                      <p:to>
+                                        <p:strVal val="visible"/>
+                                      </p:to>
+                                    </p:set>
+                                  </p:childTnLst>
+                                </p:cTn>
+                              </p:par>
+                            </p:childTnLst>
+                          </p:cTn>
+                        </p:par>
+                      </p:childTnLst>
+                    </p:cTn>
+                  </p:par>
+                </p:childTnLst>
+              </p:cTn>
+              <p:prevCondLst>
+                <p:cond evt="onPrev" delay="0">
+                  <p:tgtEl>
+                    <p:sldTgt/>
+                  </p:tgtEl>
+                </p:cond>
+              </p:prevCondLst>
+              <p:nextCondLst>
+                <p:cond evt="onNext" delay="0">
+                  <p:tgtEl>
+                    <p:sldTgt/>
+                  </p:tgtEl>
+                </p:cond>
+              </p:nextCondLst>
+            </p:seq>
+          </p:childTnLst>
+        </p:cTn>
+      </p:par>
+    </p:tnLst>
+  </p:timing>
+</p:sld>
+</file>
+
+<file path=ppt/slides/slide48.xml><?xml version="1.0" encoding="utf-8"?>
+<p:sld xmlns:a="http://schemas.openxmlformats.org/drawingml/2006/main" xmlns:r="http://schemas.openxmlformats.org/officeDocument/2006/relationships" xmlns:p="http://schemas.openxmlformats.org/presentationml/2006/main">
+  <p:cSld>
+    <p:spTree>
+      <p:nvGrpSpPr>
         <p:cNvPr id="1" name="">
           <a:extLst>
             <a:ext uri="{FF2B5EF4-FFF2-40B4-BE49-F238E27FC236}">
@@ -34673,7 +35164,7 @@
               <a:blipFill>
                 <a:blip r:embed="rId3"/>
                 <a:stretch>
-                  <a:fillRect l="-877" t="-13333" b="-5000"/>
+                  <a:fillRect l="-772" t="-13934" b="-5738"/>
                 </a:stretch>
               </a:blipFill>
             </p:spPr>
@@ -34730,7 +35221,7 @@
           <a:lstStyle/>
           <a:p>
             <a:r>
-              <a:rPr lang="en-US" sz="1400" dirty="0">
+              <a:rPr lang="en-US" sz="1400">
                 <a:solidFill>
                   <a:schemeClr val="tx2"/>
                 </a:solidFill>
@@ -34740,7 +35231,7 @@
           </a:p>
           <a:p>
             <a:r>
-              <a:rPr lang="en-US" sz="1400" dirty="0">
+              <a:rPr lang="en-US" sz="1400">
                 <a:solidFill>
                   <a:schemeClr val="tx2"/>
                 </a:solidFill>
@@ -34750,7 +35241,7 @@
           </a:p>
           <a:p>
             <a:r>
-              <a:rPr lang="en-US" sz="1400" dirty="0">
+              <a:rPr lang="en-US" sz="1400">
                 <a:solidFill>
                   <a:schemeClr val="tx2"/>
                 </a:solidFill>
@@ -34760,7 +35251,7 @@
           </a:p>
           <a:p>
             <a:r>
-              <a:rPr lang="en-US" sz="1400" dirty="0">
+              <a:rPr lang="en-US" sz="1400">
                 <a:solidFill>
                   <a:schemeClr val="tx2"/>
                 </a:solidFill>
@@ -34799,13 +35290,13 @@
           <a:lstStyle/>
           <a:p>
             <a:r>
-              <a:rPr lang="en-US" sz="1200" dirty="0"/>
+              <a:rPr lang="en-US" sz="1200"/>
               <a:t>Horace He, “Defeating Nondeterminism in LLM Inference</a:t>
             </a:r>
           </a:p>
           <a:p>
             <a:r>
-              <a:rPr lang="en-US" sz="1200" dirty="0"/>
+              <a:rPr lang="en-US" sz="1200"/>
               <a:t>“</a:t>
             </a:r>
           </a:p>
@@ -34859,7 +35350,7 @@
 </p:sld>
 </file>
 
-<file path=ppt/slides/slide48.xml><?xml version="1.0" encoding="utf-8"?>
+<file path=ppt/slides/slide49.xml><?xml version="1.0" encoding="utf-8"?>
 <p:sld xmlns:a="http://schemas.openxmlformats.org/drawingml/2006/main" xmlns:r="http://schemas.openxmlformats.org/officeDocument/2006/relationships" xmlns:p="http://schemas.openxmlformats.org/presentationml/2006/main" show="0">
   <p:cSld>
     <p:spTree>
@@ -34892,7 +35383,7 @@
           <a:lstStyle/>
           <a:p>
             <a:r>
-              <a:rPr lang="en-US" dirty="0"/>
+              <a:rPr lang="en-US"/>
               <a:t>Floating point trouble</a:t>
             </a:r>
           </a:p>
@@ -34919,7 +35410,7 @@
           <a:lstStyle/>
           <a:p>
             <a:r>
-              <a:rPr lang="en-US" dirty="0"/>
+              <a:rPr lang="en-US"/>
               <a:t>Never count using floating points</a:t>
             </a:r>
           </a:p>
@@ -34953,32 +35444,32 @@
           <a:lstStyle/>
           <a:p>
             <a:r>
-              <a:rPr lang="ro-RO" sz="3200" dirty="0"/>
+              <a:rPr lang="ro-RO" sz="3200"/>
               <a:t>count = 0;</a:t>
             </a:r>
           </a:p>
           <a:p>
             <a:r>
-              <a:rPr lang="ro-RO" sz="3200" dirty="0"/>
+              <a:rPr lang="ro-RO" sz="3200"/>
               <a:t>for (float f = 0.0; f &lt; 1.0; f += 0.1) {</a:t>
             </a:r>
           </a:p>
           <a:p>
             <a:r>
-              <a:rPr lang="ro-RO" sz="3200" dirty="0"/>
+              <a:rPr lang="ro-RO" sz="3200"/>
               <a:t>     count++;</a:t>
             </a:r>
           </a:p>
           <a:p>
             <a:r>
-              <a:rPr lang="ro-RO" sz="3200" dirty="0"/>
+              <a:rPr lang="ro-RO" sz="3200"/>
               <a:t>}</a:t>
             </a:r>
             <a:r>
-              <a:rPr lang="is-IS" dirty="0"/>
+              <a:rPr lang="is-IS"/>
               <a:t>       </a:t>
             </a:r>
-            <a:endParaRPr lang="en-US" dirty="0"/>
+            <a:endParaRPr lang="en-US"/>
           </a:p>
         </p:txBody>
       </p:sp>
@@ -34986,149 +35477,6 @@
     <p:extLst>
       <p:ext uri="{BB962C8B-B14F-4D97-AF65-F5344CB8AC3E}">
         <p14:creationId xmlns:p14="http://schemas.microsoft.com/office/powerpoint/2010/main" val="1235358217"/>
-      </p:ext>
-    </p:extLst>
-  </p:cSld>
-  <p:clrMapOvr>
-    <a:masterClrMapping/>
-  </p:clrMapOvr>
-</p:sld>
-</file>
-
-<file path=ppt/slides/slide49.xml><?xml version="1.0" encoding="utf-8"?>
-<p:sld xmlns:a="http://schemas.openxmlformats.org/drawingml/2006/main" xmlns:r="http://schemas.openxmlformats.org/officeDocument/2006/relationships" xmlns:p="http://schemas.openxmlformats.org/presentationml/2006/main">
-  <p:cSld>
-    <p:spTree>
-      <p:nvGrpSpPr>
-        <p:cNvPr id="1" name=""/>
-        <p:cNvGrpSpPr/>
-        <p:nvPr/>
-      </p:nvGrpSpPr>
-      <p:grpSpPr>
-        <a:xfrm>
-          <a:off x="0" y="0"/>
-          <a:ext cx="0" cy="0"/>
-          <a:chOff x="0" y="0"/>
-          <a:chExt cx="0" cy="0"/>
-        </a:xfrm>
-      </p:grpSpPr>
-      <p:sp>
-        <p:nvSpPr>
-          <p:cNvPr id="2" name="Title 1">
-            <a:extLst>
-              <a:ext uri="{FF2B5EF4-FFF2-40B4-BE49-F238E27FC236}">
-                <a16:creationId xmlns:a16="http://schemas.microsoft.com/office/drawing/2014/main" id="{25CD03C5-DD11-6543-A6C8-1FD70DDB1946}"/>
-              </a:ext>
-            </a:extLst>
-          </p:cNvPr>
-          <p:cNvSpPr>
-            <a:spLocks noGrp="1"/>
-          </p:cNvSpPr>
-          <p:nvPr>
-            <p:ph type="title"/>
-          </p:nvPr>
-        </p:nvSpPr>
-        <p:spPr>
-          <a:xfrm>
-            <a:off x="457199" y="274638"/>
-            <a:ext cx="8523027" cy="1143000"/>
-          </a:xfrm>
-        </p:spPr>
-        <p:txBody>
-          <a:bodyPr/>
-          <a:lstStyle/>
-          <a:p>
-            <a:r>
-              <a:rPr lang="en-US" dirty="0"/>
-              <a:t>FP point trouble</a:t>
-            </a:r>
-          </a:p>
-        </p:txBody>
-      </p:sp>
-      <p:sp>
-        <p:nvSpPr>
-          <p:cNvPr id="3" name="Content Placeholder 2">
-            <a:extLst>
-              <a:ext uri="{FF2B5EF4-FFF2-40B4-BE49-F238E27FC236}">
-                <a16:creationId xmlns:a16="http://schemas.microsoft.com/office/drawing/2014/main" id="{62EA2E42-0712-9042-8775-F471734E8934}"/>
-              </a:ext>
-            </a:extLst>
-          </p:cNvPr>
-          <p:cNvSpPr>
-            <a:spLocks noGrp="1"/>
-          </p:cNvSpPr>
-          <p:nvPr>
-            <p:ph idx="1"/>
-          </p:nvPr>
-        </p:nvSpPr>
-        <p:spPr>
-          <a:xfrm>
-            <a:off x="457200" y="1417638"/>
-            <a:ext cx="8229600" cy="4525963"/>
-          </a:xfrm>
-        </p:spPr>
-        <p:txBody>
-          <a:bodyPr/>
-          <a:lstStyle/>
-          <a:p>
-            <a:r>
-              <a:rPr lang="en-US" dirty="0"/>
-              <a:t>Many real world disasters are due to FP trickiness</a:t>
-            </a:r>
-          </a:p>
-          <a:p>
-            <a:pPr lvl="1"/>
-            <a:r>
-              <a:rPr lang="en-US" dirty="0"/>
-              <a:t>Patriot Missile failed to intercept due to rounding error (1991)</a:t>
-            </a:r>
-          </a:p>
-          <a:p>
-            <a:pPr lvl="1"/>
-            <a:r>
-              <a:rPr lang="en-US" dirty="0"/>
-              <a:t>Ariane 5 explosion due to overflow in converting from double to int (1996)</a:t>
-            </a:r>
-          </a:p>
-          <a:p>
-            <a:endParaRPr lang="en-US" dirty="0"/>
-          </a:p>
-        </p:txBody>
-      </p:sp>
-      <p:pic>
-        <p:nvPicPr>
-          <p:cNvPr id="5" name="Picture 4">
-            <a:extLst>
-              <a:ext uri="{FF2B5EF4-FFF2-40B4-BE49-F238E27FC236}">
-                <a16:creationId xmlns:a16="http://schemas.microsoft.com/office/drawing/2014/main" id="{FD438DDB-F6E6-EE4D-8C4A-7F4B4DFE008B}"/>
-              </a:ext>
-            </a:extLst>
-          </p:cNvPr>
-          <p:cNvPicPr>
-            <a:picLocks noChangeAspect="1"/>
-          </p:cNvPicPr>
-          <p:nvPr/>
-        </p:nvPicPr>
-        <p:blipFill>
-          <a:blip r:embed="rId2"/>
-          <a:stretch>
-            <a:fillRect/>
-          </a:stretch>
-        </p:blipFill>
-        <p:spPr>
-          <a:xfrm>
-            <a:off x="1957621" y="3841829"/>
-            <a:ext cx="3733495" cy="2831941"/>
-          </a:xfrm>
-          <a:prstGeom prst="rect">
-            <a:avLst/>
-          </a:prstGeom>
-        </p:spPr>
-      </p:pic>
-    </p:spTree>
-    <p:extLst>
-      <p:ext uri="{BB962C8B-B14F-4D97-AF65-F5344CB8AC3E}">
-        <p14:creationId xmlns:p14="http://schemas.microsoft.com/office/powerpoint/2010/main" val="1948272567"/>
       </p:ext>
     </p:extLst>
   </p:cSld>
@@ -35232,10 +35580,10 @@
           <a:lstStyle/>
           <a:p>
             <a:r>
-              <a:rPr kumimoji="1" lang="en-US" altLang="zh-CN" dirty="0"/>
+              <a:rPr kumimoji="1" lang="en-US" altLang="zh-CN"/>
               <a:t>Binary Representation</a:t>
             </a:r>
-            <a:endParaRPr kumimoji="1" lang="zh-CN" altLang="en-US" dirty="0"/>
+            <a:endParaRPr kumimoji="1" lang="zh-CN" altLang="en-US"/>
           </a:p>
         </p:txBody>
       </p:sp>
@@ -35261,20 +35609,20 @@
           <a:lstStyle/>
           <a:p>
             <a:r>
-              <a:rPr lang="en-US" altLang="zh-CN" sz="2400" dirty="0">
+              <a:rPr lang="en-US" altLang="zh-CN" sz="2400">
                 <a:latin typeface="Arial"/>
                 <a:cs typeface="Arial"/>
               </a:rPr>
               <a:t>(5.5)</a:t>
             </a:r>
             <a:r>
-              <a:rPr lang="en-US" altLang="zh-CN" sz="2400" baseline="-25000" dirty="0">
+              <a:rPr lang="en-US" altLang="zh-CN" sz="2400" baseline="-25000">
                 <a:latin typeface="Arial"/>
                 <a:cs typeface="Arial"/>
               </a:rPr>
               <a:t>10</a:t>
             </a:r>
-            <a:endParaRPr lang="en-US" altLang="zh-CN" sz="2400" dirty="0">
+            <a:endParaRPr lang="en-US" altLang="zh-CN" sz="2400">
               <a:latin typeface="Arial"/>
               <a:cs typeface="Arial"/>
             </a:endParaRPr>
@@ -35310,20 +35658,20 @@
           <a:lstStyle/>
           <a:p>
             <a:r>
-              <a:rPr lang="en-US" altLang="zh-CN" sz="2400" dirty="0">
+              <a:rPr lang="en-US" altLang="zh-CN" sz="2400">
                 <a:latin typeface="Arial"/>
                 <a:cs typeface="Arial"/>
               </a:rPr>
               <a:t>= (101.1)</a:t>
             </a:r>
             <a:r>
-              <a:rPr lang="en-US" altLang="zh-CN" sz="2400" baseline="-25000" dirty="0">
+              <a:rPr lang="en-US" altLang="zh-CN" sz="2400" baseline="-25000">
                 <a:latin typeface="Arial"/>
                 <a:cs typeface="Arial"/>
               </a:rPr>
               <a:t>2</a:t>
             </a:r>
-            <a:endParaRPr lang="en-US" sz="2400" dirty="0"/>
+            <a:endParaRPr lang="en-US" sz="2400"/>
           </a:p>
         </p:txBody>
       </p:sp>
@@ -35356,27 +35704,27 @@
           <a:lstStyle/>
           <a:p>
             <a:r>
-              <a:rPr lang="en-US" altLang="zh-CN" sz="2400" dirty="0">
+              <a:rPr lang="en-US" altLang="zh-CN" sz="2400">
                 <a:latin typeface="Arial"/>
                 <a:cs typeface="Arial"/>
               </a:rPr>
               <a:t>= 4</a:t>
             </a:r>
             <a:r>
-              <a:rPr lang="en-US" altLang="zh-CN" sz="2400" baseline="30000" dirty="0">
+              <a:rPr lang="en-US" altLang="zh-CN" sz="2400" baseline="30000">
                 <a:latin typeface="Arial"/>
                 <a:cs typeface="Arial"/>
               </a:rPr>
               <a:t> </a:t>
             </a:r>
             <a:r>
-              <a:rPr lang="en-US" altLang="zh-CN" sz="2400" dirty="0">
+              <a:rPr lang="en-US" altLang="zh-CN" sz="2400">
                 <a:latin typeface="Arial"/>
                 <a:cs typeface="Arial"/>
               </a:rPr>
               <a:t>+ 1 + 1/2</a:t>
             </a:r>
-            <a:endParaRPr lang="en-US" sz="2400" dirty="0"/>
+            <a:endParaRPr lang="en-US" sz="2400"/>
           </a:p>
         </p:txBody>
       </p:sp>
@@ -35409,48 +35757,48 @@
           <a:lstStyle/>
           <a:p>
             <a:r>
-              <a:rPr lang="en-US" altLang="zh-CN" sz="2400" dirty="0">
+              <a:rPr lang="en-US" altLang="zh-CN" sz="2400">
                 <a:latin typeface="Arial"/>
                 <a:cs typeface="Arial"/>
               </a:rPr>
               <a:t>= 2</a:t>
             </a:r>
             <a:r>
-              <a:rPr lang="en-US" altLang="zh-CN" sz="2400" baseline="30000" dirty="0">
+              <a:rPr lang="en-US" altLang="zh-CN" sz="2400" baseline="30000">
                 <a:latin typeface="Arial"/>
                 <a:cs typeface="Arial"/>
               </a:rPr>
               <a:t>2 </a:t>
             </a:r>
             <a:r>
-              <a:rPr lang="en-US" altLang="zh-CN" sz="2400" dirty="0">
+              <a:rPr lang="en-US" altLang="zh-CN" sz="2400">
                 <a:latin typeface="Arial"/>
                 <a:cs typeface="Arial"/>
               </a:rPr>
               <a:t>+ 2</a:t>
             </a:r>
             <a:r>
-              <a:rPr lang="en-US" altLang="zh-CN" sz="2400" baseline="30000" dirty="0">
+              <a:rPr lang="en-US" altLang="zh-CN" sz="2400" baseline="30000">
                 <a:latin typeface="Arial"/>
                 <a:cs typeface="Arial"/>
               </a:rPr>
               <a:t>0</a:t>
             </a:r>
             <a:r>
-              <a:rPr lang="en-US" altLang="zh-CN" sz="2400" dirty="0">
+              <a:rPr lang="en-US" altLang="zh-CN" sz="2400">
                 <a:latin typeface="Arial"/>
                 <a:cs typeface="Arial"/>
               </a:rPr>
               <a:t> + 2</a:t>
             </a:r>
             <a:r>
-              <a:rPr lang="en-US" altLang="zh-CN" sz="2400" baseline="30000" dirty="0">
+              <a:rPr lang="en-US" altLang="zh-CN" sz="2400" baseline="30000">
                 <a:latin typeface="Arial"/>
                 <a:cs typeface="Arial"/>
               </a:rPr>
               <a:t>-1</a:t>
             </a:r>
-            <a:endParaRPr lang="en-US" sz="2400" dirty="0"/>
+            <a:endParaRPr lang="en-US" sz="2400"/>
           </a:p>
         </p:txBody>
       </p:sp>
@@ -35525,7 +35873,13 @@
                       <p:embed/>
                       <p:pic>
                         <p:nvPicPr>
-                          <p:cNvPr id="26" name="对象 25"/>
+                          <p:cNvPr id="23" name="对象 25">
+                            <a:extLst>
+                              <a:ext uri="{FF2B5EF4-FFF2-40B4-BE49-F238E27FC236}">
+                                <a16:creationId xmlns:a16="http://schemas.microsoft.com/office/drawing/2014/main" id="{01A1BAEA-BDCD-6DC2-5153-FE33EAEF9CEC}"/>
+                              </a:ext>
+                            </a:extLst>
+                          </p:cNvPr>
                           <p:cNvPicPr/>
                           <p:nvPr/>
                         </p:nvPicPr>
@@ -35582,7 +35936,13 @@
                       <p:embed/>
                       <p:pic>
                         <p:nvPicPr>
-                          <p:cNvPr id="27" name="对象 26"/>
+                          <p:cNvPr id="24" name="对象 26">
+                            <a:extLst>
+                              <a:ext uri="{FF2B5EF4-FFF2-40B4-BE49-F238E27FC236}">
+                                <a16:creationId xmlns:a16="http://schemas.microsoft.com/office/drawing/2014/main" id="{0EF3C58C-F3B2-24E3-91AC-E845D99B97B2}"/>
+                              </a:ext>
+                            </a:extLst>
+                          </p:cNvPr>
                           <p:cNvPicPr/>
                           <p:nvPr/>
                         </p:nvPicPr>
@@ -35705,20 +36065,20 @@
             <a:lstStyle/>
             <a:p>
               <a:r>
-                <a:rPr lang="en-US" altLang="zh-CN" sz="2000" dirty="0">
+                <a:rPr lang="en-US" altLang="zh-CN" sz="2000">
                   <a:latin typeface="Arial"/>
                   <a:cs typeface="Arial"/>
                 </a:rPr>
                 <a:t>2</a:t>
               </a:r>
               <a:r>
-                <a:rPr lang="en-US" altLang="zh-CN" sz="2000" baseline="30000" dirty="0">
+                <a:rPr lang="en-US" altLang="zh-CN" sz="2000" baseline="30000">
                   <a:latin typeface="Arial"/>
                   <a:cs typeface="Arial"/>
                 </a:rPr>
                 <a:t>p</a:t>
               </a:r>
-              <a:endParaRPr lang="zh-CN" altLang="en-US" sz="1350" dirty="0">
+              <a:endParaRPr lang="zh-CN" altLang="en-US" sz="1350">
                 <a:latin typeface="Arial"/>
                 <a:cs typeface="Arial"/>
               </a:endParaRPr>
@@ -35821,20 +36181,20 @@
             <a:lstStyle/>
             <a:p>
               <a:r>
-                <a:rPr lang="en-US" altLang="zh-CN" sz="2000" dirty="0">
+                <a:rPr lang="en-US" altLang="zh-CN" sz="2000">
                   <a:latin typeface="Arial"/>
                   <a:cs typeface="Arial"/>
                 </a:rPr>
                 <a:t>2</a:t>
               </a:r>
               <a:r>
-                <a:rPr lang="en-US" altLang="zh-CN" sz="2000" baseline="30000" dirty="0">
+                <a:rPr lang="en-US" altLang="zh-CN" sz="2000" baseline="30000">
                   <a:latin typeface="Arial"/>
                   <a:cs typeface="Arial"/>
                 </a:rPr>
                 <a:t>p-1</a:t>
               </a:r>
-              <a:endParaRPr lang="zh-CN" altLang="en-US" sz="2000" dirty="0">
+              <a:endParaRPr lang="zh-CN" altLang="en-US" sz="2000">
                 <a:latin typeface="Arial"/>
                 <a:cs typeface="Arial"/>
               </a:endParaRPr>
@@ -35937,13 +36297,13 @@
             <a:lstStyle/>
             <a:p>
               <a:r>
-                <a:rPr lang="en-US" altLang="zh-CN" sz="2000" dirty="0">
+                <a:rPr lang="en-US" altLang="zh-CN" sz="2000">
                   <a:latin typeface="Arial"/>
                   <a:cs typeface="Arial"/>
                 </a:rPr>
                 <a:t>2</a:t>
               </a:r>
-              <a:endParaRPr lang="zh-CN" altLang="en-US" sz="2000" dirty="0">
+              <a:endParaRPr lang="zh-CN" altLang="en-US" sz="2000">
                 <a:latin typeface="Arial"/>
                 <a:cs typeface="Arial"/>
               </a:endParaRPr>
@@ -36046,13 +36406,13 @@
             <a:lstStyle/>
             <a:p>
               <a:r>
-                <a:rPr lang="en-US" altLang="zh-CN" sz="2000" dirty="0">
+                <a:rPr lang="en-US" altLang="zh-CN" sz="2000">
                   <a:latin typeface="Arial"/>
                   <a:cs typeface="Arial"/>
                 </a:rPr>
                 <a:t>1</a:t>
               </a:r>
-              <a:endParaRPr lang="zh-CN" altLang="en-US" sz="2000" dirty="0">
+              <a:endParaRPr lang="zh-CN" altLang="en-US" sz="2000">
                 <a:latin typeface="Arial"/>
                 <a:cs typeface="Arial"/>
               </a:endParaRPr>
@@ -36155,13 +36515,13 @@
             <a:lstStyle/>
             <a:p>
               <a:r>
-                <a:rPr lang="en-US" altLang="zh-CN" sz="2000" dirty="0">
+                <a:rPr lang="en-US" altLang="zh-CN" sz="2000">
                   <a:latin typeface="Arial"/>
                   <a:cs typeface="Arial"/>
                 </a:rPr>
                 <a:t>1/2</a:t>
               </a:r>
-              <a:endParaRPr lang="zh-CN" altLang="en-US" sz="2000" dirty="0">
+              <a:endParaRPr lang="zh-CN" altLang="en-US" sz="2000">
                 <a:latin typeface="Arial"/>
                 <a:cs typeface="Arial"/>
               </a:endParaRPr>
@@ -36196,13 +36556,13 @@
             <a:lstStyle/>
             <a:p>
               <a:r>
-                <a:rPr lang="en-US" altLang="zh-CN" sz="2000" dirty="0">
+                <a:rPr lang="en-US" altLang="zh-CN" sz="2000">
                   <a:latin typeface="Arial"/>
                   <a:cs typeface="Arial"/>
                 </a:rPr>
                 <a:t>1/4</a:t>
               </a:r>
-              <a:endParaRPr lang="zh-CN" altLang="en-US" sz="2000" dirty="0">
+              <a:endParaRPr lang="zh-CN" altLang="en-US" sz="2000">
                 <a:latin typeface="Arial"/>
                 <a:cs typeface="Arial"/>
               </a:endParaRPr>
@@ -36373,20 +36733,20 @@
             <a:lstStyle/>
             <a:p>
               <a:r>
-                <a:rPr lang="en-US" altLang="zh-CN" sz="2000" dirty="0">
+                <a:rPr lang="en-US" altLang="zh-CN" sz="2000">
                   <a:latin typeface="Arial"/>
                   <a:cs typeface="Arial"/>
                 </a:rPr>
                 <a:t>1/2</a:t>
               </a:r>
               <a:r>
-                <a:rPr lang="en-US" altLang="zh-CN" sz="2000" baseline="30000" dirty="0">
+                <a:rPr lang="en-US" altLang="zh-CN" sz="2000" baseline="30000">
                   <a:latin typeface="Arial"/>
                   <a:cs typeface="Arial"/>
                 </a:rPr>
                 <a:t>q</a:t>
               </a:r>
-              <a:endParaRPr lang="zh-CN" altLang="en-US" sz="2000" dirty="0">
+              <a:endParaRPr lang="zh-CN" altLang="en-US" sz="2000">
                 <a:latin typeface="Arial"/>
                 <a:cs typeface="Arial"/>
               </a:endParaRPr>
@@ -36422,7 +36782,7 @@
           <a:lstStyle/>
           <a:p>
             <a:r>
-              <a:rPr lang="en-US" altLang="zh-CN" sz="4000" b="1" dirty="0">
+              <a:rPr lang="en-US" altLang="zh-CN" sz="4000" b="1">
                 <a:solidFill>
                   <a:srgbClr val="FF0000"/>
                 </a:solidFill>
@@ -36431,7 +36791,7 @@
               </a:rPr>
               <a:t>.</a:t>
             </a:r>
-            <a:endParaRPr lang="zh-CN" altLang="en-US" sz="4000" b="1" dirty="0"/>
+            <a:endParaRPr lang="zh-CN" altLang="en-US" sz="4000" b="1"/>
           </a:p>
         </p:txBody>
       </p:sp>
@@ -36472,7 +36832,13 @@
                   <p:embed/>
                   <p:pic>
                     <p:nvPicPr>
-                      <p:cNvPr id="23" name="Object 3"/>
+                      <p:cNvPr id="26" name="Object 3">
+                        <a:extLst>
+                          <a:ext uri="{FF2B5EF4-FFF2-40B4-BE49-F238E27FC236}">
+                            <a16:creationId xmlns:a16="http://schemas.microsoft.com/office/drawing/2014/main" id="{9D8B13BD-76D7-C4D2-A669-C3DE804DA9C9}"/>
+                          </a:ext>
+                        </a:extLst>
+                      </p:cNvPr>
                       <p:cNvPicPr/>
                       <p:nvPr/>
                     </p:nvPicPr>
@@ -36700,6 +37066,149 @@
       </p:grpSpPr>
       <p:sp>
         <p:nvSpPr>
+          <p:cNvPr id="2" name="Title 1">
+            <a:extLst>
+              <a:ext uri="{FF2B5EF4-FFF2-40B4-BE49-F238E27FC236}">
+                <a16:creationId xmlns:a16="http://schemas.microsoft.com/office/drawing/2014/main" id="{25CD03C5-DD11-6543-A6C8-1FD70DDB1946}"/>
+              </a:ext>
+            </a:extLst>
+          </p:cNvPr>
+          <p:cNvSpPr>
+            <a:spLocks noGrp="1"/>
+          </p:cNvSpPr>
+          <p:nvPr>
+            <p:ph type="title"/>
+          </p:nvPr>
+        </p:nvSpPr>
+        <p:spPr>
+          <a:xfrm>
+            <a:off x="457199" y="274638"/>
+            <a:ext cx="8523027" cy="1143000"/>
+          </a:xfrm>
+        </p:spPr>
+        <p:txBody>
+          <a:bodyPr/>
+          <a:lstStyle/>
+          <a:p>
+            <a:r>
+              <a:rPr lang="en-US"/>
+              <a:t>FP point trouble</a:t>
+            </a:r>
+          </a:p>
+        </p:txBody>
+      </p:sp>
+      <p:sp>
+        <p:nvSpPr>
+          <p:cNvPr id="3" name="Content Placeholder 2">
+            <a:extLst>
+              <a:ext uri="{FF2B5EF4-FFF2-40B4-BE49-F238E27FC236}">
+                <a16:creationId xmlns:a16="http://schemas.microsoft.com/office/drawing/2014/main" id="{62EA2E42-0712-9042-8775-F471734E8934}"/>
+              </a:ext>
+            </a:extLst>
+          </p:cNvPr>
+          <p:cNvSpPr>
+            <a:spLocks noGrp="1"/>
+          </p:cNvSpPr>
+          <p:nvPr>
+            <p:ph idx="1"/>
+          </p:nvPr>
+        </p:nvSpPr>
+        <p:spPr>
+          <a:xfrm>
+            <a:off x="457200" y="1417638"/>
+            <a:ext cx="8229600" cy="4525963"/>
+          </a:xfrm>
+        </p:spPr>
+        <p:txBody>
+          <a:bodyPr/>
+          <a:lstStyle/>
+          <a:p>
+            <a:r>
+              <a:rPr lang="en-US"/>
+              <a:t>Many real world disasters are due to FP trickiness</a:t>
+            </a:r>
+          </a:p>
+          <a:p>
+            <a:pPr lvl="1"/>
+            <a:r>
+              <a:rPr lang="en-US"/>
+              <a:t>Patriot Missile failed to intercept due to rounding error (1991)</a:t>
+            </a:r>
+          </a:p>
+          <a:p>
+            <a:pPr lvl="1"/>
+            <a:r>
+              <a:rPr lang="en-US"/>
+              <a:t>Ariane 5 explosion due to overflow in converting from double to int (1996)</a:t>
+            </a:r>
+          </a:p>
+          <a:p>
+            <a:endParaRPr lang="en-US"/>
+          </a:p>
+        </p:txBody>
+      </p:sp>
+      <p:pic>
+        <p:nvPicPr>
+          <p:cNvPr id="5" name="Picture 4">
+            <a:extLst>
+              <a:ext uri="{FF2B5EF4-FFF2-40B4-BE49-F238E27FC236}">
+                <a16:creationId xmlns:a16="http://schemas.microsoft.com/office/drawing/2014/main" id="{FD438DDB-F6E6-EE4D-8C4A-7F4B4DFE008B}"/>
+              </a:ext>
+            </a:extLst>
+          </p:cNvPr>
+          <p:cNvPicPr>
+            <a:picLocks noChangeAspect="1"/>
+          </p:cNvPicPr>
+          <p:nvPr/>
+        </p:nvPicPr>
+        <p:blipFill>
+          <a:blip r:embed="rId2"/>
+          <a:stretch>
+            <a:fillRect/>
+          </a:stretch>
+        </p:blipFill>
+        <p:spPr>
+          <a:xfrm>
+            <a:off x="1957621" y="3841829"/>
+            <a:ext cx="3733495" cy="2831941"/>
+          </a:xfrm>
+          <a:prstGeom prst="rect">
+            <a:avLst/>
+          </a:prstGeom>
+        </p:spPr>
+      </p:pic>
+    </p:spTree>
+    <p:extLst>
+      <p:ext uri="{BB962C8B-B14F-4D97-AF65-F5344CB8AC3E}">
+        <p14:creationId xmlns:p14="http://schemas.microsoft.com/office/powerpoint/2010/main" val="1948272567"/>
+      </p:ext>
+    </p:extLst>
+  </p:cSld>
+  <p:clrMapOvr>
+    <a:masterClrMapping/>
+  </p:clrMapOvr>
+</p:sld>
+</file>
+
+<file path=ppt/slides/slide51.xml><?xml version="1.0" encoding="utf-8"?>
+<p:sld xmlns:a="http://schemas.openxmlformats.org/drawingml/2006/main" xmlns:r="http://schemas.openxmlformats.org/officeDocument/2006/relationships" xmlns:p="http://schemas.openxmlformats.org/presentationml/2006/main">
+  <p:cSld>
+    <p:spTree>
+      <p:nvGrpSpPr>
+        <p:cNvPr id="1" name=""/>
+        <p:cNvGrpSpPr/>
+        <p:nvPr/>
+      </p:nvGrpSpPr>
+      <p:grpSpPr>
+        <a:xfrm>
+          <a:off x="0" y="0"/>
+          <a:ext cx="0" cy="0"/>
+          <a:chOff x="0" y="0"/>
+          <a:chExt cx="0" cy="0"/>
+        </a:xfrm>
+      </p:grpSpPr>
+      <p:sp>
+        <p:nvSpPr>
           <p:cNvPr id="2" name="Title 1"/>
           <p:cNvSpPr>
             <a:spLocks noGrp="1"/>
@@ -36714,7 +37223,7 @@
           <a:lstStyle/>
           <a:p>
             <a:r>
-              <a:rPr lang="en-US" dirty="0"/>
+              <a:rPr lang="en-US"/>
               <a:t>Floating point summary</a:t>
             </a:r>
           </a:p>
@@ -36741,40 +37250,40 @@
           <a:lstStyle/>
           <a:p>
             <a:r>
-              <a:rPr lang="en-US" dirty="0"/>
+              <a:rPr lang="en-US"/>
               <a:t>FP format is based on binary scientific notation</a:t>
             </a:r>
           </a:p>
           <a:p>
             <a:r>
-              <a:rPr lang="en-US" dirty="0"/>
+              <a:rPr lang="en-US"/>
               <a:t>IEEE FP format</a:t>
             </a:r>
           </a:p>
           <a:p>
             <a:pPr lvl="1"/>
             <a:r>
-              <a:rPr lang="en-US" dirty="0"/>
+              <a:rPr lang="en-US"/>
               <a:t>Normalized, denormalized, special values</a:t>
             </a:r>
           </a:p>
           <a:p>
             <a:r>
-              <a:rPr lang="en-US" dirty="0"/>
+              <a:rPr lang="en-US"/>
               <a:t>Floating points are tricky</a:t>
             </a:r>
           </a:p>
           <a:p>
             <a:pPr lvl="1"/>
             <a:r>
-              <a:rPr lang="en-US" dirty="0"/>
+              <a:rPr lang="en-US"/>
               <a:t>Precision diminishes as magnitude grows</a:t>
             </a:r>
           </a:p>
           <a:p>
             <a:pPr lvl="1"/>
             <a:r>
-              <a:rPr lang="en-US" dirty="0"/>
+              <a:rPr lang="en-US"/>
               <a:t>overflow, rounding error</a:t>
             </a:r>
           </a:p>
@@ -36925,10 +37434,10 @@
           <a:lstStyle/>
           <a:p>
             <a:r>
-              <a:rPr kumimoji="1" lang="en-US" altLang="zh-CN" dirty="0"/>
+              <a:rPr kumimoji="1" lang="en-US" altLang="zh-CN"/>
               <a:t>Binary Representation</a:t>
             </a:r>
-            <a:endParaRPr kumimoji="1" lang="zh-CN" altLang="en-US" dirty="0"/>
+            <a:endParaRPr kumimoji="1" lang="zh-CN" altLang="en-US"/>
           </a:p>
         </p:txBody>
       </p:sp>
@@ -37062,10 +37571,10 @@
                       <p:embed/>
                       <p:pic>
                         <p:nvPicPr>
-                          <p:cNvPr id="23" name="对象 25">
+                          <p:cNvPr id="21" name="对象 25">
                             <a:extLst>
                               <a:ext uri="{FF2B5EF4-FFF2-40B4-BE49-F238E27FC236}">
-                                <a16:creationId xmlns:a16="http://schemas.microsoft.com/office/drawing/2014/main" id="{01A1BAEA-BDCD-6DC2-5153-FE33EAEF9CEC}"/>
+                                <a16:creationId xmlns:a16="http://schemas.microsoft.com/office/drawing/2014/main" id="{F8B940E6-B993-EA68-569D-EA4199BE8909}"/>
                               </a:ext>
                             </a:extLst>
                           </p:cNvPr>
@@ -37125,10 +37634,10 @@
                       <p:embed/>
                       <p:pic>
                         <p:nvPicPr>
-                          <p:cNvPr id="24" name="对象 26">
+                          <p:cNvPr id="22" name="对象 26">
                             <a:extLst>
                               <a:ext uri="{FF2B5EF4-FFF2-40B4-BE49-F238E27FC236}">
-                                <a16:creationId xmlns:a16="http://schemas.microsoft.com/office/drawing/2014/main" id="{0EF3C58C-F3B2-24E3-91AC-E845D99B97B2}"/>
+                                <a16:creationId xmlns:a16="http://schemas.microsoft.com/office/drawing/2014/main" id="{B297A58F-E251-3480-8C4A-AC73296CED79}"/>
                               </a:ext>
                             </a:extLst>
                           </p:cNvPr>
@@ -37254,20 +37763,20 @@
             <a:lstStyle/>
             <a:p>
               <a:r>
-                <a:rPr lang="en-US" altLang="zh-CN" sz="2000" dirty="0">
+                <a:rPr lang="en-US" altLang="zh-CN" sz="2000">
                   <a:latin typeface="Arial"/>
                   <a:cs typeface="Arial"/>
                 </a:rPr>
                 <a:t>2</a:t>
               </a:r>
               <a:r>
-                <a:rPr lang="en-US" altLang="zh-CN" sz="2000" baseline="30000" dirty="0">
+                <a:rPr lang="en-US" altLang="zh-CN" sz="2000" baseline="30000">
                   <a:latin typeface="Arial"/>
                   <a:cs typeface="Arial"/>
                 </a:rPr>
                 <a:t>p</a:t>
               </a:r>
-              <a:endParaRPr lang="zh-CN" altLang="en-US" sz="1350" dirty="0">
+              <a:endParaRPr lang="zh-CN" altLang="en-US" sz="1350">
                 <a:latin typeface="Arial"/>
                 <a:cs typeface="Arial"/>
               </a:endParaRPr>
@@ -37370,20 +37879,20 @@
             <a:lstStyle/>
             <a:p>
               <a:r>
-                <a:rPr lang="en-US" altLang="zh-CN" sz="2000" dirty="0">
+                <a:rPr lang="en-US" altLang="zh-CN" sz="2000">
                   <a:latin typeface="Arial"/>
                   <a:cs typeface="Arial"/>
                 </a:rPr>
                 <a:t>2</a:t>
               </a:r>
               <a:r>
-                <a:rPr lang="en-US" altLang="zh-CN" sz="2000" baseline="30000" dirty="0">
+                <a:rPr lang="en-US" altLang="zh-CN" sz="2000" baseline="30000">
                   <a:latin typeface="Arial"/>
                   <a:cs typeface="Arial"/>
                 </a:rPr>
                 <a:t>p-1</a:t>
               </a:r>
-              <a:endParaRPr lang="zh-CN" altLang="en-US" sz="2000" dirty="0">
+              <a:endParaRPr lang="zh-CN" altLang="en-US" sz="2000">
                 <a:latin typeface="Arial"/>
                 <a:cs typeface="Arial"/>
               </a:endParaRPr>
@@ -37486,13 +37995,13 @@
             <a:lstStyle/>
             <a:p>
               <a:r>
-                <a:rPr lang="en-US" altLang="zh-CN" sz="2000" dirty="0">
+                <a:rPr lang="en-US" altLang="zh-CN" sz="2000">
                   <a:latin typeface="Arial"/>
                   <a:cs typeface="Arial"/>
                 </a:rPr>
                 <a:t>2</a:t>
               </a:r>
-              <a:endParaRPr lang="zh-CN" altLang="en-US" sz="2000" dirty="0">
+              <a:endParaRPr lang="zh-CN" altLang="en-US" sz="2000">
                 <a:latin typeface="Arial"/>
                 <a:cs typeface="Arial"/>
               </a:endParaRPr>
@@ -37595,13 +38104,13 @@
             <a:lstStyle/>
             <a:p>
               <a:r>
-                <a:rPr lang="en-US" altLang="zh-CN" sz="2000" dirty="0">
+                <a:rPr lang="en-US" altLang="zh-CN" sz="2000">
                   <a:latin typeface="Arial"/>
                   <a:cs typeface="Arial"/>
                 </a:rPr>
                 <a:t>1</a:t>
               </a:r>
-              <a:endParaRPr lang="zh-CN" altLang="en-US" sz="2000" dirty="0">
+              <a:endParaRPr lang="zh-CN" altLang="en-US" sz="2000">
                 <a:latin typeface="Arial"/>
                 <a:cs typeface="Arial"/>
               </a:endParaRPr>
@@ -37704,13 +38213,13 @@
             <a:lstStyle/>
             <a:p>
               <a:r>
-                <a:rPr lang="en-US" altLang="zh-CN" sz="2000" dirty="0">
+                <a:rPr lang="en-US" altLang="zh-CN" sz="2000">
                   <a:latin typeface="Arial"/>
                   <a:cs typeface="Arial"/>
                 </a:rPr>
                 <a:t>1/2</a:t>
               </a:r>
-              <a:endParaRPr lang="zh-CN" altLang="en-US" sz="2000" dirty="0">
+              <a:endParaRPr lang="zh-CN" altLang="en-US" sz="2000">
                 <a:latin typeface="Arial"/>
                 <a:cs typeface="Arial"/>
               </a:endParaRPr>
@@ -37745,13 +38254,13 @@
             <a:lstStyle/>
             <a:p>
               <a:r>
-                <a:rPr lang="en-US" altLang="zh-CN" sz="2000" dirty="0">
+                <a:rPr lang="en-US" altLang="zh-CN" sz="2000">
                   <a:latin typeface="Arial"/>
                   <a:cs typeface="Arial"/>
                 </a:rPr>
                 <a:t>1/4</a:t>
               </a:r>
-              <a:endParaRPr lang="zh-CN" altLang="en-US" sz="2000" dirty="0">
+              <a:endParaRPr lang="zh-CN" altLang="en-US" sz="2000">
                 <a:latin typeface="Arial"/>
                 <a:cs typeface="Arial"/>
               </a:endParaRPr>
@@ -37922,20 +38431,20 @@
             <a:lstStyle/>
             <a:p>
               <a:r>
-                <a:rPr lang="en-US" altLang="zh-CN" sz="2000" dirty="0">
+                <a:rPr lang="en-US" altLang="zh-CN" sz="2000">
                   <a:latin typeface="Arial"/>
                   <a:cs typeface="Arial"/>
                 </a:rPr>
                 <a:t>1/2</a:t>
               </a:r>
               <a:r>
-                <a:rPr lang="en-US" altLang="zh-CN" sz="2000" baseline="30000" dirty="0">
+                <a:rPr lang="en-US" altLang="zh-CN" sz="2000" baseline="30000">
                   <a:latin typeface="Arial"/>
                   <a:cs typeface="Arial"/>
                 </a:rPr>
                 <a:t>q</a:t>
               </a:r>
-              <a:endParaRPr lang="zh-CN" altLang="en-US" sz="2000" dirty="0">
+              <a:endParaRPr lang="zh-CN" altLang="en-US" sz="2000">
                 <a:latin typeface="Arial"/>
                 <a:cs typeface="Arial"/>
               </a:endParaRPr>
@@ -37971,7 +38480,7 @@
           <a:lstStyle/>
           <a:p>
             <a:r>
-              <a:rPr lang="en-US" altLang="zh-CN" sz="4000" b="1" dirty="0">
+              <a:rPr lang="en-US" altLang="zh-CN" sz="4000" b="1">
                 <a:solidFill>
                   <a:srgbClr val="FF0000"/>
                 </a:solidFill>
@@ -37980,7 +38489,7 @@
               </a:rPr>
               <a:t>.</a:t>
             </a:r>
-            <a:endParaRPr lang="zh-CN" altLang="en-US" sz="4000" b="1" dirty="0"/>
+            <a:endParaRPr lang="zh-CN" altLang="en-US" sz="4000" b="1"/>
           </a:p>
         </p:txBody>
       </p:sp>
@@ -38021,10 +38530,10 @@
                   <p:embed/>
                   <p:pic>
                     <p:nvPicPr>
-                      <p:cNvPr id="26" name="Object 3">
+                      <p:cNvPr id="24" name="Object 3">
                         <a:extLst>
                           <a:ext uri="{FF2B5EF4-FFF2-40B4-BE49-F238E27FC236}">
-                            <a16:creationId xmlns:a16="http://schemas.microsoft.com/office/drawing/2014/main" id="{9D8B13BD-76D7-C4D2-A669-C3DE804DA9C9}"/>
+                            <a16:creationId xmlns:a16="http://schemas.microsoft.com/office/drawing/2014/main" id="{20843FD1-39CE-D3C2-E82E-6D50DD4EA0E8}"/>
                           </a:ext>
                         </a:extLst>
                       </p:cNvPr>
@@ -38105,7 +38614,7 @@
           <a:lstStyle/>
           <a:p>
             <a:r>
-              <a:rPr lang="en-US" dirty="0"/>
+              <a:rPr lang="en-US"/>
               <a:t>Binary representation</a:t>
             </a:r>
           </a:p>
@@ -38140,11 +38649,11 @@
           <a:lstStyle/>
           <a:p>
             <a:r>
-              <a:rPr lang="en-US" sz="2100" dirty="0"/>
+              <a:rPr lang="en-US" sz="2100"/>
               <a:t>What’s the decimal value of (10.01)</a:t>
             </a:r>
             <a:r>
-              <a:rPr lang="en-US" sz="2100" baseline="-25000" dirty="0"/>
+              <a:rPr lang="en-US" sz="2100" baseline="-25000"/>
               <a:t>2</a:t>
             </a:r>
           </a:p>
@@ -38249,7 +38758,7 @@
           <a:lstStyle/>
           <a:p>
             <a:r>
-              <a:rPr lang="en-US" dirty="0"/>
+              <a:rPr lang="en-US"/>
               <a:t>Binary representation</a:t>
             </a:r>
           </a:p>
@@ -38284,11 +38793,11 @@
           <a:lstStyle/>
           <a:p>
             <a:r>
-              <a:rPr lang="en-US" sz="2100" dirty="0"/>
+              <a:rPr lang="en-US" sz="2100"/>
               <a:t>What’s the decimal value of (10.01)</a:t>
             </a:r>
             <a:r>
-              <a:rPr lang="en-US" sz="2100" baseline="-25000" dirty="0"/>
+              <a:rPr lang="en-US" sz="2100" baseline="-25000"/>
               <a:t>2</a:t>
             </a:r>
           </a:p>
@@ -38370,10 +38879,10 @@
           <a:lstStyle/>
           <a:p>
             <a:r>
-              <a:rPr lang="en-US" sz="2100" dirty="0"/>
+              <a:rPr lang="en-US" sz="2100"/>
               <a:t>Answer: 2.25</a:t>
             </a:r>
-            <a:endParaRPr lang="en-US" sz="2100" baseline="-25000" dirty="0"/>
+            <a:endParaRPr lang="en-US" sz="2100" baseline="-25000"/>
           </a:p>
         </p:txBody>
       </p:sp>
@@ -39385,15 +39894,6 @@
 </file>
 
 <file path=customXml/item2.xml><?xml version="1.0" encoding="utf-8"?>
-<?mso-contentType ?>
-<FormTemplates xmlns="http://schemas.microsoft.com/sharepoint/v3/contenttype/forms">
-  <Display>DocumentLibraryForm</Display>
-  <Edit>DocumentLibraryForm</Edit>
-  <New>DocumentLibraryForm</New>
-</FormTemplates>
-</file>
-
-<file path=customXml/item3.xml><?xml version="1.0" encoding="utf-8"?>
 <ct:contentTypeSchema xmlns:ct="http://schemas.microsoft.com/office/2006/metadata/contentType" xmlns:ma="http://schemas.microsoft.com/office/2006/metadata/properties/metaAttributes" ct:_="" ma:_="" ma:contentTypeName="Document" ma:contentTypeID="0x010100F230F55FC4E86843A38ABC983CBD33D2" ma:contentTypeVersion="2" ma:contentTypeDescription="Create a new document." ma:contentTypeScope="" ma:versionID="ea51d48ed41b66d32eb63de817eecbcd">
   <xsd:schema xmlns:xsd="http://www.w3.org/2001/XMLSchema" xmlns:xs="http://www.w3.org/2001/XMLSchema" xmlns:p="http://schemas.microsoft.com/office/2006/metadata/properties" xmlns:ns3="74d6482f-e53c-4fa7-ac87-951f9f66bd4c" targetNamespace="http://schemas.microsoft.com/office/2006/metadata/properties" ma:root="true" ma:fieldsID="128b5480a780b9585a060f8329b1fff7" ns3:_="">
     <xsd:import namespace="74d6482f-e53c-4fa7-ac87-951f9f66bd4c"/>
@@ -39525,44 +40025,53 @@
 </ct:contentTypeSchema>
 </file>
 
+<file path=customXml/item3.xml><?xml version="1.0" encoding="utf-8"?>
+<?mso-contentType ?>
+<FormTemplates xmlns="http://schemas.microsoft.com/sharepoint/v3/contenttype/forms">
+  <Display>DocumentLibraryForm</Display>
+  <Edit>DocumentLibraryForm</Edit>
+  <New>DocumentLibraryForm</New>
+</FormTemplates>
+</file>
+
 <file path=customXml/itemProps1.xml><?xml version="1.0" encoding="utf-8"?>
 <ds:datastoreItem xmlns:ds="http://schemas.openxmlformats.org/officeDocument/2006/customXml" ds:itemID="{93E15339-EED0-434D-A40A-9991FB4373CD}">
   <ds:schemaRefs>
     <ds:schemaRef ds:uri="http://www.w3.org/XML/1998/namespace"/>
+    <ds:schemaRef ds:uri="http://schemas.openxmlformats.org/package/2006/metadata/core-properties"/>
+    <ds:schemaRef ds:uri="http://schemas.microsoft.com/office/2006/metadata/properties"/>
+    <ds:schemaRef ds:uri="http://purl.org/dc/terms/"/>
+    <ds:schemaRef ds:uri="http://purl.org/dc/elements/1.1/"/>
     <ds:schemaRef ds:uri="http://schemas.microsoft.com/office/infopath/2007/PartnerControls"/>
-    <ds:schemaRef ds:uri="http://schemas.openxmlformats.org/package/2006/metadata/core-properties"/>
+    <ds:schemaRef ds:uri="http://schemas.microsoft.com/office/2006/documentManagement/types"/>
     <ds:schemaRef ds:uri="74d6482f-e53c-4fa7-ac87-951f9f66bd4c"/>
-    <ds:schemaRef ds:uri="http://purl.org/dc/elements/1.1/"/>
-    <ds:schemaRef ds:uri="http://schemas.microsoft.com/office/2006/documentManagement/types"/>
-    <ds:schemaRef ds:uri="http://purl.org/dc/terms/"/>
-    <ds:schemaRef ds:uri="http://schemas.microsoft.com/office/2006/metadata/properties"/>
     <ds:schemaRef ds:uri="http://purl.org/dc/dcmitype/"/>
   </ds:schemaRefs>
 </ds:datastoreItem>
 </file>
 
 <file path=customXml/itemProps2.xml><?xml version="1.0" encoding="utf-8"?>
+<ds:datastoreItem xmlns:ds="http://schemas.openxmlformats.org/officeDocument/2006/customXml" ds:itemID="{2900832E-ADAA-4B11-A338-CC149C7D2597}">
+  <ds:schemaRefs>
+    <ds:schemaRef ds:uri="74d6482f-e53c-4fa7-ac87-951f9f66bd4c"/>
+    <ds:schemaRef ds:uri="http://purl.org/dc/elements/1.1/"/>
+    <ds:schemaRef ds:uri="http://purl.org/dc/terms/"/>
+    <ds:schemaRef ds:uri="http://schemas.microsoft.com/internal/obd"/>
+    <ds:schemaRef ds:uri="http://schemas.microsoft.com/office/2006/documentManagement/types"/>
+    <ds:schemaRef ds:uri="http://schemas.microsoft.com/office/2006/metadata/contentType"/>
+    <ds:schemaRef ds:uri="http://schemas.microsoft.com/office/2006/metadata/properties"/>
+    <ds:schemaRef ds:uri="http://schemas.microsoft.com/office/2006/metadata/properties/metaAttributes"/>
+    <ds:schemaRef ds:uri="http://schemas.microsoft.com/office/infopath/2007/PartnerControls"/>
+    <ds:schemaRef ds:uri="http://schemas.openxmlformats.org/package/2006/metadata/core-properties"/>
+    <ds:schemaRef ds:uri="http://www.w3.org/2001/XMLSchema"/>
+  </ds:schemaRefs>
+</ds:datastoreItem>
+</file>
+
+<file path=customXml/itemProps3.xml><?xml version="1.0" encoding="utf-8"?>
 <ds:datastoreItem xmlns:ds="http://schemas.openxmlformats.org/officeDocument/2006/customXml" ds:itemID="{924F85E5-0CE7-4734-A422-69AA9C2B3E16}">
   <ds:schemaRefs>
     <ds:schemaRef ds:uri="http://schemas.microsoft.com/sharepoint/v3/contenttype/forms"/>
   </ds:schemaRefs>
 </ds:datastoreItem>
-</file>
-
-<file path=customXml/itemProps3.xml><?xml version="1.0" encoding="utf-8"?>
-<ds:datastoreItem xmlns:ds="http://schemas.openxmlformats.org/officeDocument/2006/customXml" ds:itemID="{2900832E-ADAA-4B11-A338-CC149C7D2597}">
-  <ds:schemaRefs>
-    <ds:schemaRef ds:uri="http://schemas.microsoft.com/office/2006/metadata/contentType"/>
-    <ds:schemaRef ds:uri="http://schemas.microsoft.com/office/2006/metadata/properties/metaAttributes"/>
-    <ds:schemaRef ds:uri="http://www.w3.org/2001/XMLSchema"/>
-    <ds:schemaRef ds:uri="http://schemas.microsoft.com/office/2006/metadata/properties"/>
-    <ds:schemaRef ds:uri="74d6482f-e53c-4fa7-ac87-951f9f66bd4c"/>
-    <ds:schemaRef ds:uri="http://schemas.microsoft.com/office/2006/documentManagement/types"/>
-    <ds:schemaRef ds:uri="http://schemas.microsoft.com/office/infopath/2007/PartnerControls"/>
-    <ds:schemaRef ds:uri="http://schemas.openxmlformats.org/package/2006/metadata/core-properties"/>
-    <ds:schemaRef ds:uri="http://purl.org/dc/elements/1.1/"/>
-    <ds:schemaRef ds:uri="http://purl.org/dc/terms/"/>
-    <ds:schemaRef ds:uri="http://schemas.microsoft.com/internal/obd"/>
-  </ds:schemaRefs>
-</ds:datastoreItem>
 </file>